--- a/protected-downloads/praesentation/M02.pptx
+++ b/protected-downloads/praesentation/M02.pptx
@@ -8,11 +8,11 @@
     <p:sldId id="256" r:id="rId7"/>
     <p:sldId id="257" r:id="rId8"/>
     <p:sldId id="258" r:id="rId9"/>
-    <p:sldId id="259" r:id="rId10"/>
-    <p:sldId id="260" r:id="rId11"/>
-    <p:sldId id="261" r:id="rId12"/>
-    <p:sldId id="262" r:id="rId13"/>
-    <p:sldId id="263" r:id="rId14"/>
+    <p:sldId id="259" r:id="rId11"/>
+    <p:sldId id="260" r:id="rId12"/>
+    <p:sldId id="261" r:id="rId13"/>
+    <p:sldId id="262" r:id="rId14"/>
+    <p:sldId id="263" r:id="rId15"/>
   </p:sldIdLst>
   <p:sldSz cx="12188952" cy="6858000" type="screen4x3"/>
   <p:notesSz cx="6858000" cy="9144000"/>
@@ -112,6 +112,636 @@
     </a:lvl9pPr>
   </p:defaultTextStyle>
 </p:presentation>
+</file>
+
+<file path=ppt/notesMasters/notesMaster1.xml><?xml version="1.0" encoding="utf-8"?>
+<p:notesMaster xmlns:a="http://schemas.openxmlformats.org/drawingml/2006/main" xmlns:p="http://schemas.openxmlformats.org/presentationml/2006/main" xmlns:r="http://schemas.openxmlformats.org/officeDocument/2006/relationships">
+  <p:cSld>
+    <p:bg>
+      <p:bgRef idx="1001">
+        <a:schemeClr val="bg1"/>
+      </p:bgRef>
+    </p:bg>
+    <p:spTree>
+      <p:nvGrpSpPr>
+        <p:cNvPr id="1" name=""/>
+        <p:cNvGrpSpPr/>
+        <p:nvPr/>
+      </p:nvGrpSpPr>
+      <p:grpSpPr>
+        <a:xfrm>
+          <a:off x="0" y="0"/>
+          <a:ext cx="0" cy="0"/>
+          <a:chOff x="0" y="0"/>
+          <a:chExt cx="0" cy="0"/>
+        </a:xfrm>
+      </p:grpSpPr>
+      <p:sp>
+        <p:nvSpPr>
+          <p:cNvPr id="2" name="Header Placeholder 1"/>
+          <p:cNvSpPr>
+            <a:spLocks noGrp="1"/>
+          </p:cNvSpPr>
+          <p:nvPr>
+            <p:ph type="hdr" sz="quarter"/>
+          </p:nvPr>
+        </p:nvSpPr>
+        <p:spPr>
+          <a:xfrm>
+            <a:off x="0" y="0"/>
+            <a:ext cx="2971800" cy="457200"/>
+          </a:xfrm>
+          <a:prstGeom prst="rect">
+            <a:avLst/>
+          </a:prstGeom>
+        </p:spPr>
+        <p:txBody>
+          <a:bodyPr vert="horz" lIns="91440" tIns="45720" rIns="91440" bIns="45720" rtlCol="0"/>
+          <a:lstStyle>
+            <a:lvl1pPr algn="l">
+              <a:defRPr sz="1200"/>
+            </a:lvl1pPr>
+          </a:lstStyle>
+          <a:p>
+            <a:endParaRPr lang="en-US"/>
+          </a:p>
+        </p:txBody>
+      </p:sp>
+      <p:sp>
+        <p:nvSpPr>
+          <p:cNvPr id="3" name="Date Placeholder 2"/>
+          <p:cNvSpPr>
+            <a:spLocks noGrp="1"/>
+          </p:cNvSpPr>
+          <p:nvPr>
+            <p:ph type="dt" idx="1"/>
+          </p:nvPr>
+        </p:nvSpPr>
+        <p:spPr>
+          <a:xfrm>
+            <a:off x="3884613" y="0"/>
+            <a:ext cx="2971800" cy="457200"/>
+          </a:xfrm>
+          <a:prstGeom prst="rect">
+            <a:avLst/>
+          </a:prstGeom>
+        </p:spPr>
+        <p:txBody>
+          <a:bodyPr vert="horz" lIns="91440" tIns="45720" rIns="91440" bIns="45720" rtlCol="0"/>
+          <a:lstStyle>
+            <a:lvl1pPr algn="r">
+              <a:defRPr sz="1200"/>
+            </a:lvl1pPr>
+          </a:lstStyle>
+          <a:p>
+            <a:fld id="{0F89C1C7-3DCD-1040-A9CF-14679D8B5DDD}" type="datetimeFigureOut">
+              <a:rPr lang="en-US" smtClean="0"/>
+              <a:t>10/17/16</a:t>
+            </a:fld>
+            <a:endParaRPr lang="en-US"/>
+          </a:p>
+        </p:txBody>
+      </p:sp>
+      <p:sp>
+        <p:nvSpPr>
+          <p:cNvPr id="4" name="Slide Image Placeholder 3"/>
+          <p:cNvSpPr>
+            <a:spLocks noGrp="1" noRot="1" noChangeAspect="1"/>
+          </p:cNvSpPr>
+          <p:nvPr>
+            <p:ph type="sldImg" idx="2"/>
+          </p:nvPr>
+        </p:nvSpPr>
+        <p:spPr>
+          <a:xfrm>
+            <a:off x="1143000" y="685800"/>
+            <a:ext cx="4572000" cy="3429000"/>
+          </a:xfrm>
+          <a:prstGeom prst="rect">
+            <a:avLst/>
+          </a:prstGeom>
+          <a:noFill/>
+          <a:ln w="12700">
+            <a:solidFill>
+              <a:prstClr val="black"/>
+            </a:solidFill>
+          </a:ln>
+        </p:spPr>
+        <p:txBody>
+          <a:bodyPr vert="horz" lIns="91440" tIns="45720" rIns="91440" bIns="45720" rtlCol="0" anchor="ctr"/>
+          <a:lstStyle/>
+          <a:p>
+            <a:endParaRPr lang="en-US"/>
+          </a:p>
+        </p:txBody>
+      </p:sp>
+      <p:sp>
+        <p:nvSpPr>
+          <p:cNvPr id="5" name="Notes Placeholder 4"/>
+          <p:cNvSpPr>
+            <a:spLocks noGrp="1"/>
+          </p:cNvSpPr>
+          <p:nvPr>
+            <p:ph type="body" sz="quarter" idx="3"/>
+          </p:nvPr>
+        </p:nvSpPr>
+        <p:spPr>
+          <a:xfrm>
+            <a:off x="685800" y="4343400"/>
+            <a:ext cx="5486400" cy="4114800"/>
+          </a:xfrm>
+          <a:prstGeom prst="rect">
+            <a:avLst/>
+          </a:prstGeom>
+        </p:spPr>
+        <p:txBody>
+          <a:bodyPr vert="horz" lIns="91440" tIns="45720" rIns="91440" bIns="45720" rtlCol="0"/>
+          <a:lstStyle/>
+          <a:p>
+            <a:pPr lvl="0"/>
+            <a:r>
+              <a:rPr lang="en-US" smtClean="0"/>
+              <a:t>Click to edit Master text styles</a:t>
+            </a:r>
+          </a:p>
+          <a:p>
+            <a:pPr lvl="1"/>
+            <a:r>
+              <a:rPr lang="en-US" smtClean="0"/>
+              <a:t>Second level</a:t>
+            </a:r>
+          </a:p>
+          <a:p>
+            <a:pPr lvl="2"/>
+            <a:r>
+              <a:rPr lang="en-US" smtClean="0"/>
+              <a:t>Third level</a:t>
+            </a:r>
+          </a:p>
+          <a:p>
+            <a:pPr lvl="3"/>
+            <a:r>
+              <a:rPr lang="en-US" smtClean="0"/>
+              <a:t>Fourth level</a:t>
+            </a:r>
+          </a:p>
+          <a:p>
+            <a:pPr lvl="4"/>
+            <a:r>
+              <a:rPr lang="en-US" smtClean="0"/>
+              <a:t>Fifth level</a:t>
+            </a:r>
+            <a:endParaRPr lang="en-US"/>
+          </a:p>
+        </p:txBody>
+      </p:sp>
+      <p:sp>
+        <p:nvSpPr>
+          <p:cNvPr id="6" name="Footer Placeholder 5"/>
+          <p:cNvSpPr>
+            <a:spLocks noGrp="1"/>
+          </p:cNvSpPr>
+          <p:nvPr>
+            <p:ph type="ftr" sz="quarter" idx="4"/>
+          </p:nvPr>
+        </p:nvSpPr>
+        <p:spPr>
+          <a:xfrm>
+            <a:off x="0" y="8685213"/>
+            <a:ext cx="2971800" cy="457200"/>
+          </a:xfrm>
+          <a:prstGeom prst="rect">
+            <a:avLst/>
+          </a:prstGeom>
+        </p:spPr>
+        <p:txBody>
+          <a:bodyPr vert="horz" lIns="91440" tIns="45720" rIns="91440" bIns="45720" rtlCol="0" anchor="b"/>
+          <a:lstStyle>
+            <a:lvl1pPr algn="l">
+              <a:defRPr sz="1200"/>
+            </a:lvl1pPr>
+          </a:lstStyle>
+          <a:p>
+            <a:endParaRPr lang="en-US"/>
+          </a:p>
+        </p:txBody>
+      </p:sp>
+      <p:sp>
+        <p:nvSpPr>
+          <p:cNvPr id="7" name="Slide Number Placeholder 6"/>
+          <p:cNvSpPr>
+            <a:spLocks noGrp="1"/>
+          </p:cNvSpPr>
+          <p:nvPr>
+            <p:ph type="sldNum" sz="quarter" idx="5"/>
+          </p:nvPr>
+        </p:nvSpPr>
+        <p:spPr>
+          <a:xfrm>
+            <a:off x="3884613" y="8685213"/>
+            <a:ext cx="2971800" cy="457200"/>
+          </a:xfrm>
+          <a:prstGeom prst="rect">
+            <a:avLst/>
+          </a:prstGeom>
+        </p:spPr>
+        <p:txBody>
+          <a:bodyPr vert="horz" lIns="91440" tIns="45720" rIns="91440" bIns="45720" rtlCol="0" anchor="b"/>
+          <a:lstStyle>
+            <a:lvl1pPr algn="r">
+              <a:defRPr sz="1200"/>
+            </a:lvl1pPr>
+          </a:lstStyle>
+          <a:p>
+            <a:fld id="{BB5E49A5-4136-284D-997B-48E1D791AD67}" type="slidenum">
+              <a:rPr lang="en-US" smtClean="0"/>
+              <a:t>‹#›</a:t>
+            </a:fld>
+            <a:endParaRPr lang="en-US"/>
+          </a:p>
+        </p:txBody>
+      </p:sp>
+    </p:spTree>
+    <p:extLst>
+      <p:ext uri="{BB962C8B-B14F-4D97-AF65-F5344CB8AC3E}">
+        <p14:creationId xmlns:p14="http://schemas.microsoft.com/office/powerpoint/2010/main" val="2623252185"/>
+      </p:ext>
+    </p:extLst>
+  </p:cSld>
+  <p:clrMap bg1="lt1" tx1="dk1" bg2="lt2" tx2="dk2" accent1="accent1" accent2="accent2" accent3="accent3" accent4="accent4" accent5="accent5" accent6="accent6" hlink="hlink" folHlink="folHlink"/>
+  <p:notesStyle>
+    <a:lvl1pPr marL="0" algn="l" defTabSz="457200" rtl="0" eaLnBrk="1" latinLnBrk="0" hangingPunct="1">
+      <a:defRPr sz="1200" kern="1200">
+        <a:solidFill>
+          <a:schemeClr val="tx1"/>
+        </a:solidFill>
+        <a:latin typeface="+mn-lt"/>
+        <a:ea typeface="+mn-ea"/>
+        <a:cs typeface="+mn-cs"/>
+      </a:defRPr>
+    </a:lvl1pPr>
+    <a:lvl2pPr marL="457200" algn="l" defTabSz="457200" rtl="0" eaLnBrk="1" latinLnBrk="0" hangingPunct="1">
+      <a:defRPr sz="1200" kern="1200">
+        <a:solidFill>
+          <a:schemeClr val="tx1"/>
+        </a:solidFill>
+        <a:latin typeface="+mn-lt"/>
+        <a:ea typeface="+mn-ea"/>
+        <a:cs typeface="+mn-cs"/>
+      </a:defRPr>
+    </a:lvl2pPr>
+    <a:lvl3pPr marL="914400" algn="l" defTabSz="457200" rtl="0" eaLnBrk="1" latinLnBrk="0" hangingPunct="1">
+      <a:defRPr sz="1200" kern="1200">
+        <a:solidFill>
+          <a:schemeClr val="tx1"/>
+        </a:solidFill>
+        <a:latin typeface="+mn-lt"/>
+        <a:ea typeface="+mn-ea"/>
+        <a:cs typeface="+mn-cs"/>
+      </a:defRPr>
+    </a:lvl3pPr>
+    <a:lvl4pPr marL="1371600" algn="l" defTabSz="457200" rtl="0" eaLnBrk="1" latinLnBrk="0" hangingPunct="1">
+      <a:defRPr sz="1200" kern="1200">
+        <a:solidFill>
+          <a:schemeClr val="tx1"/>
+        </a:solidFill>
+        <a:latin typeface="+mn-lt"/>
+        <a:ea typeface="+mn-ea"/>
+        <a:cs typeface="+mn-cs"/>
+      </a:defRPr>
+    </a:lvl4pPr>
+    <a:lvl5pPr marL="1828800" algn="l" defTabSz="457200" rtl="0" eaLnBrk="1" latinLnBrk="0" hangingPunct="1">
+      <a:defRPr sz="1200" kern="1200">
+        <a:solidFill>
+          <a:schemeClr val="tx1"/>
+        </a:solidFill>
+        <a:latin typeface="+mn-lt"/>
+        <a:ea typeface="+mn-ea"/>
+        <a:cs typeface="+mn-cs"/>
+      </a:defRPr>
+    </a:lvl5pPr>
+    <a:lvl6pPr marL="2286000" algn="l" defTabSz="457200" rtl="0" eaLnBrk="1" latinLnBrk="0" hangingPunct="1">
+      <a:defRPr sz="1200" kern="1200">
+        <a:solidFill>
+          <a:schemeClr val="tx1"/>
+        </a:solidFill>
+        <a:latin typeface="+mn-lt"/>
+        <a:ea typeface="+mn-ea"/>
+        <a:cs typeface="+mn-cs"/>
+      </a:defRPr>
+    </a:lvl6pPr>
+    <a:lvl7pPr marL="2743200" algn="l" defTabSz="457200" rtl="0" eaLnBrk="1" latinLnBrk="0" hangingPunct="1">
+      <a:defRPr sz="1200" kern="1200">
+        <a:solidFill>
+          <a:schemeClr val="tx1"/>
+        </a:solidFill>
+        <a:latin typeface="+mn-lt"/>
+        <a:ea typeface="+mn-ea"/>
+        <a:cs typeface="+mn-cs"/>
+      </a:defRPr>
+    </a:lvl7pPr>
+    <a:lvl8pPr marL="3200400" algn="l" defTabSz="457200" rtl="0" eaLnBrk="1" latinLnBrk="0" hangingPunct="1">
+      <a:defRPr sz="1200" kern="1200">
+        <a:solidFill>
+          <a:schemeClr val="tx1"/>
+        </a:solidFill>
+        <a:latin typeface="+mn-lt"/>
+        <a:ea typeface="+mn-ea"/>
+        <a:cs typeface="+mn-cs"/>
+      </a:defRPr>
+    </a:lvl8pPr>
+    <a:lvl9pPr marL="3657600" algn="l" defTabSz="457200" rtl="0" eaLnBrk="1" latinLnBrk="0" hangingPunct="1">
+      <a:defRPr sz="1200" kern="1200">
+        <a:solidFill>
+          <a:schemeClr val="tx1"/>
+        </a:solidFill>
+        <a:latin typeface="+mn-lt"/>
+        <a:ea typeface="+mn-ea"/>
+        <a:cs typeface="+mn-cs"/>
+      </a:defRPr>
+    </a:lvl9pPr>
+  </p:notesStyle>
+</p:notesMaster>
+</file>
+
+<file path=ppt/notesSlides/notesSlide1.xml><?xml version="1.0" encoding="utf-8"?>
+<p:notes xmlns:a="http://schemas.openxmlformats.org/drawingml/2006/main" xmlns:p="http://schemas.openxmlformats.org/presentationml/2006/main" xmlns:r="http://schemas.openxmlformats.org/officeDocument/2006/relationships">
+  <p:cSld>
+    <p:spTree>
+      <p:nvGrpSpPr>
+        <p:cNvPr id="1" name=""/>
+        <p:cNvGrpSpPr/>
+        <p:nvPr/>
+      </p:nvGrpSpPr>
+      <p:grpSpPr>
+        <a:xfrm>
+          <a:off x="0" y="0"/>
+          <a:ext cx="0" cy="0"/>
+          <a:chOff x="0" y="0"/>
+          <a:chExt cx="0" cy="0"/>
+        </a:xfrm>
+      </p:grpSpPr>
+      <p:sp>
+        <p:nvSpPr>
+          <p:cNvPr id="2" name="Slide Image Placeholder 1"/>
+          <p:cNvSpPr>
+            <a:spLocks noGrp="1"/>
+          </p:cNvSpPr>
+          <p:nvPr>
+            <p:ph type="sldImg" idx="2"/>
+          </p:nvPr>
+        </p:nvSpPr>
+        <p:spPr/>
+      </p:sp>
+      <p:sp>
+        <p:nvSpPr>
+          <p:cNvPr id="3" name="Notes Placeholder 2"/>
+          <p:cNvSpPr>
+            <a:spLocks noGrp="1"/>
+          </p:cNvSpPr>
+          <p:nvPr>
+            <p:ph type="body" idx="3" sz="quarter"/>
+          </p:nvPr>
+        </p:nvSpPr>
+        <p:spPr/>
+        <p:txBody>
+          <a:bodyPr/>
+          <a:lstStyle/>
+          <a:p>
+            <a:r>
+              <a:t>Siehe Trainerhandbuch (Sektion 3) für Moderationshinweise, Timing und erwartete Teilnehmerreaktionen.</a:t>
+            </a:r>
+          </a:p>
+        </p:txBody>
+      </p:sp>
+      <p:sp>
+        <p:nvSpPr>
+          <p:cNvPr id="4" name="Slide Number Placeholder 3"/>
+          <p:cNvSpPr>
+            <a:spLocks noGrp="1"/>
+          </p:cNvSpPr>
+          <p:nvPr>
+            <p:ph type="sldNum" idx="5" sz="quarter"/>
+          </p:nvPr>
+        </p:nvSpPr>
+        <p:spPr/>
+      </p:sp>
+    </p:spTree>
+  </p:cSld>
+  <p:clrMapOvr>
+    <a:masterClrMapping/>
+  </p:clrMapOvr>
+</p:notes>
+</file>
+
+<file path=ppt/notesSlides/notesSlide2.xml><?xml version="1.0" encoding="utf-8"?>
+<p:notes xmlns:a="http://schemas.openxmlformats.org/drawingml/2006/main" xmlns:p="http://schemas.openxmlformats.org/presentationml/2006/main" xmlns:r="http://schemas.openxmlformats.org/officeDocument/2006/relationships">
+  <p:cSld>
+    <p:spTree>
+      <p:nvGrpSpPr>
+        <p:cNvPr id="1" name=""/>
+        <p:cNvGrpSpPr/>
+        <p:nvPr/>
+      </p:nvGrpSpPr>
+      <p:grpSpPr>
+        <a:xfrm>
+          <a:off x="0" y="0"/>
+          <a:ext cx="0" cy="0"/>
+          <a:chOff x="0" y="0"/>
+          <a:chExt cx="0" cy="0"/>
+        </a:xfrm>
+      </p:grpSpPr>
+      <p:sp>
+        <p:nvSpPr>
+          <p:cNvPr id="2" name="Slide Image Placeholder 1"/>
+          <p:cNvSpPr>
+            <a:spLocks noGrp="1"/>
+          </p:cNvSpPr>
+          <p:nvPr>
+            <p:ph type="sldImg" idx="2"/>
+          </p:nvPr>
+        </p:nvSpPr>
+        <p:spPr/>
+      </p:sp>
+      <p:sp>
+        <p:nvSpPr>
+          <p:cNvPr id="3" name="Notes Placeholder 2"/>
+          <p:cNvSpPr>
+            <a:spLocks noGrp="1"/>
+          </p:cNvSpPr>
+          <p:nvPr>
+            <p:ph type="body" idx="3" sz="quarter"/>
+          </p:nvPr>
+        </p:nvSpPr>
+        <p:spPr/>
+        <p:txBody>
+          <a:bodyPr/>
+          <a:lstStyle/>
+          <a:p>
+            <a:r>
+              <a:t>Trainer-Hinweis (nur für Trainer und GF-Rolle sichtbar): Martin Klemm hat einen Großauftrag über 1,2 Mio. EUR an Land gezogen, der die Vorlauffinanzierung belastet. Zusätzlich lief eine CNC-Maschine (400 TEUR) aus dem Eigenkapital. Die Auftragslage ist gut, der Cash-Engpass temporär. Diese Infos gibt der GF nur preis, wenn der Berater konkret und respektvoll danach fragt – nie freiwillig.</a:t>
+            </a:r>
+          </a:p>
+        </p:txBody>
+      </p:sp>
+      <p:sp>
+        <p:nvSpPr>
+          <p:cNvPr id="4" name="Slide Number Placeholder 3"/>
+          <p:cNvSpPr>
+            <a:spLocks noGrp="1"/>
+          </p:cNvSpPr>
+          <p:nvPr>
+            <p:ph type="sldNum" idx="5" sz="quarter"/>
+          </p:nvPr>
+        </p:nvSpPr>
+        <p:spPr/>
+      </p:sp>
+    </p:spTree>
+  </p:cSld>
+  <p:clrMapOvr>
+    <a:masterClrMapping/>
+  </p:clrMapOvr>
+</p:notes>
+</file>
+
+<file path=ppt/notesSlides/notesSlide3.xml><?xml version="1.0" encoding="utf-8"?>
+<p:notes xmlns:a="http://schemas.openxmlformats.org/drawingml/2006/main" xmlns:p="http://schemas.openxmlformats.org/presentationml/2006/main" xmlns:r="http://schemas.openxmlformats.org/officeDocument/2006/relationships">
+  <p:cSld>
+    <p:spTree>
+      <p:nvGrpSpPr>
+        <p:cNvPr id="1" name=""/>
+        <p:cNvGrpSpPr/>
+        <p:nvPr/>
+      </p:nvGrpSpPr>
+      <p:grpSpPr>
+        <a:xfrm>
+          <a:off x="0" y="0"/>
+          <a:ext cx="0" cy="0"/>
+          <a:chOff x="0" y="0"/>
+          <a:chExt cx="0" cy="0"/>
+        </a:xfrm>
+      </p:grpSpPr>
+      <p:sp>
+        <p:nvSpPr>
+          <p:cNvPr id="2" name="Slide Image Placeholder 1"/>
+          <p:cNvSpPr>
+            <a:spLocks noGrp="1"/>
+          </p:cNvSpPr>
+          <p:nvPr>
+            <p:ph type="sldImg" idx="2"/>
+          </p:nvPr>
+        </p:nvSpPr>
+        <p:spPr/>
+      </p:sp>
+      <p:sp>
+        <p:nvSpPr>
+          <p:cNvPr id="3" name="Notes Placeholder 2"/>
+          <p:cNvSpPr>
+            <a:spLocks noGrp="1"/>
+          </p:cNvSpPr>
+          <p:nvPr>
+            <p:ph type="body" idx="3" sz="quarter"/>
+          </p:nvPr>
+        </p:nvSpPr>
+        <p:spPr/>
+        <p:txBody>
+          <a:bodyPr/>
+          <a:lstStyle/>
+          <a:p>
+            <a:r>
+              <a:t>Siehe Trainerhandbuch (Sektion 3) für Moderationshinweise, Timing und erwartete Teilnehmerreaktionen.</a:t>
+            </a:r>
+          </a:p>
+        </p:txBody>
+      </p:sp>
+      <p:sp>
+        <p:nvSpPr>
+          <p:cNvPr id="4" name="Slide Number Placeholder 3"/>
+          <p:cNvSpPr>
+            <a:spLocks noGrp="1"/>
+          </p:cNvSpPr>
+          <p:nvPr>
+            <p:ph type="sldNum" idx="5" sz="quarter"/>
+          </p:nvPr>
+        </p:nvSpPr>
+        <p:spPr/>
+      </p:sp>
+    </p:spTree>
+  </p:cSld>
+  <p:clrMapOvr>
+    <a:masterClrMapping/>
+  </p:clrMapOvr>
+</p:notes>
+</file>
+
+<file path=ppt/notesSlides/notesSlide4.xml><?xml version="1.0" encoding="utf-8"?>
+<p:notes xmlns:a="http://schemas.openxmlformats.org/drawingml/2006/main" xmlns:p="http://schemas.openxmlformats.org/presentationml/2006/main" xmlns:r="http://schemas.openxmlformats.org/officeDocument/2006/relationships">
+  <p:cSld>
+    <p:spTree>
+      <p:nvGrpSpPr>
+        <p:cNvPr id="1" name=""/>
+        <p:cNvGrpSpPr/>
+        <p:nvPr/>
+      </p:nvGrpSpPr>
+      <p:grpSpPr>
+        <a:xfrm>
+          <a:off x="0" y="0"/>
+          <a:ext cx="0" cy="0"/>
+          <a:chOff x="0" y="0"/>
+          <a:chExt cx="0" cy="0"/>
+        </a:xfrm>
+      </p:grpSpPr>
+      <p:sp>
+        <p:nvSpPr>
+          <p:cNvPr id="2" name="Slide Image Placeholder 1"/>
+          <p:cNvSpPr>
+            <a:spLocks noGrp="1"/>
+          </p:cNvSpPr>
+          <p:nvPr>
+            <p:ph type="sldImg" idx="2"/>
+          </p:nvPr>
+        </p:nvSpPr>
+        <p:spPr/>
+      </p:sp>
+      <p:sp>
+        <p:nvSpPr>
+          <p:cNvPr id="3" name="Notes Placeholder 2"/>
+          <p:cNvSpPr>
+            <a:spLocks noGrp="1"/>
+          </p:cNvSpPr>
+          <p:nvPr>
+            <p:ph type="body" idx="3" sz="quarter"/>
+          </p:nvPr>
+        </p:nvSpPr>
+        <p:spPr/>
+        <p:txBody>
+          <a:bodyPr/>
+          <a:lstStyle/>
+          <a:p>
+            <a:r>
+              <a:t>Siehe Trainerhandbuch (Sektion 3) für Moderationshinweise, Timing und erwartete Teilnehmerreaktionen.</a:t>
+            </a:r>
+          </a:p>
+        </p:txBody>
+      </p:sp>
+      <p:sp>
+        <p:nvSpPr>
+          <p:cNvPr id="4" name="Slide Number Placeholder 3"/>
+          <p:cNvSpPr>
+            <a:spLocks noGrp="1"/>
+          </p:cNvSpPr>
+          <p:nvPr>
+            <p:ph type="sldNum" idx="5" sz="quarter"/>
+          </p:nvPr>
+        </p:nvSpPr>
+        <p:spPr/>
+      </p:sp>
+    </p:spTree>
+  </p:cSld>
+  <p:clrMapOvr>
+    <a:masterClrMapping/>
+  </p:clrMapOvr>
+</p:notes>
 </file>
 
 <file path=ppt/slideLayouts/slideLayout1.xml><?xml version="1.0" encoding="utf-8"?>
@@ -4400,7 +5030,26 @@
                 </a:solidFill>
                 <a:latin typeface="Arial"/>
               </a:rPr>
-              <a:t>Watzlawick, Beavin und Jackson (1967) zeigen: Jede Aussage enthält neben dem Sachinhalt eine Beziehungsbotschaft. Eine sachlich neutrale Aussage kann auf der Beziehungsebene als Vorwurf ankommen:</a:t>
+              <a:t>Das Muster: Beobachtung + offene Frage statt Beobachtung + Bewertung.</a:t>
+            </a:r>
+          </a:p>
+          <a:p>
+            <a:pPr>
+              <a:spcBef>
+                <a:spcPts val="1000"/>
+              </a:spcBef>
+              <a:spcAft>
+                <a:spcPts val="200"/>
+              </a:spcAft>
+            </a:pPr>
+            <a:r>
+              <a:rPr sz="800" b="1">
+                <a:solidFill>
+                  <a:srgbClr val="78808C"/>
+                </a:solidFill>
+                <a:latin typeface="JetBrains Mono"/>
+              </a:rPr>
+              <a:t>DER 5-PHASEN-RAHMEN FÜR DAS BILANZGESPRÄCH</a:t>
             </a:r>
           </a:p>
           <a:p>
@@ -4419,26 +5068,7 @@
                 </a:solidFill>
                 <a:latin typeface="Arial"/>
               </a:rPr>
-              <a:t>Das Muster: Beobachtung + offene Frage statt Beobachtung + Bewertung.</a:t>
-            </a:r>
-          </a:p>
-          <a:p>
-            <a:pPr>
-              <a:spcBef>
-                <a:spcPts val="1000"/>
-              </a:spcBef>
-              <a:spcAft>
-                <a:spcPts val="200"/>
-              </a:spcAft>
-            </a:pPr>
-            <a:r>
-              <a:rPr sz="800" b="1">
-                <a:solidFill>
-                  <a:srgbClr val="78808C"/>
-                </a:solidFill>
-                <a:latin typeface="JetBrains Mono"/>
-              </a:rPr>
-              <a:t>DER 5-PHASEN-RAHMEN FÜR DAS BILANZGESPRÄCH</a:t>
+              <a:t>Phase 1 – Vorbereitung (30–45 Min. vor dem Termin)</a:t>
             </a:r>
           </a:p>
           <a:p>
@@ -4451,13 +5081,13 @@
               </a:spcAft>
             </a:pPr>
             <a:r>
-              <a:rPr sz="1200">
+              <a:rPr sz="1300">
                 <a:solidFill>
                   <a:srgbClr val="3D5466"/>
                 </a:solidFill>
                 <a:latin typeface="Arial"/>
               </a:rPr>
-              <a:t>Phase 1 – Vorbereitung (30–45 Min. vor dem Termin)</a:t>
+              <a:t>▸  Mindestens 4 Kennzahlen berechnen (EK-Quote, Liquidität, Verschuldungsgrad, EBIT-Marge)</a:t>
             </a:r>
           </a:p>
           <a:p>
@@ -4476,7 +5106,7 @@
                 </a:solidFill>
                 <a:latin typeface="Arial"/>
               </a:rPr>
-              <a:t>▸  Mindestens 4 Kennzahlen berechnen (EK-Quote, Liquidität, Verschuldungsgrad, EBIT-Marge)</a:t>
+              <a:t>▸  Zeitreihe: Vergleich zu mindestens 2 Vorjahren</a:t>
             </a:r>
           </a:p>
           <a:p>
@@ -4495,7 +5125,7 @@
                 </a:solidFill>
                 <a:latin typeface="Arial"/>
               </a:rPr>
-              <a:t>▸  Zeitreihe: Vergleich zu mindestens 2 Vorjahren</a:t>
+              <a:t>▸  Branchenwert recherchieren: In agree (Firmenkundenanalyse) stehen aktuelle Branchenbenchmarks aus der Creditreform/Bisnode-Lizenz direkt im Analysebogen – diese Werte für das Gespräch bevorzugen. Alternativ: Bundesbank Unternehmensabschlussstatistik (kostenfrei, aber teils 2 Jahre zeitverzögert)</a:t>
             </a:r>
           </a:p>
           <a:p>
@@ -4514,7 +5144,7 @@
                 </a:solidFill>
                 <a:latin typeface="Arial"/>
               </a:rPr>
-              <a:t>▸  Branchenwert recherchieren: In agree (Firmenkundenanalyse) stehen aktuelle Branchenbenchmarks aus der Creditreform/Bisnode-Lizenz direkt im Analysebogen – diese Werte für das Gespräch bevorzugen. Alternativ: Bundesbank Unternehmensabschlussstatistik (kostenfrei, aber teils 2 Jahre zeitverzögert)</a:t>
+              <a:t>▸  3 Schlüsselbotschaften + 5 offene Fragen schriftlich vorbereiten</a:t>
             </a:r>
           </a:p>
           <a:p>
@@ -4527,13 +5157,13 @@
               </a:spcAft>
             </a:pPr>
             <a:r>
-              <a:rPr sz="1300">
+              <a:rPr sz="1200">
                 <a:solidFill>
                   <a:srgbClr val="3D5466"/>
                 </a:solidFill>
                 <a:latin typeface="Arial"/>
               </a:rPr>
-              <a:t>▸  3 Schlüsselbotschaften + 5 offene Fragen schriftlich vorbereiten</a:t>
+              <a:t>Phase 2 – Eröffnung (ca. 10 Min.)</a:t>
             </a:r>
           </a:p>
           <a:p>
@@ -4546,13 +5176,13 @@
               </a:spcAft>
             </a:pPr>
             <a:r>
-              <a:rPr sz="1200">
+              <a:rPr sz="1300">
                 <a:solidFill>
                   <a:srgbClr val="3D5466"/>
                 </a:solidFill>
                 <a:latin typeface="Arial"/>
               </a:rPr>
-              <a:t>Phase 2 – Eröffnung (ca. 10 Min.)</a:t>
+              <a:t>▸  Kontext und Ziel setzen: „Heute möchte ich mit Ihnen Ihren Jahresabschluss durchgehen und verstehen, wie sich Ihre Lage entwickelt hat."</a:t>
             </a:r>
           </a:p>
         </p:txBody>
@@ -7208,4 +7838,324 @@
   </a:objectDefaults>
   <a:extraClrSchemeLst/>
 </a:theme>
+</file>
+
+<file path=ppt/theme/theme2.xml><?xml version="1.0" encoding="utf-8"?>
+<a:theme xmlns:a="http://schemas.openxmlformats.org/drawingml/2006/main" name="Office Theme">
+  <a:themeElements>
+    <a:clrScheme name="Office">
+      <a:dk1>
+        <a:sysClr val="windowText" lastClr="000000"/>
+      </a:dk1>
+      <a:lt1>
+        <a:sysClr val="window" lastClr="FFFFFF"/>
+      </a:lt1>
+      <a:dk2>
+        <a:srgbClr val="1F497D"/>
+      </a:dk2>
+      <a:lt2>
+        <a:srgbClr val="EEECE1"/>
+      </a:lt2>
+      <a:accent1>
+        <a:srgbClr val="4F81BD"/>
+      </a:accent1>
+      <a:accent2>
+        <a:srgbClr val="C0504D"/>
+      </a:accent2>
+      <a:accent3>
+        <a:srgbClr val="9BBB59"/>
+      </a:accent3>
+      <a:accent4>
+        <a:srgbClr val="8064A2"/>
+      </a:accent4>
+      <a:accent5>
+        <a:srgbClr val="4BACC6"/>
+      </a:accent5>
+      <a:accent6>
+        <a:srgbClr val="F79646"/>
+      </a:accent6>
+      <a:hlink>
+        <a:srgbClr val="0000FF"/>
+      </a:hlink>
+      <a:folHlink>
+        <a:srgbClr val="800080"/>
+      </a:folHlink>
+    </a:clrScheme>
+    <a:fontScheme name="Office">
+      <a:majorFont>
+        <a:latin typeface="Calibri"/>
+        <a:ea typeface=""/>
+        <a:cs typeface=""/>
+        <a:font script="Jpan" typeface="ＭＳ Ｐゴシック"/>
+        <a:font script="Hang" typeface="맑은 고딕"/>
+        <a:font script="Hans" typeface="宋体"/>
+        <a:font script="Hant" typeface="新細明體"/>
+        <a:font script="Arab" typeface="Times New Roman"/>
+        <a:font script="Hebr" typeface="Times New Roman"/>
+        <a:font script="Thai" typeface="Angsana New"/>
+        <a:font script="Ethi" typeface="Nyala"/>
+        <a:font script="Beng" typeface="Vrinda"/>
+        <a:font script="Gujr" typeface="Shruti"/>
+        <a:font script="Khmr" typeface="MoolBoran"/>
+        <a:font script="Knda" typeface="Tunga"/>
+        <a:font script="Guru" typeface="Raavi"/>
+        <a:font script="Cans" typeface="Euphemia"/>
+        <a:font script="Cher" typeface="Plantagenet Cherokee"/>
+        <a:font script="Yiii" typeface="Microsoft Yi Baiti"/>
+        <a:font script="Tibt" typeface="Microsoft Himalaya"/>
+        <a:font script="Thaa" typeface="MV Boli"/>
+        <a:font script="Deva" typeface="Mangal"/>
+        <a:font script="Telu" typeface="Gautami"/>
+        <a:font script="Taml" typeface="Latha"/>
+        <a:font script="Syrc" typeface="Estrangelo Edessa"/>
+        <a:font script="Orya" typeface="Kalinga"/>
+        <a:font script="Mlym" typeface="Kartika"/>
+        <a:font script="Laoo" typeface="DokChampa"/>
+        <a:font script="Sinh" typeface="Iskoola Pota"/>
+        <a:font script="Mong" typeface="Mongolian Baiti"/>
+        <a:font script="Viet" typeface="Times New Roman"/>
+        <a:font script="Uigh" typeface="Microsoft Uighur"/>
+        <a:font script="Geor" typeface="Sylfaen"/>
+      </a:majorFont>
+      <a:minorFont>
+        <a:latin typeface="Calibri"/>
+        <a:ea typeface=""/>
+        <a:cs typeface=""/>
+        <a:font script="Jpan" typeface="ＭＳ Ｐゴシック"/>
+        <a:font script="Hang" typeface="맑은 고딕"/>
+        <a:font script="Hans" typeface="宋体"/>
+        <a:font script="Hant" typeface="新細明體"/>
+        <a:font script="Arab" typeface="Arial"/>
+        <a:font script="Hebr" typeface="Arial"/>
+        <a:font script="Thai" typeface="Cordia New"/>
+        <a:font script="Ethi" typeface="Nyala"/>
+        <a:font script="Beng" typeface="Vrinda"/>
+        <a:font script="Gujr" typeface="Shruti"/>
+        <a:font script="Khmr" typeface="DaunPenh"/>
+        <a:font script="Knda" typeface="Tunga"/>
+        <a:font script="Guru" typeface="Raavi"/>
+        <a:font script="Cans" typeface="Euphemia"/>
+        <a:font script="Cher" typeface="Plantagenet Cherokee"/>
+        <a:font script="Yiii" typeface="Microsoft Yi Baiti"/>
+        <a:font script="Tibt" typeface="Microsoft Himalaya"/>
+        <a:font script="Thaa" typeface="MV Boli"/>
+        <a:font script="Deva" typeface="Mangal"/>
+        <a:font script="Telu" typeface="Gautami"/>
+        <a:font script="Taml" typeface="Latha"/>
+        <a:font script="Syrc" typeface="Estrangelo Edessa"/>
+        <a:font script="Orya" typeface="Kalinga"/>
+        <a:font script="Mlym" typeface="Kartika"/>
+        <a:font script="Laoo" typeface="DokChampa"/>
+        <a:font script="Sinh" typeface="Iskoola Pota"/>
+        <a:font script="Mong" typeface="Mongolian Baiti"/>
+        <a:font script="Viet" typeface="Arial"/>
+        <a:font script="Uigh" typeface="Microsoft Uighur"/>
+        <a:font script="Geor" typeface="Sylfaen"/>
+      </a:minorFont>
+    </a:fontScheme>
+    <a:fmtScheme name="Office">
+      <a:fillStyleLst>
+        <a:solidFill>
+          <a:schemeClr val="phClr"/>
+        </a:solidFill>
+        <a:gradFill rotWithShape="1">
+          <a:gsLst>
+            <a:gs pos="0">
+              <a:schemeClr val="phClr">
+                <a:tint val="50000"/>
+                <a:satMod val="300000"/>
+              </a:schemeClr>
+            </a:gs>
+            <a:gs pos="35000">
+              <a:schemeClr val="phClr">
+                <a:tint val="37000"/>
+                <a:satMod val="300000"/>
+              </a:schemeClr>
+            </a:gs>
+            <a:gs pos="100000">
+              <a:schemeClr val="phClr">
+                <a:tint val="15000"/>
+                <a:satMod val="350000"/>
+              </a:schemeClr>
+            </a:gs>
+          </a:gsLst>
+          <a:lin ang="16200000" scaled="1"/>
+        </a:gradFill>
+        <a:gradFill rotWithShape="1">
+          <a:gsLst>
+            <a:gs pos="0">
+              <a:schemeClr val="phClr">
+                <a:tint val="100000"/>
+                <a:shade val="100000"/>
+                <a:satMod val="130000"/>
+              </a:schemeClr>
+            </a:gs>
+            <a:gs pos="100000">
+              <a:schemeClr val="phClr">
+                <a:tint val="50000"/>
+                <a:shade val="100000"/>
+                <a:satMod val="350000"/>
+              </a:schemeClr>
+            </a:gs>
+          </a:gsLst>
+          <a:lin ang="16200000" scaled="0"/>
+        </a:gradFill>
+      </a:fillStyleLst>
+      <a:lnStyleLst>
+        <a:ln w="9525" cap="flat" cmpd="sng" algn="ctr">
+          <a:solidFill>
+            <a:schemeClr val="phClr">
+              <a:shade val="95000"/>
+              <a:satMod val="105000"/>
+            </a:schemeClr>
+          </a:solidFill>
+          <a:prstDash val="solid"/>
+        </a:ln>
+        <a:ln w="25400" cap="flat" cmpd="sng" algn="ctr">
+          <a:solidFill>
+            <a:schemeClr val="phClr"/>
+          </a:solidFill>
+          <a:prstDash val="solid"/>
+        </a:ln>
+        <a:ln w="38100" cap="flat" cmpd="sng" algn="ctr">
+          <a:solidFill>
+            <a:schemeClr val="phClr"/>
+          </a:solidFill>
+          <a:prstDash val="solid"/>
+        </a:ln>
+      </a:lnStyleLst>
+      <a:effectStyleLst>
+        <a:effectStyle>
+          <a:effectLst>
+            <a:outerShdw blurRad="40000" dist="20000" dir="5400000" rotWithShape="0">
+              <a:srgbClr val="000000">
+                <a:alpha val="38000"/>
+              </a:srgbClr>
+            </a:outerShdw>
+          </a:effectLst>
+        </a:effectStyle>
+        <a:effectStyle>
+          <a:effectLst>
+            <a:outerShdw blurRad="40000" dist="23000" dir="5400000" rotWithShape="0">
+              <a:srgbClr val="000000">
+                <a:alpha val="35000"/>
+              </a:srgbClr>
+            </a:outerShdw>
+          </a:effectLst>
+        </a:effectStyle>
+        <a:effectStyle>
+          <a:effectLst>
+            <a:outerShdw blurRad="40000" dist="23000" dir="5400000" rotWithShape="0">
+              <a:srgbClr val="000000">
+                <a:alpha val="35000"/>
+              </a:srgbClr>
+            </a:outerShdw>
+          </a:effectLst>
+          <a:scene3d>
+            <a:camera prst="orthographicFront">
+              <a:rot lat="0" lon="0" rev="0"/>
+            </a:camera>
+            <a:lightRig rig="threePt" dir="t">
+              <a:rot lat="0" lon="0" rev="1200000"/>
+            </a:lightRig>
+          </a:scene3d>
+          <a:sp3d>
+            <a:bevelT w="63500" h="25400"/>
+          </a:sp3d>
+        </a:effectStyle>
+      </a:effectStyleLst>
+      <a:bgFillStyleLst>
+        <a:solidFill>
+          <a:schemeClr val="phClr"/>
+        </a:solidFill>
+        <a:gradFill rotWithShape="1">
+          <a:gsLst>
+            <a:gs pos="0">
+              <a:schemeClr val="phClr">
+                <a:tint val="40000"/>
+                <a:satMod val="350000"/>
+              </a:schemeClr>
+            </a:gs>
+            <a:gs pos="40000">
+              <a:schemeClr val="phClr">
+                <a:tint val="45000"/>
+                <a:shade val="99000"/>
+                <a:satMod val="350000"/>
+              </a:schemeClr>
+            </a:gs>
+            <a:gs pos="100000">
+              <a:schemeClr val="phClr">
+                <a:shade val="20000"/>
+                <a:satMod val="255000"/>
+              </a:schemeClr>
+            </a:gs>
+          </a:gsLst>
+          <a:path path="circle">
+            <a:fillToRect l="50000" t="-80000" r="50000" b="180000"/>
+          </a:path>
+        </a:gradFill>
+        <a:gradFill rotWithShape="1">
+          <a:gsLst>
+            <a:gs pos="0">
+              <a:schemeClr val="phClr">
+                <a:tint val="80000"/>
+                <a:satMod val="300000"/>
+              </a:schemeClr>
+            </a:gs>
+            <a:gs pos="100000">
+              <a:schemeClr val="phClr">
+                <a:shade val="30000"/>
+                <a:satMod val="200000"/>
+              </a:schemeClr>
+            </a:gs>
+          </a:gsLst>
+          <a:path path="circle">
+            <a:fillToRect l="50000" t="50000" r="50000" b="50000"/>
+          </a:path>
+        </a:gradFill>
+      </a:bgFillStyleLst>
+    </a:fmtScheme>
+  </a:themeElements>
+  <a:objectDefaults>
+    <a:spDef>
+      <a:spPr/>
+      <a:bodyPr/>
+      <a:lstStyle/>
+      <a:style>
+        <a:lnRef idx="1">
+          <a:schemeClr val="accent1"/>
+        </a:lnRef>
+        <a:fillRef idx="3">
+          <a:schemeClr val="accent1"/>
+        </a:fillRef>
+        <a:effectRef idx="2">
+          <a:schemeClr val="accent1"/>
+        </a:effectRef>
+        <a:fontRef idx="minor">
+          <a:schemeClr val="lt1"/>
+        </a:fontRef>
+      </a:style>
+    </a:spDef>
+    <a:lnDef>
+      <a:spPr/>
+      <a:bodyPr/>
+      <a:lstStyle/>
+      <a:style>
+        <a:lnRef idx="2">
+          <a:schemeClr val="accent1"/>
+        </a:lnRef>
+        <a:fillRef idx="0">
+          <a:schemeClr val="accent1"/>
+        </a:fillRef>
+        <a:effectRef idx="1">
+          <a:schemeClr val="accent1"/>
+        </a:effectRef>
+        <a:fontRef idx="minor">
+          <a:schemeClr val="tx1"/>
+        </a:fontRef>
+      </a:style>
+    </a:lnDef>
+  </a:objectDefaults>
+  <a:extraClrSchemeLst/>
+</a:theme>
 </file>
--- a/protected-downloads/praesentation/M02.pptx
+++ b/protected-downloads/praesentation/M02.pptx
@@ -8,11 +8,12 @@
     <p:sldId id="256" r:id="rId7"/>
     <p:sldId id="257" r:id="rId8"/>
     <p:sldId id="258" r:id="rId9"/>
-    <p:sldId id="259" r:id="rId11"/>
+    <p:sldId id="259" r:id="rId10"/>
     <p:sldId id="260" r:id="rId12"/>
     <p:sldId id="261" r:id="rId13"/>
     <p:sldId id="262" r:id="rId14"/>
     <p:sldId id="263" r:id="rId15"/>
+    <p:sldId id="264" r:id="rId16"/>
   </p:sldIdLst>
   <p:sldSz cx="12188952" cy="6858000" type="screen4x3"/>
   <p:notesSz cx="6858000" cy="9144000"/>
@@ -4416,7 +4417,7 @@
                 </a:solidFill>
                 <a:latin typeface="JetBrains Mono"/>
               </a:rPr>
-              <a:t>LERNZIELE  ·  M02</a:t>
+              <a:t>ÜBERBLICK  ·  M02</a:t>
             </a:r>
           </a:p>
         </p:txBody>
@@ -4494,7 +4495,7 @@
                 </a:solidFill>
                 <a:latin typeface="Source Serif 4"/>
               </a:rPr>
-              <a:t>Was Sie heute mitnehmen</a:t>
+              <a:t>Worum geht es heute</a:t>
             </a:r>
           </a:p>
         </p:txBody>
@@ -4507,8 +4508,8 @@
         </p:nvSpPr>
         <p:spPr>
           <a:xfrm>
-            <a:off x="685800" y="1371600"/>
-            <a:ext cx="10817352" cy="5120640"/>
+            <a:off x="685800" y="1737360"/>
+            <a:ext cx="9720072" cy="4206240"/>
           </a:xfrm>
           <a:prstGeom prst="rect">
             <a:avLst/>
@@ -4522,78 +4523,50 @@
           <a:lstStyle/>
           <a:p>
             <a:pPr>
-              <a:spcBef>
-                <a:spcPts val="800"/>
-              </a:spcBef>
               <a:spcAft>
-                <a:spcPts val="200"/>
+                <a:spcPts val="1200"/>
               </a:spcAft>
             </a:pPr>
             <a:r>
-              <a:rPr sz="1400">
+              <a:rPr sz="1700">
                 <a:solidFill>
                   <a:srgbClr val="3D5466"/>
                 </a:solidFill>
                 <a:latin typeface="Arial"/>
               </a:rPr>
-              <a:t>▸  Ein Bilanzgespräch mit einem KMU-Kunden anhand eines strukturierten 5-Phasen-Rahmens situativ planen und durchführen</a:t>
+              <a:t>Die Analyse liegt vor – aber wie spricht man kritische Zahlen an, ohne den Kunden zu belehren?</a:t>
             </a:r>
           </a:p>
           <a:p>
             <a:pPr>
-              <a:spcBef>
-                <a:spcPts val="800"/>
-              </a:spcBef>
               <a:spcAft>
-                <a:spcPts val="200"/>
+                <a:spcPts val="1200"/>
               </a:spcAft>
             </a:pPr>
             <a:r>
-              <a:rPr sz="1400">
+              <a:rPr sz="1700">
                 <a:solidFill>
                   <a:srgbClr val="3D5466"/>
                 </a:solidFill>
                 <a:latin typeface="Arial"/>
               </a:rPr>
-              <a:t>▸  Kritische Kennzahlenentwicklungen im Kundendialog differenziert einordnen und gezielte Analysefragen stellen</a:t>
+              <a:t>Sie lernen einen 5-Phasen-Rahmen und Fragetechniken für das Bilanzgespräch und üben beides im Rollenspiel an einem realistischen Mittelstandsfall.</a:t>
             </a:r>
           </a:p>
           <a:p>
             <a:pPr>
-              <a:spcBef>
-                <a:spcPts val="800"/>
-              </a:spcBef>
               <a:spcAft>
-                <a:spcPts val="200"/>
+                <a:spcPts val="1200"/>
               </a:spcAft>
             </a:pPr>
             <a:r>
-              <a:rPr sz="1400">
+              <a:rPr sz="1700">
                 <a:solidFill>
                   <a:srgbClr val="3D5466"/>
                 </a:solidFill>
                 <a:latin typeface="Arial"/>
               </a:rPr>
-              <a:t>▸  Qualitative Unternehmenssignale mit quantitativen Kennzahlen verknüpfen</a:t>
-            </a:r>
-          </a:p>
-          <a:p>
-            <a:pPr>
-              <a:spcBef>
-                <a:spcPts val="800"/>
-              </a:spcBef>
-              <a:spcAft>
-                <a:spcPts val="200"/>
-              </a:spcAft>
-            </a:pPr>
-            <a:r>
-              <a:rPr sz="1400">
-                <a:solidFill>
-                  <a:srgbClr val="3D5466"/>
-                </a:solidFill>
-                <a:latin typeface="Arial"/>
-              </a:rPr>
-              <a:t>▸  Einwände konstruktiv aufgreifen und das Gespräch produktiv weiterführen</a:t>
+              <a:t>Danach führen Sie Bilanzgespräche auf Augenhöhe – auch wenn die Botschaft unbequem ist.</a:t>
             </a:r>
           </a:p>
         </p:txBody>
@@ -4810,7 +4783,7 @@
                 </a:solidFill>
                 <a:latin typeface="JetBrains Mono"/>
               </a:rPr>
-              <a:t>M02  ·  INHALT</a:t>
+              <a:t>LERNZIELE  ·  M02</a:t>
             </a:r>
           </a:p>
         </p:txBody>
@@ -4860,44 +4833,36 @@
       </p:sp>
       <p:sp>
         <p:nvSpPr>
-          <p:cNvPr id="6" name="Rectangle 5"/>
-          <p:cNvSpPr/>
+          <p:cNvPr id="6" name="TextBox 5"/>
+          <p:cNvSpPr txBox="1"/>
           <p:nvPr/>
         </p:nvSpPr>
         <p:spPr>
           <a:xfrm>
             <a:off x="685800" y="502920"/>
-            <a:ext cx="36576" cy="658368"/>
-          </a:xfrm>
-          <a:prstGeom prst="rect">
-            <a:avLst/>
-          </a:prstGeom>
-          <a:solidFill>
-            <a:srgbClr val="D9C089"/>
-          </a:solidFill>
-          <a:ln>
-            <a:noFill/>
-          </a:ln>
-        </p:spPr>
-        <p:style>
-          <a:lnRef idx="1">
-            <a:schemeClr val="accent1"/>
-          </a:lnRef>
-          <a:fillRef idx="3">
-            <a:schemeClr val="accent1"/>
-          </a:fillRef>
-          <a:effectRef idx="2">
-            <a:schemeClr val="accent1"/>
-          </a:effectRef>
-          <a:fontRef idx="minor">
-            <a:schemeClr val="lt1"/>
-          </a:fontRef>
-        </p:style>
-        <p:txBody>
-          <a:bodyPr rtlCol="0" anchor="ctr"/>
-          <a:lstStyle/>
-          <a:p>
-            <a:pPr algn="ctr"/>
+            <a:ext cx="10817352" cy="658368"/>
+          </a:xfrm>
+          <a:prstGeom prst="rect">
+            <a:avLst/>
+          </a:prstGeom>
+          <a:noFill/>
+        </p:spPr>
+        <p:txBody>
+          <a:bodyPr wrap="square">
+            <a:spAutoFit/>
+          </a:bodyPr>
+          <a:lstStyle/>
+          <a:p>
+            <a:pPr algn="l"/>
+            <a:r>
+              <a:rPr sz="2600" b="1" i="0">
+                <a:solidFill>
+                  <a:srgbClr val="1F2C56"/>
+                </a:solidFill>
+                <a:latin typeface="Source Serif 4"/>
+              </a:rPr>
+              <a:t>Was Sie heute mitnehmen</a:t>
+            </a:r>
           </a:p>
         </p:txBody>
       </p:sp>
@@ -4909,8 +4874,8 @@
         </p:nvSpPr>
         <p:spPr>
           <a:xfrm>
-            <a:off x="813816" y="502920"/>
-            <a:ext cx="10634472" cy="685800"/>
+            <a:off x="685800" y="1371600"/>
+            <a:ext cx="10817352" cy="5120640"/>
           </a:xfrm>
           <a:prstGeom prst="rect">
             <a:avLst/>
@@ -4923,273 +4888,86 @@
           </a:bodyPr>
           <a:lstStyle/>
           <a:p>
-            <a:pPr algn="l"/>
-            <a:r>
-              <a:rPr sz="2400" b="1" i="0">
-                <a:solidFill>
-                  <a:srgbClr val="1F2C56"/>
-                </a:solidFill>
-                <a:latin typeface="Source Serif 4"/>
-              </a:rPr>
-              <a:t>Theorie-Input: Vom Zahlenleser zum Gesprächsführer</a:t>
-            </a:r>
-          </a:p>
-        </p:txBody>
-      </p:sp>
-      <p:sp>
-        <p:nvSpPr>
-          <p:cNvPr id="8" name="TextBox 7"/>
-          <p:cNvSpPr txBox="1"/>
-          <p:nvPr/>
-        </p:nvSpPr>
-        <p:spPr>
-          <a:xfrm>
-            <a:off x="685800" y="1417320"/>
-            <a:ext cx="10817352" cy="5029200"/>
-          </a:xfrm>
-          <a:prstGeom prst="rect">
-            <a:avLst/>
-          </a:prstGeom>
-          <a:noFill/>
-        </p:spPr>
-        <p:txBody>
-          <a:bodyPr wrap="square">
-            <a:spAutoFit/>
-          </a:bodyPr>
-          <a:lstStyle/>
-          <a:p>
             <a:pPr>
               <a:spcBef>
-                <a:spcPts val="1000"/>
+                <a:spcPts val="800"/>
               </a:spcBef>
               <a:spcAft>
                 <a:spcPts val="200"/>
               </a:spcAft>
             </a:pPr>
             <a:r>
-              <a:rPr sz="800" b="1">
-                <a:solidFill>
-                  <a:srgbClr val="78808C"/>
-                </a:solidFill>
-                <a:latin typeface="JetBrains Mono"/>
+              <a:rPr sz="1400">
+                <a:solidFill>
+                  <a:srgbClr val="3D5466"/>
+                </a:solidFill>
+                <a:latin typeface="Arial"/>
               </a:rPr>
-              <a:t>DIE GRENZEN DER REINEN KENNZAHLENANALYSE</a:t>
+              <a:t>▸  Ein Bilanzgespräch mit einem KMU-Kunden anhand eines strukturierten 5-Phasen-Rahmens situativ planen und durchführen</a:t>
             </a:r>
           </a:p>
           <a:p>
             <a:pPr>
               <a:spcBef>
-                <a:spcPts val="400"/>
+                <a:spcPts val="800"/>
               </a:spcBef>
               <a:spcAft>
                 <a:spcPts val="200"/>
               </a:spcAft>
             </a:pPr>
             <a:r>
-              <a:rPr sz="1200">
+              <a:rPr sz="1400">
                 <a:solidFill>
                   <a:srgbClr val="3D5466"/>
                 </a:solidFill>
                 <a:latin typeface="Arial"/>
               </a:rPr>
-              <a:t>Der Jahresabschluss beantwortet die Frage: „Wie ist die finanzielle Situation?" . Diese Analyse ist die Grundlage des Kreditgeschäfts – und gleichzeitig nur die Hälfte der Geschichte.</a:t>
+              <a:t>▸  Kritische Kennzahlenentwicklungen im Kundendialog differenziert einordnen und gezielte Analysefragen stellen</a:t>
             </a:r>
           </a:p>
           <a:p>
             <a:pPr>
               <a:spcBef>
-                <a:spcPts val="1000"/>
+                <a:spcPts val="800"/>
               </a:spcBef>
               <a:spcAft>
                 <a:spcPts val="200"/>
               </a:spcAft>
             </a:pPr>
             <a:r>
-              <a:rPr sz="800" b="1">
-                <a:solidFill>
-                  <a:srgbClr val="78808C"/>
-                </a:solidFill>
-                <a:latin typeface="JetBrains Mono"/>
+              <a:rPr sz="1400">
+                <a:solidFill>
+                  <a:srgbClr val="3D5466"/>
+                </a:solidFill>
+                <a:latin typeface="Arial"/>
               </a:rPr>
-              <a:t>KOMMUNIKATION AUF AUGENHÖHE: INHALTS- VS. BEZIEHUNGSEBENE</a:t>
+              <a:t>▸  Qualitative Unternehmenssignale mit quantitativen Kennzahlen verknüpfen</a:t>
             </a:r>
           </a:p>
           <a:p>
             <a:pPr>
               <a:spcBef>
-                <a:spcPts val="400"/>
+                <a:spcPts val="800"/>
               </a:spcBef>
               <a:spcAft>
                 <a:spcPts val="200"/>
               </a:spcAft>
             </a:pPr>
             <a:r>
-              <a:rPr sz="1200">
+              <a:rPr sz="1400">
                 <a:solidFill>
                   <a:srgbClr val="3D5466"/>
                 </a:solidFill>
                 <a:latin typeface="Arial"/>
               </a:rPr>
-              <a:t>Das Muster: Beobachtung + offene Frage statt Beobachtung + Bewertung.</a:t>
-            </a:r>
-          </a:p>
-          <a:p>
-            <a:pPr>
-              <a:spcBef>
-                <a:spcPts val="1000"/>
-              </a:spcBef>
-              <a:spcAft>
-                <a:spcPts val="200"/>
-              </a:spcAft>
-            </a:pPr>
-            <a:r>
-              <a:rPr sz="800" b="1">
-                <a:solidFill>
-                  <a:srgbClr val="78808C"/>
-                </a:solidFill>
-                <a:latin typeface="JetBrains Mono"/>
-              </a:rPr>
-              <a:t>DER 5-PHASEN-RAHMEN FÜR DAS BILANZGESPRÄCH</a:t>
-            </a:r>
-          </a:p>
-          <a:p>
-            <a:pPr>
-              <a:spcBef>
-                <a:spcPts val="400"/>
-              </a:spcBef>
-              <a:spcAft>
-                <a:spcPts val="200"/>
-              </a:spcAft>
-            </a:pPr>
-            <a:r>
-              <a:rPr sz="1200">
-                <a:solidFill>
-                  <a:srgbClr val="3D5466"/>
-                </a:solidFill>
-                <a:latin typeface="Arial"/>
-              </a:rPr>
-              <a:t>Phase 1 – Vorbereitung (30–45 Min. vor dem Termin)</a:t>
-            </a:r>
-          </a:p>
-          <a:p>
-            <a:pPr>
-              <a:spcBef>
-                <a:spcPts val="400"/>
-              </a:spcBef>
-              <a:spcAft>
-                <a:spcPts val="200"/>
-              </a:spcAft>
-            </a:pPr>
-            <a:r>
-              <a:rPr sz="1300">
-                <a:solidFill>
-                  <a:srgbClr val="3D5466"/>
-                </a:solidFill>
-                <a:latin typeface="Arial"/>
-              </a:rPr>
-              <a:t>▸  Mindestens 4 Kennzahlen berechnen (EK-Quote, Liquidität, Verschuldungsgrad, EBIT-Marge)</a:t>
-            </a:r>
-          </a:p>
-          <a:p>
-            <a:pPr>
-              <a:spcBef>
-                <a:spcPts val="400"/>
-              </a:spcBef>
-              <a:spcAft>
-                <a:spcPts val="200"/>
-              </a:spcAft>
-            </a:pPr>
-            <a:r>
-              <a:rPr sz="1300">
-                <a:solidFill>
-                  <a:srgbClr val="3D5466"/>
-                </a:solidFill>
-                <a:latin typeface="Arial"/>
-              </a:rPr>
-              <a:t>▸  Zeitreihe: Vergleich zu mindestens 2 Vorjahren</a:t>
-            </a:r>
-          </a:p>
-          <a:p>
-            <a:pPr>
-              <a:spcBef>
-                <a:spcPts val="400"/>
-              </a:spcBef>
-              <a:spcAft>
-                <a:spcPts val="200"/>
-              </a:spcAft>
-            </a:pPr>
-            <a:r>
-              <a:rPr sz="1300">
-                <a:solidFill>
-                  <a:srgbClr val="3D5466"/>
-                </a:solidFill>
-                <a:latin typeface="Arial"/>
-              </a:rPr>
-              <a:t>▸  Branchenwert recherchieren: In agree (Firmenkundenanalyse) stehen aktuelle Branchenbenchmarks aus der Creditreform/Bisnode-Lizenz direkt im Analysebogen – diese Werte für das Gespräch bevorzugen. Alternativ: Bundesbank Unternehmensabschlussstatistik (kostenfrei, aber teils 2 Jahre zeitverzögert)</a:t>
-            </a:r>
-          </a:p>
-          <a:p>
-            <a:pPr>
-              <a:spcBef>
-                <a:spcPts val="400"/>
-              </a:spcBef>
-              <a:spcAft>
-                <a:spcPts val="200"/>
-              </a:spcAft>
-            </a:pPr>
-            <a:r>
-              <a:rPr sz="1300">
-                <a:solidFill>
-                  <a:srgbClr val="3D5466"/>
-                </a:solidFill>
-                <a:latin typeface="Arial"/>
-              </a:rPr>
-              <a:t>▸  3 Schlüsselbotschaften + 5 offene Fragen schriftlich vorbereiten</a:t>
-            </a:r>
-          </a:p>
-          <a:p>
-            <a:pPr>
-              <a:spcBef>
-                <a:spcPts val="400"/>
-              </a:spcBef>
-              <a:spcAft>
-                <a:spcPts val="200"/>
-              </a:spcAft>
-            </a:pPr>
-            <a:r>
-              <a:rPr sz="1200">
-                <a:solidFill>
-                  <a:srgbClr val="3D5466"/>
-                </a:solidFill>
-                <a:latin typeface="Arial"/>
-              </a:rPr>
-              <a:t>Phase 2 – Eröffnung (ca. 10 Min.)</a:t>
-            </a:r>
-          </a:p>
-          <a:p>
-            <a:pPr>
-              <a:spcBef>
-                <a:spcPts val="400"/>
-              </a:spcBef>
-              <a:spcAft>
-                <a:spcPts val="200"/>
-              </a:spcAft>
-            </a:pPr>
-            <a:r>
-              <a:rPr sz="1300">
-                <a:solidFill>
-                  <a:srgbClr val="3D5466"/>
-                </a:solidFill>
-                <a:latin typeface="Arial"/>
-              </a:rPr>
-              <a:t>▸  Kontext und Ziel setzen: „Heute möchte ich mit Ihnen Ihren Jahresabschluss durchgehen und verstehen, wie sich Ihre Lage entwickelt hat."</a:t>
-            </a:r>
-          </a:p>
-        </p:txBody>
-      </p:sp>
-      <p:sp>
-        <p:nvSpPr>
-          <p:cNvPr id="9" name="Rectangle 8"/>
+              <a:t>▸  Einwände konstruktiv aufgreifen und das Gespräch produktiv weiterführen</a:t>
+            </a:r>
+          </a:p>
+        </p:txBody>
+      </p:sp>
+      <p:sp>
+        <p:nvSpPr>
+          <p:cNvPr id="8" name="Rectangle 7"/>
           <p:cNvSpPr/>
           <p:nvPr/>
         </p:nvSpPr>
@@ -5232,7 +5010,7 @@
       </p:sp>
       <p:sp>
         <p:nvSpPr>
-          <p:cNvPr id="10" name="TextBox 9"/>
+          <p:cNvPr id="9" name="TextBox 8"/>
           <p:cNvSpPr txBox="1"/>
           <p:nvPr/>
         </p:nvSpPr>
@@ -5298,7 +5076,7 @@
             <a:avLst/>
           </a:prstGeom>
           <a:solidFill>
-            <a:srgbClr val="FFFFFF"/>
+            <a:srgbClr val="EDEDF3"/>
           </a:solidFill>
           <a:ln>
             <a:noFill/>
@@ -5399,43 +5177,51 @@
                 </a:solidFill>
                 <a:latin typeface="JetBrains Mono"/>
               </a:rPr>
-              <a:t>M02  ·  SCHAUBILD</a:t>
-            </a:r>
-          </a:p>
-        </p:txBody>
-      </p:sp>
-      <p:sp>
-        <p:nvSpPr>
-          <p:cNvPr id="5" name="TextBox 4"/>
-          <p:cNvSpPr txBox="1"/>
+              <a:t>M02  ·  INHALT</a:t>
+            </a:r>
+          </a:p>
+        </p:txBody>
+      </p:sp>
+      <p:sp>
+        <p:nvSpPr>
+          <p:cNvPr id="5" name="Rectangle 4"/>
+          <p:cNvSpPr/>
           <p:nvPr/>
         </p:nvSpPr>
         <p:spPr>
           <a:xfrm>
-            <a:off x="685800" y="502920"/>
-            <a:ext cx="10817352" cy="594360"/>
-          </a:xfrm>
-          <a:prstGeom prst="rect">
-            <a:avLst/>
-          </a:prstGeom>
-          <a:noFill/>
-        </p:spPr>
-        <p:txBody>
-          <a:bodyPr wrap="square">
-            <a:spAutoFit/>
-          </a:bodyPr>
-          <a:lstStyle/>
-          <a:p>
-            <a:pPr algn="l"/>
-            <a:r>
-              <a:rPr sz="2000" b="1" i="0">
-                <a:solidFill>
-                  <a:srgbClr val="1F2C56"/>
-                </a:solidFill>
-                <a:latin typeface="Source Serif 4"/>
-              </a:rPr>
-              <a:t>Vier-Ohren-Modell nach Schulz von Thun</a:t>
-            </a:r>
+            <a:off x="0" y="1234440"/>
+            <a:ext cx="12188952" cy="12700"/>
+          </a:xfrm>
+          <a:prstGeom prst="rect">
+            <a:avLst/>
+          </a:prstGeom>
+          <a:solidFill>
+            <a:srgbClr val="D8DFE4"/>
+          </a:solidFill>
+          <a:ln>
+            <a:noFill/>
+          </a:ln>
+        </p:spPr>
+        <p:style>
+          <a:lnRef idx="1">
+            <a:schemeClr val="accent1"/>
+          </a:lnRef>
+          <a:fillRef idx="3">
+            <a:schemeClr val="accent1"/>
+          </a:fillRef>
+          <a:effectRef idx="2">
+            <a:schemeClr val="accent1"/>
+          </a:effectRef>
+          <a:fontRef idx="minor">
+            <a:schemeClr val="lt1"/>
+          </a:fontRef>
+        </p:style>
+        <p:txBody>
+          <a:bodyPr rtlCol="0" anchor="ctr"/>
+          <a:lstStyle/>
+          <a:p>
+            <a:pPr algn="ctr"/>
           </a:p>
         </p:txBody>
       </p:sp>
@@ -5447,8 +5233,8 @@
         </p:nvSpPr>
         <p:spPr>
           <a:xfrm>
-            <a:off x="685800" y="1143000"/>
-            <a:ext cx="10817352" cy="25400"/>
+            <a:off x="685800" y="502920"/>
+            <a:ext cx="36576" cy="658368"/>
           </a:xfrm>
           <a:prstGeom prst="rect">
             <a:avLst/>
@@ -5482,33 +5268,295 @@
           </a:p>
         </p:txBody>
       </p:sp>
-      <p:pic>
-        <p:nvPicPr>
-          <p:cNvPr id="7" name="Picture 6" descr="image.png"/>
-          <p:cNvPicPr>
-            <a:picLocks noChangeAspect="1"/>
-          </p:cNvPicPr>
+      <p:sp>
+        <p:nvSpPr>
+          <p:cNvPr id="7" name="TextBox 6"/>
+          <p:cNvSpPr txBox="1"/>
           <p:nvPr/>
-        </p:nvPicPr>
-        <p:blipFill>
-          <a:blip r:embed="rId2"/>
-          <a:stretch>
-            <a:fillRect/>
-          </a:stretch>
-        </p:blipFill>
-        <p:spPr>
-          <a:xfrm>
-            <a:off x="2554863" y="1325880"/>
-            <a:ext cx="7079225" cy="4937760"/>
-          </a:xfrm>
-          <a:prstGeom prst="rect">
-            <a:avLst/>
-          </a:prstGeom>
-        </p:spPr>
-      </p:pic>
-      <p:sp>
-        <p:nvSpPr>
-          <p:cNvPr id="8" name="Rectangle 7"/>
+        </p:nvSpPr>
+        <p:spPr>
+          <a:xfrm>
+            <a:off x="813816" y="502920"/>
+            <a:ext cx="10634472" cy="685800"/>
+          </a:xfrm>
+          <a:prstGeom prst="rect">
+            <a:avLst/>
+          </a:prstGeom>
+          <a:noFill/>
+        </p:spPr>
+        <p:txBody>
+          <a:bodyPr wrap="square">
+            <a:spAutoFit/>
+          </a:bodyPr>
+          <a:lstStyle/>
+          <a:p>
+            <a:pPr algn="l"/>
+            <a:r>
+              <a:rPr sz="2400" b="1" i="0">
+                <a:solidFill>
+                  <a:srgbClr val="1F2C56"/>
+                </a:solidFill>
+                <a:latin typeface="Source Serif 4"/>
+              </a:rPr>
+              <a:t>Theorie-Input: Vom Zahlenleser zum Gesprächsführer</a:t>
+            </a:r>
+          </a:p>
+        </p:txBody>
+      </p:sp>
+      <p:sp>
+        <p:nvSpPr>
+          <p:cNvPr id="8" name="TextBox 7"/>
+          <p:cNvSpPr txBox="1"/>
+          <p:nvPr/>
+        </p:nvSpPr>
+        <p:spPr>
+          <a:xfrm>
+            <a:off x="685800" y="1417320"/>
+            <a:ext cx="10817352" cy="5029200"/>
+          </a:xfrm>
+          <a:prstGeom prst="rect">
+            <a:avLst/>
+          </a:prstGeom>
+          <a:noFill/>
+        </p:spPr>
+        <p:txBody>
+          <a:bodyPr wrap="square">
+            <a:spAutoFit/>
+          </a:bodyPr>
+          <a:lstStyle/>
+          <a:p>
+            <a:pPr>
+              <a:spcBef>
+                <a:spcPts val="1000"/>
+              </a:spcBef>
+              <a:spcAft>
+                <a:spcPts val="200"/>
+              </a:spcAft>
+            </a:pPr>
+            <a:r>
+              <a:rPr sz="800" b="1">
+                <a:solidFill>
+                  <a:srgbClr val="78808C"/>
+                </a:solidFill>
+                <a:latin typeface="JetBrains Mono"/>
+              </a:rPr>
+              <a:t>DIE GRENZEN DER REINEN KENNZAHLENANALYSE</a:t>
+            </a:r>
+          </a:p>
+          <a:p>
+            <a:pPr>
+              <a:spcBef>
+                <a:spcPts val="400"/>
+              </a:spcBef>
+              <a:spcAft>
+                <a:spcPts val="200"/>
+              </a:spcAft>
+            </a:pPr>
+            <a:r>
+              <a:rPr sz="1200">
+                <a:solidFill>
+                  <a:srgbClr val="3D5466"/>
+                </a:solidFill>
+                <a:latin typeface="Arial"/>
+              </a:rPr>
+              <a:t>Der Jahresabschluss beantwortet die Frage: „Wie ist die finanzielle Situation?" . Diese Analyse ist die Grundlage des Kreditgeschäfts – und gleichzeitig nur die Hälfte der Geschichte.</a:t>
+            </a:r>
+          </a:p>
+          <a:p>
+            <a:pPr>
+              <a:spcBef>
+                <a:spcPts val="1000"/>
+              </a:spcBef>
+              <a:spcAft>
+                <a:spcPts val="200"/>
+              </a:spcAft>
+            </a:pPr>
+            <a:r>
+              <a:rPr sz="800" b="1">
+                <a:solidFill>
+                  <a:srgbClr val="78808C"/>
+                </a:solidFill>
+                <a:latin typeface="JetBrains Mono"/>
+              </a:rPr>
+              <a:t>KOMMUNIKATION AUF AUGENHÖHE: INHALTS- VS. BEZIEHUNGSEBENE</a:t>
+            </a:r>
+          </a:p>
+          <a:p>
+            <a:pPr>
+              <a:spcBef>
+                <a:spcPts val="400"/>
+              </a:spcBef>
+              <a:spcAft>
+                <a:spcPts val="200"/>
+              </a:spcAft>
+            </a:pPr>
+            <a:r>
+              <a:rPr sz="1200">
+                <a:solidFill>
+                  <a:srgbClr val="3D5466"/>
+                </a:solidFill>
+                <a:latin typeface="Arial"/>
+              </a:rPr>
+              <a:t>Das Muster: Beobachtung + offene Frage statt Beobachtung + Bewertung.</a:t>
+            </a:r>
+          </a:p>
+          <a:p>
+            <a:pPr>
+              <a:spcBef>
+                <a:spcPts val="1000"/>
+              </a:spcBef>
+              <a:spcAft>
+                <a:spcPts val="200"/>
+              </a:spcAft>
+            </a:pPr>
+            <a:r>
+              <a:rPr sz="800" b="1">
+                <a:solidFill>
+                  <a:srgbClr val="78808C"/>
+                </a:solidFill>
+                <a:latin typeface="JetBrains Mono"/>
+              </a:rPr>
+              <a:t>DER 5-PHASEN-RAHMEN FÜR DAS BILANZGESPRÄCH</a:t>
+            </a:r>
+          </a:p>
+          <a:p>
+            <a:pPr>
+              <a:spcBef>
+                <a:spcPts val="400"/>
+              </a:spcBef>
+              <a:spcAft>
+                <a:spcPts val="200"/>
+              </a:spcAft>
+            </a:pPr>
+            <a:r>
+              <a:rPr sz="1200">
+                <a:solidFill>
+                  <a:srgbClr val="3D5466"/>
+                </a:solidFill>
+                <a:latin typeface="Arial"/>
+              </a:rPr>
+              <a:t>Phase 1 – Vorbereitung (30–45 Min. vor dem Termin)</a:t>
+            </a:r>
+          </a:p>
+          <a:p>
+            <a:pPr>
+              <a:spcBef>
+                <a:spcPts val="400"/>
+              </a:spcBef>
+              <a:spcAft>
+                <a:spcPts val="200"/>
+              </a:spcAft>
+            </a:pPr>
+            <a:r>
+              <a:rPr sz="1300">
+                <a:solidFill>
+                  <a:srgbClr val="3D5466"/>
+                </a:solidFill>
+                <a:latin typeface="Arial"/>
+              </a:rPr>
+              <a:t>▸  Mindestens 4 Kennzahlen berechnen (EK-Quote, Liquidität, Verschuldungsgrad, EBIT-Marge)</a:t>
+            </a:r>
+          </a:p>
+          <a:p>
+            <a:pPr>
+              <a:spcBef>
+                <a:spcPts val="400"/>
+              </a:spcBef>
+              <a:spcAft>
+                <a:spcPts val="200"/>
+              </a:spcAft>
+            </a:pPr>
+            <a:r>
+              <a:rPr sz="1300">
+                <a:solidFill>
+                  <a:srgbClr val="3D5466"/>
+                </a:solidFill>
+                <a:latin typeface="Arial"/>
+              </a:rPr>
+              <a:t>▸  Zeitreihe: Vergleich zu mindestens 2 Vorjahren</a:t>
+            </a:r>
+          </a:p>
+          <a:p>
+            <a:pPr>
+              <a:spcBef>
+                <a:spcPts val="400"/>
+              </a:spcBef>
+              <a:spcAft>
+                <a:spcPts val="200"/>
+              </a:spcAft>
+            </a:pPr>
+            <a:r>
+              <a:rPr sz="1300">
+                <a:solidFill>
+                  <a:srgbClr val="3D5466"/>
+                </a:solidFill>
+                <a:latin typeface="Arial"/>
+              </a:rPr>
+              <a:t>▸  Branchenwert recherchieren: In agree (Firmenkundenanalyse) stehen aktuelle Branchenbenchmarks aus der Creditreform/Bisnode-Lizenz direkt im Analysebogen – diese Werte für das Gespräch bevorzugen. Alternativ: Bundesbank Unternehmensabschlussstatistik (kostenfrei, aber teils 2 Jahre zeitverzögert)</a:t>
+            </a:r>
+          </a:p>
+          <a:p>
+            <a:pPr>
+              <a:spcBef>
+                <a:spcPts val="400"/>
+              </a:spcBef>
+              <a:spcAft>
+                <a:spcPts val="200"/>
+              </a:spcAft>
+            </a:pPr>
+            <a:r>
+              <a:rPr sz="1300">
+                <a:solidFill>
+                  <a:srgbClr val="3D5466"/>
+                </a:solidFill>
+                <a:latin typeface="Arial"/>
+              </a:rPr>
+              <a:t>▸  3 Schlüsselbotschaften + 5 offene Fragen schriftlich vorbereiten</a:t>
+            </a:r>
+          </a:p>
+          <a:p>
+            <a:pPr>
+              <a:spcBef>
+                <a:spcPts val="400"/>
+              </a:spcBef>
+              <a:spcAft>
+                <a:spcPts val="200"/>
+              </a:spcAft>
+            </a:pPr>
+            <a:r>
+              <a:rPr sz="1200">
+                <a:solidFill>
+                  <a:srgbClr val="3D5466"/>
+                </a:solidFill>
+                <a:latin typeface="Arial"/>
+              </a:rPr>
+              <a:t>Phase 2 – Eröffnung (ca. 10 Min.)</a:t>
+            </a:r>
+          </a:p>
+          <a:p>
+            <a:pPr>
+              <a:spcBef>
+                <a:spcPts val="400"/>
+              </a:spcBef>
+              <a:spcAft>
+                <a:spcPts val="200"/>
+              </a:spcAft>
+            </a:pPr>
+            <a:r>
+              <a:rPr sz="1300">
+                <a:solidFill>
+                  <a:srgbClr val="3D5466"/>
+                </a:solidFill>
+                <a:latin typeface="Arial"/>
+              </a:rPr>
+              <a:t>▸  Kontext und Ziel setzen: „Heute möchte ich mit Ihnen Ihren Jahresabschluss durchgehen und verstehen, wie sich Ihre Lage entwickelt hat."</a:t>
+            </a:r>
+          </a:p>
+        </p:txBody>
+      </p:sp>
+      <p:sp>
+        <p:nvSpPr>
+          <p:cNvPr id="9" name="Rectangle 8"/>
           <p:cNvSpPr/>
           <p:nvPr/>
         </p:nvSpPr>
@@ -5551,7 +5599,7 @@
       </p:sp>
       <p:sp>
         <p:nvSpPr>
-          <p:cNvPr id="9" name="TextBox 8"/>
+          <p:cNvPr id="10" name="TextBox 9"/>
           <p:cNvSpPr txBox="1"/>
           <p:nvPr/>
         </p:nvSpPr>
@@ -5580,41 +5628,6 @@
                 <a:latin typeface="JetBrains Mono"/>
               </a:rPr>
               <a:t>Benedikt Zoller Coaching  ·  FKB Campus  ·  M02</a:t>
-            </a:r>
-          </a:p>
-        </p:txBody>
-      </p:sp>
-      <p:sp>
-        <p:nvSpPr>
-          <p:cNvPr id="10" name="TextBox 9"/>
-          <p:cNvSpPr txBox="1"/>
-          <p:nvPr/>
-        </p:nvSpPr>
-        <p:spPr>
-          <a:xfrm>
-            <a:off x="7176211" y="6583680"/>
-            <a:ext cx="4326940" cy="256032"/>
-          </a:xfrm>
-          <a:prstGeom prst="rect">
-            <a:avLst/>
-          </a:prstGeom>
-          <a:noFill/>
-        </p:spPr>
-        <p:txBody>
-          <a:bodyPr wrap="none">
-            <a:spAutoFit/>
-          </a:bodyPr>
-          <a:lstStyle/>
-          <a:p>
-            <a:pPr algn="r"/>
-            <a:r>
-              <a:rPr sz="700">
-                <a:solidFill>
-                  <a:srgbClr val="A0B4D2"/>
-                </a:solidFill>
-                <a:latin typeface="JetBrains Mono"/>
-              </a:rPr>
-              <a:t>Schaubild</a:t>
             </a:r>
           </a:p>
         </p:txBody>
@@ -5788,7 +5801,7 @@
                 </a:solidFill>
                 <a:latin typeface="Source Serif 4"/>
               </a:rPr>
-              <a:t>5-Phasen-Rahmen für das strukturierte Bilanzgespräch</a:t>
+              <a:t>Vier-Ohren-Modell nach Schulz von Thun</a:t>
             </a:r>
           </a:p>
         </p:txBody>
@@ -5852,8 +5865,8 @@
         </p:blipFill>
         <p:spPr>
           <a:xfrm>
-            <a:off x="1670951" y="1325880"/>
-            <a:ext cx="8847050" cy="4937760"/>
+            <a:off x="2554863" y="1325880"/>
+            <a:ext cx="7079225" cy="4937760"/>
           </a:xfrm>
           <a:prstGeom prst="rect">
             <a:avLst/>
@@ -6006,7 +6019,7 @@
             <a:avLst/>
           </a:prstGeom>
           <a:solidFill>
-            <a:srgbClr val="EDEDF3"/>
+            <a:srgbClr val="FFFFFF"/>
           </a:solidFill>
           <a:ln>
             <a:noFill/>
@@ -6107,51 +6120,43 @@
                 </a:solidFill>
                 <a:latin typeface="JetBrains Mono"/>
               </a:rPr>
-              <a:t>M02  ·  INHALT</a:t>
-            </a:r>
-          </a:p>
-        </p:txBody>
-      </p:sp>
-      <p:sp>
-        <p:nvSpPr>
-          <p:cNvPr id="5" name="Rectangle 4"/>
-          <p:cNvSpPr/>
+              <a:t>M02  ·  SCHAUBILD</a:t>
+            </a:r>
+          </a:p>
+        </p:txBody>
+      </p:sp>
+      <p:sp>
+        <p:nvSpPr>
+          <p:cNvPr id="5" name="TextBox 4"/>
+          <p:cNvSpPr txBox="1"/>
           <p:nvPr/>
         </p:nvSpPr>
         <p:spPr>
           <a:xfrm>
-            <a:off x="0" y="1234440"/>
-            <a:ext cx="12188952" cy="12700"/>
-          </a:xfrm>
-          <a:prstGeom prst="rect">
-            <a:avLst/>
-          </a:prstGeom>
-          <a:solidFill>
-            <a:srgbClr val="D8DFE4"/>
-          </a:solidFill>
-          <a:ln>
-            <a:noFill/>
-          </a:ln>
-        </p:spPr>
-        <p:style>
-          <a:lnRef idx="1">
-            <a:schemeClr val="accent1"/>
-          </a:lnRef>
-          <a:fillRef idx="3">
-            <a:schemeClr val="accent1"/>
-          </a:fillRef>
-          <a:effectRef idx="2">
-            <a:schemeClr val="accent1"/>
-          </a:effectRef>
-          <a:fontRef idx="minor">
-            <a:schemeClr val="lt1"/>
-          </a:fontRef>
-        </p:style>
-        <p:txBody>
-          <a:bodyPr rtlCol="0" anchor="ctr"/>
-          <a:lstStyle/>
-          <a:p>
-            <a:pPr algn="ctr"/>
+            <a:off x="685800" y="502920"/>
+            <a:ext cx="10817352" cy="594360"/>
+          </a:xfrm>
+          <a:prstGeom prst="rect">
+            <a:avLst/>
+          </a:prstGeom>
+          <a:noFill/>
+        </p:spPr>
+        <p:txBody>
+          <a:bodyPr wrap="square">
+            <a:spAutoFit/>
+          </a:bodyPr>
+          <a:lstStyle/>
+          <a:p>
+            <a:pPr algn="l"/>
+            <a:r>
+              <a:rPr sz="2000" b="1" i="0">
+                <a:solidFill>
+                  <a:srgbClr val="1F2C56"/>
+                </a:solidFill>
+                <a:latin typeface="Source Serif 4"/>
+              </a:rPr>
+              <a:t>5-Phasen-Rahmen für das strukturierte Bilanzgespräch</a:t>
+            </a:r>
           </a:p>
         </p:txBody>
       </p:sp>
@@ -6163,8 +6168,8 @@
         </p:nvSpPr>
         <p:spPr>
           <a:xfrm>
-            <a:off x="685800" y="502920"/>
-            <a:ext cx="36576" cy="658368"/>
+            <a:off x="685800" y="1143000"/>
+            <a:ext cx="10817352" cy="25400"/>
           </a:xfrm>
           <a:prstGeom prst="rect">
             <a:avLst/>
@@ -6198,219 +6203,33 @@
           </a:p>
         </p:txBody>
       </p:sp>
-      <p:sp>
-        <p:nvSpPr>
-          <p:cNvPr id="7" name="TextBox 6"/>
-          <p:cNvSpPr txBox="1"/>
+      <p:pic>
+        <p:nvPicPr>
+          <p:cNvPr id="7" name="Picture 6" descr="image.png"/>
+          <p:cNvPicPr>
+            <a:picLocks noChangeAspect="1"/>
+          </p:cNvPicPr>
           <p:nvPr/>
-        </p:nvSpPr>
-        <p:spPr>
-          <a:xfrm>
-            <a:off x="813816" y="502920"/>
-            <a:ext cx="10634472" cy="685800"/>
-          </a:xfrm>
-          <a:prstGeom prst="rect">
-            <a:avLst/>
-          </a:prstGeom>
-          <a:noFill/>
-        </p:spPr>
-        <p:txBody>
-          <a:bodyPr wrap="square">
-            <a:spAutoFit/>
-          </a:bodyPr>
-          <a:lstStyle/>
-          <a:p>
-            <a:pPr algn="l"/>
-            <a:r>
-              <a:rPr sz="2400" b="1" i="0">
-                <a:solidFill>
-                  <a:srgbClr val="1F2C56"/>
-                </a:solidFill>
-                <a:latin typeface="Source Serif 4"/>
-              </a:rPr>
-              <a:t>Praxiscase: Schwäbische Metallbau GmbH</a:t>
-            </a:r>
-          </a:p>
-        </p:txBody>
-      </p:sp>
-      <p:sp>
-        <p:nvSpPr>
-          <p:cNvPr id="8" name="TextBox 7"/>
-          <p:cNvSpPr txBox="1"/>
-          <p:nvPr/>
-        </p:nvSpPr>
-        <p:spPr>
-          <a:xfrm>
-            <a:off x="685800" y="1417320"/>
-            <a:ext cx="10817352" cy="5029200"/>
-          </a:xfrm>
-          <a:prstGeom prst="rect">
-            <a:avLst/>
-          </a:prstGeom>
-          <a:noFill/>
-        </p:spPr>
-        <p:txBody>
-          <a:bodyPr wrap="square">
-            <a:spAutoFit/>
-          </a:bodyPr>
-          <a:lstStyle/>
-          <a:p>
-            <a:pPr>
-              <a:spcBef>
-                <a:spcPts val="400"/>
-              </a:spcBef>
-              <a:spcAft>
-                <a:spcPts val="200"/>
-              </a:spcAft>
-            </a:pPr>
-            <a:r>
-              <a:rPr sz="1200">
-                <a:solidFill>
-                  <a:srgbClr val="3D5466"/>
-                </a:solidFill>
-                <a:latin typeface="Arial"/>
-              </a:rPr>
-              <a:t>Finanzdaten (fiktiv):</a:t>
-            </a:r>
-          </a:p>
-          <a:p>
-            <a:pPr>
-              <a:spcBef>
-                <a:spcPts val="400"/>
-              </a:spcBef>
-              <a:spcAft>
-                <a:spcPts val="200"/>
-              </a:spcAft>
-            </a:pPr>
-            <a:r>
-              <a:rPr sz="1200">
-                <a:solidFill>
-                  <a:srgbClr val="3D5466"/>
-                </a:solidFill>
-                <a:latin typeface="Arial"/>
-              </a:rPr>
-              <a:t>Quelle: Deutsche Bundesbank, Unternehmensabschlussstatistik (laufend)</a:t>
-            </a:r>
-          </a:p>
-          <a:p>
-            <a:pPr>
-              <a:spcBef>
-                <a:spcPts val="400"/>
-              </a:spcBef>
-              <a:spcAft>
-                <a:spcPts val="200"/>
-              </a:spcAft>
-            </a:pPr>
-            <a:r>
-              <a:rPr sz="1200">
-                <a:solidFill>
-                  <a:srgbClr val="3D5466"/>
-                </a:solidFill>
-                <a:latin typeface="Arial"/>
-              </a:rPr>
-              <a:t>Rollenbeschreibungen:</a:t>
-            </a:r>
-          </a:p>
-          <a:p>
-            <a:pPr>
-              <a:spcBef>
-                <a:spcPts val="400"/>
-              </a:spcBef>
-              <a:spcAft>
-                <a:spcPts val="200"/>
-              </a:spcAft>
-            </a:pPr>
-            <a:r>
-              <a:rPr sz="1200">
-                <a:solidFill>
-                  <a:srgbClr val="3D5466"/>
-                </a:solidFill>
-                <a:latin typeface="Arial"/>
-              </a:rPr>
-              <a:t>Rolle A – Berater (erhält nur diese Informationen — keine Hintergrundinfos)</a:t>
-            </a:r>
-          </a:p>
-          <a:p>
-            <a:pPr>
-              <a:spcBef>
-                <a:spcPts val="400"/>
-              </a:spcBef>
-              <a:spcAft>
-                <a:spcPts val="200"/>
-              </a:spcAft>
-            </a:pPr>
-            <a:r>
-              <a:rPr sz="1200">
-                <a:solidFill>
-                  <a:srgbClr val="3D5466"/>
-                </a:solidFill>
-                <a:latin typeface="Arial"/>
-              </a:rPr>
-              <a:t>Rolle B – GF Martin Klemm (+ Trainer-Karte mit Hintergrundinfos)</a:t>
-            </a:r>
-          </a:p>
-          <a:p>
-            <a:pPr>
-              <a:spcBef>
-                <a:spcPts val="400"/>
-              </a:spcBef>
-              <a:spcAft>
-                <a:spcPts val="200"/>
-              </a:spcAft>
-            </a:pPr>
-            <a:r>
-              <a:rPr sz="1200">
-                <a:solidFill>
-                  <a:srgbClr val="3D5466"/>
-                </a:solidFill>
-                <a:latin typeface="Arial"/>
-              </a:rPr>
-              <a:t>Rolle C – Beobachter: Beobachtungsbogen nutzen (s. u.), konkrete Gesprächssequenzen festhalten, nicht nur Urteile.</a:t>
-            </a:r>
-          </a:p>
-          <a:p>
-            <a:pPr>
-              <a:spcBef>
-                <a:spcPts val="1000"/>
-              </a:spcBef>
-              <a:spcAft>
-                <a:spcPts val="200"/>
-              </a:spcAft>
-            </a:pPr>
-            <a:r>
-              <a:rPr sz="800" b="1">
-                <a:solidFill>
-                  <a:srgbClr val="78808C"/>
-                </a:solidFill>
-                <a:latin typeface="JetBrains Mono"/>
-              </a:rPr>
-              <a:t>BEOBACHTUNGSBOGEN ROLLENSPIEL</a:t>
-            </a:r>
-          </a:p>
-          <a:p>
-            <a:pPr>
-              <a:spcBef>
-                <a:spcPts val="400"/>
-              </a:spcBef>
-              <a:spcAft>
-                <a:spcPts val="200"/>
-              </a:spcAft>
-            </a:pPr>
-            <a:r>
-              <a:rPr sz="1200">
-                <a:solidFill>
-                  <a:srgbClr val="3D5466"/>
-                </a:solidFill>
-                <a:latin typeface="Arial"/>
-              </a:rPr>
-              <a:t>Skala: 1 = gar nicht sichtbar · 3 = ansatzweise · 5 = sehr gut</a:t>
-            </a:r>
-          </a:p>
-        </p:txBody>
-      </p:sp>
-      <p:sp>
-        <p:nvSpPr>
-          <p:cNvPr id="9" name="Rectangle 8"/>
+        </p:nvPicPr>
+        <p:blipFill>
+          <a:blip r:embed="rId2"/>
+          <a:stretch>
+            <a:fillRect/>
+          </a:stretch>
+        </p:blipFill>
+        <p:spPr>
+          <a:xfrm>
+            <a:off x="1670951" y="1325880"/>
+            <a:ext cx="8847050" cy="4937760"/>
+          </a:xfrm>
+          <a:prstGeom prst="rect">
+            <a:avLst/>
+          </a:prstGeom>
+        </p:spPr>
+      </p:pic>
+      <p:sp>
+        <p:nvSpPr>
+          <p:cNvPr id="8" name="Rectangle 7"/>
           <p:cNvSpPr/>
           <p:nvPr/>
         </p:nvSpPr>
@@ -6453,14 +6272,49 @@
       </p:sp>
       <p:sp>
         <p:nvSpPr>
+          <p:cNvPr id="9" name="TextBox 8"/>
+          <p:cNvSpPr txBox="1"/>
+          <p:nvPr/>
+        </p:nvSpPr>
+        <p:spPr>
+          <a:xfrm>
+            <a:off x="685800" y="6583680"/>
+            <a:ext cx="6490411" cy="256032"/>
+          </a:xfrm>
+          <a:prstGeom prst="rect">
+            <a:avLst/>
+          </a:prstGeom>
+          <a:noFill/>
+        </p:spPr>
+        <p:txBody>
+          <a:bodyPr wrap="none">
+            <a:spAutoFit/>
+          </a:bodyPr>
+          <a:lstStyle/>
+          <a:p>
+            <a:pPr algn="l"/>
+            <a:r>
+              <a:rPr sz="700">
+                <a:solidFill>
+                  <a:srgbClr val="A0B4D2"/>
+                </a:solidFill>
+                <a:latin typeface="JetBrains Mono"/>
+              </a:rPr>
+              <a:t>Benedikt Zoller Coaching  ·  FKB Campus  ·  M02</a:t>
+            </a:r>
+          </a:p>
+        </p:txBody>
+      </p:sp>
+      <p:sp>
+        <p:nvSpPr>
           <p:cNvPr id="10" name="TextBox 9"/>
           <p:cNvSpPr txBox="1"/>
           <p:nvPr/>
         </p:nvSpPr>
         <p:spPr>
           <a:xfrm>
-            <a:off x="685800" y="6583680"/>
-            <a:ext cx="6490411" cy="256032"/>
+            <a:off x="7176211" y="6583680"/>
+            <a:ext cx="4326940" cy="256032"/>
           </a:xfrm>
           <a:prstGeom prst="rect">
             <a:avLst/>
@@ -6473,7 +6327,7 @@
           </a:bodyPr>
           <a:lstStyle/>
           <a:p>
-            <a:pPr algn="l"/>
+            <a:pPr algn="r"/>
             <a:r>
               <a:rPr sz="700">
                 <a:solidFill>
@@ -6481,7 +6335,7 @@
                 </a:solidFill>
                 <a:latin typeface="JetBrains Mono"/>
               </a:rPr>
-              <a:t>Benedikt Zoller Coaching  ·  FKB Campus  ·  M02</a:t>
+              <a:t>Schaubild</a:t>
             </a:r>
           </a:p>
         </p:txBody>
@@ -6741,7 +6595,7 @@
                 </a:solidFill>
                 <a:latin typeface="Source Serif 4"/>
               </a:rPr>
-              <a:t>Checkliste: Bilanzgespräch vorbereiten</a:t>
+              <a:t>Praxiscase: Schwäbische Metallbau GmbH</a:t>
             </a:r>
           </a:p>
         </p:txBody>
@@ -6783,7 +6637,7 @@
                 </a:solidFill>
                 <a:latin typeface="Arial"/>
               </a:rPr>
-              <a:t>Vor dem Gespräch:</a:t>
+              <a:t>Finanzdaten (fiktiv):</a:t>
             </a:r>
           </a:p>
           <a:p>
@@ -6796,13 +6650,13 @@
               </a:spcAft>
             </a:pPr>
             <a:r>
-              <a:rPr sz="1300">
+              <a:rPr sz="1200">
                 <a:solidFill>
                   <a:srgbClr val="3D5466"/>
                 </a:solidFill>
                 <a:latin typeface="Arial"/>
               </a:rPr>
-              <a:t>▸  [ ] Jahresabschluss und Vorjahresvergleich ausgewertet</a:t>
+              <a:t>Quelle: Deutsche Bundesbank, Unternehmensabschlussstatistik (laufend)</a:t>
             </a:r>
           </a:p>
           <a:p>
@@ -6815,13 +6669,13 @@
               </a:spcAft>
             </a:pPr>
             <a:r>
-              <a:rPr sz="1300">
+              <a:rPr sz="1200">
                 <a:solidFill>
                   <a:srgbClr val="3D5466"/>
                 </a:solidFill>
                 <a:latin typeface="Arial"/>
               </a:rPr>
-              <a:t>▸  [ ] 4+ Kennzahlen berechnet, Branchenvergleich notiert</a:t>
+              <a:t>Rollenbeschreibungen:</a:t>
             </a:r>
           </a:p>
           <a:p>
@@ -6834,13 +6688,13 @@
               </a:spcAft>
             </a:pPr>
             <a:r>
-              <a:rPr sz="1300">
+              <a:rPr sz="1200">
                 <a:solidFill>
                   <a:srgbClr val="3D5466"/>
                 </a:solidFill>
                 <a:latin typeface="Arial"/>
               </a:rPr>
-              <a:t>▸  [ ] 5 offene Fragen schriftlich vorbereitet</a:t>
+              <a:t>Rolle A – Berater (erhält nur diese Informationen — keine Hintergrundinfos)</a:t>
             </a:r>
           </a:p>
           <a:p>
@@ -6853,13 +6707,13 @@
               </a:spcAft>
             </a:pPr>
             <a:r>
-              <a:rPr sz="1300">
+              <a:rPr sz="1200">
                 <a:solidFill>
                   <a:srgbClr val="3D5466"/>
                 </a:solidFill>
                 <a:latin typeface="Arial"/>
               </a:rPr>
-              <a:t>▸  [ ] Gesprächsziel definiert</a:t>
+              <a:t>Rolle B – GF Martin Klemm (+ Trainer-Karte mit Hintergrundinfos)</a:t>
             </a:r>
           </a:p>
           <a:p>
@@ -6872,13 +6726,32 @@
               </a:spcAft>
             </a:pPr>
             <a:r>
-              <a:rPr sz="1300">
+              <a:rPr sz="1200">
                 <a:solidFill>
                   <a:srgbClr val="3D5466"/>
                 </a:solidFill>
                 <a:latin typeface="Arial"/>
               </a:rPr>
-              <a:t>▸  [ ] Kreditlinie / § 18 KWG-Unterlagen geprüft</a:t>
+              <a:t>Rolle C – Beobachter: Beobachtungsbogen nutzen (s. u.), konkrete Gesprächssequenzen festhalten, nicht nur Urteile.</a:t>
+            </a:r>
+          </a:p>
+          <a:p>
+            <a:pPr>
+              <a:spcBef>
+                <a:spcPts val="1000"/>
+              </a:spcBef>
+              <a:spcAft>
+                <a:spcPts val="200"/>
+              </a:spcAft>
+            </a:pPr>
+            <a:r>
+              <a:rPr sz="800" b="1">
+                <a:solidFill>
+                  <a:srgbClr val="78808C"/>
+                </a:solidFill>
+                <a:latin typeface="JetBrains Mono"/>
+              </a:rPr>
+              <a:t>BEOBACHTUNGSBOGEN ROLLENSPIEL</a:t>
             </a:r>
           </a:p>
           <a:p>
@@ -6891,108 +6764,13 @@
               </a:spcAft>
             </a:pPr>
             <a:r>
-              <a:rPr sz="1300">
+              <a:rPr sz="1200">
                 <a:solidFill>
                   <a:srgbClr val="3D5466"/>
                 </a:solidFill>
                 <a:latin typeface="Arial"/>
               </a:rPr>
-              <a:t>▸  [ ] Verbundpartner-Bedarf gesichtet (R+V, Union Investment, DZ BANK)</a:t>
-            </a:r>
-          </a:p>
-          <a:p>
-            <a:pPr>
-              <a:spcBef>
-                <a:spcPts val="400"/>
-              </a:spcBef>
-              <a:spcAft>
-                <a:spcPts val="200"/>
-              </a:spcAft>
-            </a:pPr>
-            <a:r>
-              <a:rPr sz="1200">
-                <a:solidFill>
-                  <a:srgbClr val="3D5466"/>
-                </a:solidFill>
-                <a:latin typeface="Arial"/>
-              </a:rPr>
-              <a:t>Im Gespräch:</a:t>
-            </a:r>
-          </a:p>
-          <a:p>
-            <a:pPr>
-              <a:spcBef>
-                <a:spcPts val="400"/>
-              </a:spcBef>
-              <a:spcAft>
-                <a:spcPts val="200"/>
-              </a:spcAft>
-            </a:pPr>
-            <a:r>
-              <a:rPr sz="1300">
-                <a:solidFill>
-                  <a:srgbClr val="3D5466"/>
-                </a:solidFill>
-                <a:latin typeface="Arial"/>
-              </a:rPr>
-              <a:t>▸  [ ] Positiver Einstieg, Agenda gesetzt</a:t>
-            </a:r>
-          </a:p>
-          <a:p>
-            <a:pPr>
-              <a:spcBef>
-                <a:spcPts val="400"/>
-              </a:spcBef>
-              <a:spcAft>
-                <a:spcPts val="200"/>
-              </a:spcAft>
-            </a:pPr>
-            <a:r>
-              <a:rPr sz="1300">
-                <a:solidFill>
-                  <a:srgbClr val="3D5466"/>
-                </a:solidFill>
-                <a:latin typeface="Arial"/>
-              </a:rPr>
-              <a:t>▸  [ ] Mindestens 40 % Redezeit für den Kunden</a:t>
-            </a:r>
-          </a:p>
-          <a:p>
-            <a:pPr>
-              <a:spcBef>
-                <a:spcPts val="400"/>
-              </a:spcBef>
-              <a:spcAft>
-                <a:spcPts val="200"/>
-              </a:spcAft>
-            </a:pPr>
-            <a:r>
-              <a:rPr sz="1300">
-                <a:solidFill>
-                  <a:srgbClr val="3D5466"/>
-                </a:solidFill>
-                <a:latin typeface="Arial"/>
-              </a:rPr>
-              <a:t>▸  [ ] Kritische Punkte mit offener Frage angesprochen</a:t>
-            </a:r>
-          </a:p>
-          <a:p>
-            <a:pPr>
-              <a:spcBef>
-                <a:spcPts val="400"/>
-              </a:spcBef>
-              <a:spcAft>
-                <a:spcPts val="200"/>
-              </a:spcAft>
-            </a:pPr>
-            <a:r>
-              <a:rPr sz="1300">
-                <a:solidFill>
-                  <a:srgbClr val="3D5466"/>
-                </a:solidFill>
-                <a:latin typeface="Arial"/>
-              </a:rPr>
-              <a:t>▸  [ ] Handlungsoptionen gemeinsam entwickelt</a:t>
+              <a:t>Skala: 1 = gar nicht sichtbar · 3 = ansatzweise · 5 = sehr gut</a:t>
             </a:r>
           </a:p>
         </p:txBody>
@@ -7084,6 +6862,595 @@
 </file>
 
 <file path=ppt/slides/slide8.xml><?xml version="1.0" encoding="utf-8"?>
+<p:sld xmlns:a="http://schemas.openxmlformats.org/drawingml/2006/main" xmlns:p="http://schemas.openxmlformats.org/presentationml/2006/main" xmlns:r="http://schemas.openxmlformats.org/officeDocument/2006/relationships">
+  <p:cSld>
+    <p:spTree>
+      <p:nvGrpSpPr>
+        <p:cNvPr id="1" name=""/>
+        <p:cNvGrpSpPr/>
+        <p:nvPr/>
+      </p:nvGrpSpPr>
+      <p:grpSpPr/>
+      <p:sp>
+        <p:nvSpPr>
+          <p:cNvPr id="2" name="Rectangle 1"/>
+          <p:cNvSpPr/>
+          <p:nvPr/>
+        </p:nvSpPr>
+        <p:spPr>
+          <a:xfrm>
+            <a:off x="0" y="0"/>
+            <a:ext cx="12188952" cy="6858000"/>
+          </a:xfrm>
+          <a:prstGeom prst="rect">
+            <a:avLst/>
+          </a:prstGeom>
+          <a:solidFill>
+            <a:srgbClr val="EDEDF3"/>
+          </a:solidFill>
+          <a:ln>
+            <a:noFill/>
+          </a:ln>
+        </p:spPr>
+        <p:style>
+          <a:lnRef idx="1">
+            <a:schemeClr val="accent1"/>
+          </a:lnRef>
+          <a:fillRef idx="3">
+            <a:schemeClr val="accent1"/>
+          </a:fillRef>
+          <a:effectRef idx="2">
+            <a:schemeClr val="accent1"/>
+          </a:effectRef>
+          <a:fontRef idx="minor">
+            <a:schemeClr val="lt1"/>
+          </a:fontRef>
+        </p:style>
+        <p:txBody>
+          <a:bodyPr rtlCol="0" anchor="ctr"/>
+          <a:lstStyle/>
+          <a:p>
+            <a:pPr algn="ctr"/>
+          </a:p>
+        </p:txBody>
+      </p:sp>
+      <p:sp>
+        <p:nvSpPr>
+          <p:cNvPr id="3" name="Rectangle 2"/>
+          <p:cNvSpPr/>
+          <p:nvPr/>
+        </p:nvSpPr>
+        <p:spPr>
+          <a:xfrm>
+            <a:off x="0" y="0"/>
+            <a:ext cx="12188952" cy="50292"/>
+          </a:xfrm>
+          <a:prstGeom prst="rect">
+            <a:avLst/>
+          </a:prstGeom>
+          <a:solidFill>
+            <a:srgbClr val="1F2C56"/>
+          </a:solidFill>
+          <a:ln>
+            <a:noFill/>
+          </a:ln>
+        </p:spPr>
+        <p:style>
+          <a:lnRef idx="1">
+            <a:schemeClr val="accent1"/>
+          </a:lnRef>
+          <a:fillRef idx="3">
+            <a:schemeClr val="accent1"/>
+          </a:fillRef>
+          <a:effectRef idx="2">
+            <a:schemeClr val="accent1"/>
+          </a:effectRef>
+          <a:fontRef idx="minor">
+            <a:schemeClr val="lt1"/>
+          </a:fontRef>
+        </p:style>
+        <p:txBody>
+          <a:bodyPr rtlCol="0" anchor="ctr"/>
+          <a:lstStyle/>
+          <a:p>
+            <a:pPr algn="ctr"/>
+          </a:p>
+        </p:txBody>
+      </p:sp>
+      <p:sp>
+        <p:nvSpPr>
+          <p:cNvPr id="4" name="TextBox 3"/>
+          <p:cNvSpPr txBox="1"/>
+          <p:nvPr/>
+        </p:nvSpPr>
+        <p:spPr>
+          <a:xfrm>
+            <a:off x="685800" y="109728"/>
+            <a:ext cx="10817352" cy="228600"/>
+          </a:xfrm>
+          <a:prstGeom prst="rect">
+            <a:avLst/>
+          </a:prstGeom>
+          <a:noFill/>
+        </p:spPr>
+        <p:txBody>
+          <a:bodyPr wrap="none">
+            <a:spAutoFit/>
+          </a:bodyPr>
+          <a:lstStyle/>
+          <a:p>
+            <a:pPr algn="l"/>
+            <a:r>
+              <a:rPr sz="750">
+                <a:solidFill>
+                  <a:srgbClr val="78808C"/>
+                </a:solidFill>
+                <a:latin typeface="JetBrains Mono"/>
+              </a:rPr>
+              <a:t>M02  ·  INHALT</a:t>
+            </a:r>
+          </a:p>
+        </p:txBody>
+      </p:sp>
+      <p:sp>
+        <p:nvSpPr>
+          <p:cNvPr id="5" name="Rectangle 4"/>
+          <p:cNvSpPr/>
+          <p:nvPr/>
+        </p:nvSpPr>
+        <p:spPr>
+          <a:xfrm>
+            <a:off x="0" y="1234440"/>
+            <a:ext cx="12188952" cy="12700"/>
+          </a:xfrm>
+          <a:prstGeom prst="rect">
+            <a:avLst/>
+          </a:prstGeom>
+          <a:solidFill>
+            <a:srgbClr val="D8DFE4"/>
+          </a:solidFill>
+          <a:ln>
+            <a:noFill/>
+          </a:ln>
+        </p:spPr>
+        <p:style>
+          <a:lnRef idx="1">
+            <a:schemeClr val="accent1"/>
+          </a:lnRef>
+          <a:fillRef idx="3">
+            <a:schemeClr val="accent1"/>
+          </a:fillRef>
+          <a:effectRef idx="2">
+            <a:schemeClr val="accent1"/>
+          </a:effectRef>
+          <a:fontRef idx="minor">
+            <a:schemeClr val="lt1"/>
+          </a:fontRef>
+        </p:style>
+        <p:txBody>
+          <a:bodyPr rtlCol="0" anchor="ctr"/>
+          <a:lstStyle/>
+          <a:p>
+            <a:pPr algn="ctr"/>
+          </a:p>
+        </p:txBody>
+      </p:sp>
+      <p:sp>
+        <p:nvSpPr>
+          <p:cNvPr id="6" name="Rectangle 5"/>
+          <p:cNvSpPr/>
+          <p:nvPr/>
+        </p:nvSpPr>
+        <p:spPr>
+          <a:xfrm>
+            <a:off x="685800" y="502920"/>
+            <a:ext cx="36576" cy="658368"/>
+          </a:xfrm>
+          <a:prstGeom prst="rect">
+            <a:avLst/>
+          </a:prstGeom>
+          <a:solidFill>
+            <a:srgbClr val="D9C089"/>
+          </a:solidFill>
+          <a:ln>
+            <a:noFill/>
+          </a:ln>
+        </p:spPr>
+        <p:style>
+          <a:lnRef idx="1">
+            <a:schemeClr val="accent1"/>
+          </a:lnRef>
+          <a:fillRef idx="3">
+            <a:schemeClr val="accent1"/>
+          </a:fillRef>
+          <a:effectRef idx="2">
+            <a:schemeClr val="accent1"/>
+          </a:effectRef>
+          <a:fontRef idx="minor">
+            <a:schemeClr val="lt1"/>
+          </a:fontRef>
+        </p:style>
+        <p:txBody>
+          <a:bodyPr rtlCol="0" anchor="ctr"/>
+          <a:lstStyle/>
+          <a:p>
+            <a:pPr algn="ctr"/>
+          </a:p>
+        </p:txBody>
+      </p:sp>
+      <p:sp>
+        <p:nvSpPr>
+          <p:cNvPr id="7" name="TextBox 6"/>
+          <p:cNvSpPr txBox="1"/>
+          <p:nvPr/>
+        </p:nvSpPr>
+        <p:spPr>
+          <a:xfrm>
+            <a:off x="813816" y="502920"/>
+            <a:ext cx="10634472" cy="685800"/>
+          </a:xfrm>
+          <a:prstGeom prst="rect">
+            <a:avLst/>
+          </a:prstGeom>
+          <a:noFill/>
+        </p:spPr>
+        <p:txBody>
+          <a:bodyPr wrap="square">
+            <a:spAutoFit/>
+          </a:bodyPr>
+          <a:lstStyle/>
+          <a:p>
+            <a:pPr algn="l"/>
+            <a:r>
+              <a:rPr sz="2400" b="1" i="0">
+                <a:solidFill>
+                  <a:srgbClr val="1F2C56"/>
+                </a:solidFill>
+                <a:latin typeface="Source Serif 4"/>
+              </a:rPr>
+              <a:t>Checkliste: Bilanzgespräch vorbereiten</a:t>
+            </a:r>
+          </a:p>
+        </p:txBody>
+      </p:sp>
+      <p:sp>
+        <p:nvSpPr>
+          <p:cNvPr id="8" name="TextBox 7"/>
+          <p:cNvSpPr txBox="1"/>
+          <p:nvPr/>
+        </p:nvSpPr>
+        <p:spPr>
+          <a:xfrm>
+            <a:off x="685800" y="1417320"/>
+            <a:ext cx="10817352" cy="5029200"/>
+          </a:xfrm>
+          <a:prstGeom prst="rect">
+            <a:avLst/>
+          </a:prstGeom>
+          <a:noFill/>
+        </p:spPr>
+        <p:txBody>
+          <a:bodyPr wrap="square">
+            <a:spAutoFit/>
+          </a:bodyPr>
+          <a:lstStyle/>
+          <a:p>
+            <a:pPr>
+              <a:spcBef>
+                <a:spcPts val="400"/>
+              </a:spcBef>
+              <a:spcAft>
+                <a:spcPts val="200"/>
+              </a:spcAft>
+            </a:pPr>
+            <a:r>
+              <a:rPr sz="1200">
+                <a:solidFill>
+                  <a:srgbClr val="3D5466"/>
+                </a:solidFill>
+                <a:latin typeface="Arial"/>
+              </a:rPr>
+              <a:t>Vor dem Gespräch:</a:t>
+            </a:r>
+          </a:p>
+          <a:p>
+            <a:pPr>
+              <a:spcBef>
+                <a:spcPts val="400"/>
+              </a:spcBef>
+              <a:spcAft>
+                <a:spcPts val="200"/>
+              </a:spcAft>
+            </a:pPr>
+            <a:r>
+              <a:rPr sz="1300">
+                <a:solidFill>
+                  <a:srgbClr val="3D5466"/>
+                </a:solidFill>
+                <a:latin typeface="Arial"/>
+              </a:rPr>
+              <a:t>▸  [ ] Jahresabschluss und Vorjahresvergleich ausgewertet</a:t>
+            </a:r>
+          </a:p>
+          <a:p>
+            <a:pPr>
+              <a:spcBef>
+                <a:spcPts val="400"/>
+              </a:spcBef>
+              <a:spcAft>
+                <a:spcPts val="200"/>
+              </a:spcAft>
+            </a:pPr>
+            <a:r>
+              <a:rPr sz="1300">
+                <a:solidFill>
+                  <a:srgbClr val="3D5466"/>
+                </a:solidFill>
+                <a:latin typeface="Arial"/>
+              </a:rPr>
+              <a:t>▸  [ ] 4+ Kennzahlen berechnet, Branchenvergleich notiert</a:t>
+            </a:r>
+          </a:p>
+          <a:p>
+            <a:pPr>
+              <a:spcBef>
+                <a:spcPts val="400"/>
+              </a:spcBef>
+              <a:spcAft>
+                <a:spcPts val="200"/>
+              </a:spcAft>
+            </a:pPr>
+            <a:r>
+              <a:rPr sz="1300">
+                <a:solidFill>
+                  <a:srgbClr val="3D5466"/>
+                </a:solidFill>
+                <a:latin typeface="Arial"/>
+              </a:rPr>
+              <a:t>▸  [ ] 5 offene Fragen schriftlich vorbereitet</a:t>
+            </a:r>
+          </a:p>
+          <a:p>
+            <a:pPr>
+              <a:spcBef>
+                <a:spcPts val="400"/>
+              </a:spcBef>
+              <a:spcAft>
+                <a:spcPts val="200"/>
+              </a:spcAft>
+            </a:pPr>
+            <a:r>
+              <a:rPr sz="1300">
+                <a:solidFill>
+                  <a:srgbClr val="3D5466"/>
+                </a:solidFill>
+                <a:latin typeface="Arial"/>
+              </a:rPr>
+              <a:t>▸  [ ] Gesprächsziel definiert</a:t>
+            </a:r>
+          </a:p>
+          <a:p>
+            <a:pPr>
+              <a:spcBef>
+                <a:spcPts val="400"/>
+              </a:spcBef>
+              <a:spcAft>
+                <a:spcPts val="200"/>
+              </a:spcAft>
+            </a:pPr>
+            <a:r>
+              <a:rPr sz="1300">
+                <a:solidFill>
+                  <a:srgbClr val="3D5466"/>
+                </a:solidFill>
+                <a:latin typeface="Arial"/>
+              </a:rPr>
+              <a:t>▸  [ ] Kreditlinie / § 18 KWG-Unterlagen geprüft</a:t>
+            </a:r>
+          </a:p>
+          <a:p>
+            <a:pPr>
+              <a:spcBef>
+                <a:spcPts val="400"/>
+              </a:spcBef>
+              <a:spcAft>
+                <a:spcPts val="200"/>
+              </a:spcAft>
+            </a:pPr>
+            <a:r>
+              <a:rPr sz="1300">
+                <a:solidFill>
+                  <a:srgbClr val="3D5466"/>
+                </a:solidFill>
+                <a:latin typeface="Arial"/>
+              </a:rPr>
+              <a:t>▸  [ ] Verbundpartner-Bedarf gesichtet (R+V, Union Investment, DZ BANK)</a:t>
+            </a:r>
+          </a:p>
+          <a:p>
+            <a:pPr>
+              <a:spcBef>
+                <a:spcPts val="400"/>
+              </a:spcBef>
+              <a:spcAft>
+                <a:spcPts val="200"/>
+              </a:spcAft>
+            </a:pPr>
+            <a:r>
+              <a:rPr sz="1200">
+                <a:solidFill>
+                  <a:srgbClr val="3D5466"/>
+                </a:solidFill>
+                <a:latin typeface="Arial"/>
+              </a:rPr>
+              <a:t>Im Gespräch:</a:t>
+            </a:r>
+          </a:p>
+          <a:p>
+            <a:pPr>
+              <a:spcBef>
+                <a:spcPts val="400"/>
+              </a:spcBef>
+              <a:spcAft>
+                <a:spcPts val="200"/>
+              </a:spcAft>
+            </a:pPr>
+            <a:r>
+              <a:rPr sz="1300">
+                <a:solidFill>
+                  <a:srgbClr val="3D5466"/>
+                </a:solidFill>
+                <a:latin typeface="Arial"/>
+              </a:rPr>
+              <a:t>▸  [ ] Positiver Einstieg, Agenda gesetzt</a:t>
+            </a:r>
+          </a:p>
+          <a:p>
+            <a:pPr>
+              <a:spcBef>
+                <a:spcPts val="400"/>
+              </a:spcBef>
+              <a:spcAft>
+                <a:spcPts val="200"/>
+              </a:spcAft>
+            </a:pPr>
+            <a:r>
+              <a:rPr sz="1300">
+                <a:solidFill>
+                  <a:srgbClr val="3D5466"/>
+                </a:solidFill>
+                <a:latin typeface="Arial"/>
+              </a:rPr>
+              <a:t>▸  [ ] Mindestens 40 % Redezeit für den Kunden</a:t>
+            </a:r>
+          </a:p>
+          <a:p>
+            <a:pPr>
+              <a:spcBef>
+                <a:spcPts val="400"/>
+              </a:spcBef>
+              <a:spcAft>
+                <a:spcPts val="200"/>
+              </a:spcAft>
+            </a:pPr>
+            <a:r>
+              <a:rPr sz="1300">
+                <a:solidFill>
+                  <a:srgbClr val="3D5466"/>
+                </a:solidFill>
+                <a:latin typeface="Arial"/>
+              </a:rPr>
+              <a:t>▸  [ ] Kritische Punkte mit offener Frage angesprochen</a:t>
+            </a:r>
+          </a:p>
+          <a:p>
+            <a:pPr>
+              <a:spcBef>
+                <a:spcPts val="400"/>
+              </a:spcBef>
+              <a:spcAft>
+                <a:spcPts val="200"/>
+              </a:spcAft>
+            </a:pPr>
+            <a:r>
+              <a:rPr sz="1300">
+                <a:solidFill>
+                  <a:srgbClr val="3D5466"/>
+                </a:solidFill>
+                <a:latin typeface="Arial"/>
+              </a:rPr>
+              <a:t>▸  [ ] Handlungsoptionen gemeinsam entwickelt</a:t>
+            </a:r>
+          </a:p>
+        </p:txBody>
+      </p:sp>
+      <p:sp>
+        <p:nvSpPr>
+          <p:cNvPr id="9" name="Rectangle 8"/>
+          <p:cNvSpPr/>
+          <p:nvPr/>
+        </p:nvSpPr>
+        <p:spPr>
+          <a:xfrm>
+            <a:off x="0" y="6510528"/>
+            <a:ext cx="12188952" cy="347472"/>
+          </a:xfrm>
+          <a:prstGeom prst="rect">
+            <a:avLst/>
+          </a:prstGeom>
+          <a:solidFill>
+            <a:srgbClr val="0A1937"/>
+          </a:solidFill>
+          <a:ln>
+            <a:noFill/>
+          </a:ln>
+        </p:spPr>
+        <p:style>
+          <a:lnRef idx="1">
+            <a:schemeClr val="accent1"/>
+          </a:lnRef>
+          <a:fillRef idx="3">
+            <a:schemeClr val="accent1"/>
+          </a:fillRef>
+          <a:effectRef idx="2">
+            <a:schemeClr val="accent1"/>
+          </a:effectRef>
+          <a:fontRef idx="minor">
+            <a:schemeClr val="lt1"/>
+          </a:fontRef>
+        </p:style>
+        <p:txBody>
+          <a:bodyPr rtlCol="0" anchor="ctr"/>
+          <a:lstStyle/>
+          <a:p>
+            <a:pPr algn="ctr"/>
+          </a:p>
+        </p:txBody>
+      </p:sp>
+      <p:sp>
+        <p:nvSpPr>
+          <p:cNvPr id="10" name="TextBox 9"/>
+          <p:cNvSpPr txBox="1"/>
+          <p:nvPr/>
+        </p:nvSpPr>
+        <p:spPr>
+          <a:xfrm>
+            <a:off x="685800" y="6583680"/>
+            <a:ext cx="6490411" cy="256032"/>
+          </a:xfrm>
+          <a:prstGeom prst="rect">
+            <a:avLst/>
+          </a:prstGeom>
+          <a:noFill/>
+        </p:spPr>
+        <p:txBody>
+          <a:bodyPr wrap="none">
+            <a:spAutoFit/>
+          </a:bodyPr>
+          <a:lstStyle/>
+          <a:p>
+            <a:pPr algn="l"/>
+            <a:r>
+              <a:rPr sz="700">
+                <a:solidFill>
+                  <a:srgbClr val="A0B4D2"/>
+                </a:solidFill>
+                <a:latin typeface="JetBrains Mono"/>
+              </a:rPr>
+              <a:t>Benedikt Zoller Coaching  ·  FKB Campus  ·  M02</a:t>
+            </a:r>
+          </a:p>
+        </p:txBody>
+      </p:sp>
+    </p:spTree>
+  </p:cSld>
+  <p:clrMapOvr>
+    <a:masterClrMapping/>
+  </p:clrMapOvr>
+</p:sld>
+</file>
+
+<file path=ppt/slides/slide9.xml><?xml version="1.0" encoding="utf-8"?>
 <p:sld xmlns:a="http://schemas.openxmlformats.org/drawingml/2006/main" xmlns:p="http://schemas.openxmlformats.org/presentationml/2006/main" xmlns:r="http://schemas.openxmlformats.org/officeDocument/2006/relationships">
   <p:cSld>
     <p:spTree>

--- a/protected-downloads/praesentation/M02.pptx
+++ b/protected-downloads/praesentation/M02.pptx
@@ -14,6 +14,9 @@
     <p:sldId id="262" r:id="rId14"/>
     <p:sldId id="263" r:id="rId15"/>
     <p:sldId id="264" r:id="rId16"/>
+    <p:sldId id="265" r:id="rId17"/>
+    <p:sldId id="266" r:id="rId18"/>
+    <p:sldId id="267" r:id="rId19"/>
   </p:sldIdLst>
   <p:sldSz cx="12188952" cy="6858000" type="screen4x3"/>
   <p:notesSz cx="6858000" cy="9144000"/>
@@ -510,7 +513,7 @@
           <a:lstStyle/>
           <a:p>
             <a:r>
-              <a:t>Siehe Trainerhandbuch (Sektion 3) für Moderationshinweise, Timing und erwartete Teilnehmerreaktionen.</a:t>
+              <a:t>Agenda aus dem Ablaufplan (Sektion 3.1). Timing und Pausen siehe Trainerhandbuch.</a:t>
             </a:r>
           </a:p>
         </p:txBody>
@@ -580,7 +583,7 @@
           <a:lstStyle/>
           <a:p>
             <a:r>
-              <a:t>Trainer-Hinweis (nur für Trainer und GF-Rolle sichtbar): Martin Klemm hat einen Großauftrag über 1,2 Mio. EUR an Land gezogen, der die Vorlauffinanzierung belastet. Zusätzlich lief eine CNC-Maschine (400 TEUR) aus dem Eigenkapital. Die Auftragslage ist gut, der Cash-Engpass temporär. Diese Infos gibt der GF nur preis, wenn der Berater konkret und respektvoll danach fragt – nie freiwillig.</a:t>
+              <a:t>Siehe Trainerhandbuch (Sektion 3) für Moderationshinweise, Timing und erwartete Teilnehmerreaktionen.</a:t>
             </a:r>
           </a:p>
         </p:txBody>
@@ -650,7 +653,7 @@
           <a:lstStyle/>
           <a:p>
             <a:r>
-              <a:t>Siehe Trainerhandbuch (Sektion 3) für Moderationshinweise, Timing und erwartete Teilnehmerreaktionen.</a:t>
+              <a:t>Trainer-Hinweis (nur für Trainer und GF-Rolle sichtbar): Martin Klemm hat einen Großauftrag über 1,2 Mio. EUR an Land gezogen, der die Vorlauffinanzierung belastet. Zusätzlich lief eine CNC-Maschine (400 TEUR) aus dem Eigenkapital. Die Auftragslage ist gut, der Cash-Engpass temporär. Diese Infos gibt der GF nur preis, wenn der Berater konkret und respektvoll danach fragt – nie freiwillig.</a:t>
             </a:r>
           </a:p>
         </p:txBody>
@@ -676,6 +679,76 @@
 </file>
 
 <file path=ppt/notesSlides/notesSlide4.xml><?xml version="1.0" encoding="utf-8"?>
+<p:notes xmlns:a="http://schemas.openxmlformats.org/drawingml/2006/main" xmlns:p="http://schemas.openxmlformats.org/presentationml/2006/main" xmlns:r="http://schemas.openxmlformats.org/officeDocument/2006/relationships">
+  <p:cSld>
+    <p:spTree>
+      <p:nvGrpSpPr>
+        <p:cNvPr id="1" name=""/>
+        <p:cNvGrpSpPr/>
+        <p:nvPr/>
+      </p:nvGrpSpPr>
+      <p:grpSpPr>
+        <a:xfrm>
+          <a:off x="0" y="0"/>
+          <a:ext cx="0" cy="0"/>
+          <a:chOff x="0" y="0"/>
+          <a:chExt cx="0" cy="0"/>
+        </a:xfrm>
+      </p:grpSpPr>
+      <p:sp>
+        <p:nvSpPr>
+          <p:cNvPr id="2" name="Slide Image Placeholder 1"/>
+          <p:cNvSpPr>
+            <a:spLocks noGrp="1"/>
+          </p:cNvSpPr>
+          <p:nvPr>
+            <p:ph type="sldImg" idx="2"/>
+          </p:nvPr>
+        </p:nvSpPr>
+        <p:spPr/>
+      </p:sp>
+      <p:sp>
+        <p:nvSpPr>
+          <p:cNvPr id="3" name="Notes Placeholder 2"/>
+          <p:cNvSpPr>
+            <a:spLocks noGrp="1"/>
+          </p:cNvSpPr>
+          <p:nvPr>
+            <p:ph type="body" idx="3" sz="quarter"/>
+          </p:nvPr>
+        </p:nvSpPr>
+        <p:spPr/>
+        <p:txBody>
+          <a:bodyPr/>
+          <a:lstStyle/>
+          <a:p>
+            <a:r>
+              <a:t>Siehe Trainerhandbuch (Sektion 3) für Moderationshinweise, Timing und erwartete Teilnehmerreaktionen.</a:t>
+            </a:r>
+          </a:p>
+        </p:txBody>
+      </p:sp>
+      <p:sp>
+        <p:nvSpPr>
+          <p:cNvPr id="4" name="Slide Number Placeholder 3"/>
+          <p:cNvSpPr>
+            <a:spLocks noGrp="1"/>
+          </p:cNvSpPr>
+          <p:nvPr>
+            <p:ph type="sldNum" idx="5" sz="quarter"/>
+          </p:nvPr>
+        </p:nvSpPr>
+        <p:spPr/>
+      </p:sp>
+    </p:spTree>
+  </p:cSld>
+  <p:clrMapOvr>
+    <a:masterClrMapping/>
+  </p:clrMapOvr>
+</p:notes>
+</file>
+
+<file path=ppt/notesSlides/notesSlide5.xml><?xml version="1.0" encoding="utf-8"?>
 <p:notes xmlns:a="http://schemas.openxmlformats.org/drawingml/2006/main" xmlns:p="http://schemas.openxmlformats.org/presentationml/2006/main" xmlns:r="http://schemas.openxmlformats.org/officeDocument/2006/relationships">
   <p:cSld>
     <p:spTree>
@@ -4291,6 +4364,1673 @@
 </p:sld>
 </file>
 
+<file path=ppt/slides/slide10.xml><?xml version="1.0" encoding="utf-8"?>
+<p:sld xmlns:a="http://schemas.openxmlformats.org/drawingml/2006/main" xmlns:p="http://schemas.openxmlformats.org/presentationml/2006/main" xmlns:r="http://schemas.openxmlformats.org/officeDocument/2006/relationships">
+  <p:cSld>
+    <p:spTree>
+      <p:nvGrpSpPr>
+        <p:cNvPr id="1" name=""/>
+        <p:cNvGrpSpPr/>
+        <p:nvPr/>
+      </p:nvGrpSpPr>
+      <p:grpSpPr/>
+      <p:sp>
+        <p:nvSpPr>
+          <p:cNvPr id="2" name="Rectangle 1"/>
+          <p:cNvSpPr/>
+          <p:nvPr/>
+        </p:nvSpPr>
+        <p:spPr>
+          <a:xfrm>
+            <a:off x="0" y="0"/>
+            <a:ext cx="12188952" cy="6858000"/>
+          </a:xfrm>
+          <a:prstGeom prst="rect">
+            <a:avLst/>
+          </a:prstGeom>
+          <a:solidFill>
+            <a:srgbClr val="FFFFFF"/>
+          </a:solidFill>
+          <a:ln>
+            <a:noFill/>
+          </a:ln>
+        </p:spPr>
+        <p:style>
+          <a:lnRef idx="1">
+            <a:schemeClr val="accent1"/>
+          </a:lnRef>
+          <a:fillRef idx="3">
+            <a:schemeClr val="accent1"/>
+          </a:fillRef>
+          <a:effectRef idx="2">
+            <a:schemeClr val="accent1"/>
+          </a:effectRef>
+          <a:fontRef idx="minor">
+            <a:schemeClr val="lt1"/>
+          </a:fontRef>
+        </p:style>
+        <p:txBody>
+          <a:bodyPr rtlCol="0" anchor="ctr"/>
+          <a:lstStyle/>
+          <a:p>
+            <a:pPr algn="ctr"/>
+          </a:p>
+        </p:txBody>
+      </p:sp>
+      <p:sp>
+        <p:nvSpPr>
+          <p:cNvPr id="3" name="Rectangle 2"/>
+          <p:cNvSpPr/>
+          <p:nvPr/>
+        </p:nvSpPr>
+        <p:spPr>
+          <a:xfrm>
+            <a:off x="0" y="0"/>
+            <a:ext cx="12188952" cy="50292"/>
+          </a:xfrm>
+          <a:prstGeom prst="rect">
+            <a:avLst/>
+          </a:prstGeom>
+          <a:solidFill>
+            <a:srgbClr val="1F2C56"/>
+          </a:solidFill>
+          <a:ln>
+            <a:noFill/>
+          </a:ln>
+        </p:spPr>
+        <p:style>
+          <a:lnRef idx="1">
+            <a:schemeClr val="accent1"/>
+          </a:lnRef>
+          <a:fillRef idx="3">
+            <a:schemeClr val="accent1"/>
+          </a:fillRef>
+          <a:effectRef idx="2">
+            <a:schemeClr val="accent1"/>
+          </a:effectRef>
+          <a:fontRef idx="minor">
+            <a:schemeClr val="lt1"/>
+          </a:fontRef>
+        </p:style>
+        <p:txBody>
+          <a:bodyPr rtlCol="0" anchor="ctr"/>
+          <a:lstStyle/>
+          <a:p>
+            <a:pPr algn="ctr"/>
+          </a:p>
+        </p:txBody>
+      </p:sp>
+      <p:sp>
+        <p:nvSpPr>
+          <p:cNvPr id="4" name="TextBox 3"/>
+          <p:cNvSpPr txBox="1"/>
+          <p:nvPr/>
+        </p:nvSpPr>
+        <p:spPr>
+          <a:xfrm>
+            <a:off x="685800" y="109728"/>
+            <a:ext cx="10817352" cy="228600"/>
+          </a:xfrm>
+          <a:prstGeom prst="rect">
+            <a:avLst/>
+          </a:prstGeom>
+          <a:noFill/>
+        </p:spPr>
+        <p:txBody>
+          <a:bodyPr wrap="none">
+            <a:spAutoFit/>
+          </a:bodyPr>
+          <a:lstStyle/>
+          <a:p>
+            <a:pPr algn="l"/>
+            <a:r>
+              <a:rPr sz="750">
+                <a:solidFill>
+                  <a:srgbClr val="78808C"/>
+                </a:solidFill>
+                <a:latin typeface="JetBrains Mono"/>
+              </a:rPr>
+              <a:t>M02  ·  ÜBERSICHT</a:t>
+            </a:r>
+          </a:p>
+        </p:txBody>
+      </p:sp>
+      <p:sp>
+        <p:nvSpPr>
+          <p:cNvPr id="5" name="TextBox 4"/>
+          <p:cNvSpPr txBox="1"/>
+          <p:nvPr/>
+        </p:nvSpPr>
+        <p:spPr>
+          <a:xfrm>
+            <a:off x="685800" y="502920"/>
+            <a:ext cx="10817352" cy="594360"/>
+          </a:xfrm>
+          <a:prstGeom prst="rect">
+            <a:avLst/>
+          </a:prstGeom>
+          <a:noFill/>
+        </p:spPr>
+        <p:txBody>
+          <a:bodyPr wrap="square">
+            <a:spAutoFit/>
+          </a:bodyPr>
+          <a:lstStyle/>
+          <a:p>
+            <a:pPr algn="l"/>
+            <a:r>
+              <a:rPr sz="2000" b="1" i="0">
+                <a:solidFill>
+                  <a:srgbClr val="1F2C56"/>
+                </a:solidFill>
+                <a:latin typeface="Source Serif 4"/>
+              </a:rPr>
+              <a:t>Praxiscase: Schwäbische Metallbau GmbH</a:t>
+            </a:r>
+          </a:p>
+        </p:txBody>
+      </p:sp>
+      <p:sp>
+        <p:nvSpPr>
+          <p:cNvPr id="6" name="Rectangle 5"/>
+          <p:cNvSpPr/>
+          <p:nvPr/>
+        </p:nvSpPr>
+        <p:spPr>
+          <a:xfrm>
+            <a:off x="685800" y="1143000"/>
+            <a:ext cx="10817352" cy="25400"/>
+          </a:xfrm>
+          <a:prstGeom prst="rect">
+            <a:avLst/>
+          </a:prstGeom>
+          <a:solidFill>
+            <a:srgbClr val="D9C089"/>
+          </a:solidFill>
+          <a:ln>
+            <a:noFill/>
+          </a:ln>
+        </p:spPr>
+        <p:style>
+          <a:lnRef idx="1">
+            <a:schemeClr val="accent1"/>
+          </a:lnRef>
+          <a:fillRef idx="3">
+            <a:schemeClr val="accent1"/>
+          </a:fillRef>
+          <a:effectRef idx="2">
+            <a:schemeClr val="accent1"/>
+          </a:effectRef>
+          <a:fontRef idx="minor">
+            <a:schemeClr val="lt1"/>
+          </a:fontRef>
+        </p:style>
+        <p:txBody>
+          <a:bodyPr rtlCol="0" anchor="ctr"/>
+          <a:lstStyle/>
+          <a:p>
+            <a:pPr algn="ctr"/>
+          </a:p>
+        </p:txBody>
+      </p:sp>
+      <p:graphicFrame>
+        <p:nvGraphicFramePr>
+          <p:cNvPr id="7" name="Table 6"/>
+          <p:cNvGraphicFramePr>
+            <a:graphicFrameLocks noGrp="1"/>
+          </p:cNvGraphicFramePr>
+          <p:nvPr/>
+        </p:nvGraphicFramePr>
+        <p:xfrm>
+          <a:off x="685800" y="1417320"/>
+          <a:ext cx="10817352" cy="2688336"/>
+        </p:xfrm>
+        <a:graphic>
+          <a:graphicData uri="http://schemas.openxmlformats.org/drawingml/2006/table">
+            <a:tbl>
+              <a:tblPr firstRow="1" bandRow="1">
+                <a:tableStyleId>{5C22544A-7EE6-4342-B048-85BDC9FD1C3A}</a:tableStyleId>
+              </a:tblPr>
+              <a:tblGrid>
+                <a:gridCol w="3605784"/>
+                <a:gridCol w="3605784"/>
+                <a:gridCol w="3605784"/>
+              </a:tblGrid>
+              <a:tr h="384048">
+                <a:tc>
+                  <a:txBody>
+                    <a:bodyPr/>
+                    <a:lstStyle/>
+                    <a:p>
+                      <a:r>
+                        <a:rPr sz="1100" b="1">
+                          <a:solidFill>
+                            <a:srgbClr val="FFFFFF"/>
+                          </a:solidFill>
+                          <a:latin typeface="Arial"/>
+                        </a:rPr>
+                        <a:t>Kriterium</a:t>
+                      </a:r>
+                    </a:p>
+                  </a:txBody>
+                  <a:tcPr>
+                    <a:solidFill>
+                      <a:srgbClr val="1F2C56"/>
+                    </a:solidFill>
+                  </a:tcPr>
+                </a:tc>
+                <a:tc>
+                  <a:txBody>
+                    <a:bodyPr/>
+                    <a:lstStyle/>
+                    <a:p>
+                      <a:r>
+                        <a:rPr sz="1100" b="1">
+                          <a:solidFill>
+                            <a:srgbClr val="FFFFFF"/>
+                          </a:solidFill>
+                          <a:latin typeface="Arial"/>
+                        </a:rPr>
+                        <a:t>Beobachtung / Beispiel</a:t>
+                      </a:r>
+                    </a:p>
+                  </a:txBody>
+                  <a:tcPr>
+                    <a:solidFill>
+                      <a:srgbClr val="1F2C56"/>
+                    </a:solidFill>
+                  </a:tcPr>
+                </a:tc>
+                <a:tc>
+                  <a:txBody>
+                    <a:bodyPr/>
+                    <a:lstStyle/>
+                    <a:p>
+                      <a:r>
+                        <a:rPr sz="1100" b="1">
+                          <a:solidFill>
+                            <a:srgbClr val="FFFFFF"/>
+                          </a:solidFill>
+                          <a:latin typeface="Arial"/>
+                        </a:rPr>
+                        <a:t>1–5</a:t>
+                      </a:r>
+                    </a:p>
+                  </a:txBody>
+                  <a:tcPr>
+                    <a:solidFill>
+                      <a:srgbClr val="1F2C56"/>
+                    </a:solidFill>
+                  </a:tcPr>
+                </a:tc>
+              </a:tr>
+              <a:tr h="384048">
+                <a:tc>
+                  <a:txBody>
+                    <a:bodyPr/>
+                    <a:lstStyle/>
+                    <a:p>
+                      <a:r>
+                        <a:rPr sz="1050">
+                          <a:solidFill>
+                            <a:srgbClr val="3D5466"/>
+                          </a:solidFill>
+                          <a:latin typeface="Arial"/>
+                        </a:rPr>
+                        <a:t>5-Phasen-Rahmen eingehalten</a:t>
+                      </a:r>
+                    </a:p>
+                  </a:txBody>
+                  <a:tcPr/>
+                </a:tc>
+                <a:tc>
+                  <a:txBody>
+                    <a:bodyPr/>
+                    <a:lstStyle/>
+                    <a:p/>
+                  </a:txBody>
+                  <a:tcPr/>
+                </a:tc>
+                <a:tc>
+                  <a:txBody>
+                    <a:bodyPr/>
+                    <a:lstStyle/>
+                    <a:p/>
+                  </a:txBody>
+                  <a:tcPr/>
+                </a:tc>
+              </a:tr>
+              <a:tr h="384048">
+                <a:tc>
+                  <a:txBody>
+                    <a:bodyPr/>
+                    <a:lstStyle/>
+                    <a:p>
+                      <a:r>
+                        <a:rPr sz="1050">
+                          <a:solidFill>
+                            <a:srgbClr val="3D5466"/>
+                          </a:solidFill>
+                          <a:latin typeface="Arial"/>
+                        </a:rPr>
+                        <a:t>Offene Fragen eingesetzt</a:t>
+                      </a:r>
+                    </a:p>
+                  </a:txBody>
+                  <a:tcPr/>
+                </a:tc>
+                <a:tc>
+                  <a:txBody>
+                    <a:bodyPr/>
+                    <a:lstStyle/>
+                    <a:p/>
+                  </a:txBody>
+                  <a:tcPr/>
+                </a:tc>
+                <a:tc>
+                  <a:txBody>
+                    <a:bodyPr/>
+                    <a:lstStyle/>
+                    <a:p/>
+                  </a:txBody>
+                  <a:tcPr/>
+                </a:tc>
+              </a:tr>
+              <a:tr h="384048">
+                <a:tc>
+                  <a:txBody>
+                    <a:bodyPr/>
+                    <a:lstStyle/>
+                    <a:p>
+                      <a:r>
+                        <a:rPr sz="1050">
+                          <a:solidFill>
+                            <a:srgbClr val="3D5466"/>
+                          </a:solidFill>
+                          <a:latin typeface="Arial"/>
+                        </a:rPr>
+                        <a:t>Beobachtung + Frage statt Beobachtung + Urteil</a:t>
+                      </a:r>
+                    </a:p>
+                  </a:txBody>
+                  <a:tcPr/>
+                </a:tc>
+                <a:tc>
+                  <a:txBody>
+                    <a:bodyPr/>
+                    <a:lstStyle/>
+                    <a:p/>
+                  </a:txBody>
+                  <a:tcPr/>
+                </a:tc>
+                <a:tc>
+                  <a:txBody>
+                    <a:bodyPr/>
+                    <a:lstStyle/>
+                    <a:p/>
+                  </a:txBody>
+                  <a:tcPr/>
+                </a:tc>
+              </a:tr>
+              <a:tr h="384048">
+                <a:tc>
+                  <a:txBody>
+                    <a:bodyPr/>
+                    <a:lstStyle/>
+                    <a:p>
+                      <a:r>
+                        <a:rPr sz="1050">
+                          <a:solidFill>
+                            <a:srgbClr val="3D5466"/>
+                          </a:solidFill>
+                          <a:latin typeface="Arial"/>
+                        </a:rPr>
+                        <a:t>Qualitative Info aktiv erfragt</a:t>
+                      </a:r>
+                    </a:p>
+                  </a:txBody>
+                  <a:tcPr/>
+                </a:tc>
+                <a:tc>
+                  <a:txBody>
+                    <a:bodyPr/>
+                    <a:lstStyle/>
+                    <a:p/>
+                  </a:txBody>
+                  <a:tcPr/>
+                </a:tc>
+                <a:tc>
+                  <a:txBody>
+                    <a:bodyPr/>
+                    <a:lstStyle/>
+                    <a:p/>
+                  </a:txBody>
+                  <a:tcPr/>
+                </a:tc>
+              </a:tr>
+              <a:tr h="384048">
+                <a:tc>
+                  <a:txBody>
+                    <a:bodyPr/>
+                    <a:lstStyle/>
+                    <a:p>
+                      <a:r>
+                        <a:rPr sz="1050">
+                          <a:solidFill>
+                            <a:srgbClr val="3D5466"/>
+                          </a:solidFill>
+                          <a:latin typeface="Arial"/>
+                        </a:rPr>
+                        <a:t>Konkrete Beratungsimpulse aus Analyse abgeleitet</a:t>
+                      </a:r>
+                    </a:p>
+                  </a:txBody>
+                  <a:tcPr/>
+                </a:tc>
+                <a:tc>
+                  <a:txBody>
+                    <a:bodyPr/>
+                    <a:lstStyle/>
+                    <a:p/>
+                  </a:txBody>
+                  <a:tcPr/>
+                </a:tc>
+                <a:tc>
+                  <a:txBody>
+                    <a:bodyPr/>
+                    <a:lstStyle/>
+                    <a:p/>
+                  </a:txBody>
+                  <a:tcPr/>
+                </a:tc>
+              </a:tr>
+              <a:tr h="384048">
+                <a:tc>
+                  <a:txBody>
+                    <a:bodyPr/>
+                    <a:lstStyle/>
+                    <a:p>
+                      <a:r>
+                        <a:rPr sz="1050">
+                          <a:solidFill>
+                            <a:srgbClr val="3D5466"/>
+                          </a:solidFill>
+                          <a:latin typeface="Arial"/>
+                        </a:rPr>
+                        <a:t>Gespräch wirkte wie Dialog auf Augenhöhe</a:t>
+                      </a:r>
+                    </a:p>
+                  </a:txBody>
+                  <a:tcPr/>
+                </a:tc>
+                <a:tc>
+                  <a:txBody>
+                    <a:bodyPr/>
+                    <a:lstStyle/>
+                    <a:p/>
+                  </a:txBody>
+                  <a:tcPr/>
+                </a:tc>
+                <a:tc>
+                  <a:txBody>
+                    <a:bodyPr/>
+                    <a:lstStyle/>
+                    <a:p/>
+                  </a:txBody>
+                  <a:tcPr/>
+                </a:tc>
+              </a:tr>
+            </a:tbl>
+          </a:graphicData>
+        </a:graphic>
+      </p:graphicFrame>
+      <p:sp>
+        <p:nvSpPr>
+          <p:cNvPr id="8" name="Rectangle 7"/>
+          <p:cNvSpPr/>
+          <p:nvPr/>
+        </p:nvSpPr>
+        <p:spPr>
+          <a:xfrm>
+            <a:off x="0" y="6510528"/>
+            <a:ext cx="12188952" cy="347472"/>
+          </a:xfrm>
+          <a:prstGeom prst="rect">
+            <a:avLst/>
+          </a:prstGeom>
+          <a:solidFill>
+            <a:srgbClr val="0A1937"/>
+          </a:solidFill>
+          <a:ln>
+            <a:noFill/>
+          </a:ln>
+        </p:spPr>
+        <p:style>
+          <a:lnRef idx="1">
+            <a:schemeClr val="accent1"/>
+          </a:lnRef>
+          <a:fillRef idx="3">
+            <a:schemeClr val="accent1"/>
+          </a:fillRef>
+          <a:effectRef idx="2">
+            <a:schemeClr val="accent1"/>
+          </a:effectRef>
+          <a:fontRef idx="minor">
+            <a:schemeClr val="lt1"/>
+          </a:fontRef>
+        </p:style>
+        <p:txBody>
+          <a:bodyPr rtlCol="0" anchor="ctr"/>
+          <a:lstStyle/>
+          <a:p>
+            <a:pPr algn="ctr"/>
+          </a:p>
+        </p:txBody>
+      </p:sp>
+      <p:sp>
+        <p:nvSpPr>
+          <p:cNvPr id="9" name="TextBox 8"/>
+          <p:cNvSpPr txBox="1"/>
+          <p:nvPr/>
+        </p:nvSpPr>
+        <p:spPr>
+          <a:xfrm>
+            <a:off x="685800" y="6583680"/>
+            <a:ext cx="6490411" cy="256032"/>
+          </a:xfrm>
+          <a:prstGeom prst="rect">
+            <a:avLst/>
+          </a:prstGeom>
+          <a:noFill/>
+        </p:spPr>
+        <p:txBody>
+          <a:bodyPr wrap="none">
+            <a:spAutoFit/>
+          </a:bodyPr>
+          <a:lstStyle/>
+          <a:p>
+            <a:pPr algn="l"/>
+            <a:r>
+              <a:rPr sz="700">
+                <a:solidFill>
+                  <a:srgbClr val="A0B4D2"/>
+                </a:solidFill>
+                <a:latin typeface="JetBrains Mono"/>
+              </a:rPr>
+              <a:t>Benedikt Zoller Coaching  ·  FKB Campus  ·  M02</a:t>
+            </a:r>
+          </a:p>
+        </p:txBody>
+      </p:sp>
+      <p:sp>
+        <p:nvSpPr>
+          <p:cNvPr id="10" name="TextBox 9"/>
+          <p:cNvSpPr txBox="1"/>
+          <p:nvPr/>
+        </p:nvSpPr>
+        <p:spPr>
+          <a:xfrm>
+            <a:off x="7176211" y="6583680"/>
+            <a:ext cx="4326940" cy="256032"/>
+          </a:xfrm>
+          <a:prstGeom prst="rect">
+            <a:avLst/>
+          </a:prstGeom>
+          <a:noFill/>
+        </p:spPr>
+        <p:txBody>
+          <a:bodyPr wrap="none">
+            <a:spAutoFit/>
+          </a:bodyPr>
+          <a:lstStyle/>
+          <a:p>
+            <a:pPr algn="r"/>
+            <a:r>
+              <a:rPr sz="700">
+                <a:solidFill>
+                  <a:srgbClr val="A0B4D2"/>
+                </a:solidFill>
+                <a:latin typeface="JetBrains Mono"/>
+              </a:rPr>
+              <a:t>Übersicht</a:t>
+            </a:r>
+          </a:p>
+        </p:txBody>
+      </p:sp>
+    </p:spTree>
+  </p:cSld>
+  <p:clrMapOvr>
+    <a:masterClrMapping/>
+  </p:clrMapOvr>
+</p:sld>
+</file>
+
+<file path=ppt/slides/slide11.xml><?xml version="1.0" encoding="utf-8"?>
+<p:sld xmlns:a="http://schemas.openxmlformats.org/drawingml/2006/main" xmlns:p="http://schemas.openxmlformats.org/presentationml/2006/main" xmlns:r="http://schemas.openxmlformats.org/officeDocument/2006/relationships">
+  <p:cSld>
+    <p:spTree>
+      <p:nvGrpSpPr>
+        <p:cNvPr id="1" name=""/>
+        <p:cNvGrpSpPr/>
+        <p:nvPr/>
+      </p:nvGrpSpPr>
+      <p:grpSpPr/>
+      <p:sp>
+        <p:nvSpPr>
+          <p:cNvPr id="2" name="Rectangle 1"/>
+          <p:cNvSpPr/>
+          <p:nvPr/>
+        </p:nvSpPr>
+        <p:spPr>
+          <a:xfrm>
+            <a:off x="0" y="0"/>
+            <a:ext cx="12188952" cy="6858000"/>
+          </a:xfrm>
+          <a:prstGeom prst="rect">
+            <a:avLst/>
+          </a:prstGeom>
+          <a:solidFill>
+            <a:srgbClr val="EDEDF3"/>
+          </a:solidFill>
+          <a:ln>
+            <a:noFill/>
+          </a:ln>
+        </p:spPr>
+        <p:style>
+          <a:lnRef idx="1">
+            <a:schemeClr val="accent1"/>
+          </a:lnRef>
+          <a:fillRef idx="3">
+            <a:schemeClr val="accent1"/>
+          </a:fillRef>
+          <a:effectRef idx="2">
+            <a:schemeClr val="accent1"/>
+          </a:effectRef>
+          <a:fontRef idx="minor">
+            <a:schemeClr val="lt1"/>
+          </a:fontRef>
+        </p:style>
+        <p:txBody>
+          <a:bodyPr rtlCol="0" anchor="ctr"/>
+          <a:lstStyle/>
+          <a:p>
+            <a:pPr algn="ctr"/>
+          </a:p>
+        </p:txBody>
+      </p:sp>
+      <p:sp>
+        <p:nvSpPr>
+          <p:cNvPr id="3" name="Rectangle 2"/>
+          <p:cNvSpPr/>
+          <p:nvPr/>
+        </p:nvSpPr>
+        <p:spPr>
+          <a:xfrm>
+            <a:off x="0" y="0"/>
+            <a:ext cx="12188952" cy="50292"/>
+          </a:xfrm>
+          <a:prstGeom prst="rect">
+            <a:avLst/>
+          </a:prstGeom>
+          <a:solidFill>
+            <a:srgbClr val="1F2C56"/>
+          </a:solidFill>
+          <a:ln>
+            <a:noFill/>
+          </a:ln>
+        </p:spPr>
+        <p:style>
+          <a:lnRef idx="1">
+            <a:schemeClr val="accent1"/>
+          </a:lnRef>
+          <a:fillRef idx="3">
+            <a:schemeClr val="accent1"/>
+          </a:fillRef>
+          <a:effectRef idx="2">
+            <a:schemeClr val="accent1"/>
+          </a:effectRef>
+          <a:fontRef idx="minor">
+            <a:schemeClr val="lt1"/>
+          </a:fontRef>
+        </p:style>
+        <p:txBody>
+          <a:bodyPr rtlCol="0" anchor="ctr"/>
+          <a:lstStyle/>
+          <a:p>
+            <a:pPr algn="ctr"/>
+          </a:p>
+        </p:txBody>
+      </p:sp>
+      <p:sp>
+        <p:nvSpPr>
+          <p:cNvPr id="4" name="TextBox 3"/>
+          <p:cNvSpPr txBox="1"/>
+          <p:nvPr/>
+        </p:nvSpPr>
+        <p:spPr>
+          <a:xfrm>
+            <a:off x="685800" y="109728"/>
+            <a:ext cx="10817352" cy="228600"/>
+          </a:xfrm>
+          <a:prstGeom prst="rect">
+            <a:avLst/>
+          </a:prstGeom>
+          <a:noFill/>
+        </p:spPr>
+        <p:txBody>
+          <a:bodyPr wrap="none">
+            <a:spAutoFit/>
+          </a:bodyPr>
+          <a:lstStyle/>
+          <a:p>
+            <a:pPr algn="l"/>
+            <a:r>
+              <a:rPr sz="750">
+                <a:solidFill>
+                  <a:srgbClr val="78808C"/>
+                </a:solidFill>
+                <a:latin typeface="JetBrains Mono"/>
+              </a:rPr>
+              <a:t>M02  ·  INHALT</a:t>
+            </a:r>
+          </a:p>
+        </p:txBody>
+      </p:sp>
+      <p:sp>
+        <p:nvSpPr>
+          <p:cNvPr id="5" name="Rectangle 4"/>
+          <p:cNvSpPr/>
+          <p:nvPr/>
+        </p:nvSpPr>
+        <p:spPr>
+          <a:xfrm>
+            <a:off x="0" y="1234440"/>
+            <a:ext cx="12188952" cy="12700"/>
+          </a:xfrm>
+          <a:prstGeom prst="rect">
+            <a:avLst/>
+          </a:prstGeom>
+          <a:solidFill>
+            <a:srgbClr val="D8DFE4"/>
+          </a:solidFill>
+          <a:ln>
+            <a:noFill/>
+          </a:ln>
+        </p:spPr>
+        <p:style>
+          <a:lnRef idx="1">
+            <a:schemeClr val="accent1"/>
+          </a:lnRef>
+          <a:fillRef idx="3">
+            <a:schemeClr val="accent1"/>
+          </a:fillRef>
+          <a:effectRef idx="2">
+            <a:schemeClr val="accent1"/>
+          </a:effectRef>
+          <a:fontRef idx="minor">
+            <a:schemeClr val="lt1"/>
+          </a:fontRef>
+        </p:style>
+        <p:txBody>
+          <a:bodyPr rtlCol="0" anchor="ctr"/>
+          <a:lstStyle/>
+          <a:p>
+            <a:pPr algn="ctr"/>
+          </a:p>
+        </p:txBody>
+      </p:sp>
+      <p:sp>
+        <p:nvSpPr>
+          <p:cNvPr id="6" name="Rectangle 5"/>
+          <p:cNvSpPr/>
+          <p:nvPr/>
+        </p:nvSpPr>
+        <p:spPr>
+          <a:xfrm>
+            <a:off x="685800" y="502920"/>
+            <a:ext cx="36576" cy="658368"/>
+          </a:xfrm>
+          <a:prstGeom prst="rect">
+            <a:avLst/>
+          </a:prstGeom>
+          <a:solidFill>
+            <a:srgbClr val="D9C089"/>
+          </a:solidFill>
+          <a:ln>
+            <a:noFill/>
+          </a:ln>
+        </p:spPr>
+        <p:style>
+          <a:lnRef idx="1">
+            <a:schemeClr val="accent1"/>
+          </a:lnRef>
+          <a:fillRef idx="3">
+            <a:schemeClr val="accent1"/>
+          </a:fillRef>
+          <a:effectRef idx="2">
+            <a:schemeClr val="accent1"/>
+          </a:effectRef>
+          <a:fontRef idx="minor">
+            <a:schemeClr val="lt1"/>
+          </a:fontRef>
+        </p:style>
+        <p:txBody>
+          <a:bodyPr rtlCol="0" anchor="ctr"/>
+          <a:lstStyle/>
+          <a:p>
+            <a:pPr algn="ctr"/>
+          </a:p>
+        </p:txBody>
+      </p:sp>
+      <p:sp>
+        <p:nvSpPr>
+          <p:cNvPr id="7" name="TextBox 6"/>
+          <p:cNvSpPr txBox="1"/>
+          <p:nvPr/>
+        </p:nvSpPr>
+        <p:spPr>
+          <a:xfrm>
+            <a:off x="813816" y="502920"/>
+            <a:ext cx="10634472" cy="685800"/>
+          </a:xfrm>
+          <a:prstGeom prst="rect">
+            <a:avLst/>
+          </a:prstGeom>
+          <a:noFill/>
+        </p:spPr>
+        <p:txBody>
+          <a:bodyPr wrap="square">
+            <a:spAutoFit/>
+          </a:bodyPr>
+          <a:lstStyle/>
+          <a:p>
+            <a:pPr algn="l"/>
+            <a:r>
+              <a:rPr sz="2400" b="1" i="0">
+                <a:solidFill>
+                  <a:srgbClr val="1F2C56"/>
+                </a:solidFill>
+                <a:latin typeface="Source Serif 4"/>
+              </a:rPr>
+              <a:t>Checkliste: Bilanzgespräch vorbereiten</a:t>
+            </a:r>
+          </a:p>
+        </p:txBody>
+      </p:sp>
+      <p:sp>
+        <p:nvSpPr>
+          <p:cNvPr id="8" name="TextBox 7"/>
+          <p:cNvSpPr txBox="1"/>
+          <p:nvPr/>
+        </p:nvSpPr>
+        <p:spPr>
+          <a:xfrm>
+            <a:off x="685800" y="1417320"/>
+            <a:ext cx="10817352" cy="5029200"/>
+          </a:xfrm>
+          <a:prstGeom prst="rect">
+            <a:avLst/>
+          </a:prstGeom>
+          <a:noFill/>
+        </p:spPr>
+        <p:txBody>
+          <a:bodyPr wrap="square">
+            <a:spAutoFit/>
+          </a:bodyPr>
+          <a:lstStyle/>
+          <a:p>
+            <a:pPr>
+              <a:spcBef>
+                <a:spcPts val="400"/>
+              </a:spcBef>
+              <a:spcAft>
+                <a:spcPts val="200"/>
+              </a:spcAft>
+            </a:pPr>
+            <a:r>
+              <a:rPr sz="1300">
+                <a:solidFill>
+                  <a:srgbClr val="3D5466"/>
+                </a:solidFill>
+                <a:latin typeface="Arial"/>
+              </a:rPr>
+              <a:t>▸  Vor dem Gespräch:</a:t>
+            </a:r>
+          </a:p>
+          <a:p>
+            <a:pPr>
+              <a:spcBef>
+                <a:spcPts val="400"/>
+              </a:spcBef>
+              <a:spcAft>
+                <a:spcPts val="200"/>
+              </a:spcAft>
+            </a:pPr>
+            <a:r>
+              <a:rPr sz="1300">
+                <a:solidFill>
+                  <a:srgbClr val="3D5466"/>
+                </a:solidFill>
+                <a:latin typeface="Arial"/>
+              </a:rPr>
+              <a:t>▸  [ ] Jahresabschluss und Vorjahresvergleich ausgewertet</a:t>
+            </a:r>
+          </a:p>
+          <a:p>
+            <a:pPr>
+              <a:spcBef>
+                <a:spcPts val="400"/>
+              </a:spcBef>
+              <a:spcAft>
+                <a:spcPts val="200"/>
+              </a:spcAft>
+            </a:pPr>
+            <a:r>
+              <a:rPr sz="1300">
+                <a:solidFill>
+                  <a:srgbClr val="3D5466"/>
+                </a:solidFill>
+                <a:latin typeface="Arial"/>
+              </a:rPr>
+              <a:t>▸  [ ] 4+ Kennzahlen berechnet, Branchenvergleich notiert</a:t>
+            </a:r>
+          </a:p>
+          <a:p>
+            <a:pPr>
+              <a:spcBef>
+                <a:spcPts val="400"/>
+              </a:spcBef>
+              <a:spcAft>
+                <a:spcPts val="200"/>
+              </a:spcAft>
+            </a:pPr>
+            <a:r>
+              <a:rPr sz="1300">
+                <a:solidFill>
+                  <a:srgbClr val="3D5466"/>
+                </a:solidFill>
+                <a:latin typeface="Arial"/>
+              </a:rPr>
+              <a:t>▸  [ ] 5 offene Fragen schriftlich vorbereitet</a:t>
+            </a:r>
+          </a:p>
+          <a:p>
+            <a:pPr>
+              <a:spcBef>
+                <a:spcPts val="400"/>
+              </a:spcBef>
+              <a:spcAft>
+                <a:spcPts val="200"/>
+              </a:spcAft>
+            </a:pPr>
+            <a:r>
+              <a:rPr sz="1300">
+                <a:solidFill>
+                  <a:srgbClr val="3D5466"/>
+                </a:solidFill>
+                <a:latin typeface="Arial"/>
+              </a:rPr>
+              <a:t>▸  [ ] Gesprächsziel definiert</a:t>
+            </a:r>
+          </a:p>
+          <a:p>
+            <a:pPr>
+              <a:spcBef>
+                <a:spcPts val="400"/>
+              </a:spcBef>
+              <a:spcAft>
+                <a:spcPts val="200"/>
+              </a:spcAft>
+            </a:pPr>
+            <a:r>
+              <a:rPr sz="1300">
+                <a:solidFill>
+                  <a:srgbClr val="3D5466"/>
+                </a:solidFill>
+                <a:latin typeface="Arial"/>
+              </a:rPr>
+              <a:t>▸  [ ] Kreditlinie / § 18 KWG-Unterlagen geprüft</a:t>
+            </a:r>
+          </a:p>
+          <a:p>
+            <a:pPr>
+              <a:spcBef>
+                <a:spcPts val="400"/>
+              </a:spcBef>
+              <a:spcAft>
+                <a:spcPts val="200"/>
+              </a:spcAft>
+            </a:pPr>
+            <a:r>
+              <a:rPr sz="1300">
+                <a:solidFill>
+                  <a:srgbClr val="3D5466"/>
+                </a:solidFill>
+                <a:latin typeface="Arial"/>
+              </a:rPr>
+              <a:t>▸  [ ] Verbundpartner-Bedarf gesichtet (R+V, Union Investment, DZ BANK)</a:t>
+            </a:r>
+          </a:p>
+          <a:p>
+            <a:pPr>
+              <a:spcBef>
+                <a:spcPts val="400"/>
+              </a:spcBef>
+              <a:spcAft>
+                <a:spcPts val="200"/>
+              </a:spcAft>
+            </a:pPr>
+            <a:r>
+              <a:rPr sz="1300">
+                <a:solidFill>
+                  <a:srgbClr val="3D5466"/>
+                </a:solidFill>
+                <a:latin typeface="Arial"/>
+              </a:rPr>
+              <a:t>▸  Im Gespräch:</a:t>
+            </a:r>
+          </a:p>
+          <a:p>
+            <a:pPr>
+              <a:spcBef>
+                <a:spcPts val="400"/>
+              </a:spcBef>
+              <a:spcAft>
+                <a:spcPts val="200"/>
+              </a:spcAft>
+            </a:pPr>
+            <a:r>
+              <a:rPr sz="1300">
+                <a:solidFill>
+                  <a:srgbClr val="3D5466"/>
+                </a:solidFill>
+                <a:latin typeface="Arial"/>
+              </a:rPr>
+              <a:t>▸  [ ] Positiver Einstieg, Agenda gesetzt</a:t>
+            </a:r>
+          </a:p>
+          <a:p>
+            <a:pPr>
+              <a:spcBef>
+                <a:spcPts val="400"/>
+              </a:spcBef>
+              <a:spcAft>
+                <a:spcPts val="200"/>
+              </a:spcAft>
+            </a:pPr>
+            <a:r>
+              <a:rPr sz="1300">
+                <a:solidFill>
+                  <a:srgbClr val="3D5466"/>
+                </a:solidFill>
+                <a:latin typeface="Arial"/>
+              </a:rPr>
+              <a:t>▸  [ ] Mindestens 40 % Redezeit für den Kunden</a:t>
+            </a:r>
+          </a:p>
+          <a:p>
+            <a:pPr>
+              <a:spcBef>
+                <a:spcPts val="400"/>
+              </a:spcBef>
+              <a:spcAft>
+                <a:spcPts val="200"/>
+              </a:spcAft>
+            </a:pPr>
+            <a:r>
+              <a:rPr sz="1300">
+                <a:solidFill>
+                  <a:srgbClr val="3D5466"/>
+                </a:solidFill>
+                <a:latin typeface="Arial"/>
+              </a:rPr>
+              <a:t>▸  [ ] Kritische Punkte mit offener Frage angesprochen</a:t>
+            </a:r>
+          </a:p>
+          <a:p>
+            <a:pPr>
+              <a:spcBef>
+                <a:spcPts val="400"/>
+              </a:spcBef>
+              <a:spcAft>
+                <a:spcPts val="200"/>
+              </a:spcAft>
+            </a:pPr>
+            <a:r>
+              <a:rPr sz="1300">
+                <a:solidFill>
+                  <a:srgbClr val="3D5466"/>
+                </a:solidFill>
+                <a:latin typeface="Arial"/>
+              </a:rPr>
+              <a:t>▸  [ ] Handlungsoptionen gemeinsam entwickelt</a:t>
+            </a:r>
+          </a:p>
+        </p:txBody>
+      </p:sp>
+      <p:sp>
+        <p:nvSpPr>
+          <p:cNvPr id="9" name="Rectangle 8"/>
+          <p:cNvSpPr/>
+          <p:nvPr/>
+        </p:nvSpPr>
+        <p:spPr>
+          <a:xfrm>
+            <a:off x="0" y="6510528"/>
+            <a:ext cx="12188952" cy="347472"/>
+          </a:xfrm>
+          <a:prstGeom prst="rect">
+            <a:avLst/>
+          </a:prstGeom>
+          <a:solidFill>
+            <a:srgbClr val="0A1937"/>
+          </a:solidFill>
+          <a:ln>
+            <a:noFill/>
+          </a:ln>
+        </p:spPr>
+        <p:style>
+          <a:lnRef idx="1">
+            <a:schemeClr val="accent1"/>
+          </a:lnRef>
+          <a:fillRef idx="3">
+            <a:schemeClr val="accent1"/>
+          </a:fillRef>
+          <a:effectRef idx="2">
+            <a:schemeClr val="accent1"/>
+          </a:effectRef>
+          <a:fontRef idx="minor">
+            <a:schemeClr val="lt1"/>
+          </a:fontRef>
+        </p:style>
+        <p:txBody>
+          <a:bodyPr rtlCol="0" anchor="ctr"/>
+          <a:lstStyle/>
+          <a:p>
+            <a:pPr algn="ctr"/>
+          </a:p>
+        </p:txBody>
+      </p:sp>
+      <p:sp>
+        <p:nvSpPr>
+          <p:cNvPr id="10" name="TextBox 9"/>
+          <p:cNvSpPr txBox="1"/>
+          <p:nvPr/>
+        </p:nvSpPr>
+        <p:spPr>
+          <a:xfrm>
+            <a:off x="685800" y="6583680"/>
+            <a:ext cx="6490411" cy="256032"/>
+          </a:xfrm>
+          <a:prstGeom prst="rect">
+            <a:avLst/>
+          </a:prstGeom>
+          <a:noFill/>
+        </p:spPr>
+        <p:txBody>
+          <a:bodyPr wrap="none">
+            <a:spAutoFit/>
+          </a:bodyPr>
+          <a:lstStyle/>
+          <a:p>
+            <a:pPr algn="l"/>
+            <a:r>
+              <a:rPr sz="700">
+                <a:solidFill>
+                  <a:srgbClr val="A0B4D2"/>
+                </a:solidFill>
+                <a:latin typeface="JetBrains Mono"/>
+              </a:rPr>
+              <a:t>Benedikt Zoller Coaching  ·  FKB Campus  ·  M02</a:t>
+            </a:r>
+          </a:p>
+        </p:txBody>
+      </p:sp>
+    </p:spTree>
+  </p:cSld>
+  <p:clrMapOvr>
+    <a:masterClrMapping/>
+  </p:clrMapOvr>
+</p:sld>
+</file>
+
+<file path=ppt/slides/slide12.xml><?xml version="1.0" encoding="utf-8"?>
+<p:sld xmlns:a="http://schemas.openxmlformats.org/drawingml/2006/main" xmlns:p="http://schemas.openxmlformats.org/presentationml/2006/main" xmlns:r="http://schemas.openxmlformats.org/officeDocument/2006/relationships">
+  <p:cSld>
+    <p:spTree>
+      <p:nvGrpSpPr>
+        <p:cNvPr id="1" name=""/>
+        <p:cNvGrpSpPr/>
+        <p:nvPr/>
+      </p:nvGrpSpPr>
+      <p:grpSpPr/>
+      <p:sp>
+        <p:nvSpPr>
+          <p:cNvPr id="2" name="Rectangle 1"/>
+          <p:cNvSpPr/>
+          <p:nvPr/>
+        </p:nvSpPr>
+        <p:spPr>
+          <a:xfrm>
+            <a:off x="0" y="0"/>
+            <a:ext cx="12188952" cy="6858000"/>
+          </a:xfrm>
+          <a:prstGeom prst="rect">
+            <a:avLst/>
+          </a:prstGeom>
+          <a:solidFill>
+            <a:srgbClr val="EDEDF3"/>
+          </a:solidFill>
+          <a:ln>
+            <a:noFill/>
+          </a:ln>
+        </p:spPr>
+        <p:style>
+          <a:lnRef idx="1">
+            <a:schemeClr val="accent1"/>
+          </a:lnRef>
+          <a:fillRef idx="3">
+            <a:schemeClr val="accent1"/>
+          </a:fillRef>
+          <a:effectRef idx="2">
+            <a:schemeClr val="accent1"/>
+          </a:effectRef>
+          <a:fontRef idx="minor">
+            <a:schemeClr val="lt1"/>
+          </a:fontRef>
+        </p:style>
+        <p:txBody>
+          <a:bodyPr rtlCol="0" anchor="ctr"/>
+          <a:lstStyle/>
+          <a:p>
+            <a:pPr algn="ctr"/>
+          </a:p>
+        </p:txBody>
+      </p:sp>
+      <p:sp>
+        <p:nvSpPr>
+          <p:cNvPr id="3" name="Rectangle 2"/>
+          <p:cNvSpPr/>
+          <p:nvPr/>
+        </p:nvSpPr>
+        <p:spPr>
+          <a:xfrm>
+            <a:off x="0" y="0"/>
+            <a:ext cx="12188952" cy="50292"/>
+          </a:xfrm>
+          <a:prstGeom prst="rect">
+            <a:avLst/>
+          </a:prstGeom>
+          <a:solidFill>
+            <a:srgbClr val="1F2C56"/>
+          </a:solidFill>
+          <a:ln>
+            <a:noFill/>
+          </a:ln>
+        </p:spPr>
+        <p:style>
+          <a:lnRef idx="1">
+            <a:schemeClr val="accent1"/>
+          </a:lnRef>
+          <a:fillRef idx="3">
+            <a:schemeClr val="accent1"/>
+          </a:fillRef>
+          <a:effectRef idx="2">
+            <a:schemeClr val="accent1"/>
+          </a:effectRef>
+          <a:fontRef idx="minor">
+            <a:schemeClr val="lt1"/>
+          </a:fontRef>
+        </p:style>
+        <p:txBody>
+          <a:bodyPr rtlCol="0" anchor="ctr"/>
+          <a:lstStyle/>
+          <a:p>
+            <a:pPr algn="ctr"/>
+          </a:p>
+        </p:txBody>
+      </p:sp>
+      <p:sp>
+        <p:nvSpPr>
+          <p:cNvPr id="4" name="TextBox 3"/>
+          <p:cNvSpPr txBox="1"/>
+          <p:nvPr/>
+        </p:nvSpPr>
+        <p:spPr>
+          <a:xfrm>
+            <a:off x="685800" y="109728"/>
+            <a:ext cx="10817352" cy="228600"/>
+          </a:xfrm>
+          <a:prstGeom prst="rect">
+            <a:avLst/>
+          </a:prstGeom>
+          <a:noFill/>
+        </p:spPr>
+        <p:txBody>
+          <a:bodyPr wrap="none">
+            <a:spAutoFit/>
+          </a:bodyPr>
+          <a:lstStyle/>
+          <a:p>
+            <a:pPr algn="l"/>
+            <a:r>
+              <a:rPr sz="750">
+                <a:solidFill>
+                  <a:srgbClr val="78808C"/>
+                </a:solidFill>
+                <a:latin typeface="JetBrains Mono"/>
+              </a:rPr>
+              <a:t>M02  ·  INHALT</a:t>
+            </a:r>
+          </a:p>
+        </p:txBody>
+      </p:sp>
+      <p:sp>
+        <p:nvSpPr>
+          <p:cNvPr id="5" name="Rectangle 4"/>
+          <p:cNvSpPr/>
+          <p:nvPr/>
+        </p:nvSpPr>
+        <p:spPr>
+          <a:xfrm>
+            <a:off x="0" y="1234440"/>
+            <a:ext cx="12188952" cy="12700"/>
+          </a:xfrm>
+          <a:prstGeom prst="rect">
+            <a:avLst/>
+          </a:prstGeom>
+          <a:solidFill>
+            <a:srgbClr val="D8DFE4"/>
+          </a:solidFill>
+          <a:ln>
+            <a:noFill/>
+          </a:ln>
+        </p:spPr>
+        <p:style>
+          <a:lnRef idx="1">
+            <a:schemeClr val="accent1"/>
+          </a:lnRef>
+          <a:fillRef idx="3">
+            <a:schemeClr val="accent1"/>
+          </a:fillRef>
+          <a:effectRef idx="2">
+            <a:schemeClr val="accent1"/>
+          </a:effectRef>
+          <a:fontRef idx="minor">
+            <a:schemeClr val="lt1"/>
+          </a:fontRef>
+        </p:style>
+        <p:txBody>
+          <a:bodyPr rtlCol="0" anchor="ctr"/>
+          <a:lstStyle/>
+          <a:p>
+            <a:pPr algn="ctr"/>
+          </a:p>
+        </p:txBody>
+      </p:sp>
+      <p:sp>
+        <p:nvSpPr>
+          <p:cNvPr id="6" name="Rectangle 5"/>
+          <p:cNvSpPr/>
+          <p:nvPr/>
+        </p:nvSpPr>
+        <p:spPr>
+          <a:xfrm>
+            <a:off x="685800" y="502920"/>
+            <a:ext cx="36576" cy="658368"/>
+          </a:xfrm>
+          <a:prstGeom prst="rect">
+            <a:avLst/>
+          </a:prstGeom>
+          <a:solidFill>
+            <a:srgbClr val="D9C089"/>
+          </a:solidFill>
+          <a:ln>
+            <a:noFill/>
+          </a:ln>
+        </p:spPr>
+        <p:style>
+          <a:lnRef idx="1">
+            <a:schemeClr val="accent1"/>
+          </a:lnRef>
+          <a:fillRef idx="3">
+            <a:schemeClr val="accent1"/>
+          </a:fillRef>
+          <a:effectRef idx="2">
+            <a:schemeClr val="accent1"/>
+          </a:effectRef>
+          <a:fontRef idx="minor">
+            <a:schemeClr val="lt1"/>
+          </a:fontRef>
+        </p:style>
+        <p:txBody>
+          <a:bodyPr rtlCol="0" anchor="ctr"/>
+          <a:lstStyle/>
+          <a:p>
+            <a:pPr algn="ctr"/>
+          </a:p>
+        </p:txBody>
+      </p:sp>
+      <p:sp>
+        <p:nvSpPr>
+          <p:cNvPr id="7" name="TextBox 6"/>
+          <p:cNvSpPr txBox="1"/>
+          <p:nvPr/>
+        </p:nvSpPr>
+        <p:spPr>
+          <a:xfrm>
+            <a:off x="813816" y="502920"/>
+            <a:ext cx="10634472" cy="685800"/>
+          </a:xfrm>
+          <a:prstGeom prst="rect">
+            <a:avLst/>
+          </a:prstGeom>
+          <a:noFill/>
+        </p:spPr>
+        <p:txBody>
+          <a:bodyPr wrap="square">
+            <a:spAutoFit/>
+          </a:bodyPr>
+          <a:lstStyle/>
+          <a:p>
+            <a:pPr algn="l"/>
+            <a:r>
+              <a:rPr sz="2400" b="1" i="0">
+                <a:solidFill>
+                  <a:srgbClr val="1F2C56"/>
+                </a:solidFill>
+                <a:latin typeface="Source Serif 4"/>
+              </a:rPr>
+              <a:t>Reflexionsfragen</a:t>
+            </a:r>
+          </a:p>
+        </p:txBody>
+      </p:sp>
+      <p:sp>
+        <p:nvSpPr>
+          <p:cNvPr id="8" name="TextBox 7"/>
+          <p:cNvSpPr txBox="1"/>
+          <p:nvPr/>
+        </p:nvSpPr>
+        <p:spPr>
+          <a:xfrm>
+            <a:off x="685800" y="1417320"/>
+            <a:ext cx="10817352" cy="5029200"/>
+          </a:xfrm>
+          <a:prstGeom prst="rect">
+            <a:avLst/>
+          </a:prstGeom>
+          <a:noFill/>
+        </p:spPr>
+        <p:txBody>
+          <a:bodyPr wrap="square">
+            <a:spAutoFit/>
+          </a:bodyPr>
+          <a:lstStyle/>
+          <a:p>
+            <a:pPr>
+              <a:spcBef>
+                <a:spcPts val="400"/>
+              </a:spcBef>
+              <a:spcAft>
+                <a:spcPts val="200"/>
+              </a:spcAft>
+            </a:pPr>
+            <a:r>
+              <a:rPr sz="1300">
+                <a:solidFill>
+                  <a:srgbClr val="3D5466"/>
+                </a:solidFill>
+                <a:latin typeface="Arial"/>
+              </a:rPr>
+              <a:t>▸  An welcher Stelle im Rollenspiel haben Sie sich am wohlsten gefühlt? Warum?</a:t>
+            </a:r>
+          </a:p>
+          <a:p>
+            <a:pPr>
+              <a:spcBef>
+                <a:spcPts val="400"/>
+              </a:spcBef>
+              <a:spcAft>
+                <a:spcPts val="200"/>
+              </a:spcAft>
+            </a:pPr>
+            <a:r>
+              <a:rPr sz="1300">
+                <a:solidFill>
+                  <a:srgbClr val="3D5466"/>
+                </a:solidFill>
+                <a:latin typeface="Arial"/>
+              </a:rPr>
+              <a:t>▸  Wo haben Sie gemerkt, dass Ihnen eine Technik noch nicht in Fleisch und Blut übergegangen ist?</a:t>
+            </a:r>
+          </a:p>
+          <a:p>
+            <a:pPr>
+              <a:spcBef>
+                <a:spcPts val="400"/>
+              </a:spcBef>
+              <a:spcAft>
+                <a:spcPts val="200"/>
+              </a:spcAft>
+            </a:pPr>
+            <a:r>
+              <a:rPr sz="1300">
+                <a:solidFill>
+                  <a:srgbClr val="3D5466"/>
+                </a:solidFill>
+                <a:latin typeface="Arial"/>
+              </a:rPr>
+              <a:t>▸  Welchen konkreten Kunden würden Sie gerne beim nächsten Gespräch mit den neuen Techniken ansprechen?</a:t>
+            </a:r>
+          </a:p>
+          <a:p>
+            <a:pPr>
+              <a:spcBef>
+                <a:spcPts val="400"/>
+              </a:spcBef>
+              <a:spcAft>
+                <a:spcPts val="200"/>
+              </a:spcAft>
+            </a:pPr>
+            <a:r>
+              <a:rPr sz="1300">
+                <a:solidFill>
+                  <a:srgbClr val="3D5466"/>
+                </a:solidFill>
+                <a:latin typeface="Arial"/>
+              </a:rPr>
+              <a:t>▸  Was nehmen Sie sich vor, beim nächsten echten Bilanzgespräch anders zu machen?</a:t>
+            </a:r>
+          </a:p>
+        </p:txBody>
+      </p:sp>
+      <p:sp>
+        <p:nvSpPr>
+          <p:cNvPr id="9" name="Rectangle 8"/>
+          <p:cNvSpPr/>
+          <p:nvPr/>
+        </p:nvSpPr>
+        <p:spPr>
+          <a:xfrm>
+            <a:off x="0" y="6510528"/>
+            <a:ext cx="12188952" cy="347472"/>
+          </a:xfrm>
+          <a:prstGeom prst="rect">
+            <a:avLst/>
+          </a:prstGeom>
+          <a:solidFill>
+            <a:srgbClr val="0A1937"/>
+          </a:solidFill>
+          <a:ln>
+            <a:noFill/>
+          </a:ln>
+        </p:spPr>
+        <p:style>
+          <a:lnRef idx="1">
+            <a:schemeClr val="accent1"/>
+          </a:lnRef>
+          <a:fillRef idx="3">
+            <a:schemeClr val="accent1"/>
+          </a:fillRef>
+          <a:effectRef idx="2">
+            <a:schemeClr val="accent1"/>
+          </a:effectRef>
+          <a:fontRef idx="minor">
+            <a:schemeClr val="lt1"/>
+          </a:fontRef>
+        </p:style>
+        <p:txBody>
+          <a:bodyPr rtlCol="0" anchor="ctr"/>
+          <a:lstStyle/>
+          <a:p>
+            <a:pPr algn="ctr"/>
+          </a:p>
+        </p:txBody>
+      </p:sp>
+      <p:sp>
+        <p:nvSpPr>
+          <p:cNvPr id="10" name="TextBox 9"/>
+          <p:cNvSpPr txBox="1"/>
+          <p:nvPr/>
+        </p:nvSpPr>
+        <p:spPr>
+          <a:xfrm>
+            <a:off x="685800" y="6583680"/>
+            <a:ext cx="6490411" cy="256032"/>
+          </a:xfrm>
+          <a:prstGeom prst="rect">
+            <a:avLst/>
+          </a:prstGeom>
+          <a:noFill/>
+        </p:spPr>
+        <p:txBody>
+          <a:bodyPr wrap="none">
+            <a:spAutoFit/>
+          </a:bodyPr>
+          <a:lstStyle/>
+          <a:p>
+            <a:pPr algn="l"/>
+            <a:r>
+              <a:rPr sz="700">
+                <a:solidFill>
+                  <a:srgbClr val="A0B4D2"/>
+                </a:solidFill>
+                <a:latin typeface="JetBrains Mono"/>
+              </a:rPr>
+              <a:t>Benedikt Zoller Coaching  ·  FKB Campus  ·  M02</a:t>
+            </a:r>
+          </a:p>
+        </p:txBody>
+      </p:sp>
+    </p:spTree>
+  </p:cSld>
+  <p:clrMapOvr>
+    <a:masterClrMapping/>
+  </p:clrMapOvr>
+</p:sld>
+</file>
+
 <file path=ppt/slides/slide2.xml><?xml version="1.0" encoding="utf-8"?>
 <p:sld xmlns:a="http://schemas.openxmlformats.org/drawingml/2006/main" xmlns:p="http://schemas.openxmlformats.org/presentationml/2006/main" xmlns:r="http://schemas.openxmlformats.org/officeDocument/2006/relationships">
   <p:cSld>
@@ -5177,7 +6917,7 @@
                 </a:solidFill>
                 <a:latin typeface="JetBrains Mono"/>
               </a:rPr>
-              <a:t>M02  ·  INHALT</a:t>
+              <a:t>AGENDA  ·  M02</a:t>
             </a:r>
           </a:p>
         </p:txBody>
@@ -5227,57 +6967,14 @@
       </p:sp>
       <p:sp>
         <p:nvSpPr>
-          <p:cNvPr id="6" name="Rectangle 5"/>
-          <p:cNvSpPr/>
+          <p:cNvPr id="6" name="TextBox 5"/>
+          <p:cNvSpPr txBox="1"/>
           <p:nvPr/>
         </p:nvSpPr>
         <p:spPr>
           <a:xfrm>
             <a:off x="685800" y="502920"/>
-            <a:ext cx="36576" cy="658368"/>
-          </a:xfrm>
-          <a:prstGeom prst="rect">
-            <a:avLst/>
-          </a:prstGeom>
-          <a:solidFill>
-            <a:srgbClr val="D9C089"/>
-          </a:solidFill>
-          <a:ln>
-            <a:noFill/>
-          </a:ln>
-        </p:spPr>
-        <p:style>
-          <a:lnRef idx="1">
-            <a:schemeClr val="accent1"/>
-          </a:lnRef>
-          <a:fillRef idx="3">
-            <a:schemeClr val="accent1"/>
-          </a:fillRef>
-          <a:effectRef idx="2">
-            <a:schemeClr val="accent1"/>
-          </a:effectRef>
-          <a:fontRef idx="minor">
-            <a:schemeClr val="lt1"/>
-          </a:fontRef>
-        </p:style>
-        <p:txBody>
-          <a:bodyPr rtlCol="0" anchor="ctr"/>
-          <a:lstStyle/>
-          <a:p>
-            <a:pPr algn="ctr"/>
-          </a:p>
-        </p:txBody>
-      </p:sp>
-      <p:sp>
-        <p:nvSpPr>
-          <p:cNvPr id="7" name="TextBox 6"/>
-          <p:cNvSpPr txBox="1"/>
-          <p:nvPr/>
-        </p:nvSpPr>
-        <p:spPr>
-          <a:xfrm>
-            <a:off x="813816" y="502920"/>
-            <a:ext cx="10634472" cy="685800"/>
+            <a:ext cx="10817352" cy="658368"/>
           </a:xfrm>
           <a:prstGeom prst="rect">
             <a:avLst/>
@@ -5292,27 +6989,27 @@
           <a:p>
             <a:pPr algn="l"/>
             <a:r>
-              <a:rPr sz="2400" b="1" i="0">
+              <a:rPr sz="2600" b="1" i="0">
                 <a:solidFill>
                   <a:srgbClr val="1F2C56"/>
                 </a:solidFill>
                 <a:latin typeface="Source Serif 4"/>
               </a:rPr>
-              <a:t>Theorie-Input: Vom Zahlenleser zum Gesprächsführer</a:t>
-            </a:r>
-          </a:p>
-        </p:txBody>
-      </p:sp>
-      <p:sp>
-        <p:nvSpPr>
-          <p:cNvPr id="8" name="TextBox 7"/>
+              <a:t>So läuft das Modul</a:t>
+            </a:r>
+          </a:p>
+        </p:txBody>
+      </p:sp>
+      <p:sp>
+        <p:nvSpPr>
+          <p:cNvPr id="7" name="TextBox 6"/>
           <p:cNvSpPr txBox="1"/>
           <p:nvPr/>
         </p:nvSpPr>
         <p:spPr>
           <a:xfrm>
-            <a:off x="685800" y="1417320"/>
-            <a:ext cx="10817352" cy="5029200"/>
+            <a:off x="685800" y="1463040"/>
+            <a:ext cx="10817352" cy="4937760"/>
           </a:xfrm>
           <a:prstGeom prst="rect">
             <a:avLst/>
@@ -5324,61 +7021,41 @@
             <a:spAutoFit/>
           </a:bodyPr>
           <a:lstStyle/>
-          <a:p>
-            <a:pPr>
-              <a:spcBef>
-                <a:spcPts val="1000"/>
-              </a:spcBef>
-              <a:spcAft>
-                <a:spcPts val="200"/>
-              </a:spcAft>
-            </a:pPr>
-            <a:r>
-              <a:rPr sz="800" b="1">
-                <a:solidFill>
-                  <a:srgbClr val="78808C"/>
-                </a:solidFill>
-                <a:latin typeface="JetBrains Mono"/>
-              </a:rPr>
-              <a:t>DIE GRENZEN DER REINEN KENNZAHLENANALYSE</a:t>
-            </a:r>
-          </a:p>
           <a:p>
             <a:pPr>
               <a:spcBef>
                 <a:spcPts val="400"/>
               </a:spcBef>
               <a:spcAft>
-                <a:spcPts val="200"/>
+                <a:spcPts val="100"/>
               </a:spcAft>
             </a:pPr>
             <a:r>
-              <a:rPr sz="1200">
+              <a:rPr sz="900">
+                <a:solidFill>
+                  <a:srgbClr val="78808C"/>
+                </a:solidFill>
+                <a:latin typeface="Consolas"/>
+              </a:rPr>
+              <a:t>0–15 min    </a:t>
+            </a:r>
+            <a:r>
+              <a:rPr sz="1200" b="1">
                 <a:solidFill>
                   <a:srgbClr val="3D5466"/>
                 </a:solidFill>
                 <a:latin typeface="Arial"/>
               </a:rPr>
-              <a:t>Der Jahresabschluss beantwortet die Frage: „Wie ist die finanzielle Situation?" . Diese Analyse ist die Grundlage des Kreditgeschäfts – und gleichzeitig nur die Hälfte der Geschichte.</a:t>
-            </a:r>
-          </a:p>
-          <a:p>
-            <a:pPr>
-              <a:spcBef>
-                <a:spcPts val="1000"/>
-              </a:spcBef>
-              <a:spcAft>
-                <a:spcPts val="200"/>
-              </a:spcAft>
-            </a:pPr>
-            <a:r>
-              <a:rPr sz="800" b="1">
+              <a:t>  Einstieg &amp; Aktivierung</a:t>
+            </a:r>
+            <a:r>
+              <a:rPr sz="900">
                 <a:solidFill>
                   <a:srgbClr val="78808C"/>
                 </a:solidFill>
-                <a:latin typeface="JetBrains Mono"/>
-              </a:rPr>
-              <a:t>KOMMUNIKATION AUF AUGENHÖHE: INHALTS- VS. BEZIEHUNGSEBENE</a:t>
+                <a:latin typeface="Arial"/>
+              </a:rPr>
+              <a:t>  ·  Blitzlichtrunde, Plenum</a:t>
             </a:r>
           </a:p>
           <a:p>
@@ -5387,36 +7064,35 @@
                 <a:spcPts val="400"/>
               </a:spcBef>
               <a:spcAft>
-                <a:spcPts val="200"/>
+                <a:spcPts val="100"/>
               </a:spcAft>
             </a:pPr>
             <a:r>
-              <a:rPr sz="1200">
+              <a:rPr sz="900">
+                <a:solidFill>
+                  <a:srgbClr val="78808C"/>
+                </a:solidFill>
+                <a:latin typeface="Consolas"/>
+              </a:rPr>
+              <a:t>15–35 min   </a:t>
+            </a:r>
+            <a:r>
+              <a:rPr sz="1200" b="1">
                 <a:solidFill>
                   <a:srgbClr val="3D5466"/>
                 </a:solidFill>
                 <a:latin typeface="Arial"/>
               </a:rPr>
-              <a:t>Das Muster: Beobachtung + offene Frage statt Beobachtung + Bewertung.</a:t>
-            </a:r>
-          </a:p>
-          <a:p>
-            <a:pPr>
-              <a:spcBef>
-                <a:spcPts val="1000"/>
-              </a:spcBef>
-              <a:spcAft>
-                <a:spcPts val="200"/>
-              </a:spcAft>
-            </a:pPr>
-            <a:r>
-              <a:rPr sz="800" b="1">
+              <a:t>  Theorie-Input I</a:t>
+            </a:r>
+            <a:r>
+              <a:rPr sz="900">
                 <a:solidFill>
                   <a:srgbClr val="78808C"/>
                 </a:solidFill>
-                <a:latin typeface="JetBrains Mono"/>
-              </a:rPr>
-              <a:t>DER 5-PHASEN-RAHMEN FÜR DAS BILANZGESPRÄCH</a:t>
+                <a:latin typeface="Arial"/>
+              </a:rPr>
+              <a:t>  ·  Kurzvortrag + Diskussion</a:t>
             </a:r>
           </a:p>
           <a:p>
@@ -5425,17 +7101,35 @@
                 <a:spcPts val="400"/>
               </a:spcBef>
               <a:spcAft>
-                <a:spcPts val="200"/>
+                <a:spcPts val="100"/>
               </a:spcAft>
             </a:pPr>
             <a:r>
-              <a:rPr sz="1200">
+              <a:rPr sz="900">
+                <a:solidFill>
+                  <a:srgbClr val="78808C"/>
+                </a:solidFill>
+                <a:latin typeface="Consolas"/>
+              </a:rPr>
+              <a:t>35–50 min   </a:t>
+            </a:r>
+            <a:r>
+              <a:rPr sz="1200" b="1">
                 <a:solidFill>
                   <a:srgbClr val="3D5466"/>
                 </a:solidFill>
                 <a:latin typeface="Arial"/>
               </a:rPr>
-              <a:t>Phase 1 – Vorbereitung (30–45 Min. vor dem Termin)</a:t>
+              <a:t>  Theorie-Input II</a:t>
+            </a:r>
+            <a:r>
+              <a:rPr sz="900">
+                <a:solidFill>
+                  <a:srgbClr val="78808C"/>
+                </a:solidFill>
+                <a:latin typeface="Arial"/>
+              </a:rPr>
+              <a:t>  ·  Kurzvortrag, interaktiv</a:t>
             </a:r>
           </a:p>
           <a:p>
@@ -5444,17 +7138,35 @@
                 <a:spcPts val="400"/>
               </a:spcBef>
               <a:spcAft>
-                <a:spcPts val="200"/>
+                <a:spcPts val="100"/>
               </a:spcAft>
             </a:pPr>
             <a:r>
-              <a:rPr sz="1300">
+              <a:rPr sz="900">
+                <a:solidFill>
+                  <a:srgbClr val="78808C"/>
+                </a:solidFill>
+                <a:latin typeface="Consolas"/>
+              </a:rPr>
+              <a:t>50–65 min   </a:t>
+            </a:r>
+            <a:r>
+              <a:rPr sz="1200" b="1">
                 <a:solidFill>
                   <a:srgbClr val="3D5466"/>
                 </a:solidFill>
                 <a:latin typeface="Arial"/>
               </a:rPr>
-              <a:t>▸  Mindestens 4 Kennzahlen berechnen (EK-Quote, Liquidität, Verschuldungsgrad, EBIT-Marge)</a:t>
+              <a:t>  Rollenspielvorbereitung</a:t>
+            </a:r>
+            <a:r>
+              <a:rPr sz="900">
+                <a:solidFill>
+                  <a:srgbClr val="78808C"/>
+                </a:solidFill>
+                <a:latin typeface="Arial"/>
+              </a:rPr>
+              <a:t>  ·  Stille Einzelarbeit, dann 3er-Gruppe</a:t>
             </a:r>
           </a:p>
           <a:p>
@@ -5463,17 +7175,35 @@
                 <a:spcPts val="400"/>
               </a:spcBef>
               <a:spcAft>
-                <a:spcPts val="200"/>
+                <a:spcPts val="100"/>
               </a:spcAft>
             </a:pPr>
             <a:r>
-              <a:rPr sz="1300">
+              <a:rPr sz="900">
+                <a:solidFill>
+                  <a:srgbClr val="78808C"/>
+                </a:solidFill>
+                <a:latin typeface="Consolas"/>
+              </a:rPr>
+              <a:t>65–95 min   </a:t>
+            </a:r>
+            <a:r>
+              <a:rPr sz="1200" b="1">
                 <a:solidFill>
                   <a:srgbClr val="3D5466"/>
                 </a:solidFill>
                 <a:latin typeface="Arial"/>
               </a:rPr>
-              <a:t>▸  Zeitreihe: Vergleich zu mindestens 2 Vorjahren</a:t>
+              <a:t>  Rollenspiel Runde 1</a:t>
+            </a:r>
+            <a:r>
+              <a:rPr sz="900">
+                <a:solidFill>
+                  <a:srgbClr val="78808C"/>
+                </a:solidFill>
+                <a:latin typeface="Arial"/>
+              </a:rPr>
+              <a:t>  ·  Rollenspiel, Peer-Feedback</a:t>
             </a:r>
           </a:p>
           <a:p>
@@ -5482,17 +7212,35 @@
                 <a:spcPts val="400"/>
               </a:spcBef>
               <a:spcAft>
-                <a:spcPts val="200"/>
+                <a:spcPts val="100"/>
               </a:spcAft>
             </a:pPr>
             <a:r>
-              <a:rPr sz="1300">
+              <a:rPr sz="900">
+                <a:solidFill>
+                  <a:srgbClr val="78808C"/>
+                </a:solidFill>
+                <a:latin typeface="Consolas"/>
+              </a:rPr>
+              <a:t>95–115 min  </a:t>
+            </a:r>
+            <a:r>
+              <a:rPr sz="1200" b="1">
                 <a:solidFill>
                   <a:srgbClr val="3D5466"/>
                 </a:solidFill>
                 <a:latin typeface="Arial"/>
               </a:rPr>
-              <a:t>▸  Branchenwert recherchieren: In agree (Firmenkundenanalyse) stehen aktuelle Branchenbenchmarks aus der Creditreform/Bisnode-Lizenz direkt im Analysebogen – diese Werte für das Gespräch bevorzugen. Alternativ: Bundesbank Unternehmensabschlussstatistik (kostenfrei, aber teils 2 Jahre zeitverzögert)</a:t>
+              <a:t>  Debriefing Runde 1</a:t>
+            </a:r>
+            <a:r>
+              <a:rPr sz="900">
+                <a:solidFill>
+                  <a:srgbClr val="78808C"/>
+                </a:solidFill>
+                <a:latin typeface="Arial"/>
+              </a:rPr>
+              <a:t>  ·  Moderiertes Plenum</a:t>
             </a:r>
           </a:p>
           <a:p>
@@ -5501,17 +7249,35 @@
                 <a:spcPts val="400"/>
               </a:spcBef>
               <a:spcAft>
-                <a:spcPts val="200"/>
+                <a:spcPts val="100"/>
               </a:spcAft>
             </a:pPr>
             <a:r>
-              <a:rPr sz="1300">
+              <a:rPr sz="900">
+                <a:solidFill>
+                  <a:srgbClr val="78808C"/>
+                </a:solidFill>
+                <a:latin typeface="Consolas"/>
+              </a:rPr>
+              <a:t>115–125 min </a:t>
+            </a:r>
+            <a:r>
+              <a:rPr sz="1200" b="1">
                 <a:solidFill>
                   <a:srgbClr val="3D5466"/>
                 </a:solidFill>
                 <a:latin typeface="Arial"/>
               </a:rPr>
-              <a:t>▸  3 Schlüsselbotschaften + 5 offene Fragen schriftlich vorbereiten</a:t>
+              <a:t>  Pause</a:t>
+            </a:r>
+            <a:r>
+              <a:rPr sz="900">
+                <a:solidFill>
+                  <a:srgbClr val="78808C"/>
+                </a:solidFill>
+                <a:latin typeface="Arial"/>
+              </a:rPr>
+              <a:t>  ·  —</a:t>
             </a:r>
           </a:p>
           <a:p>
@@ -5520,17 +7286,35 @@
                 <a:spcPts val="400"/>
               </a:spcBef>
               <a:spcAft>
-                <a:spcPts val="200"/>
+                <a:spcPts val="100"/>
               </a:spcAft>
             </a:pPr>
             <a:r>
-              <a:rPr sz="1200">
+              <a:rPr sz="900">
+                <a:solidFill>
+                  <a:srgbClr val="78808C"/>
+                </a:solidFill>
+                <a:latin typeface="Consolas"/>
+              </a:rPr>
+              <a:t>125–155 min </a:t>
+            </a:r>
+            <a:r>
+              <a:rPr sz="1200" b="1">
                 <a:solidFill>
                   <a:srgbClr val="3D5466"/>
                 </a:solidFill>
                 <a:latin typeface="Arial"/>
               </a:rPr>
-              <a:t>Phase 2 – Eröffnung (ca. 10 Min.)</a:t>
+              <a:t>  Rollenspiel Runde 2</a:t>
+            </a:r>
+            <a:r>
+              <a:rPr sz="900">
+                <a:solidFill>
+                  <a:srgbClr val="78808C"/>
+                </a:solidFill>
+                <a:latin typeface="Arial"/>
+              </a:rPr>
+              <a:t>  ·  Rollenspiel</a:t>
             </a:r>
           </a:p>
           <a:p>
@@ -5539,24 +7323,116 @@
                 <a:spcPts val="400"/>
               </a:spcBef>
               <a:spcAft>
-                <a:spcPts val="200"/>
+                <a:spcPts val="100"/>
               </a:spcAft>
             </a:pPr>
             <a:r>
-              <a:rPr sz="1300">
+              <a:rPr sz="900">
+                <a:solidFill>
+                  <a:srgbClr val="78808C"/>
+                </a:solidFill>
+                <a:latin typeface="Consolas"/>
+              </a:rPr>
+              <a:t>155–170 min </a:t>
+            </a:r>
+            <a:r>
+              <a:rPr sz="1200" b="1">
                 <a:solidFill>
                   <a:srgbClr val="3D5466"/>
                 </a:solidFill>
                 <a:latin typeface="Arial"/>
               </a:rPr>
-              <a:t>▸  Kontext und Ziel setzen: „Heute möchte ich mit Ihnen Ihren Jahresabschluss durchgehen und verstehen, wie sich Ihre Lage entwickelt hat."</a:t>
-            </a:r>
-          </a:p>
-        </p:txBody>
-      </p:sp>
-      <p:sp>
-        <p:nvSpPr>
-          <p:cNvPr id="9" name="Rectangle 8"/>
+              <a:t>  Debriefing Runde 2</a:t>
+            </a:r>
+            <a:r>
+              <a:rPr sz="900">
+                <a:solidFill>
+                  <a:srgbClr val="78808C"/>
+                </a:solidFill>
+                <a:latin typeface="Arial"/>
+              </a:rPr>
+              <a:t>  ·  Moderiertes Plenum</a:t>
+            </a:r>
+          </a:p>
+          <a:p>
+            <a:pPr>
+              <a:spcBef>
+                <a:spcPts val="400"/>
+              </a:spcBef>
+              <a:spcAft>
+                <a:spcPts val="100"/>
+              </a:spcAft>
+            </a:pPr>
+            <a:r>
+              <a:rPr sz="900">
+                <a:solidFill>
+                  <a:srgbClr val="78808C"/>
+                </a:solidFill>
+                <a:latin typeface="Consolas"/>
+              </a:rPr>
+              <a:t>170–175 min </a:t>
+            </a:r>
+            <a:r>
+              <a:rPr sz="1200" b="1">
+                <a:solidFill>
+                  <a:srgbClr val="3D5466"/>
+                </a:solidFill>
+                <a:latin typeface="Arial"/>
+              </a:rPr>
+              <a:t>  Transfer &amp; Abschluss</a:t>
+            </a:r>
+            <a:r>
+              <a:rPr sz="900">
+                <a:solidFill>
+                  <a:srgbClr val="78808C"/>
+                </a:solidFill>
+                <a:latin typeface="Arial"/>
+              </a:rPr>
+              <a:t>  ·  Plenum, Einzelreflexion</a:t>
+            </a:r>
+          </a:p>
+          <a:p>
+            <a:pPr>
+              <a:spcBef>
+                <a:spcPts val="400"/>
+              </a:spcBef>
+              <a:spcAft>
+                <a:spcPts val="100"/>
+              </a:spcAft>
+            </a:pPr>
+            <a:r>
+              <a:rPr sz="900">
+                <a:solidFill>
+                  <a:srgbClr val="78808C"/>
+                </a:solidFill>
+                <a:latin typeface="Consolas"/>
+              </a:rPr>
+              <a:t>175–180 min </a:t>
+            </a:r>
+            <a:r>
+              <a:rPr sz="1200" b="1">
+                <a:solidFill>
+                  <a:srgbClr val="3D5466"/>
+                </a:solidFill>
+                <a:latin typeface="Arial"/>
+              </a:rPr>
+              <a:t>  Evaluation</a:t>
+            </a:r>
+            <a:r>
+              <a:rPr sz="900">
+                <a:solidFill>
+                  <a:srgbClr val="78808C"/>
+                </a:solidFill>
+                <a:latin typeface="Arial"/>
+              </a:rPr>
+              <a:t>  ·  Einzelarbeit</a:t>
+            </a:r>
+          </a:p>
+        </p:txBody>
+      </p:sp>
+      <p:sp>
+        <p:nvSpPr>
+          <p:cNvPr id="8" name="Rectangle 7"/>
           <p:cNvSpPr/>
           <p:nvPr/>
         </p:nvSpPr>
@@ -5599,7 +7475,7 @@
       </p:sp>
       <p:sp>
         <p:nvSpPr>
-          <p:cNvPr id="10" name="TextBox 9"/>
+          <p:cNvPr id="9" name="TextBox 8"/>
           <p:cNvSpPr txBox="1"/>
           <p:nvPr/>
         </p:nvSpPr>
@@ -5665,7 +7541,7 @@
             <a:avLst/>
           </a:prstGeom>
           <a:solidFill>
-            <a:srgbClr val="FFFFFF"/>
+            <a:srgbClr val="EDEDF3"/>
           </a:solidFill>
           <a:ln>
             <a:noFill/>
@@ -5766,43 +7642,51 @@
                 </a:solidFill>
                 <a:latin typeface="JetBrains Mono"/>
               </a:rPr>
-              <a:t>M02  ·  SCHAUBILD</a:t>
-            </a:r>
-          </a:p>
-        </p:txBody>
-      </p:sp>
-      <p:sp>
-        <p:nvSpPr>
-          <p:cNvPr id="5" name="TextBox 4"/>
-          <p:cNvSpPr txBox="1"/>
-          <p:nvPr/>
-        </p:nvSpPr>
-        <p:spPr>
-          <a:xfrm>
-            <a:off x="685800" y="502920"/>
-            <a:ext cx="10817352" cy="594360"/>
-          </a:xfrm>
-          <a:prstGeom prst="rect">
-            <a:avLst/>
-          </a:prstGeom>
-          <a:noFill/>
-        </p:spPr>
-        <p:txBody>
-          <a:bodyPr wrap="square">
-            <a:spAutoFit/>
-          </a:bodyPr>
-          <a:lstStyle/>
-          <a:p>
-            <a:pPr algn="l"/>
-            <a:r>
-              <a:rPr sz="2000" b="1" i="0">
-                <a:solidFill>
-                  <a:srgbClr val="1F2C56"/>
-                </a:solidFill>
-                <a:latin typeface="Source Serif 4"/>
-              </a:rPr>
-              <a:t>Vier-Ohren-Modell nach Schulz von Thun</a:t>
-            </a:r>
+              <a:t>M02  ·  INHALT</a:t>
+            </a:r>
+          </a:p>
+        </p:txBody>
+      </p:sp>
+      <p:sp>
+        <p:nvSpPr>
+          <p:cNvPr id="5" name="Rectangle 4"/>
+          <p:cNvSpPr/>
+          <p:nvPr/>
+        </p:nvSpPr>
+        <p:spPr>
+          <a:xfrm>
+            <a:off x="0" y="1234440"/>
+            <a:ext cx="12188952" cy="12700"/>
+          </a:xfrm>
+          <a:prstGeom prst="rect">
+            <a:avLst/>
+          </a:prstGeom>
+          <a:solidFill>
+            <a:srgbClr val="D8DFE4"/>
+          </a:solidFill>
+          <a:ln>
+            <a:noFill/>
+          </a:ln>
+        </p:spPr>
+        <p:style>
+          <a:lnRef idx="1">
+            <a:schemeClr val="accent1"/>
+          </a:lnRef>
+          <a:fillRef idx="3">
+            <a:schemeClr val="accent1"/>
+          </a:fillRef>
+          <a:effectRef idx="2">
+            <a:schemeClr val="accent1"/>
+          </a:effectRef>
+          <a:fontRef idx="minor">
+            <a:schemeClr val="lt1"/>
+          </a:fontRef>
+        </p:style>
+        <p:txBody>
+          <a:bodyPr rtlCol="0" anchor="ctr"/>
+          <a:lstStyle/>
+          <a:p>
+            <a:pPr algn="ctr"/>
           </a:p>
         </p:txBody>
       </p:sp>
@@ -5814,8 +7698,8 @@
         </p:nvSpPr>
         <p:spPr>
           <a:xfrm>
-            <a:off x="685800" y="1143000"/>
-            <a:ext cx="10817352" cy="25400"/>
+            <a:off x="685800" y="502920"/>
+            <a:ext cx="36576" cy="658368"/>
           </a:xfrm>
           <a:prstGeom prst="rect">
             <a:avLst/>
@@ -5849,33 +7733,295 @@
           </a:p>
         </p:txBody>
       </p:sp>
-      <p:pic>
-        <p:nvPicPr>
-          <p:cNvPr id="7" name="Picture 6" descr="image.png"/>
-          <p:cNvPicPr>
-            <a:picLocks noChangeAspect="1"/>
-          </p:cNvPicPr>
-          <p:nvPr/>
-        </p:nvPicPr>
-        <p:blipFill>
-          <a:blip r:embed="rId2"/>
-          <a:stretch>
-            <a:fillRect/>
-          </a:stretch>
-        </p:blipFill>
-        <p:spPr>
-          <a:xfrm>
-            <a:off x="2554863" y="1325880"/>
-            <a:ext cx="7079225" cy="4937760"/>
-          </a:xfrm>
-          <a:prstGeom prst="rect">
-            <a:avLst/>
-          </a:prstGeom>
-        </p:spPr>
-      </p:pic>
-      <p:sp>
-        <p:nvSpPr>
-          <p:cNvPr id="8" name="Rectangle 7"/>
+      <p:sp>
+        <p:nvSpPr>
+          <p:cNvPr id="7" name="TextBox 6"/>
+          <p:cNvSpPr txBox="1"/>
+          <p:nvPr/>
+        </p:nvSpPr>
+        <p:spPr>
+          <a:xfrm>
+            <a:off x="813816" y="502920"/>
+            <a:ext cx="10634472" cy="685800"/>
+          </a:xfrm>
+          <a:prstGeom prst="rect">
+            <a:avLst/>
+          </a:prstGeom>
+          <a:noFill/>
+        </p:spPr>
+        <p:txBody>
+          <a:bodyPr wrap="square">
+            <a:spAutoFit/>
+          </a:bodyPr>
+          <a:lstStyle/>
+          <a:p>
+            <a:pPr algn="l"/>
+            <a:r>
+              <a:rPr sz="2400" b="1" i="0">
+                <a:solidFill>
+                  <a:srgbClr val="1F2C56"/>
+                </a:solidFill>
+                <a:latin typeface="Source Serif 4"/>
+              </a:rPr>
+              <a:t>Theorie-Input: Vom Zahlenleser zum Gesprächsführer</a:t>
+            </a:r>
+          </a:p>
+        </p:txBody>
+      </p:sp>
+      <p:sp>
+        <p:nvSpPr>
+          <p:cNvPr id="8" name="TextBox 7"/>
+          <p:cNvSpPr txBox="1"/>
+          <p:nvPr/>
+        </p:nvSpPr>
+        <p:spPr>
+          <a:xfrm>
+            <a:off x="685800" y="1417320"/>
+            <a:ext cx="10817352" cy="5029200"/>
+          </a:xfrm>
+          <a:prstGeom prst="rect">
+            <a:avLst/>
+          </a:prstGeom>
+          <a:noFill/>
+        </p:spPr>
+        <p:txBody>
+          <a:bodyPr wrap="square">
+            <a:spAutoFit/>
+          </a:bodyPr>
+          <a:lstStyle/>
+          <a:p>
+            <a:pPr>
+              <a:spcBef>
+                <a:spcPts val="1000"/>
+              </a:spcBef>
+              <a:spcAft>
+                <a:spcPts val="200"/>
+              </a:spcAft>
+            </a:pPr>
+            <a:r>
+              <a:rPr sz="800" b="1">
+                <a:solidFill>
+                  <a:srgbClr val="78808C"/>
+                </a:solidFill>
+                <a:latin typeface="JetBrains Mono"/>
+              </a:rPr>
+              <a:t>DIE GRENZEN DER REINEN KENNZAHLENANALYSE</a:t>
+            </a:r>
+          </a:p>
+          <a:p>
+            <a:pPr>
+              <a:spcBef>
+                <a:spcPts val="400"/>
+              </a:spcBef>
+              <a:spcAft>
+                <a:spcPts val="200"/>
+              </a:spcAft>
+            </a:pPr>
+            <a:r>
+              <a:rPr sz="1300">
+                <a:solidFill>
+                  <a:srgbClr val="3D5466"/>
+                </a:solidFill>
+                <a:latin typeface="Arial"/>
+              </a:rPr>
+              <a:t>▸  Der Jahresabschluss beantwortet die Frage: „Wie ist die finanzielle Situation?" . Diese Analyse ist die Grundlage des Kreditgeschäfts – und gleichzeitig nur die Hälfte der Geschichte.</a:t>
+            </a:r>
+          </a:p>
+          <a:p>
+            <a:pPr>
+              <a:spcBef>
+                <a:spcPts val="1000"/>
+              </a:spcBef>
+              <a:spcAft>
+                <a:spcPts val="200"/>
+              </a:spcAft>
+            </a:pPr>
+            <a:r>
+              <a:rPr sz="800" b="1">
+                <a:solidFill>
+                  <a:srgbClr val="78808C"/>
+                </a:solidFill>
+                <a:latin typeface="JetBrains Mono"/>
+              </a:rPr>
+              <a:t>KOMMUNIKATION AUF AUGENHÖHE: INHALTS- VS. BEZIEHUNGSEBENE</a:t>
+            </a:r>
+          </a:p>
+          <a:p>
+            <a:pPr>
+              <a:spcBef>
+                <a:spcPts val="400"/>
+              </a:spcBef>
+              <a:spcAft>
+                <a:spcPts val="200"/>
+              </a:spcAft>
+            </a:pPr>
+            <a:r>
+              <a:rPr sz="1300">
+                <a:solidFill>
+                  <a:srgbClr val="3D5466"/>
+                </a:solidFill>
+                <a:latin typeface="Arial"/>
+              </a:rPr>
+              <a:t>▸  Das Muster: Beobachtung + offene Frage statt Beobachtung + Bewertung.</a:t>
+            </a:r>
+          </a:p>
+          <a:p>
+            <a:pPr>
+              <a:spcBef>
+                <a:spcPts val="1000"/>
+              </a:spcBef>
+              <a:spcAft>
+                <a:spcPts val="200"/>
+              </a:spcAft>
+            </a:pPr>
+            <a:r>
+              <a:rPr sz="800" b="1">
+                <a:solidFill>
+                  <a:srgbClr val="78808C"/>
+                </a:solidFill>
+                <a:latin typeface="JetBrains Mono"/>
+              </a:rPr>
+              <a:t>DER 5-PHASEN-RAHMEN FÜR DAS BILANZGESPRÄCH</a:t>
+            </a:r>
+          </a:p>
+          <a:p>
+            <a:pPr>
+              <a:spcBef>
+                <a:spcPts val="400"/>
+              </a:spcBef>
+              <a:spcAft>
+                <a:spcPts val="200"/>
+              </a:spcAft>
+            </a:pPr>
+            <a:r>
+              <a:rPr sz="1300">
+                <a:solidFill>
+                  <a:srgbClr val="3D5466"/>
+                </a:solidFill>
+                <a:latin typeface="Arial"/>
+              </a:rPr>
+              <a:t>▸  Phase 1 – Vorbereitung (30–45 Min. vor dem Termin)</a:t>
+            </a:r>
+          </a:p>
+          <a:p>
+            <a:pPr>
+              <a:spcBef>
+                <a:spcPts val="400"/>
+              </a:spcBef>
+              <a:spcAft>
+                <a:spcPts val="200"/>
+              </a:spcAft>
+            </a:pPr>
+            <a:r>
+              <a:rPr sz="1300">
+                <a:solidFill>
+                  <a:srgbClr val="3D5466"/>
+                </a:solidFill>
+                <a:latin typeface="Arial"/>
+              </a:rPr>
+              <a:t>▸  Mindestens 4 Kennzahlen berechnen (EK-Quote, Liquidität, Verschuldungsgrad, EBIT-Marge)</a:t>
+            </a:r>
+          </a:p>
+          <a:p>
+            <a:pPr>
+              <a:spcBef>
+                <a:spcPts val="400"/>
+              </a:spcBef>
+              <a:spcAft>
+                <a:spcPts val="200"/>
+              </a:spcAft>
+            </a:pPr>
+            <a:r>
+              <a:rPr sz="1300">
+                <a:solidFill>
+                  <a:srgbClr val="3D5466"/>
+                </a:solidFill>
+                <a:latin typeface="Arial"/>
+              </a:rPr>
+              <a:t>▸  Zeitreihe: Vergleich zu mindestens 2 Vorjahren</a:t>
+            </a:r>
+          </a:p>
+          <a:p>
+            <a:pPr>
+              <a:spcBef>
+                <a:spcPts val="400"/>
+              </a:spcBef>
+              <a:spcAft>
+                <a:spcPts val="200"/>
+              </a:spcAft>
+            </a:pPr>
+            <a:r>
+              <a:rPr sz="1300">
+                <a:solidFill>
+                  <a:srgbClr val="3D5466"/>
+                </a:solidFill>
+                <a:latin typeface="Arial"/>
+              </a:rPr>
+              <a:t>▸  Branchenwert recherchieren: In agree (Firmenkundenanalyse) stehen aktuelle Branchenbenchmarks aus der Creditreform/Bisnode-Lizenz direkt im Analysebogen – diese Werte für das Gespräch bevorzugen. Alternativ: Bundesbank Unternehmensabschlussstatistik (kostenfrei, aber teils 2 Jahre zeitverzögert)</a:t>
+            </a:r>
+          </a:p>
+          <a:p>
+            <a:pPr>
+              <a:spcBef>
+                <a:spcPts val="400"/>
+              </a:spcBef>
+              <a:spcAft>
+                <a:spcPts val="200"/>
+              </a:spcAft>
+            </a:pPr>
+            <a:r>
+              <a:rPr sz="1300">
+                <a:solidFill>
+                  <a:srgbClr val="3D5466"/>
+                </a:solidFill>
+                <a:latin typeface="Arial"/>
+              </a:rPr>
+              <a:t>▸  3 Schlüsselbotschaften + 5 offene Fragen schriftlich vorbereiten</a:t>
+            </a:r>
+          </a:p>
+          <a:p>
+            <a:pPr>
+              <a:spcBef>
+                <a:spcPts val="400"/>
+              </a:spcBef>
+              <a:spcAft>
+                <a:spcPts val="200"/>
+              </a:spcAft>
+            </a:pPr>
+            <a:r>
+              <a:rPr sz="1300">
+                <a:solidFill>
+                  <a:srgbClr val="3D5466"/>
+                </a:solidFill>
+                <a:latin typeface="Arial"/>
+              </a:rPr>
+              <a:t>▸  Phase 2 – Eröffnung (ca. 10 Min.)</a:t>
+            </a:r>
+          </a:p>
+          <a:p>
+            <a:pPr>
+              <a:spcBef>
+                <a:spcPts val="400"/>
+              </a:spcBef>
+              <a:spcAft>
+                <a:spcPts val="200"/>
+              </a:spcAft>
+            </a:pPr>
+            <a:r>
+              <a:rPr sz="1300">
+                <a:solidFill>
+                  <a:srgbClr val="3D5466"/>
+                </a:solidFill>
+                <a:latin typeface="Arial"/>
+              </a:rPr>
+              <a:t>▸  Kontext und Ziel setzen: „Heute möchte ich mit Ihnen Ihren Jahresabschluss durchgehen und verstehen, wie sich Ihre Lage entwickelt hat."</a:t>
+            </a:r>
+          </a:p>
+        </p:txBody>
+      </p:sp>
+      <p:sp>
+        <p:nvSpPr>
+          <p:cNvPr id="9" name="Rectangle 8"/>
           <p:cNvSpPr/>
           <p:nvPr/>
         </p:nvSpPr>
@@ -5918,7 +8064,7 @@
       </p:sp>
       <p:sp>
         <p:nvSpPr>
-          <p:cNvPr id="9" name="TextBox 8"/>
+          <p:cNvPr id="10" name="TextBox 9"/>
           <p:cNvSpPr txBox="1"/>
           <p:nvPr/>
         </p:nvSpPr>
@@ -5947,41 +8093,6 @@
                 <a:latin typeface="JetBrains Mono"/>
               </a:rPr>
               <a:t>Benedikt Zoller Coaching  ·  FKB Campus  ·  M02</a:t>
-            </a:r>
-          </a:p>
-        </p:txBody>
-      </p:sp>
-      <p:sp>
-        <p:nvSpPr>
-          <p:cNvPr id="10" name="TextBox 9"/>
-          <p:cNvSpPr txBox="1"/>
-          <p:nvPr/>
-        </p:nvSpPr>
-        <p:spPr>
-          <a:xfrm>
-            <a:off x="7176211" y="6583680"/>
-            <a:ext cx="4326940" cy="256032"/>
-          </a:xfrm>
-          <a:prstGeom prst="rect">
-            <a:avLst/>
-          </a:prstGeom>
-          <a:noFill/>
-        </p:spPr>
-        <p:txBody>
-          <a:bodyPr wrap="none">
-            <a:spAutoFit/>
-          </a:bodyPr>
-          <a:lstStyle/>
-          <a:p>
-            <a:pPr algn="r"/>
-            <a:r>
-              <a:rPr sz="700">
-                <a:solidFill>
-                  <a:srgbClr val="A0B4D2"/>
-                </a:solidFill>
-                <a:latin typeface="JetBrains Mono"/>
-              </a:rPr>
-              <a:t>Schaubild</a:t>
             </a:r>
           </a:p>
         </p:txBody>
@@ -6155,7 +8266,7 @@
                 </a:solidFill>
                 <a:latin typeface="Source Serif 4"/>
               </a:rPr>
-              <a:t>5-Phasen-Rahmen für das strukturierte Bilanzgespräch</a:t>
+              <a:t>Vier-Ohren-Modell nach Schulz von Thun</a:t>
             </a:r>
           </a:p>
         </p:txBody>
@@ -6219,8 +8330,8 @@
         </p:blipFill>
         <p:spPr>
           <a:xfrm>
-            <a:off x="1670951" y="1325880"/>
-            <a:ext cx="8847050" cy="4937760"/>
+            <a:off x="2554863" y="1325880"/>
+            <a:ext cx="7079225" cy="4937760"/>
           </a:xfrm>
           <a:prstGeom prst="rect">
             <a:avLst/>
@@ -6373,7 +8484,7 @@
             <a:avLst/>
           </a:prstGeom>
           <a:solidFill>
-            <a:srgbClr val="EDEDF3"/>
+            <a:srgbClr val="FFFFFF"/>
           </a:solidFill>
           <a:ln>
             <a:noFill/>
@@ -6474,51 +8585,43 @@
                 </a:solidFill>
                 <a:latin typeface="JetBrains Mono"/>
               </a:rPr>
-              <a:t>M02  ·  INHALT</a:t>
-            </a:r>
-          </a:p>
-        </p:txBody>
-      </p:sp>
-      <p:sp>
-        <p:nvSpPr>
-          <p:cNvPr id="5" name="Rectangle 4"/>
-          <p:cNvSpPr/>
-          <p:nvPr/>
-        </p:nvSpPr>
-        <p:spPr>
-          <a:xfrm>
-            <a:off x="0" y="1234440"/>
-            <a:ext cx="12188952" cy="12700"/>
-          </a:xfrm>
-          <a:prstGeom prst="rect">
-            <a:avLst/>
-          </a:prstGeom>
-          <a:solidFill>
-            <a:srgbClr val="D8DFE4"/>
-          </a:solidFill>
-          <a:ln>
-            <a:noFill/>
-          </a:ln>
-        </p:spPr>
-        <p:style>
-          <a:lnRef idx="1">
-            <a:schemeClr val="accent1"/>
-          </a:lnRef>
-          <a:fillRef idx="3">
-            <a:schemeClr val="accent1"/>
-          </a:fillRef>
-          <a:effectRef idx="2">
-            <a:schemeClr val="accent1"/>
-          </a:effectRef>
-          <a:fontRef idx="minor">
-            <a:schemeClr val="lt1"/>
-          </a:fontRef>
-        </p:style>
-        <p:txBody>
-          <a:bodyPr rtlCol="0" anchor="ctr"/>
-          <a:lstStyle/>
-          <a:p>
-            <a:pPr algn="ctr"/>
+              <a:t>M02  ·  SCHAUBILD</a:t>
+            </a:r>
+          </a:p>
+        </p:txBody>
+      </p:sp>
+      <p:sp>
+        <p:nvSpPr>
+          <p:cNvPr id="5" name="TextBox 4"/>
+          <p:cNvSpPr txBox="1"/>
+          <p:nvPr/>
+        </p:nvSpPr>
+        <p:spPr>
+          <a:xfrm>
+            <a:off x="685800" y="502920"/>
+            <a:ext cx="10817352" cy="594360"/>
+          </a:xfrm>
+          <a:prstGeom prst="rect">
+            <a:avLst/>
+          </a:prstGeom>
+          <a:noFill/>
+        </p:spPr>
+        <p:txBody>
+          <a:bodyPr wrap="square">
+            <a:spAutoFit/>
+          </a:bodyPr>
+          <a:lstStyle/>
+          <a:p>
+            <a:pPr algn="l"/>
+            <a:r>
+              <a:rPr sz="2000" b="1" i="0">
+                <a:solidFill>
+                  <a:srgbClr val="1F2C56"/>
+                </a:solidFill>
+                <a:latin typeface="Source Serif 4"/>
+              </a:rPr>
+              <a:t>5-Phasen-Rahmen für das strukturierte Bilanzgespräch</a:t>
+            </a:r>
           </a:p>
         </p:txBody>
       </p:sp>
@@ -6530,8 +8633,8 @@
         </p:nvSpPr>
         <p:spPr>
           <a:xfrm>
-            <a:off x="685800" y="502920"/>
-            <a:ext cx="36576" cy="658368"/>
+            <a:off x="685800" y="1143000"/>
+            <a:ext cx="10817352" cy="25400"/>
           </a:xfrm>
           <a:prstGeom prst="rect">
             <a:avLst/>
@@ -6565,219 +8668,33 @@
           </a:p>
         </p:txBody>
       </p:sp>
-      <p:sp>
-        <p:nvSpPr>
-          <p:cNvPr id="7" name="TextBox 6"/>
-          <p:cNvSpPr txBox="1"/>
-          <p:nvPr/>
-        </p:nvSpPr>
-        <p:spPr>
-          <a:xfrm>
-            <a:off x="813816" y="502920"/>
-            <a:ext cx="10634472" cy="685800"/>
-          </a:xfrm>
-          <a:prstGeom prst="rect">
-            <a:avLst/>
-          </a:prstGeom>
-          <a:noFill/>
-        </p:spPr>
-        <p:txBody>
-          <a:bodyPr wrap="square">
-            <a:spAutoFit/>
-          </a:bodyPr>
-          <a:lstStyle/>
-          <a:p>
-            <a:pPr algn="l"/>
-            <a:r>
-              <a:rPr sz="2400" b="1" i="0">
-                <a:solidFill>
-                  <a:srgbClr val="1F2C56"/>
-                </a:solidFill>
-                <a:latin typeface="Source Serif 4"/>
-              </a:rPr>
-              <a:t>Praxiscase: Schwäbische Metallbau GmbH</a:t>
-            </a:r>
-          </a:p>
-        </p:txBody>
-      </p:sp>
-      <p:sp>
-        <p:nvSpPr>
-          <p:cNvPr id="8" name="TextBox 7"/>
-          <p:cNvSpPr txBox="1"/>
-          <p:nvPr/>
-        </p:nvSpPr>
-        <p:spPr>
-          <a:xfrm>
-            <a:off x="685800" y="1417320"/>
-            <a:ext cx="10817352" cy="5029200"/>
-          </a:xfrm>
-          <a:prstGeom prst="rect">
-            <a:avLst/>
-          </a:prstGeom>
-          <a:noFill/>
-        </p:spPr>
-        <p:txBody>
-          <a:bodyPr wrap="square">
-            <a:spAutoFit/>
-          </a:bodyPr>
-          <a:lstStyle/>
-          <a:p>
-            <a:pPr>
-              <a:spcBef>
-                <a:spcPts val="400"/>
-              </a:spcBef>
-              <a:spcAft>
-                <a:spcPts val="200"/>
-              </a:spcAft>
-            </a:pPr>
-            <a:r>
-              <a:rPr sz="1200">
-                <a:solidFill>
-                  <a:srgbClr val="3D5466"/>
-                </a:solidFill>
-                <a:latin typeface="Arial"/>
-              </a:rPr>
-              <a:t>Finanzdaten (fiktiv):</a:t>
-            </a:r>
-          </a:p>
-          <a:p>
-            <a:pPr>
-              <a:spcBef>
-                <a:spcPts val="400"/>
-              </a:spcBef>
-              <a:spcAft>
-                <a:spcPts val="200"/>
-              </a:spcAft>
-            </a:pPr>
-            <a:r>
-              <a:rPr sz="1200">
-                <a:solidFill>
-                  <a:srgbClr val="3D5466"/>
-                </a:solidFill>
-                <a:latin typeface="Arial"/>
-              </a:rPr>
-              <a:t>Quelle: Deutsche Bundesbank, Unternehmensabschlussstatistik (laufend)</a:t>
-            </a:r>
-          </a:p>
-          <a:p>
-            <a:pPr>
-              <a:spcBef>
-                <a:spcPts val="400"/>
-              </a:spcBef>
-              <a:spcAft>
-                <a:spcPts val="200"/>
-              </a:spcAft>
-            </a:pPr>
-            <a:r>
-              <a:rPr sz="1200">
-                <a:solidFill>
-                  <a:srgbClr val="3D5466"/>
-                </a:solidFill>
-                <a:latin typeface="Arial"/>
-              </a:rPr>
-              <a:t>Rollenbeschreibungen:</a:t>
-            </a:r>
-          </a:p>
-          <a:p>
-            <a:pPr>
-              <a:spcBef>
-                <a:spcPts val="400"/>
-              </a:spcBef>
-              <a:spcAft>
-                <a:spcPts val="200"/>
-              </a:spcAft>
-            </a:pPr>
-            <a:r>
-              <a:rPr sz="1200">
-                <a:solidFill>
-                  <a:srgbClr val="3D5466"/>
-                </a:solidFill>
-                <a:latin typeface="Arial"/>
-              </a:rPr>
-              <a:t>Rolle A – Berater (erhält nur diese Informationen — keine Hintergrundinfos)</a:t>
-            </a:r>
-          </a:p>
-          <a:p>
-            <a:pPr>
-              <a:spcBef>
-                <a:spcPts val="400"/>
-              </a:spcBef>
-              <a:spcAft>
-                <a:spcPts val="200"/>
-              </a:spcAft>
-            </a:pPr>
-            <a:r>
-              <a:rPr sz="1200">
-                <a:solidFill>
-                  <a:srgbClr val="3D5466"/>
-                </a:solidFill>
-                <a:latin typeface="Arial"/>
-              </a:rPr>
-              <a:t>Rolle B – GF Martin Klemm (+ Trainer-Karte mit Hintergrundinfos)</a:t>
-            </a:r>
-          </a:p>
-          <a:p>
-            <a:pPr>
-              <a:spcBef>
-                <a:spcPts val="400"/>
-              </a:spcBef>
-              <a:spcAft>
-                <a:spcPts val="200"/>
-              </a:spcAft>
-            </a:pPr>
-            <a:r>
-              <a:rPr sz="1200">
-                <a:solidFill>
-                  <a:srgbClr val="3D5466"/>
-                </a:solidFill>
-                <a:latin typeface="Arial"/>
-              </a:rPr>
-              <a:t>Rolle C – Beobachter: Beobachtungsbogen nutzen (s. u.), konkrete Gesprächssequenzen festhalten, nicht nur Urteile.</a:t>
-            </a:r>
-          </a:p>
-          <a:p>
-            <a:pPr>
-              <a:spcBef>
-                <a:spcPts val="1000"/>
-              </a:spcBef>
-              <a:spcAft>
-                <a:spcPts val="200"/>
-              </a:spcAft>
-            </a:pPr>
-            <a:r>
-              <a:rPr sz="800" b="1">
-                <a:solidFill>
-                  <a:srgbClr val="78808C"/>
-                </a:solidFill>
-                <a:latin typeface="JetBrains Mono"/>
-              </a:rPr>
-              <a:t>BEOBACHTUNGSBOGEN ROLLENSPIEL</a:t>
-            </a:r>
-          </a:p>
-          <a:p>
-            <a:pPr>
-              <a:spcBef>
-                <a:spcPts val="400"/>
-              </a:spcBef>
-              <a:spcAft>
-                <a:spcPts val="200"/>
-              </a:spcAft>
-            </a:pPr>
-            <a:r>
-              <a:rPr sz="1200">
-                <a:solidFill>
-                  <a:srgbClr val="3D5466"/>
-                </a:solidFill>
-                <a:latin typeface="Arial"/>
-              </a:rPr>
-              <a:t>Skala: 1 = gar nicht sichtbar · 3 = ansatzweise · 5 = sehr gut</a:t>
-            </a:r>
-          </a:p>
-        </p:txBody>
-      </p:sp>
-      <p:sp>
-        <p:nvSpPr>
-          <p:cNvPr id="9" name="Rectangle 8"/>
+      <p:pic>
+        <p:nvPicPr>
+          <p:cNvPr id="7" name="Picture 6" descr="image.png"/>
+          <p:cNvPicPr>
+            <a:picLocks noChangeAspect="1"/>
+          </p:cNvPicPr>
+          <p:nvPr/>
+        </p:nvPicPr>
+        <p:blipFill>
+          <a:blip r:embed="rId2"/>
+          <a:stretch>
+            <a:fillRect/>
+          </a:stretch>
+        </p:blipFill>
+        <p:spPr>
+          <a:xfrm>
+            <a:off x="1670951" y="1325880"/>
+            <a:ext cx="8847050" cy="4937760"/>
+          </a:xfrm>
+          <a:prstGeom prst="rect">
+            <a:avLst/>
+          </a:prstGeom>
+        </p:spPr>
+      </p:pic>
+      <p:sp>
+        <p:nvSpPr>
+          <p:cNvPr id="8" name="Rectangle 7"/>
           <p:cNvSpPr/>
           <p:nvPr/>
         </p:nvSpPr>
@@ -6820,7 +8737,7 @@
       </p:sp>
       <p:sp>
         <p:nvSpPr>
-          <p:cNvPr id="10" name="TextBox 9"/>
+          <p:cNvPr id="9" name="TextBox 8"/>
           <p:cNvSpPr txBox="1"/>
           <p:nvPr/>
         </p:nvSpPr>
@@ -6849,6 +8766,41 @@
                 <a:latin typeface="JetBrains Mono"/>
               </a:rPr>
               <a:t>Benedikt Zoller Coaching  ·  FKB Campus  ·  M02</a:t>
+            </a:r>
+          </a:p>
+        </p:txBody>
+      </p:sp>
+      <p:sp>
+        <p:nvSpPr>
+          <p:cNvPr id="10" name="TextBox 9"/>
+          <p:cNvSpPr txBox="1"/>
+          <p:nvPr/>
+        </p:nvSpPr>
+        <p:spPr>
+          <a:xfrm>
+            <a:off x="7176211" y="6583680"/>
+            <a:ext cx="4326940" cy="256032"/>
+          </a:xfrm>
+          <a:prstGeom prst="rect">
+            <a:avLst/>
+          </a:prstGeom>
+          <a:noFill/>
+        </p:spPr>
+        <p:txBody>
+          <a:bodyPr wrap="none">
+            <a:spAutoFit/>
+          </a:bodyPr>
+          <a:lstStyle/>
+          <a:p>
+            <a:pPr algn="r"/>
+            <a:r>
+              <a:rPr sz="700">
+                <a:solidFill>
+                  <a:srgbClr val="A0B4D2"/>
+                </a:solidFill>
+                <a:latin typeface="JetBrains Mono"/>
+              </a:rPr>
+              <a:t>Schaubild</a:t>
             </a:r>
           </a:p>
         </p:txBody>
@@ -7108,7 +9060,7 @@
                 </a:solidFill>
                 <a:latin typeface="Source Serif 4"/>
               </a:rPr>
-              <a:t>Checkliste: Bilanzgespräch vorbereiten</a:t>
+              <a:t>Praxiscase: Schwäbische Metallbau GmbH</a:t>
             </a:r>
           </a:p>
         </p:txBody>
@@ -7144,13 +9096,13 @@
               </a:spcAft>
             </a:pPr>
             <a:r>
-              <a:rPr sz="1200">
+              <a:rPr sz="1300">
                 <a:solidFill>
                   <a:srgbClr val="3D5466"/>
                 </a:solidFill>
                 <a:latin typeface="Arial"/>
               </a:rPr>
-              <a:t>Vor dem Gespräch:</a:t>
+              <a:t>▸  Finanzdaten (fiktiv):</a:t>
             </a:r>
           </a:p>
           <a:p>
@@ -7169,7 +9121,7 @@
                 </a:solidFill>
                 <a:latin typeface="Arial"/>
               </a:rPr>
-              <a:t>▸  [ ] Jahresabschluss und Vorjahresvergleich ausgewertet</a:t>
+              <a:t>▸  Quelle: Deutsche Bundesbank, Unternehmensabschlussstatistik (laufend)</a:t>
             </a:r>
           </a:p>
           <a:p>
@@ -7188,7 +9140,7 @@
                 </a:solidFill>
                 <a:latin typeface="Arial"/>
               </a:rPr>
-              <a:t>▸  [ ] 4+ Kennzahlen berechnet, Branchenvergleich notiert</a:t>
+              <a:t>▸  Rollenbeschreibungen:</a:t>
             </a:r>
           </a:p>
           <a:p>
@@ -7207,7 +9159,7 @@
                 </a:solidFill>
                 <a:latin typeface="Arial"/>
               </a:rPr>
-              <a:t>▸  [ ] 5 offene Fragen schriftlich vorbereitet</a:t>
+              <a:t>▸  Rolle A – Berater (erhält nur diese Informationen — keine Hintergrundinfos)</a:t>
             </a:r>
           </a:p>
           <a:p>
@@ -7226,7 +9178,7 @@
                 </a:solidFill>
                 <a:latin typeface="Arial"/>
               </a:rPr>
-              <a:t>▸  [ ] Gesprächsziel definiert</a:t>
+              <a:t>▸  Rolle B – GF Martin Klemm (+ Trainer-Karte mit Hintergrundinfos)</a:t>
             </a:r>
           </a:p>
           <a:p>
@@ -7245,7 +9197,26 @@
                 </a:solidFill>
                 <a:latin typeface="Arial"/>
               </a:rPr>
-              <a:t>▸  [ ] Kreditlinie / § 18 KWG-Unterlagen geprüft</a:t>
+              <a:t>▸  Rolle C – Beobachter: Beobachtungsbogen nutzen (s. u.), konkrete Gesprächssequenzen festhalten, nicht nur Urteile.</a:t>
+            </a:r>
+          </a:p>
+          <a:p>
+            <a:pPr>
+              <a:spcBef>
+                <a:spcPts val="1000"/>
+              </a:spcBef>
+              <a:spcAft>
+                <a:spcPts val="200"/>
+              </a:spcAft>
+            </a:pPr>
+            <a:r>
+              <a:rPr sz="800" b="1">
+                <a:solidFill>
+                  <a:srgbClr val="78808C"/>
+                </a:solidFill>
+                <a:latin typeface="JetBrains Mono"/>
+              </a:rPr>
+              <a:t>BEOBACHTUNGSBOGEN ROLLENSPIEL</a:t>
             </a:r>
           </a:p>
           <a:p>
@@ -7264,102 +9235,7 @@
                 </a:solidFill>
                 <a:latin typeface="Arial"/>
               </a:rPr>
-              <a:t>▸  [ ] Verbundpartner-Bedarf gesichtet (R+V, Union Investment, DZ BANK)</a:t>
-            </a:r>
-          </a:p>
-          <a:p>
-            <a:pPr>
-              <a:spcBef>
-                <a:spcPts val="400"/>
-              </a:spcBef>
-              <a:spcAft>
-                <a:spcPts val="200"/>
-              </a:spcAft>
-            </a:pPr>
-            <a:r>
-              <a:rPr sz="1200">
-                <a:solidFill>
-                  <a:srgbClr val="3D5466"/>
-                </a:solidFill>
-                <a:latin typeface="Arial"/>
-              </a:rPr>
-              <a:t>Im Gespräch:</a:t>
-            </a:r>
-          </a:p>
-          <a:p>
-            <a:pPr>
-              <a:spcBef>
-                <a:spcPts val="400"/>
-              </a:spcBef>
-              <a:spcAft>
-                <a:spcPts val="200"/>
-              </a:spcAft>
-            </a:pPr>
-            <a:r>
-              <a:rPr sz="1300">
-                <a:solidFill>
-                  <a:srgbClr val="3D5466"/>
-                </a:solidFill>
-                <a:latin typeface="Arial"/>
-              </a:rPr>
-              <a:t>▸  [ ] Positiver Einstieg, Agenda gesetzt</a:t>
-            </a:r>
-          </a:p>
-          <a:p>
-            <a:pPr>
-              <a:spcBef>
-                <a:spcPts val="400"/>
-              </a:spcBef>
-              <a:spcAft>
-                <a:spcPts val="200"/>
-              </a:spcAft>
-            </a:pPr>
-            <a:r>
-              <a:rPr sz="1300">
-                <a:solidFill>
-                  <a:srgbClr val="3D5466"/>
-                </a:solidFill>
-                <a:latin typeface="Arial"/>
-              </a:rPr>
-              <a:t>▸  [ ] Mindestens 40 % Redezeit für den Kunden</a:t>
-            </a:r>
-          </a:p>
-          <a:p>
-            <a:pPr>
-              <a:spcBef>
-                <a:spcPts val="400"/>
-              </a:spcBef>
-              <a:spcAft>
-                <a:spcPts val="200"/>
-              </a:spcAft>
-            </a:pPr>
-            <a:r>
-              <a:rPr sz="1300">
-                <a:solidFill>
-                  <a:srgbClr val="3D5466"/>
-                </a:solidFill>
-                <a:latin typeface="Arial"/>
-              </a:rPr>
-              <a:t>▸  [ ] Kritische Punkte mit offener Frage angesprochen</a:t>
-            </a:r>
-          </a:p>
-          <a:p>
-            <a:pPr>
-              <a:spcBef>
-                <a:spcPts val="400"/>
-              </a:spcBef>
-              <a:spcAft>
-                <a:spcPts val="200"/>
-              </a:spcAft>
-            </a:pPr>
-            <a:r>
-              <a:rPr sz="1300">
-                <a:solidFill>
-                  <a:srgbClr val="3D5466"/>
-                </a:solidFill>
-                <a:latin typeface="Arial"/>
-              </a:rPr>
-              <a:t>▸  [ ] Handlungsoptionen gemeinsam entwickelt</a:t>
+              <a:t>▸  Skala: 1 = gar nicht sichtbar · 3 = ansatzweise · 5 = sehr gut</a:t>
             </a:r>
           </a:p>
         </p:txBody>
@@ -7475,7 +9351,7 @@
             <a:avLst/>
           </a:prstGeom>
           <a:solidFill>
-            <a:srgbClr val="EDEDF3"/>
+            <a:srgbClr val="FFFFFF"/>
           </a:solidFill>
           <a:ln>
             <a:noFill/>
@@ -7576,51 +9452,43 @@
                 </a:solidFill>
                 <a:latin typeface="JetBrains Mono"/>
               </a:rPr>
-              <a:t>M02  ·  INHALT</a:t>
-            </a:r>
-          </a:p>
-        </p:txBody>
-      </p:sp>
-      <p:sp>
-        <p:nvSpPr>
-          <p:cNvPr id="5" name="Rectangle 4"/>
-          <p:cNvSpPr/>
-          <p:nvPr/>
-        </p:nvSpPr>
-        <p:spPr>
-          <a:xfrm>
-            <a:off x="0" y="1234440"/>
-            <a:ext cx="12188952" cy="12700"/>
-          </a:xfrm>
-          <a:prstGeom prst="rect">
-            <a:avLst/>
-          </a:prstGeom>
-          <a:solidFill>
-            <a:srgbClr val="D8DFE4"/>
-          </a:solidFill>
-          <a:ln>
-            <a:noFill/>
-          </a:ln>
-        </p:spPr>
-        <p:style>
-          <a:lnRef idx="1">
-            <a:schemeClr val="accent1"/>
-          </a:lnRef>
-          <a:fillRef idx="3">
-            <a:schemeClr val="accent1"/>
-          </a:fillRef>
-          <a:effectRef idx="2">
-            <a:schemeClr val="accent1"/>
-          </a:effectRef>
-          <a:fontRef idx="minor">
-            <a:schemeClr val="lt1"/>
-          </a:fontRef>
-        </p:style>
-        <p:txBody>
-          <a:bodyPr rtlCol="0" anchor="ctr"/>
-          <a:lstStyle/>
-          <a:p>
-            <a:pPr algn="ctr"/>
+              <a:t>M02  ·  ÜBERSICHT</a:t>
+            </a:r>
+          </a:p>
+        </p:txBody>
+      </p:sp>
+      <p:sp>
+        <p:nvSpPr>
+          <p:cNvPr id="5" name="TextBox 4"/>
+          <p:cNvSpPr txBox="1"/>
+          <p:nvPr/>
+        </p:nvSpPr>
+        <p:spPr>
+          <a:xfrm>
+            <a:off x="685800" y="502920"/>
+            <a:ext cx="10817352" cy="594360"/>
+          </a:xfrm>
+          <a:prstGeom prst="rect">
+            <a:avLst/>
+          </a:prstGeom>
+          <a:noFill/>
+        </p:spPr>
+        <p:txBody>
+          <a:bodyPr wrap="square">
+            <a:spAutoFit/>
+          </a:bodyPr>
+          <a:lstStyle/>
+          <a:p>
+            <a:pPr algn="l"/>
+            <a:r>
+              <a:rPr sz="2000" b="1" i="0">
+                <a:solidFill>
+                  <a:srgbClr val="1F2C56"/>
+                </a:solidFill>
+                <a:latin typeface="Source Serif 4"/>
+              </a:rPr>
+              <a:t>Praxiscase: Schwäbische Metallbau GmbH</a:t>
+            </a:r>
           </a:p>
         </p:txBody>
       </p:sp>
@@ -7632,8 +9500,8 @@
         </p:nvSpPr>
         <p:spPr>
           <a:xfrm>
-            <a:off x="685800" y="502920"/>
-            <a:ext cx="36576" cy="658368"/>
+            <a:off x="685800" y="1143000"/>
+            <a:ext cx="10817352" cy="25400"/>
           </a:xfrm>
           <a:prstGeom prst="rect">
             <a:avLst/>
@@ -7667,143 +9535,497 @@
           </a:p>
         </p:txBody>
       </p:sp>
-      <p:sp>
-        <p:nvSpPr>
-          <p:cNvPr id="7" name="TextBox 6"/>
-          <p:cNvSpPr txBox="1"/>
-          <p:nvPr/>
-        </p:nvSpPr>
-        <p:spPr>
-          <a:xfrm>
-            <a:off x="813816" y="502920"/>
-            <a:ext cx="10634472" cy="685800"/>
-          </a:xfrm>
-          <a:prstGeom prst="rect">
-            <a:avLst/>
-          </a:prstGeom>
-          <a:noFill/>
-        </p:spPr>
-        <p:txBody>
-          <a:bodyPr wrap="square">
-            <a:spAutoFit/>
-          </a:bodyPr>
-          <a:lstStyle/>
-          <a:p>
-            <a:pPr algn="l"/>
-            <a:r>
-              <a:rPr sz="2400" b="1" i="0">
-                <a:solidFill>
-                  <a:srgbClr val="1F2C56"/>
-                </a:solidFill>
-                <a:latin typeface="Source Serif 4"/>
-              </a:rPr>
-              <a:t>Reflexionsfragen</a:t>
-            </a:r>
-          </a:p>
-        </p:txBody>
-      </p:sp>
-      <p:sp>
-        <p:nvSpPr>
-          <p:cNvPr id="8" name="TextBox 7"/>
-          <p:cNvSpPr txBox="1"/>
-          <p:nvPr/>
-        </p:nvSpPr>
-        <p:spPr>
-          <a:xfrm>
-            <a:off x="685800" y="1417320"/>
-            <a:ext cx="10817352" cy="5029200"/>
-          </a:xfrm>
-          <a:prstGeom prst="rect">
-            <a:avLst/>
-          </a:prstGeom>
-          <a:noFill/>
-        </p:spPr>
-        <p:txBody>
-          <a:bodyPr wrap="square">
-            <a:spAutoFit/>
-          </a:bodyPr>
-          <a:lstStyle/>
-          <a:p>
-            <a:pPr>
-              <a:spcBef>
-                <a:spcPts val="400"/>
-              </a:spcBef>
-              <a:spcAft>
-                <a:spcPts val="200"/>
-              </a:spcAft>
-            </a:pPr>
-            <a:r>
-              <a:rPr sz="1300">
-                <a:solidFill>
-                  <a:srgbClr val="3D5466"/>
-                </a:solidFill>
-                <a:latin typeface="Arial"/>
-              </a:rPr>
-              <a:t>▸  An welcher Stelle im Rollenspiel haben Sie sich am wohlsten gefühlt? Warum?</a:t>
-            </a:r>
-          </a:p>
-          <a:p>
-            <a:pPr>
-              <a:spcBef>
-                <a:spcPts val="400"/>
-              </a:spcBef>
-              <a:spcAft>
-                <a:spcPts val="200"/>
-              </a:spcAft>
-            </a:pPr>
-            <a:r>
-              <a:rPr sz="1300">
-                <a:solidFill>
-                  <a:srgbClr val="3D5466"/>
-                </a:solidFill>
-                <a:latin typeface="Arial"/>
-              </a:rPr>
-              <a:t>▸  Wo haben Sie gemerkt, dass Ihnen eine Technik noch nicht in Fleisch und Blut übergegangen ist?</a:t>
-            </a:r>
-          </a:p>
-          <a:p>
-            <a:pPr>
-              <a:spcBef>
-                <a:spcPts val="400"/>
-              </a:spcBef>
-              <a:spcAft>
-                <a:spcPts val="200"/>
-              </a:spcAft>
-            </a:pPr>
-            <a:r>
-              <a:rPr sz="1300">
-                <a:solidFill>
-                  <a:srgbClr val="3D5466"/>
-                </a:solidFill>
-                <a:latin typeface="Arial"/>
-              </a:rPr>
-              <a:t>▸  Welchen konkreten Kunden würden Sie gerne beim nächsten Gespräch mit den neuen Techniken ansprechen?</a:t>
-            </a:r>
-          </a:p>
-          <a:p>
-            <a:pPr>
-              <a:spcBef>
-                <a:spcPts val="400"/>
-              </a:spcBef>
-              <a:spcAft>
-                <a:spcPts val="200"/>
-              </a:spcAft>
-            </a:pPr>
-            <a:r>
-              <a:rPr sz="1300">
-                <a:solidFill>
-                  <a:srgbClr val="3D5466"/>
-                </a:solidFill>
-                <a:latin typeface="Arial"/>
-              </a:rPr>
-              <a:t>▸  Was nehmen Sie sich vor, beim nächsten echten Bilanzgespräch anders zu machen?</a:t>
-            </a:r>
-          </a:p>
-        </p:txBody>
-      </p:sp>
-      <p:sp>
-        <p:nvSpPr>
-          <p:cNvPr id="9" name="Rectangle 8"/>
+      <p:graphicFrame>
+        <p:nvGraphicFramePr>
+          <p:cNvPr id="7" name="Table 6"/>
+          <p:cNvGraphicFramePr>
+            <a:graphicFrameLocks noGrp="1"/>
+          </p:cNvGraphicFramePr>
+          <p:nvPr/>
+        </p:nvGraphicFramePr>
+        <p:xfrm>
+          <a:off x="685800" y="1417320"/>
+          <a:ext cx="10817352" cy="2304288"/>
+        </p:xfrm>
+        <a:graphic>
+          <a:graphicData uri="http://schemas.openxmlformats.org/drawingml/2006/table">
+            <a:tbl>
+              <a:tblPr firstRow="1" bandRow="1">
+                <a:tableStyleId>{5C22544A-7EE6-4342-B048-85BDC9FD1C3A}</a:tableStyleId>
+              </a:tblPr>
+              <a:tblGrid>
+                <a:gridCol w="2704338"/>
+                <a:gridCol w="2704338"/>
+                <a:gridCol w="2704338"/>
+                <a:gridCol w="2704338"/>
+              </a:tblGrid>
+              <a:tr h="384048">
+                <a:tc>
+                  <a:txBody>
+                    <a:bodyPr/>
+                    <a:lstStyle/>
+                    <a:p>
+                      <a:r>
+                        <a:rPr sz="1100" b="1">
+                          <a:solidFill>
+                            <a:srgbClr val="FFFFFF"/>
+                          </a:solidFill>
+                          <a:latin typeface="Arial"/>
+                        </a:rPr>
+                        <a:t>Kennzahl</a:t>
+                      </a:r>
+                    </a:p>
+                  </a:txBody>
+                  <a:tcPr>
+                    <a:solidFill>
+                      <a:srgbClr val="1F2C56"/>
+                    </a:solidFill>
+                  </a:tcPr>
+                </a:tc>
+                <a:tc>
+                  <a:txBody>
+                    <a:bodyPr/>
+                    <a:lstStyle/>
+                    <a:p>
+                      <a:r>
+                        <a:rPr sz="1100" b="1">
+                          <a:solidFill>
+                            <a:srgbClr val="FFFFFF"/>
+                          </a:solidFill>
+                          <a:latin typeface="Arial"/>
+                        </a:rPr>
+                        <a:t>2024</a:t>
+                      </a:r>
+                    </a:p>
+                  </a:txBody>
+                  <a:tcPr>
+                    <a:solidFill>
+                      <a:srgbClr val="1F2C56"/>
+                    </a:solidFill>
+                  </a:tcPr>
+                </a:tc>
+                <a:tc>
+                  <a:txBody>
+                    <a:bodyPr/>
+                    <a:lstStyle/>
+                    <a:p>
+                      <a:r>
+                        <a:rPr sz="1100" b="1">
+                          <a:solidFill>
+                            <a:srgbClr val="FFFFFF"/>
+                          </a:solidFill>
+                          <a:latin typeface="Arial"/>
+                        </a:rPr>
+                        <a:t>2025</a:t>
+                      </a:r>
+                    </a:p>
+                  </a:txBody>
+                  <a:tcPr>
+                    <a:solidFill>
+                      <a:srgbClr val="1F2C56"/>
+                    </a:solidFill>
+                  </a:tcPr>
+                </a:tc>
+                <a:tc>
+                  <a:txBody>
+                    <a:bodyPr/>
+                    <a:lstStyle/>
+                    <a:p>
+                      <a:r>
+                        <a:rPr sz="1100" b="1">
+                          <a:solidFill>
+                            <a:srgbClr val="FFFFFF"/>
+                          </a:solidFill>
+                          <a:latin typeface="Arial"/>
+                        </a:rPr>
+                        <a:t>Branche (Ø)</a:t>
+                      </a:r>
+                    </a:p>
+                  </a:txBody>
+                  <a:tcPr>
+                    <a:solidFill>
+                      <a:srgbClr val="1F2C56"/>
+                    </a:solidFill>
+                  </a:tcPr>
+                </a:tc>
+              </a:tr>
+              <a:tr h="384048">
+                <a:tc>
+                  <a:txBody>
+                    <a:bodyPr/>
+                    <a:lstStyle/>
+                    <a:p>
+                      <a:r>
+                        <a:rPr sz="1050">
+                          <a:solidFill>
+                            <a:srgbClr val="3D5466"/>
+                          </a:solidFill>
+                          <a:latin typeface="Arial"/>
+                        </a:rPr>
+                        <a:t>Eigenkapitalquote</a:t>
+                      </a:r>
+                    </a:p>
+                  </a:txBody>
+                  <a:tcPr/>
+                </a:tc>
+                <a:tc>
+                  <a:txBody>
+                    <a:bodyPr/>
+                    <a:lstStyle/>
+                    <a:p>
+                      <a:r>
+                        <a:rPr sz="1050">
+                          <a:solidFill>
+                            <a:srgbClr val="3D5466"/>
+                          </a:solidFill>
+                          <a:latin typeface="Arial"/>
+                        </a:rPr>
+                        <a:t>22,4 %</a:t>
+                      </a:r>
+                    </a:p>
+                  </a:txBody>
+                  <a:tcPr/>
+                </a:tc>
+                <a:tc>
+                  <a:txBody>
+                    <a:bodyPr/>
+                    <a:lstStyle/>
+                    <a:p>
+                      <a:r>
+                        <a:rPr sz="1050">
+                          <a:solidFill>
+                            <a:srgbClr val="3D5466"/>
+                          </a:solidFill>
+                          <a:latin typeface="Arial"/>
+                        </a:rPr>
+                        <a:t>15,1 %</a:t>
+                      </a:r>
+                    </a:p>
+                  </a:txBody>
+                  <a:tcPr/>
+                </a:tc>
+                <a:tc>
+                  <a:txBody>
+                    <a:bodyPr/>
+                    <a:lstStyle/>
+                    <a:p>
+                      <a:r>
+                        <a:rPr sz="1050">
+                          <a:solidFill>
+                            <a:srgbClr val="3D5466"/>
+                          </a:solidFill>
+                          <a:latin typeface="Arial"/>
+                        </a:rPr>
+                        <a:t>28–32 %</a:t>
+                      </a:r>
+                    </a:p>
+                  </a:txBody>
+                  <a:tcPr/>
+                </a:tc>
+              </a:tr>
+              <a:tr h="384048">
+                <a:tc>
+                  <a:txBody>
+                    <a:bodyPr/>
+                    <a:lstStyle/>
+                    <a:p>
+                      <a:r>
+                        <a:rPr sz="1050">
+                          <a:solidFill>
+                            <a:srgbClr val="3D5466"/>
+                          </a:solidFill>
+                          <a:latin typeface="Arial"/>
+                        </a:rPr>
+                        <a:t>Liquidität 2. Grades</a:t>
+                      </a:r>
+                    </a:p>
+                  </a:txBody>
+                  <a:tcPr/>
+                </a:tc>
+                <a:tc>
+                  <a:txBody>
+                    <a:bodyPr/>
+                    <a:lstStyle/>
+                    <a:p>
+                      <a:r>
+                        <a:rPr sz="1050">
+                          <a:solidFill>
+                            <a:srgbClr val="3D5466"/>
+                          </a:solidFill>
+                          <a:latin typeface="Arial"/>
+                        </a:rPr>
+                        <a:t>1,18</a:t>
+                      </a:r>
+                    </a:p>
+                  </a:txBody>
+                  <a:tcPr/>
+                </a:tc>
+                <a:tc>
+                  <a:txBody>
+                    <a:bodyPr/>
+                    <a:lstStyle/>
+                    <a:p>
+                      <a:r>
+                        <a:rPr sz="1050">
+                          <a:solidFill>
+                            <a:srgbClr val="3D5466"/>
+                          </a:solidFill>
+                          <a:latin typeface="Arial"/>
+                        </a:rPr>
+                        <a:t>0,94</a:t>
+                      </a:r>
+                    </a:p>
+                  </a:txBody>
+                  <a:tcPr/>
+                </a:tc>
+                <a:tc>
+                  <a:txBody>
+                    <a:bodyPr/>
+                    <a:lstStyle/>
+                    <a:p>
+                      <a:r>
+                        <a:rPr sz="1050">
+                          <a:solidFill>
+                            <a:srgbClr val="3D5466"/>
+                          </a:solidFill>
+                          <a:latin typeface="Arial"/>
+                        </a:rPr>
+                        <a:t>&gt; 1,0</a:t>
+                      </a:r>
+                    </a:p>
+                  </a:txBody>
+                  <a:tcPr/>
+                </a:tc>
+              </a:tr>
+              <a:tr h="384048">
+                <a:tc>
+                  <a:txBody>
+                    <a:bodyPr/>
+                    <a:lstStyle/>
+                    <a:p>
+                      <a:r>
+                        <a:rPr sz="1050">
+                          <a:solidFill>
+                            <a:srgbClr val="3D5466"/>
+                          </a:solidFill>
+                          <a:latin typeface="Arial"/>
+                        </a:rPr>
+                        <a:t>Verschuldungsgrad (FK/EK)</a:t>
+                      </a:r>
+                    </a:p>
+                  </a:txBody>
+                  <a:tcPr/>
+                </a:tc>
+                <a:tc>
+                  <a:txBody>
+                    <a:bodyPr/>
+                    <a:lstStyle/>
+                    <a:p>
+                      <a:r>
+                        <a:rPr sz="1050">
+                          <a:solidFill>
+                            <a:srgbClr val="3D5466"/>
+                          </a:solidFill>
+                          <a:latin typeface="Arial"/>
+                        </a:rPr>
+                        <a:t>3,5x</a:t>
+                      </a:r>
+                    </a:p>
+                  </a:txBody>
+                  <a:tcPr/>
+                </a:tc>
+                <a:tc>
+                  <a:txBody>
+                    <a:bodyPr/>
+                    <a:lstStyle/>
+                    <a:p>
+                      <a:r>
+                        <a:rPr sz="1050">
+                          <a:solidFill>
+                            <a:srgbClr val="3D5466"/>
+                          </a:solidFill>
+                          <a:latin typeface="Arial"/>
+                        </a:rPr>
+                        <a:t>5,6x</a:t>
+                      </a:r>
+                    </a:p>
+                  </a:txBody>
+                  <a:tcPr/>
+                </a:tc>
+                <a:tc>
+                  <a:txBody>
+                    <a:bodyPr/>
+                    <a:lstStyle/>
+                    <a:p>
+                      <a:r>
+                        <a:rPr sz="1050">
+                          <a:solidFill>
+                            <a:srgbClr val="3D5466"/>
+                          </a:solidFill>
+                          <a:latin typeface="Arial"/>
+                        </a:rPr>
+                        <a:t>2,5–3,5x</a:t>
+                      </a:r>
+                    </a:p>
+                  </a:txBody>
+                  <a:tcPr/>
+                </a:tc>
+              </a:tr>
+              <a:tr h="384048">
+                <a:tc>
+                  <a:txBody>
+                    <a:bodyPr/>
+                    <a:lstStyle/>
+                    <a:p>
+                      <a:r>
+                        <a:rPr sz="1050">
+                          <a:solidFill>
+                            <a:srgbClr val="3D5466"/>
+                          </a:solidFill>
+                          <a:latin typeface="Arial"/>
+                        </a:rPr>
+                        <a:t>EBIT-Marge</a:t>
+                      </a:r>
+                    </a:p>
+                  </a:txBody>
+                  <a:tcPr/>
+                </a:tc>
+                <a:tc>
+                  <a:txBody>
+                    <a:bodyPr/>
+                    <a:lstStyle/>
+                    <a:p>
+                      <a:r>
+                        <a:rPr sz="1050">
+                          <a:solidFill>
+                            <a:srgbClr val="3D5466"/>
+                          </a:solidFill>
+                          <a:latin typeface="Arial"/>
+                        </a:rPr>
+                        <a:t>4,1 %</a:t>
+                      </a:r>
+                    </a:p>
+                  </a:txBody>
+                  <a:tcPr/>
+                </a:tc>
+                <a:tc>
+                  <a:txBody>
+                    <a:bodyPr/>
+                    <a:lstStyle/>
+                    <a:p>
+                      <a:r>
+                        <a:rPr sz="1050">
+                          <a:solidFill>
+                            <a:srgbClr val="3D5466"/>
+                          </a:solidFill>
+                          <a:latin typeface="Arial"/>
+                        </a:rPr>
+                        <a:t>2,8 %</a:t>
+                      </a:r>
+                    </a:p>
+                  </a:txBody>
+                  <a:tcPr/>
+                </a:tc>
+                <a:tc>
+                  <a:txBody>
+                    <a:bodyPr/>
+                    <a:lstStyle/>
+                    <a:p>
+                      <a:r>
+                        <a:rPr sz="1050">
+                          <a:solidFill>
+                            <a:srgbClr val="3D5466"/>
+                          </a:solidFill>
+                          <a:latin typeface="Arial"/>
+                        </a:rPr>
+                        <a:t>4–6 %</a:t>
+                      </a:r>
+                    </a:p>
+                  </a:txBody>
+                  <a:tcPr/>
+                </a:tc>
+              </a:tr>
+              <a:tr h="384048">
+                <a:tc>
+                  <a:txBody>
+                    <a:bodyPr/>
+                    <a:lstStyle/>
+                    <a:p>
+                      <a:r>
+                        <a:rPr sz="1050">
+                          <a:solidFill>
+                            <a:srgbClr val="3D5466"/>
+                          </a:solidFill>
+                          <a:latin typeface="Arial"/>
+                        </a:rPr>
+                        <a:t>Personalaufwandsquote</a:t>
+                      </a:r>
+                    </a:p>
+                  </a:txBody>
+                  <a:tcPr/>
+                </a:tc>
+                <a:tc>
+                  <a:txBody>
+                    <a:bodyPr/>
+                    <a:lstStyle/>
+                    <a:p>
+                      <a:r>
+                        <a:rPr sz="1050">
+                          <a:solidFill>
+                            <a:srgbClr val="3D5466"/>
+                          </a:solidFill>
+                          <a:latin typeface="Arial"/>
+                        </a:rPr>
+                        <a:t>38 %</a:t>
+                      </a:r>
+                    </a:p>
+                  </a:txBody>
+                  <a:tcPr/>
+                </a:tc>
+                <a:tc>
+                  <a:txBody>
+                    <a:bodyPr/>
+                    <a:lstStyle/>
+                    <a:p>
+                      <a:r>
+                        <a:rPr sz="1050">
+                          <a:solidFill>
+                            <a:srgbClr val="3D5466"/>
+                          </a:solidFill>
+                          <a:latin typeface="Arial"/>
+                        </a:rPr>
+                        <a:t>44 %</a:t>
+                      </a:r>
+                    </a:p>
+                  </a:txBody>
+                  <a:tcPr/>
+                </a:tc>
+                <a:tc>
+                  <a:txBody>
+                    <a:bodyPr/>
+                    <a:lstStyle/>
+                    <a:p>
+                      <a:r>
+                        <a:rPr sz="1050">
+                          <a:solidFill>
+                            <a:srgbClr val="3D5466"/>
+                          </a:solidFill>
+                          <a:latin typeface="Arial"/>
+                        </a:rPr>
+                        <a:t>38–42 %</a:t>
+                      </a:r>
+                    </a:p>
+                  </a:txBody>
+                  <a:tcPr/>
+                </a:tc>
+              </a:tr>
+            </a:tbl>
+          </a:graphicData>
+        </a:graphic>
+      </p:graphicFrame>
+      <p:sp>
+        <p:nvSpPr>
+          <p:cNvPr id="8" name="Rectangle 7"/>
           <p:cNvSpPr/>
           <p:nvPr/>
         </p:nvSpPr>
@@ -7846,7 +10068,7 @@
       </p:sp>
       <p:sp>
         <p:nvSpPr>
-          <p:cNvPr id="10" name="TextBox 9"/>
+          <p:cNvPr id="9" name="TextBox 8"/>
           <p:cNvSpPr txBox="1"/>
           <p:nvPr/>
         </p:nvSpPr>
@@ -7875,6 +10097,41 @@
                 <a:latin typeface="JetBrains Mono"/>
               </a:rPr>
               <a:t>Benedikt Zoller Coaching  ·  FKB Campus  ·  M02</a:t>
+            </a:r>
+          </a:p>
+        </p:txBody>
+      </p:sp>
+      <p:sp>
+        <p:nvSpPr>
+          <p:cNvPr id="10" name="TextBox 9"/>
+          <p:cNvSpPr txBox="1"/>
+          <p:nvPr/>
+        </p:nvSpPr>
+        <p:spPr>
+          <a:xfrm>
+            <a:off x="7176211" y="6583680"/>
+            <a:ext cx="4326940" cy="256032"/>
+          </a:xfrm>
+          <a:prstGeom prst="rect">
+            <a:avLst/>
+          </a:prstGeom>
+          <a:noFill/>
+        </p:spPr>
+        <p:txBody>
+          <a:bodyPr wrap="none">
+            <a:spAutoFit/>
+          </a:bodyPr>
+          <a:lstStyle/>
+          <a:p>
+            <a:pPr algn="r"/>
+            <a:r>
+              <a:rPr sz="700">
+                <a:solidFill>
+                  <a:srgbClr val="A0B4D2"/>
+                </a:solidFill>
+                <a:latin typeface="JetBrains Mono"/>
+              </a:rPr>
+              <a:t>Übersicht</a:t>
             </a:r>
           </a:p>
         </p:txBody>

--- a/protected-downloads/praesentation/M02.pptx
+++ b/protected-downloads/praesentation/M02.pptx
@@ -4316,7 +4316,7 @@
                 </a:solidFill>
                 <a:latin typeface="JetBrains Mono"/>
               </a:rPr>
-              <a:t>Benedikt Zoller Coaching  ·  FKB Campus  ·  2026</a:t>
+              <a:t>FKB Campus  ·  2026</a:t>
             </a:r>
           </a:p>
         </p:txBody>
@@ -4957,7 +4957,7 @@
                 </a:solidFill>
                 <a:latin typeface="JetBrains Mono"/>
               </a:rPr>
-              <a:t>Benedikt Zoller Coaching  ·  FKB Campus  ·  M02</a:t>
+              <a:t>FKB Campus  ·  M02</a:t>
             </a:r>
           </a:p>
         </p:txBody>
@@ -5581,7 +5581,7 @@
                 </a:solidFill>
                 <a:latin typeface="JetBrains Mono"/>
               </a:rPr>
-              <a:t>Benedikt Zoller Coaching  ·  FKB Campus  ·  M02</a:t>
+              <a:t>FKB Campus  ·  M02</a:t>
             </a:r>
           </a:p>
         </p:txBody>
@@ -6018,7 +6018,7 @@
                 </a:solidFill>
                 <a:latin typeface="JetBrains Mono"/>
               </a:rPr>
-              <a:t>Benedikt Zoller Coaching  ·  FKB Campus  ·  M02</a:t>
+              <a:t>FKB Campus  ·  M02</a:t>
             </a:r>
           </a:p>
         </p:txBody>
@@ -6384,7 +6384,7 @@
                 </a:solidFill>
                 <a:latin typeface="JetBrains Mono"/>
               </a:rPr>
-              <a:t>Benedikt Zoller Coaching  ·  FKB Campus  ·  M02</a:t>
+              <a:t>FKB Campus  ·  M02</a:t>
             </a:r>
           </a:p>
         </p:txBody>
@@ -6778,7 +6778,7 @@
                 </a:solidFill>
                 <a:latin typeface="JetBrains Mono"/>
               </a:rPr>
-              <a:t>Benedikt Zoller Coaching  ·  FKB Campus  ·  M02</a:t>
+              <a:t>FKB Campus  ·  M02</a:t>
             </a:r>
           </a:p>
         </p:txBody>
@@ -7503,7 +7503,7 @@
                 </a:solidFill>
                 <a:latin typeface="JetBrains Mono"/>
               </a:rPr>
-              <a:t>Benedikt Zoller Coaching  ·  FKB Campus  ·  M02</a:t>
+              <a:t>FKB Campus  ·  M02</a:t>
             </a:r>
           </a:p>
         </p:txBody>
@@ -8092,7 +8092,7 @@
                 </a:solidFill>
                 <a:latin typeface="JetBrains Mono"/>
               </a:rPr>
-              <a:t>Benedikt Zoller Coaching  ·  FKB Campus  ·  M02</a:t>
+              <a:t>FKB Campus  ·  M02</a:t>
             </a:r>
           </a:p>
         </p:txBody>
@@ -8411,7 +8411,7 @@
                 </a:solidFill>
                 <a:latin typeface="JetBrains Mono"/>
               </a:rPr>
-              <a:t>Benedikt Zoller Coaching  ·  FKB Campus  ·  M02</a:t>
+              <a:t>FKB Campus  ·  M02</a:t>
             </a:r>
           </a:p>
         </p:txBody>
@@ -8765,7 +8765,7 @@
                 </a:solidFill>
                 <a:latin typeface="JetBrains Mono"/>
               </a:rPr>
-              <a:t>Benedikt Zoller Coaching  ·  FKB Campus  ·  M02</a:t>
+              <a:t>FKB Campus  ·  M02</a:t>
             </a:r>
           </a:p>
         </p:txBody>
@@ -9313,7 +9313,7 @@
                 </a:solidFill>
                 <a:latin typeface="JetBrains Mono"/>
               </a:rPr>
-              <a:t>Benedikt Zoller Coaching  ·  FKB Campus  ·  M02</a:t>
+              <a:t>FKB Campus  ·  M02</a:t>
             </a:r>
           </a:p>
         </p:txBody>
@@ -10096,7 +10096,7 @@
                 </a:solidFill>
                 <a:latin typeface="JetBrains Mono"/>
               </a:rPr>
-              <a:t>Benedikt Zoller Coaching  ·  FKB Campus  ·  M02</a:t>
+              <a:t>FKB Campus  ·  M02</a:t>
             </a:r>
           </a:p>
         </p:txBody>

--- a/protected-downloads/praesentation/M02.pptx
+++ b/protected-downloads/praesentation/M02.pptx
@@ -6643,7 +6643,7 @@
                 </a:solidFill>
                 <a:latin typeface="Arial"/>
               </a:rPr>
-              <a:t>▸  Ein Bilanzgespräch mit einem KMU-Kunden anhand eines strukturierten 5-Phasen-Rahmens situativ planen und durchführen</a:t>
+              <a:t>▸  Ein Bilanzgespräch anhand eines strukturierten 5-Phasen-Rahmens situativ planen und durchführen</a:t>
             </a:r>
           </a:p>
           <a:p>
@@ -6662,7 +6662,7 @@
                 </a:solidFill>
                 <a:latin typeface="Arial"/>
               </a:rPr>
-              <a:t>▸  Kritische Kennzahlenentwicklungen im Kundendialog differenziert einordnen und gezielte Analysefragen stellen</a:t>
+              <a:t>▸  Kritische Kennzahlenentwicklungen im Kundendialog differenziert einordnen und Analysefragen stellen, ohne eine Abwehrhaltung auszulösen</a:t>
             </a:r>
           </a:p>
           <a:p>
@@ -6700,7 +6700,26 @@
                 </a:solidFill>
                 <a:latin typeface="Arial"/>
               </a:rPr>
-              <a:t>▸  Einwände konstruktiv aufgreifen und das Gespräch produktiv weiterführen</a:t>
+              <a:t>▸  Einwände mit Fragetechniken konstruktiv aufgreifen und das Gespräch weiterführen</a:t>
+            </a:r>
+          </a:p>
+          <a:p>
+            <a:pPr>
+              <a:spcBef>
+                <a:spcPts val="800"/>
+              </a:spcBef>
+              <a:spcAft>
+                <a:spcPts val="200"/>
+              </a:spcAft>
+            </a:pPr>
+            <a:r>
+              <a:rPr sz="1400">
+                <a:solidFill>
+                  <a:srgbClr val="3D5466"/>
+                </a:solidFill>
+                <a:latin typeface="Arial"/>
+              </a:rPr>
+              <a:t>▸  Aus der Bilanzanalyse bedarfsorientierte Beratungsimpulse für Verbundprodukte ableiten (DZ BANK, R+V, Union Investment, VR-Leasing)</a:t>
             </a:r>
           </a:p>
         </p:txBody>

--- a/protected-downloads/praesentation/M02.pptx
+++ b/protected-downloads/praesentation/M02.pptx
@@ -4238,7 +4238,7 @@
                 </a:solidFill>
                 <a:latin typeface="Arial"/>
               </a:rPr>
-              <a:t>v0.2</a:t>
+              <a:t>v1.0</a:t>
             </a:r>
           </a:p>
         </p:txBody>

--- a/protected-downloads/praesentation/M02.pptx
+++ b/protected-downloads/praesentation/M02.pptx
@@ -5252,7 +5252,7 @@
                 </a:solidFill>
                 <a:latin typeface="Source Serif 4"/>
               </a:rPr>
-              <a:t>Checkliste: Bilanzgespräch vorbereiten</a:t>
+              <a:t>AB-1: Checkliste – Bilanzgespräch vorbereiten</a:t>
             </a:r>
           </a:p>
         </p:txBody>

--- a/protected-downloads/praesentation/M02.pptx
+++ b/protected-downloads/praesentation/M02.pptx
@@ -3913,7 +3913,7 @@
                 <a:solidFill>
                   <a:srgbClr val="C8D2E6"/>
                 </a:solidFill>
-                <a:latin typeface="JetBrains Mono"/>
+                <a:latin typeface="Consolas"/>
               </a:rPr>
               <a:t>FKB CAMPUS  ·  FIRMENKUNDENAKADEMIE  ·  M02</a:t>
             </a:r>
@@ -3948,7 +3948,7 @@
                 <a:solidFill>
                   <a:srgbClr val="FFFFFF"/>
                 </a:solidFill>
-                <a:latin typeface="Source Serif 4"/>
+                <a:latin typeface="Arial"/>
               </a:rPr>
               <a:t>Bilanzgespräch auf Augenhöhe</a:t>
             </a:r>
@@ -3983,7 +3983,7 @@
                 <a:solidFill>
                   <a:srgbClr val="BECDE6"/>
                 </a:solidFill>
-                <a:latin typeface="Source Serif 4"/>
+                <a:latin typeface="Arial"/>
               </a:rPr>
               <a:t>Jahresabschlüsse im Kundengespräch professionell einsetzen</a:t>
             </a:r>
@@ -4061,7 +4061,7 @@
                 <a:solidFill>
                   <a:srgbClr val="A0B4D2"/>
                 </a:solidFill>
-                <a:latin typeface="JetBrains Mono"/>
+                <a:latin typeface="Consolas"/>
               </a:rPr>
               <a:t>KOMPETENZFELD</a:t>
             </a:r>
@@ -4131,7 +4131,7 @@
                 <a:solidFill>
                   <a:srgbClr val="A0B4D2"/>
                 </a:solidFill>
-                <a:latin typeface="JetBrains Mono"/>
+                <a:latin typeface="Consolas"/>
               </a:rPr>
               <a:t>KOMPETENZSTUFE</a:t>
             </a:r>
@@ -4201,7 +4201,7 @@
                 <a:solidFill>
                   <a:srgbClr val="A0B4D2"/>
                 </a:solidFill>
-                <a:latin typeface="JetBrains Mono"/>
+                <a:latin typeface="Consolas"/>
               </a:rPr>
               <a:t>VERSION</a:t>
             </a:r>
@@ -4314,7 +4314,7 @@
                 <a:solidFill>
                   <a:srgbClr val="96A5BE"/>
                 </a:solidFill>
-                <a:latin typeface="JetBrains Mono"/>
+                <a:latin typeface="Consolas"/>
               </a:rPr>
               <a:t>FKB Campus  ·  2026</a:t>
             </a:r>
@@ -4349,7 +4349,7 @@
                 <a:solidFill>
                   <a:srgbClr val="96A5BE"/>
                 </a:solidFill>
-                <a:latin typeface="JetBrains Mono"/>
+                <a:latin typeface="Consolas"/>
               </a:rPr>
               <a:t>Trainer-Präsentation</a:t>
             </a:r>
@@ -4488,7 +4488,7 @@
                 <a:solidFill>
                   <a:srgbClr val="78808C"/>
                 </a:solidFill>
-                <a:latin typeface="JetBrains Mono"/>
+                <a:latin typeface="Consolas"/>
               </a:rPr>
               <a:t>M02  ·  ÜBERSICHT</a:t>
             </a:r>
@@ -4523,7 +4523,7 @@
                 <a:solidFill>
                   <a:srgbClr val="1F2C56"/>
                 </a:solidFill>
-                <a:latin typeface="Source Serif 4"/>
+                <a:latin typeface="Arial"/>
               </a:rPr>
               <a:t>Praxiscase: Schwäbische Metallbau GmbH</a:t>
             </a:r>
@@ -4955,7 +4955,7 @@
                 <a:solidFill>
                   <a:srgbClr val="A0B4D2"/>
                 </a:solidFill>
-                <a:latin typeface="JetBrains Mono"/>
+                <a:latin typeface="Consolas"/>
               </a:rPr>
               <a:t>FKB Campus  ·  M02</a:t>
             </a:r>
@@ -4990,7 +4990,7 @@
                 <a:solidFill>
                   <a:srgbClr val="A0B4D2"/>
                 </a:solidFill>
-                <a:latin typeface="JetBrains Mono"/>
+                <a:latin typeface="Consolas"/>
               </a:rPr>
               <a:t>Übersicht</a:t>
             </a:r>
@@ -5129,7 +5129,7 @@
                 <a:solidFill>
                   <a:srgbClr val="78808C"/>
                 </a:solidFill>
-                <a:latin typeface="JetBrains Mono"/>
+                <a:latin typeface="Consolas"/>
               </a:rPr>
               <a:t>M02  ·  INHALT</a:t>
             </a:r>
@@ -5250,7 +5250,7 @@
                 <a:solidFill>
                   <a:srgbClr val="1F2C56"/>
                 </a:solidFill>
-                <a:latin typeface="Source Serif 4"/>
+                <a:latin typeface="Arial"/>
               </a:rPr>
               <a:t>AB-1: Checkliste – Bilanzgespräch vorbereiten</a:t>
             </a:r>
@@ -5266,7 +5266,7 @@
         <p:spPr>
           <a:xfrm>
             <a:off x="685800" y="1417320"/>
-            <a:ext cx="10817352" cy="5029200"/>
+            <a:ext cx="10817352" cy="4892040"/>
           </a:xfrm>
           <a:prstGeom prst="rect">
             <a:avLst/>
@@ -5279,7 +5279,7 @@
           </a:bodyPr>
           <a:lstStyle/>
           <a:p>
-            <a:pPr>
+            <a:pPr marL="190500" indent="-190500">
               <a:spcBef>
                 <a:spcPts val="400"/>
               </a:spcBef>
@@ -5298,7 +5298,7 @@
             </a:r>
           </a:p>
           <a:p>
-            <a:pPr>
+            <a:pPr marL="190500" indent="-190500">
               <a:spcBef>
                 <a:spcPts val="400"/>
               </a:spcBef>
@@ -5317,7 +5317,7 @@
             </a:r>
           </a:p>
           <a:p>
-            <a:pPr>
+            <a:pPr marL="190500" indent="-190500">
               <a:spcBef>
                 <a:spcPts val="400"/>
               </a:spcBef>
@@ -5336,7 +5336,7 @@
             </a:r>
           </a:p>
           <a:p>
-            <a:pPr>
+            <a:pPr marL="190500" indent="-190500">
               <a:spcBef>
                 <a:spcPts val="400"/>
               </a:spcBef>
@@ -5355,7 +5355,7 @@
             </a:r>
           </a:p>
           <a:p>
-            <a:pPr>
+            <a:pPr marL="190500" indent="-190500">
               <a:spcBef>
                 <a:spcPts val="400"/>
               </a:spcBef>
@@ -5374,7 +5374,7 @@
             </a:r>
           </a:p>
           <a:p>
-            <a:pPr>
+            <a:pPr marL="190500" indent="-190500">
               <a:spcBef>
                 <a:spcPts val="400"/>
               </a:spcBef>
@@ -5393,7 +5393,7 @@
             </a:r>
           </a:p>
           <a:p>
-            <a:pPr>
+            <a:pPr marL="190500" indent="-190500">
               <a:spcBef>
                 <a:spcPts val="400"/>
               </a:spcBef>
@@ -5412,7 +5412,7 @@
             </a:r>
           </a:p>
           <a:p>
-            <a:pPr>
+            <a:pPr marL="190500" indent="-190500">
               <a:spcBef>
                 <a:spcPts val="400"/>
               </a:spcBef>
@@ -5431,7 +5431,7 @@
             </a:r>
           </a:p>
           <a:p>
-            <a:pPr>
+            <a:pPr marL="190500" indent="-190500">
               <a:spcBef>
                 <a:spcPts val="400"/>
               </a:spcBef>
@@ -5450,7 +5450,7 @@
             </a:r>
           </a:p>
           <a:p>
-            <a:pPr>
+            <a:pPr marL="190500" indent="-190500">
               <a:spcBef>
                 <a:spcPts val="400"/>
               </a:spcBef>
@@ -5469,7 +5469,7 @@
             </a:r>
           </a:p>
           <a:p>
-            <a:pPr>
+            <a:pPr marL="190500" indent="-190500">
               <a:spcBef>
                 <a:spcPts val="400"/>
               </a:spcBef>
@@ -5488,7 +5488,7 @@
             </a:r>
           </a:p>
           <a:p>
-            <a:pPr>
+            <a:pPr marL="190500" indent="-190500">
               <a:spcBef>
                 <a:spcPts val="400"/>
               </a:spcBef>
@@ -5579,7 +5579,7 @@
                 <a:solidFill>
                   <a:srgbClr val="A0B4D2"/>
                 </a:solidFill>
-                <a:latin typeface="JetBrains Mono"/>
+                <a:latin typeface="Consolas"/>
               </a:rPr>
               <a:t>FKB Campus  ·  M02</a:t>
             </a:r>
@@ -5718,7 +5718,7 @@
                 <a:solidFill>
                   <a:srgbClr val="78808C"/>
                 </a:solidFill>
-                <a:latin typeface="JetBrains Mono"/>
+                <a:latin typeface="Consolas"/>
               </a:rPr>
               <a:t>M02  ·  INHALT</a:t>
             </a:r>
@@ -5839,7 +5839,7 @@
                 <a:solidFill>
                   <a:srgbClr val="1F2C56"/>
                 </a:solidFill>
-                <a:latin typeface="Source Serif 4"/>
+                <a:latin typeface="Arial"/>
               </a:rPr>
               <a:t>Reflexionsfragen</a:t>
             </a:r>
@@ -5855,7 +5855,7 @@
         <p:spPr>
           <a:xfrm>
             <a:off x="685800" y="1417320"/>
-            <a:ext cx="10817352" cy="5029200"/>
+            <a:ext cx="10817352" cy="4892040"/>
           </a:xfrm>
           <a:prstGeom prst="rect">
             <a:avLst/>
@@ -5863,12 +5863,12 @@
           <a:noFill/>
         </p:spPr>
         <p:txBody>
-          <a:bodyPr wrap="square">
+          <a:bodyPr wrap="square" anchor="ctr">
             <a:spAutoFit/>
           </a:bodyPr>
           <a:lstStyle/>
           <a:p>
-            <a:pPr>
+            <a:pPr marL="190500" indent="-190500">
               <a:spcBef>
                 <a:spcPts val="400"/>
               </a:spcBef>
@@ -5887,7 +5887,7 @@
             </a:r>
           </a:p>
           <a:p>
-            <a:pPr>
+            <a:pPr marL="190500" indent="-190500">
               <a:spcBef>
                 <a:spcPts val="400"/>
               </a:spcBef>
@@ -5906,7 +5906,7 @@
             </a:r>
           </a:p>
           <a:p>
-            <a:pPr>
+            <a:pPr marL="190500" indent="-190500">
               <a:spcBef>
                 <a:spcPts val="400"/>
               </a:spcBef>
@@ -5925,7 +5925,7 @@
             </a:r>
           </a:p>
           <a:p>
-            <a:pPr>
+            <a:pPr marL="190500" indent="-190500">
               <a:spcBef>
                 <a:spcPts val="400"/>
               </a:spcBef>
@@ -6016,7 +6016,7 @@
                 <a:solidFill>
                   <a:srgbClr val="A0B4D2"/>
                 </a:solidFill>
-                <a:latin typeface="JetBrains Mono"/>
+                <a:latin typeface="Consolas"/>
               </a:rPr>
               <a:t>FKB Campus  ·  M02</a:t>
             </a:r>
@@ -6155,7 +6155,7 @@
                 <a:solidFill>
                   <a:srgbClr val="78808C"/>
                 </a:solidFill>
-                <a:latin typeface="JetBrains Mono"/>
+                <a:latin typeface="Consolas"/>
               </a:rPr>
               <a:t>ÜBERBLICK  ·  M02</a:t>
             </a:r>
@@ -6233,7 +6233,7 @@
                 <a:solidFill>
                   <a:srgbClr val="1F2C56"/>
                 </a:solidFill>
-                <a:latin typeface="Source Serif 4"/>
+                <a:latin typeface="Arial"/>
               </a:rPr>
               <a:t>Worum geht es heute</a:t>
             </a:r>
@@ -6382,7 +6382,7 @@
                 <a:solidFill>
                   <a:srgbClr val="A0B4D2"/>
                 </a:solidFill>
-                <a:latin typeface="JetBrains Mono"/>
+                <a:latin typeface="Consolas"/>
               </a:rPr>
               <a:t>FKB Campus  ·  M02</a:t>
             </a:r>
@@ -6521,7 +6521,7 @@
                 <a:solidFill>
                   <a:srgbClr val="78808C"/>
                 </a:solidFill>
-                <a:latin typeface="JetBrains Mono"/>
+                <a:latin typeface="Consolas"/>
               </a:rPr>
               <a:t>LERNZIELE  ·  M02</a:t>
             </a:r>
@@ -6599,7 +6599,7 @@
                 <a:solidFill>
                   <a:srgbClr val="1F2C56"/>
                 </a:solidFill>
-                <a:latin typeface="Source Serif 4"/>
+                <a:latin typeface="Arial"/>
               </a:rPr>
               <a:t>Was Sie heute mitnehmen</a:t>
             </a:r>
@@ -6795,7 +6795,7 @@
                 <a:solidFill>
                   <a:srgbClr val="A0B4D2"/>
                 </a:solidFill>
-                <a:latin typeface="JetBrains Mono"/>
+                <a:latin typeface="Consolas"/>
               </a:rPr>
               <a:t>FKB Campus  ·  M02</a:t>
             </a:r>
@@ -6934,7 +6934,7 @@
                 <a:solidFill>
                   <a:srgbClr val="78808C"/>
                 </a:solidFill>
-                <a:latin typeface="JetBrains Mono"/>
+                <a:latin typeface="Consolas"/>
               </a:rPr>
               <a:t>AGENDA  ·  M02</a:t>
             </a:r>
@@ -7012,7 +7012,7 @@
                 <a:solidFill>
                   <a:srgbClr val="1F2C56"/>
                 </a:solidFill>
-                <a:latin typeface="Source Serif 4"/>
+                <a:latin typeface="Arial"/>
               </a:rPr>
               <a:t>So läuft das Modul</a:t>
             </a:r>
@@ -7520,7 +7520,7 @@
                 <a:solidFill>
                   <a:srgbClr val="A0B4D2"/>
                 </a:solidFill>
-                <a:latin typeface="JetBrains Mono"/>
+                <a:latin typeface="Consolas"/>
               </a:rPr>
               <a:t>FKB Campus  ·  M02</a:t>
             </a:r>
@@ -7659,7 +7659,7 @@
                 <a:solidFill>
                   <a:srgbClr val="78808C"/>
                 </a:solidFill>
-                <a:latin typeface="JetBrains Mono"/>
+                <a:latin typeface="Consolas"/>
               </a:rPr>
               <a:t>M02  ·  INHALT</a:t>
             </a:r>
@@ -7780,7 +7780,7 @@
                 <a:solidFill>
                   <a:srgbClr val="1F2C56"/>
                 </a:solidFill>
-                <a:latin typeface="Source Serif 4"/>
+                <a:latin typeface="Arial"/>
               </a:rPr>
               <a:t>Theorie-Input: Vom Zahlenleser zum Gesprächsführer</a:t>
             </a:r>
@@ -7796,7 +7796,7 @@
         <p:spPr>
           <a:xfrm>
             <a:off x="685800" y="1417320"/>
-            <a:ext cx="10817352" cy="5029200"/>
+            <a:ext cx="10817352" cy="4892040"/>
           </a:xfrm>
           <a:prstGeom prst="rect">
             <a:avLst/>
@@ -7822,13 +7822,13 @@
                 <a:solidFill>
                   <a:srgbClr val="78808C"/>
                 </a:solidFill>
-                <a:latin typeface="JetBrains Mono"/>
+                <a:latin typeface="Consolas"/>
               </a:rPr>
               <a:t>DIE GRENZEN DER REINEN KENNZAHLENANALYSE</a:t>
             </a:r>
           </a:p>
           <a:p>
-            <a:pPr>
+            <a:pPr marL="190500" indent="-190500">
               <a:spcBef>
                 <a:spcPts val="400"/>
               </a:spcBef>
@@ -7860,13 +7860,13 @@
                 <a:solidFill>
                   <a:srgbClr val="78808C"/>
                 </a:solidFill>
-                <a:latin typeface="JetBrains Mono"/>
+                <a:latin typeface="Consolas"/>
               </a:rPr>
               <a:t>KOMMUNIKATION AUF AUGENHÖHE: INHALTS- VS. BEZIEHUNGSEBENE</a:t>
             </a:r>
           </a:p>
           <a:p>
-            <a:pPr>
+            <a:pPr marL="190500" indent="-190500">
               <a:spcBef>
                 <a:spcPts val="400"/>
               </a:spcBef>
@@ -7898,13 +7898,13 @@
                 <a:solidFill>
                   <a:srgbClr val="78808C"/>
                 </a:solidFill>
-                <a:latin typeface="JetBrains Mono"/>
+                <a:latin typeface="Consolas"/>
               </a:rPr>
               <a:t>DER 5-PHASEN-RAHMEN FÜR DAS BILANZGESPRÄCH</a:t>
             </a:r>
           </a:p>
           <a:p>
-            <a:pPr>
+            <a:pPr marL="190500" indent="-190500">
               <a:spcBef>
                 <a:spcPts val="400"/>
               </a:spcBef>
@@ -7923,7 +7923,7 @@
             </a:r>
           </a:p>
           <a:p>
-            <a:pPr>
+            <a:pPr marL="190500" indent="-190500">
               <a:spcBef>
                 <a:spcPts val="400"/>
               </a:spcBef>
@@ -7942,7 +7942,7 @@
             </a:r>
           </a:p>
           <a:p>
-            <a:pPr>
+            <a:pPr marL="190500" indent="-190500">
               <a:spcBef>
                 <a:spcPts val="400"/>
               </a:spcBef>
@@ -7961,7 +7961,7 @@
             </a:r>
           </a:p>
           <a:p>
-            <a:pPr>
+            <a:pPr marL="190500" indent="-190500">
               <a:spcBef>
                 <a:spcPts val="400"/>
               </a:spcBef>
@@ -7980,7 +7980,7 @@
             </a:r>
           </a:p>
           <a:p>
-            <a:pPr>
+            <a:pPr marL="190500" indent="-190500">
               <a:spcBef>
                 <a:spcPts val="400"/>
               </a:spcBef>
@@ -7999,7 +7999,7 @@
             </a:r>
           </a:p>
           <a:p>
-            <a:pPr>
+            <a:pPr marL="190500" indent="-190500">
               <a:spcBef>
                 <a:spcPts val="400"/>
               </a:spcBef>
@@ -8018,7 +8018,7 @@
             </a:r>
           </a:p>
           <a:p>
-            <a:pPr>
+            <a:pPr marL="190500" indent="-190500">
               <a:spcBef>
                 <a:spcPts val="400"/>
               </a:spcBef>
@@ -8109,7 +8109,7 @@
                 <a:solidFill>
                   <a:srgbClr val="A0B4D2"/>
                 </a:solidFill>
-                <a:latin typeface="JetBrains Mono"/>
+                <a:latin typeface="Consolas"/>
               </a:rPr>
               <a:t>FKB Campus  ·  M02</a:t>
             </a:r>
@@ -8248,7 +8248,7 @@
                 <a:solidFill>
                   <a:srgbClr val="78808C"/>
                 </a:solidFill>
-                <a:latin typeface="JetBrains Mono"/>
+                <a:latin typeface="Consolas"/>
               </a:rPr>
               <a:t>M02  ·  SCHAUBILD</a:t>
             </a:r>
@@ -8283,7 +8283,7 @@
                 <a:solidFill>
                   <a:srgbClr val="1F2C56"/>
                 </a:solidFill>
-                <a:latin typeface="Source Serif 4"/>
+                <a:latin typeface="Arial"/>
               </a:rPr>
               <a:t>Vier-Ohren-Modell nach Schulz von Thun</a:t>
             </a:r>
@@ -8428,7 +8428,7 @@
                 <a:solidFill>
                   <a:srgbClr val="A0B4D2"/>
                 </a:solidFill>
-                <a:latin typeface="JetBrains Mono"/>
+                <a:latin typeface="Consolas"/>
               </a:rPr>
               <a:t>FKB Campus  ·  M02</a:t>
             </a:r>
@@ -8463,7 +8463,7 @@
                 <a:solidFill>
                   <a:srgbClr val="A0B4D2"/>
                 </a:solidFill>
-                <a:latin typeface="JetBrains Mono"/>
+                <a:latin typeface="Consolas"/>
               </a:rPr>
               <a:t>Schaubild</a:t>
             </a:r>
@@ -8602,7 +8602,7 @@
                 <a:solidFill>
                   <a:srgbClr val="78808C"/>
                 </a:solidFill>
-                <a:latin typeface="JetBrains Mono"/>
+                <a:latin typeface="Consolas"/>
               </a:rPr>
               <a:t>M02  ·  SCHAUBILD</a:t>
             </a:r>
@@ -8637,7 +8637,7 @@
                 <a:solidFill>
                   <a:srgbClr val="1F2C56"/>
                 </a:solidFill>
-                <a:latin typeface="Source Serif 4"/>
+                <a:latin typeface="Arial"/>
               </a:rPr>
               <a:t>5-Phasen-Rahmen für das strukturierte Bilanzgespräch</a:t>
             </a:r>
@@ -8782,7 +8782,7 @@
                 <a:solidFill>
                   <a:srgbClr val="A0B4D2"/>
                 </a:solidFill>
-                <a:latin typeface="JetBrains Mono"/>
+                <a:latin typeface="Consolas"/>
               </a:rPr>
               <a:t>FKB Campus  ·  M02</a:t>
             </a:r>
@@ -8817,7 +8817,7 @@
                 <a:solidFill>
                   <a:srgbClr val="A0B4D2"/>
                 </a:solidFill>
-                <a:latin typeface="JetBrains Mono"/>
+                <a:latin typeface="Consolas"/>
               </a:rPr>
               <a:t>Schaubild</a:t>
             </a:r>
@@ -8956,7 +8956,7 @@
                 <a:solidFill>
                   <a:srgbClr val="78808C"/>
                 </a:solidFill>
-                <a:latin typeface="JetBrains Mono"/>
+                <a:latin typeface="Consolas"/>
               </a:rPr>
               <a:t>M02  ·  INHALT</a:t>
             </a:r>
@@ -9077,7 +9077,7 @@
                 <a:solidFill>
                   <a:srgbClr val="1F2C56"/>
                 </a:solidFill>
-                <a:latin typeface="Source Serif 4"/>
+                <a:latin typeface="Arial"/>
               </a:rPr>
               <a:t>Praxiscase: Schwäbische Metallbau GmbH</a:t>
             </a:r>
@@ -9093,7 +9093,7 @@
         <p:spPr>
           <a:xfrm>
             <a:off x="685800" y="1417320"/>
-            <a:ext cx="10817352" cy="5029200"/>
+            <a:ext cx="10817352" cy="4892040"/>
           </a:xfrm>
           <a:prstGeom prst="rect">
             <a:avLst/>
@@ -9106,7 +9106,7 @@
           </a:bodyPr>
           <a:lstStyle/>
           <a:p>
-            <a:pPr>
+            <a:pPr marL="190500" indent="-190500">
               <a:spcBef>
                 <a:spcPts val="400"/>
               </a:spcBef>
@@ -9125,7 +9125,7 @@
             </a:r>
           </a:p>
           <a:p>
-            <a:pPr>
+            <a:pPr marL="190500" indent="-190500">
               <a:spcBef>
                 <a:spcPts val="400"/>
               </a:spcBef>
@@ -9144,7 +9144,7 @@
             </a:r>
           </a:p>
           <a:p>
-            <a:pPr>
+            <a:pPr marL="190500" indent="-190500">
               <a:spcBef>
                 <a:spcPts val="400"/>
               </a:spcBef>
@@ -9163,7 +9163,7 @@
             </a:r>
           </a:p>
           <a:p>
-            <a:pPr>
+            <a:pPr marL="190500" indent="-190500">
               <a:spcBef>
                 <a:spcPts val="400"/>
               </a:spcBef>
@@ -9182,7 +9182,7 @@
             </a:r>
           </a:p>
           <a:p>
-            <a:pPr>
+            <a:pPr marL="190500" indent="-190500">
               <a:spcBef>
                 <a:spcPts val="400"/>
               </a:spcBef>
@@ -9201,7 +9201,7 @@
             </a:r>
           </a:p>
           <a:p>
-            <a:pPr>
+            <a:pPr marL="190500" indent="-190500">
               <a:spcBef>
                 <a:spcPts val="400"/>
               </a:spcBef>
@@ -9233,13 +9233,13 @@
                 <a:solidFill>
                   <a:srgbClr val="78808C"/>
                 </a:solidFill>
-                <a:latin typeface="JetBrains Mono"/>
+                <a:latin typeface="Consolas"/>
               </a:rPr>
               <a:t>BEOBACHTUNGSBOGEN ROLLENSPIEL</a:t>
             </a:r>
           </a:p>
           <a:p>
-            <a:pPr>
+            <a:pPr marL="190500" indent="-190500">
               <a:spcBef>
                 <a:spcPts val="400"/>
               </a:spcBef>
@@ -9330,7 +9330,7 @@
                 <a:solidFill>
                   <a:srgbClr val="A0B4D2"/>
                 </a:solidFill>
-                <a:latin typeface="JetBrains Mono"/>
+                <a:latin typeface="Consolas"/>
               </a:rPr>
               <a:t>FKB Campus  ·  M02</a:t>
             </a:r>
@@ -9469,7 +9469,7 @@
                 <a:solidFill>
                   <a:srgbClr val="78808C"/>
                 </a:solidFill>
-                <a:latin typeface="JetBrains Mono"/>
+                <a:latin typeface="Consolas"/>
               </a:rPr>
               <a:t>M02  ·  ÜBERSICHT</a:t>
             </a:r>
@@ -9504,7 +9504,7 @@
                 <a:solidFill>
                   <a:srgbClr val="1F2C56"/>
                 </a:solidFill>
-                <a:latin typeface="Source Serif 4"/>
+                <a:latin typeface="Arial"/>
               </a:rPr>
               <a:t>Praxiscase: Schwäbische Metallbau GmbH</a:t>
             </a:r>
@@ -10113,7 +10113,7 @@
                 <a:solidFill>
                   <a:srgbClr val="A0B4D2"/>
                 </a:solidFill>
-                <a:latin typeface="JetBrains Mono"/>
+                <a:latin typeface="Consolas"/>
               </a:rPr>
               <a:t>FKB Campus  ·  M02</a:t>
             </a:r>
@@ -10148,7 +10148,7 @@
                 <a:solidFill>
                   <a:srgbClr val="A0B4D2"/>
                 </a:solidFill>
-                <a:latin typeface="JetBrains Mono"/>
+                <a:latin typeface="Consolas"/>
               </a:rPr>
               <a:t>Übersicht</a:t>
             </a:r>

--- a/protected-downloads/praesentation/M02.pptx
+++ b/protected-downloads/praesentation/M02.pptx
@@ -17,6 +17,7 @@
     <p:sldId id="265" r:id="rId17"/>
     <p:sldId id="266" r:id="rId18"/>
     <p:sldId id="267" r:id="rId19"/>
+    <p:sldId id="268" r:id="rId20"/>
   </p:sldIdLst>
   <p:sldSz cx="12188952" cy="6858000" type="screen4x3"/>
   <p:notesSz cx="6858000" cy="9144000"/>
@@ -583,7 +584,7 @@
           <a:lstStyle/>
           <a:p>
             <a:r>
-              <a:t>Siehe Trainerhandbuch (Sektion 3) für Moderationshinweise, Timing und erwartete Teilnehmerreaktionen.</a:t>
+              <a:t>Einstieg: „Wie reagiert Ihr Kunde, wenn Sie eine schlechte Kennzahl ansprechen – und wie liegt das an der Formulierung?"</a:t>
             </a:r>
           </a:p>
         </p:txBody>
@@ -653,7 +654,7 @@
           <a:lstStyle/>
           <a:p>
             <a:r>
-              <a:t>Trainer-Hinweis (nur für Trainer und GF-Rolle sichtbar): Martin Klemm hat einen Großauftrag über 1,2 Mio. EUR an Land gezogen, der die Vorlauffinanzierung belastet. Zusätzlich lief eine CNC-Maschine (400 TEUR) aus dem Eigenkapital. Die Auftragslage ist gut, der Cash-Engpass temporär. Diese Infos gibt der GF nur preis, wenn der Berater konkret und respektvoll danach fragt – nie freiwillig.</a:t>
+              <a:t>Wer nur Zahlen vorträgt, löst Rechtfertigung aus; wer fragt, löst Erklärung aus.</a:t>
             </a:r>
           </a:p>
         </p:txBody>
@@ -723,7 +724,12 @@
           <a:lstStyle/>
           <a:p>
             <a:r>
-              <a:t>Siehe Trainerhandbuch (Sektion 3) für Moderationshinweise, Timing und erwartete Teilnehmerreaktionen.</a:t>
+              <a:t>Fragetechniken je Phase: offene Fragen zur Analyse, hypothetische Fragen im Lösungsraum.</a:t>
+            </a:r>
+          </a:p>
+          <a:p>
+            <a:r>
+              <a:t>Moderation (HB Sec 3): Theorie-Input II (min 35–50) Trainer-Hinweis: Stellen Sie beim Input II explizit klar: „Der 5-Phasen-Rahmen gibt Ihnen eine Struktur – im echten Gespräch dauert das Ganze 60 bis 75 Minuten, nicht 180. Was wir heute im Seminar üben, ist die Qualität jeder Phase, nicht die Länge." So vermeiden Sie den (in der Praxis häufigen) Eindruck, ein Bilanzgespräch müsse drei Stunden dauern. Rollenspiel-Einstieg (min 50–65) Trainer-Hinweis: Viele Teilnehmer empfinden Rollenspiele als unangenehm. Normalisieren Sie das explizit: „Rollenspiele sind seltsam – das ist normal." Betonen Sie, dass Beobachter eine aktive, wertvolle Rolle haben. Das Ziel ist nicht Perfektion, sondern das Ausprobieren. Umgang mit Widerstand im Rollenspiel Trainer-Tipp: Nutzen Sie die „Freeze-Technik": Rufen Sie während eines Rollenspiels „Freeze!" – alle frieren ein. Fragen Sie den Berater: „Was überlegen Sie gerade? Welche Frage könnten Sie jetzt stellen?" Dann weiter. Diese Methode erhöht die Reflexionstiefe. Debriefing-Struktur (min 95–115 und 155–170) Trainer-Hinweis: Strukturieren Sie das Debriefing immer in dieser Reihenfolge: (1) Beschreibung – Was ist passiert? (2) Analyse – Warum? (3) Generalisierung – Was lernen wir? (4) Transfer – Was mache ich nächste Woche? Schweigen aushalten: 15 Sekunden Stille nach einer Frage sind produktiv. Trainer-Hinweis (gemischte Erfahrungsstufen): Wenn erfahrene Teilnehmer im Debriefing Fragen in Richtung M03 oder regulatorischer Konsequenzen (§ 18 KWG, Grenze des Gesprächs) stellen: Diese kurz beantworten, dann explizit zurückschalten: „Das ist eine wichtige Frage – die vertiefen wir in M03. Für heute: Was nehmen die mit uns, die vielleicht noch kein Bilanzgespräch mit dieser Komplexität hatten?" Damit holen Sie unerfahrene TN aktiv zurück in den Dialog, statt sie durch Spezialdiskussionen zu verlieren. Transfer-Vorsatz (min 170–175) Trainer-Hinweis: Der Transfer-Vorsatz muss konkret und verhaltensbasiert sein – nicht „Ich möchte besser zuhören", sondern „Ich werde beim nächsten Gespräch mit Müller GmbH mindestens eine Implikationsfrage stellen." Notieren Sie alle Vorsätze auf Flipchart. Empfehlen Sie den TN, sofort nach dem Seminar (spätestens heute) eine agree-Wiedervorlage auf 4 Wochen zu setzen – so wird aus dem Vorsatz ein institutionell verankerter Termin statt eines „Ehrensystems".</a:t>
             </a:r>
           </a:p>
         </p:txBody>
@@ -793,7 +799,147 @@
           <a:lstStyle/>
           <a:p>
             <a:r>
-              <a:t>Siehe Trainerhandbuch (Sektion 3) für Moderationshinweise, Timing und erwartete Teilnehmerreaktionen.</a:t>
+              <a:t>Schwäbische Metallbau: kritische Kennzahlen auffällig – die Kunst ist, sie als Frage einzubringen. Debriefing: Wann kippte das Gespräch in Rechtfertigung?</a:t>
+            </a:r>
+          </a:p>
+        </p:txBody>
+      </p:sp>
+      <p:sp>
+        <p:nvSpPr>
+          <p:cNvPr id="4" name="Slide Number Placeholder 3"/>
+          <p:cNvSpPr>
+            <a:spLocks noGrp="1"/>
+          </p:cNvSpPr>
+          <p:nvPr>
+            <p:ph type="sldNum" idx="5" sz="quarter"/>
+          </p:nvPr>
+        </p:nvSpPr>
+        <p:spPr/>
+      </p:sp>
+    </p:spTree>
+  </p:cSld>
+  <p:clrMapOvr>
+    <a:masterClrMapping/>
+  </p:clrMapOvr>
+</p:notes>
+</file>
+
+<file path=ppt/notesSlides/notesSlide6.xml><?xml version="1.0" encoding="utf-8"?>
+<p:notes xmlns:a="http://schemas.openxmlformats.org/drawingml/2006/main" xmlns:p="http://schemas.openxmlformats.org/presentationml/2006/main" xmlns:r="http://schemas.openxmlformats.org/officeDocument/2006/relationships">
+  <p:cSld>
+    <p:spTree>
+      <p:nvGrpSpPr>
+        <p:cNvPr id="1" name=""/>
+        <p:cNvGrpSpPr/>
+        <p:nvPr/>
+      </p:nvGrpSpPr>
+      <p:grpSpPr>
+        <a:xfrm>
+          <a:off x="0" y="0"/>
+          <a:ext cx="0" cy="0"/>
+          <a:chOff x="0" y="0"/>
+          <a:chExt cx="0" cy="0"/>
+        </a:xfrm>
+      </p:grpSpPr>
+      <p:sp>
+        <p:nvSpPr>
+          <p:cNvPr id="2" name="Slide Image Placeholder 1"/>
+          <p:cNvSpPr>
+            <a:spLocks noGrp="1"/>
+          </p:cNvSpPr>
+          <p:nvPr>
+            <p:ph type="sldImg" idx="2"/>
+          </p:nvPr>
+        </p:nvSpPr>
+        <p:spPr/>
+      </p:sp>
+      <p:sp>
+        <p:nvSpPr>
+          <p:cNvPr id="3" name="Notes Placeholder 2"/>
+          <p:cNvSpPr>
+            <a:spLocks noGrp="1"/>
+          </p:cNvSpPr>
+          <p:nvPr>
+            <p:ph type="body" idx="3" sz="quarter"/>
+          </p:nvPr>
+        </p:nvSpPr>
+        <p:spPr/>
+        <p:txBody>
+          <a:bodyPr/>
+          <a:lstStyle/>
+          <a:p>
+            <a:r>
+              <a:t>Überleitung zum Selbstcheck.</a:t>
+            </a:r>
+          </a:p>
+        </p:txBody>
+      </p:sp>
+      <p:sp>
+        <p:nvSpPr>
+          <p:cNvPr id="4" name="Slide Number Placeholder 3"/>
+          <p:cNvSpPr>
+            <a:spLocks noGrp="1"/>
+          </p:cNvSpPr>
+          <p:nvPr>
+            <p:ph type="sldNum" idx="5" sz="quarter"/>
+          </p:nvPr>
+        </p:nvSpPr>
+        <p:spPr/>
+      </p:sp>
+    </p:spTree>
+  </p:cSld>
+  <p:clrMapOvr>
+    <a:masterClrMapping/>
+  </p:clrMapOvr>
+</p:notes>
+</file>
+
+<file path=ppt/notesSlides/notesSlide7.xml><?xml version="1.0" encoding="utf-8"?>
+<p:notes xmlns:a="http://schemas.openxmlformats.org/drawingml/2006/main" xmlns:p="http://schemas.openxmlformats.org/presentationml/2006/main" xmlns:r="http://schemas.openxmlformats.org/officeDocument/2006/relationships">
+  <p:cSld>
+    <p:spTree>
+      <p:nvGrpSpPr>
+        <p:cNvPr id="1" name=""/>
+        <p:cNvGrpSpPr/>
+        <p:nvPr/>
+      </p:nvGrpSpPr>
+      <p:grpSpPr>
+        <a:xfrm>
+          <a:off x="0" y="0"/>
+          <a:ext cx="0" cy="0"/>
+          <a:chOff x="0" y="0"/>
+          <a:chExt cx="0" cy="0"/>
+        </a:xfrm>
+      </p:grpSpPr>
+      <p:sp>
+        <p:nvSpPr>
+          <p:cNvPr id="2" name="Slide Image Placeholder 1"/>
+          <p:cNvSpPr>
+            <a:spLocks noGrp="1"/>
+          </p:cNvSpPr>
+          <p:nvPr>
+            <p:ph type="sldImg" idx="2"/>
+          </p:nvPr>
+        </p:nvSpPr>
+        <p:spPr/>
+      </p:sp>
+      <p:sp>
+        <p:nvSpPr>
+          <p:cNvPr id="3" name="Notes Placeholder 2"/>
+          <p:cNvSpPr>
+            <a:spLocks noGrp="1"/>
+          </p:cNvSpPr>
+          <p:nvPr>
+            <p:ph type="body" idx="3" sz="quarter"/>
+          </p:nvPr>
+        </p:nvSpPr>
+        <p:spPr/>
+        <p:txBody>
+          <a:bodyPr/>
+          <a:lstStyle/>
+          <a:p>
+            <a:r>
+              <a:t>Selbstcheck nach 4 Wochen als Transferanker.</a:t>
             </a:r>
           </a:p>
         </p:txBody>
@@ -4389,7 +4535,7 @@
             <a:avLst/>
           </a:prstGeom>
           <a:solidFill>
-            <a:srgbClr val="FFFFFF"/>
+            <a:srgbClr val="1F2C56"/>
           </a:solidFill>
           <a:ln>
             <a:noFill/>
@@ -4419,57 +4565,14 @@
       </p:sp>
       <p:sp>
         <p:nvSpPr>
-          <p:cNvPr id="3" name="Rectangle 2"/>
-          <p:cNvSpPr/>
-          <p:nvPr/>
-        </p:nvSpPr>
-        <p:spPr>
-          <a:xfrm>
-            <a:off x="0" y="0"/>
-            <a:ext cx="12188952" cy="50292"/>
-          </a:xfrm>
-          <a:prstGeom prst="rect">
-            <a:avLst/>
-          </a:prstGeom>
-          <a:solidFill>
-            <a:srgbClr val="1F2C56"/>
-          </a:solidFill>
-          <a:ln>
-            <a:noFill/>
-          </a:ln>
-        </p:spPr>
-        <p:style>
-          <a:lnRef idx="1">
-            <a:schemeClr val="accent1"/>
-          </a:lnRef>
-          <a:fillRef idx="3">
-            <a:schemeClr val="accent1"/>
-          </a:fillRef>
-          <a:effectRef idx="2">
-            <a:schemeClr val="accent1"/>
-          </a:effectRef>
-          <a:fontRef idx="minor">
-            <a:schemeClr val="lt1"/>
-          </a:fontRef>
-        </p:style>
-        <p:txBody>
-          <a:bodyPr rtlCol="0" anchor="ctr"/>
-          <a:lstStyle/>
-          <a:p>
-            <a:pPr algn="ctr"/>
-          </a:p>
-        </p:txBody>
-      </p:sp>
-      <p:sp>
-        <p:nvSpPr>
-          <p:cNvPr id="4" name="TextBox 3"/>
+          <p:cNvPr id="3" name="TextBox 2"/>
           <p:cNvSpPr txBox="1"/>
           <p:nvPr/>
         </p:nvSpPr>
         <p:spPr>
           <a:xfrm>
-            <a:off x="685800" y="109728"/>
-            <a:ext cx="10817352" cy="228600"/>
+            <a:off x="685800" y="2377440"/>
+            <a:ext cx="10817352" cy="365760"/>
           </a:xfrm>
           <a:prstGeom prst="rect">
             <a:avLst/>
@@ -4484,62 +4587,27 @@
           <a:p>
             <a:pPr algn="l"/>
             <a:r>
-              <a:rPr sz="750">
-                <a:solidFill>
-                  <a:srgbClr val="78808C"/>
+              <a:rPr sz="1200">
+                <a:solidFill>
+                  <a:srgbClr val="D9C089"/>
                 </a:solidFill>
                 <a:latin typeface="Consolas"/>
               </a:rPr>
-              <a:t>M02  ·  ÜBERSICHT</a:t>
-            </a:r>
-          </a:p>
-        </p:txBody>
-      </p:sp>
-      <p:sp>
-        <p:nvSpPr>
-          <p:cNvPr id="5" name="TextBox 4"/>
-          <p:cNvSpPr txBox="1"/>
-          <p:nvPr/>
-        </p:nvSpPr>
-        <p:spPr>
-          <a:xfrm>
-            <a:off x="685800" y="502920"/>
-            <a:ext cx="10817352" cy="594360"/>
-          </a:xfrm>
-          <a:prstGeom prst="rect">
-            <a:avLst/>
-          </a:prstGeom>
-          <a:noFill/>
-        </p:spPr>
-        <p:txBody>
-          <a:bodyPr wrap="square">
-            <a:spAutoFit/>
-          </a:bodyPr>
-          <a:lstStyle/>
-          <a:p>
-            <a:pPr algn="l"/>
-            <a:r>
-              <a:rPr sz="2000" b="1" i="0">
-                <a:solidFill>
-                  <a:srgbClr val="1F2C56"/>
-                </a:solidFill>
-                <a:latin typeface="Arial"/>
-              </a:rPr>
-              <a:t>Praxiscase: Schwäbische Metallbau GmbH</a:t>
-            </a:r>
-          </a:p>
-        </p:txBody>
-      </p:sp>
-      <p:sp>
-        <p:nvSpPr>
-          <p:cNvPr id="6" name="Rectangle 5"/>
+              <a:t>FALLARBEIT</a:t>
+            </a:r>
+          </a:p>
+        </p:txBody>
+      </p:sp>
+      <p:sp>
+        <p:nvSpPr>
+          <p:cNvPr id="4" name="Rectangle 3"/>
           <p:cNvSpPr/>
           <p:nvPr/>
         </p:nvSpPr>
         <p:spPr>
           <a:xfrm>
-            <a:off x="685800" y="1143000"/>
-            <a:ext cx="10817352" cy="25400"/>
+            <a:off x="685800" y="2788920"/>
+            <a:ext cx="548640" cy="38100"/>
           </a:xfrm>
           <a:prstGeom prst="rect">
             <a:avLst/>
@@ -4573,370 +4641,86 @@
           </a:p>
         </p:txBody>
       </p:sp>
-      <p:graphicFrame>
-        <p:nvGraphicFramePr>
-          <p:cNvPr id="7" name="Table 6"/>
-          <p:cNvGraphicFramePr>
-            <a:graphicFrameLocks noGrp="1"/>
-          </p:cNvGraphicFramePr>
-          <p:nvPr/>
-        </p:nvGraphicFramePr>
-        <p:xfrm>
-          <a:off x="685800" y="1417320"/>
-          <a:ext cx="10817352" cy="2688336"/>
-        </p:xfrm>
-        <a:graphic>
-          <a:graphicData uri="http://schemas.openxmlformats.org/drawingml/2006/table">
-            <a:tbl>
-              <a:tblPr firstRow="1" bandRow="1">
-                <a:tableStyleId>{5C22544A-7EE6-4342-B048-85BDC9FD1C3A}</a:tableStyleId>
-              </a:tblPr>
-              <a:tblGrid>
-                <a:gridCol w="3605784"/>
-                <a:gridCol w="3605784"/>
-                <a:gridCol w="3605784"/>
-              </a:tblGrid>
-              <a:tr h="384048">
-                <a:tc>
-                  <a:txBody>
-                    <a:bodyPr/>
-                    <a:lstStyle/>
-                    <a:p>
-                      <a:r>
-                        <a:rPr sz="1100" b="1">
-                          <a:solidFill>
-                            <a:srgbClr val="FFFFFF"/>
-                          </a:solidFill>
-                          <a:latin typeface="Arial"/>
-                        </a:rPr>
-                        <a:t>Kriterium</a:t>
-                      </a:r>
-                    </a:p>
-                  </a:txBody>
-                  <a:tcPr>
-                    <a:solidFill>
-                      <a:srgbClr val="1F2C56"/>
-                    </a:solidFill>
-                  </a:tcPr>
-                </a:tc>
-                <a:tc>
-                  <a:txBody>
-                    <a:bodyPr/>
-                    <a:lstStyle/>
-                    <a:p>
-                      <a:r>
-                        <a:rPr sz="1100" b="1">
-                          <a:solidFill>
-                            <a:srgbClr val="FFFFFF"/>
-                          </a:solidFill>
-                          <a:latin typeface="Arial"/>
-                        </a:rPr>
-                        <a:t>Beobachtung / Beispiel</a:t>
-                      </a:r>
-                    </a:p>
-                  </a:txBody>
-                  <a:tcPr>
-                    <a:solidFill>
-                      <a:srgbClr val="1F2C56"/>
-                    </a:solidFill>
-                  </a:tcPr>
-                </a:tc>
-                <a:tc>
-                  <a:txBody>
-                    <a:bodyPr/>
-                    <a:lstStyle/>
-                    <a:p>
-                      <a:r>
-                        <a:rPr sz="1100" b="1">
-                          <a:solidFill>
-                            <a:srgbClr val="FFFFFF"/>
-                          </a:solidFill>
-                          <a:latin typeface="Arial"/>
-                        </a:rPr>
-                        <a:t>1–5</a:t>
-                      </a:r>
-                    </a:p>
-                  </a:txBody>
-                  <a:tcPr>
-                    <a:solidFill>
-                      <a:srgbClr val="1F2C56"/>
-                    </a:solidFill>
-                  </a:tcPr>
-                </a:tc>
-              </a:tr>
-              <a:tr h="384048">
-                <a:tc>
-                  <a:txBody>
-                    <a:bodyPr/>
-                    <a:lstStyle/>
-                    <a:p>
-                      <a:r>
-                        <a:rPr sz="1050">
-                          <a:solidFill>
-                            <a:srgbClr val="3D5466"/>
-                          </a:solidFill>
-                          <a:latin typeface="Arial"/>
-                        </a:rPr>
-                        <a:t>5-Phasen-Rahmen eingehalten</a:t>
-                      </a:r>
-                    </a:p>
-                  </a:txBody>
-                  <a:tcPr/>
-                </a:tc>
-                <a:tc>
-                  <a:txBody>
-                    <a:bodyPr/>
-                    <a:lstStyle/>
-                    <a:p/>
-                  </a:txBody>
-                  <a:tcPr/>
-                </a:tc>
-                <a:tc>
-                  <a:txBody>
-                    <a:bodyPr/>
-                    <a:lstStyle/>
-                    <a:p/>
-                  </a:txBody>
-                  <a:tcPr/>
-                </a:tc>
-              </a:tr>
-              <a:tr h="384048">
-                <a:tc>
-                  <a:txBody>
-                    <a:bodyPr/>
-                    <a:lstStyle/>
-                    <a:p>
-                      <a:r>
-                        <a:rPr sz="1050">
-                          <a:solidFill>
-                            <a:srgbClr val="3D5466"/>
-                          </a:solidFill>
-                          <a:latin typeface="Arial"/>
-                        </a:rPr>
-                        <a:t>Offene Fragen eingesetzt</a:t>
-                      </a:r>
-                    </a:p>
-                  </a:txBody>
-                  <a:tcPr/>
-                </a:tc>
-                <a:tc>
-                  <a:txBody>
-                    <a:bodyPr/>
-                    <a:lstStyle/>
-                    <a:p/>
-                  </a:txBody>
-                  <a:tcPr/>
-                </a:tc>
-                <a:tc>
-                  <a:txBody>
-                    <a:bodyPr/>
-                    <a:lstStyle/>
-                    <a:p/>
-                  </a:txBody>
-                  <a:tcPr/>
-                </a:tc>
-              </a:tr>
-              <a:tr h="384048">
-                <a:tc>
-                  <a:txBody>
-                    <a:bodyPr/>
-                    <a:lstStyle/>
-                    <a:p>
-                      <a:r>
-                        <a:rPr sz="1050">
-                          <a:solidFill>
-                            <a:srgbClr val="3D5466"/>
-                          </a:solidFill>
-                          <a:latin typeface="Arial"/>
-                        </a:rPr>
-                        <a:t>Beobachtung + Frage statt Beobachtung + Urteil</a:t>
-                      </a:r>
-                    </a:p>
-                  </a:txBody>
-                  <a:tcPr/>
-                </a:tc>
-                <a:tc>
-                  <a:txBody>
-                    <a:bodyPr/>
-                    <a:lstStyle/>
-                    <a:p/>
-                  </a:txBody>
-                  <a:tcPr/>
-                </a:tc>
-                <a:tc>
-                  <a:txBody>
-                    <a:bodyPr/>
-                    <a:lstStyle/>
-                    <a:p/>
-                  </a:txBody>
-                  <a:tcPr/>
-                </a:tc>
-              </a:tr>
-              <a:tr h="384048">
-                <a:tc>
-                  <a:txBody>
-                    <a:bodyPr/>
-                    <a:lstStyle/>
-                    <a:p>
-                      <a:r>
-                        <a:rPr sz="1050">
-                          <a:solidFill>
-                            <a:srgbClr val="3D5466"/>
-                          </a:solidFill>
-                          <a:latin typeface="Arial"/>
-                        </a:rPr>
-                        <a:t>Qualitative Info aktiv erfragt</a:t>
-                      </a:r>
-                    </a:p>
-                  </a:txBody>
-                  <a:tcPr/>
-                </a:tc>
-                <a:tc>
-                  <a:txBody>
-                    <a:bodyPr/>
-                    <a:lstStyle/>
-                    <a:p/>
-                  </a:txBody>
-                  <a:tcPr/>
-                </a:tc>
-                <a:tc>
-                  <a:txBody>
-                    <a:bodyPr/>
-                    <a:lstStyle/>
-                    <a:p/>
-                  </a:txBody>
-                  <a:tcPr/>
-                </a:tc>
-              </a:tr>
-              <a:tr h="384048">
-                <a:tc>
-                  <a:txBody>
-                    <a:bodyPr/>
-                    <a:lstStyle/>
-                    <a:p>
-                      <a:r>
-                        <a:rPr sz="1050">
-                          <a:solidFill>
-                            <a:srgbClr val="3D5466"/>
-                          </a:solidFill>
-                          <a:latin typeface="Arial"/>
-                        </a:rPr>
-                        <a:t>Konkrete Beratungsimpulse aus Analyse abgeleitet</a:t>
-                      </a:r>
-                    </a:p>
-                  </a:txBody>
-                  <a:tcPr/>
-                </a:tc>
-                <a:tc>
-                  <a:txBody>
-                    <a:bodyPr/>
-                    <a:lstStyle/>
-                    <a:p/>
-                  </a:txBody>
-                  <a:tcPr/>
-                </a:tc>
-                <a:tc>
-                  <a:txBody>
-                    <a:bodyPr/>
-                    <a:lstStyle/>
-                    <a:p/>
-                  </a:txBody>
-                  <a:tcPr/>
-                </a:tc>
-              </a:tr>
-              <a:tr h="384048">
-                <a:tc>
-                  <a:txBody>
-                    <a:bodyPr/>
-                    <a:lstStyle/>
-                    <a:p>
-                      <a:r>
-                        <a:rPr sz="1050">
-                          <a:solidFill>
-                            <a:srgbClr val="3D5466"/>
-                          </a:solidFill>
-                          <a:latin typeface="Arial"/>
-                        </a:rPr>
-                        <a:t>Gespräch wirkte wie Dialog auf Augenhöhe</a:t>
-                      </a:r>
-                    </a:p>
-                  </a:txBody>
-                  <a:tcPr/>
-                </a:tc>
-                <a:tc>
-                  <a:txBody>
-                    <a:bodyPr/>
-                    <a:lstStyle/>
-                    <a:p/>
-                  </a:txBody>
-                  <a:tcPr/>
-                </a:tc>
-                <a:tc>
-                  <a:txBody>
-                    <a:bodyPr/>
-                    <a:lstStyle/>
-                    <a:p/>
-                  </a:txBody>
-                  <a:tcPr/>
-                </a:tc>
-              </a:tr>
-            </a:tbl>
-          </a:graphicData>
-        </a:graphic>
-      </p:graphicFrame>
-      <p:sp>
-        <p:nvSpPr>
-          <p:cNvPr id="8" name="Rectangle 7"/>
-          <p:cNvSpPr/>
-          <p:nvPr/>
-        </p:nvSpPr>
-        <p:spPr>
-          <a:xfrm>
-            <a:off x="0" y="6510528"/>
-            <a:ext cx="12188952" cy="347472"/>
-          </a:xfrm>
-          <a:prstGeom prst="rect">
-            <a:avLst/>
-          </a:prstGeom>
-          <a:solidFill>
-            <a:srgbClr val="0A1937"/>
-          </a:solidFill>
-          <a:ln>
-            <a:noFill/>
-          </a:ln>
-        </p:spPr>
-        <p:style>
-          <a:lnRef idx="1">
-            <a:schemeClr val="accent1"/>
-          </a:lnRef>
-          <a:fillRef idx="3">
-            <a:schemeClr val="accent1"/>
-          </a:fillRef>
-          <a:effectRef idx="2">
-            <a:schemeClr val="accent1"/>
-          </a:effectRef>
-          <a:fontRef idx="minor">
-            <a:schemeClr val="lt1"/>
-          </a:fontRef>
-        </p:style>
-        <p:txBody>
-          <a:bodyPr rtlCol="0" anchor="ctr"/>
-          <a:lstStyle/>
-          <a:p>
-            <a:pPr algn="ctr"/>
-          </a:p>
-        </p:txBody>
-      </p:sp>
-      <p:sp>
-        <p:nvSpPr>
-          <p:cNvPr id="9" name="TextBox 8"/>
+      <p:sp>
+        <p:nvSpPr>
+          <p:cNvPr id="5" name="TextBox 4"/>
           <p:cNvSpPr txBox="1"/>
           <p:nvPr/>
         </p:nvSpPr>
         <p:spPr>
           <a:xfrm>
-            <a:off x="685800" y="6583680"/>
-            <a:ext cx="6490411" cy="256032"/>
+            <a:off x="685800" y="3017520"/>
+            <a:ext cx="10817352" cy="1463040"/>
+          </a:xfrm>
+          <a:prstGeom prst="rect">
+            <a:avLst/>
+          </a:prstGeom>
+          <a:noFill/>
+        </p:spPr>
+        <p:txBody>
+          <a:bodyPr wrap="square">
+            <a:spAutoFit/>
+          </a:bodyPr>
+          <a:lstStyle/>
+          <a:p>
+            <a:pPr algn="l"/>
+            <a:r>
+              <a:rPr sz="4000" b="1" i="0">
+                <a:solidFill>
+                  <a:srgbClr val="FFFFFF"/>
+                </a:solidFill>
+                <a:latin typeface="Arial"/>
+              </a:rPr>
+              <a:t>Praxiscase &amp; Rollenspiel</a:t>
+            </a:r>
+          </a:p>
+        </p:txBody>
+      </p:sp>
+      <p:sp>
+        <p:nvSpPr>
+          <p:cNvPr id="6" name="TextBox 5"/>
+          <p:cNvSpPr txBox="1"/>
+          <p:nvPr/>
+        </p:nvSpPr>
+        <p:spPr>
+          <a:xfrm>
+            <a:off x="685800" y="4480560"/>
+            <a:ext cx="8653881" cy="1280160"/>
+          </a:xfrm>
+          <a:prstGeom prst="rect">
+            <a:avLst/>
+          </a:prstGeom>
+          <a:noFill/>
+        </p:spPr>
+        <p:txBody>
+          <a:bodyPr wrap="square">
+            <a:spAutoFit/>
+          </a:bodyPr>
+          <a:lstStyle/>
+          <a:p>
+            <a:pPr algn="l"/>
+            <a:r>
+              <a:rPr sz="1600" b="0" i="0">
+                <a:solidFill>
+                  <a:srgbClr val="C8D2E6"/>
+                </a:solidFill>
+                <a:latin typeface="Arial"/>
+              </a:rPr>
+              <a:t>Ein kritisches Bilanzgespräch vorbereiten und im Rollenspiel führen.</a:t>
+            </a:r>
+          </a:p>
+        </p:txBody>
+      </p:sp>
+      <p:sp>
+        <p:nvSpPr>
+          <p:cNvPr id="7" name="TextBox 6"/>
+          <p:cNvSpPr txBox="1"/>
+          <p:nvPr/>
+        </p:nvSpPr>
+        <p:spPr>
+          <a:xfrm>
+            <a:off x="685800" y="6355080"/>
+            <a:ext cx="10817352" cy="274320"/>
           </a:xfrm>
           <a:prstGeom prst="rect">
             <a:avLst/>
@@ -4953,46 +4737,11 @@
             <a:r>
               <a:rPr sz="700">
                 <a:solidFill>
-                  <a:srgbClr val="A0B4D2"/>
+                  <a:srgbClr val="8CA0C3"/>
                 </a:solidFill>
                 <a:latin typeface="Consolas"/>
               </a:rPr>
               <a:t>FKB Campus  ·  M02</a:t>
-            </a:r>
-          </a:p>
-        </p:txBody>
-      </p:sp>
-      <p:sp>
-        <p:nvSpPr>
-          <p:cNvPr id="10" name="TextBox 9"/>
-          <p:cNvSpPr txBox="1"/>
-          <p:nvPr/>
-        </p:nvSpPr>
-        <p:spPr>
-          <a:xfrm>
-            <a:off x="7176211" y="6583680"/>
-            <a:ext cx="4326940" cy="256032"/>
-          </a:xfrm>
-          <a:prstGeom prst="rect">
-            <a:avLst/>
-          </a:prstGeom>
-          <a:noFill/>
-        </p:spPr>
-        <p:txBody>
-          <a:bodyPr wrap="none">
-            <a:spAutoFit/>
-          </a:bodyPr>
-          <a:lstStyle/>
-          <a:p>
-            <a:pPr algn="r"/>
-            <a:r>
-              <a:rPr sz="700">
-                <a:solidFill>
-                  <a:srgbClr val="A0B4D2"/>
-                </a:solidFill>
-                <a:latin typeface="Consolas"/>
-              </a:rPr>
-              <a:t>Übersicht</a:t>
             </a:r>
           </a:p>
         </p:txBody>
@@ -5131,7 +4880,7 @@
                 </a:solidFill>
                 <a:latin typeface="Consolas"/>
               </a:rPr>
-              <a:t>M02  ·  INHALT</a:t>
+              <a:t>M02  ·  ARBEITSBLATT</a:t>
             </a:r>
           </a:p>
         </p:txBody>
@@ -5252,7 +5001,7 @@
                 </a:solidFill>
                 <a:latin typeface="Arial"/>
               </a:rPr>
-              <a:t>AB-1: Checkliste – Bilanzgespräch vorbereiten</a:t>
+              <a:t>Bilanzgespräch Schwäbische Metallbau bearbeiten</a:t>
             </a:r>
           </a:p>
         </p:txBody>
@@ -5265,8 +5014,8 @@
         </p:nvSpPr>
         <p:spPr>
           <a:xfrm>
-            <a:off x="685800" y="1417320"/>
-            <a:ext cx="10817352" cy="4892040"/>
+            <a:off x="685800" y="1554480"/>
+            <a:ext cx="10817352" cy="3840480"/>
           </a:xfrm>
           <a:prstGeom prst="rect">
             <a:avLst/>
@@ -5288,13 +5037,13 @@
               </a:spcAft>
             </a:pPr>
             <a:r>
-              <a:rPr sz="1300">
+              <a:rPr sz="1400">
                 <a:solidFill>
                   <a:srgbClr val="3D5466"/>
                 </a:solidFill>
                 <a:latin typeface="Arial"/>
               </a:rPr>
-              <a:t>▸  Vor dem Gespräch:</a:t>
+              <a:t>▸  Bereiten Sie das Bilanzgespräch mit der Schwäbischen Metallbau GmbH vor (AB-1).</a:t>
             </a:r>
           </a:p>
           <a:p>
@@ -5307,13 +5056,13 @@
               </a:spcAft>
             </a:pPr>
             <a:r>
-              <a:rPr sz="1300">
+              <a:rPr sz="1400">
                 <a:solidFill>
                   <a:srgbClr val="3D5466"/>
                 </a:solidFill>
                 <a:latin typeface="Arial"/>
               </a:rPr>
-              <a:t>▸  [ ] Jahresabschluss und Vorjahresvergleich ausgewertet</a:t>
+              <a:t>▸  Ordnen Sie die kritischen Kennzahlen den fünf Gesprächsphasen zu.</a:t>
             </a:r>
           </a:p>
           <a:p>
@@ -5326,191 +5075,98 @@
               </a:spcAft>
             </a:pPr>
             <a:r>
-              <a:rPr sz="1300">
+              <a:rPr sz="1400">
                 <a:solidFill>
                   <a:srgbClr val="3D5466"/>
                 </a:solidFill>
                 <a:latin typeface="Arial"/>
               </a:rPr>
-              <a:t>▸  [ ] 4+ Kennzahlen berechnet, Branchenvergleich notiert</a:t>
-            </a:r>
-          </a:p>
-          <a:p>
-            <a:pPr marL="190500" indent="-190500">
-              <a:spcBef>
-                <a:spcPts val="400"/>
-              </a:spcBef>
-              <a:spcAft>
-                <a:spcPts val="200"/>
-              </a:spcAft>
-            </a:pPr>
-            <a:r>
-              <a:rPr sz="1300">
-                <a:solidFill>
-                  <a:srgbClr val="3D5466"/>
+              <a:t>▸  Führen Sie das Gespräch im Rollenspiel und nutzen Sie den Beobachtungsbogen.</a:t>
+            </a:r>
+          </a:p>
+        </p:txBody>
+      </p:sp>
+      <p:sp>
+        <p:nvSpPr>
+          <p:cNvPr id="9" name="Rectangle 8"/>
+          <p:cNvSpPr/>
+          <p:nvPr/>
+        </p:nvSpPr>
+        <p:spPr>
+          <a:xfrm>
+            <a:off x="685800" y="5486400"/>
+            <a:ext cx="10817352" cy="640080"/>
+          </a:xfrm>
+          <a:prstGeom prst="rect">
+            <a:avLst/>
+          </a:prstGeom>
+          <a:solidFill>
+            <a:srgbClr val="1F2C56"/>
+          </a:solidFill>
+          <a:ln>
+            <a:noFill/>
+          </a:ln>
+        </p:spPr>
+        <p:style>
+          <a:lnRef idx="1">
+            <a:schemeClr val="accent1"/>
+          </a:lnRef>
+          <a:fillRef idx="3">
+            <a:schemeClr val="accent1"/>
+          </a:fillRef>
+          <a:effectRef idx="2">
+            <a:schemeClr val="accent1"/>
+          </a:effectRef>
+          <a:fontRef idx="minor">
+            <a:schemeClr val="lt1"/>
+          </a:fontRef>
+        </p:style>
+        <p:txBody>
+          <a:bodyPr rtlCol="0" anchor="ctr"/>
+          <a:lstStyle/>
+          <a:p>
+            <a:pPr algn="ctr"/>
+          </a:p>
+        </p:txBody>
+      </p:sp>
+      <p:sp>
+        <p:nvSpPr>
+          <p:cNvPr id="10" name="TextBox 9"/>
+          <p:cNvSpPr txBox="1"/>
+          <p:nvPr/>
+        </p:nvSpPr>
+        <p:spPr>
+          <a:xfrm>
+            <a:off x="868680" y="5596128"/>
+            <a:ext cx="10451592" cy="457200"/>
+          </a:xfrm>
+          <a:prstGeom prst="rect">
+            <a:avLst/>
+          </a:prstGeom>
+          <a:noFill/>
+        </p:spPr>
+        <p:txBody>
+          <a:bodyPr wrap="square">
+            <a:spAutoFit/>
+          </a:bodyPr>
+          <a:lstStyle/>
+          <a:p>
+            <a:pPr algn="l"/>
+            <a:r>
+              <a:rPr sz="1300" b="1" i="0">
+                <a:solidFill>
+                  <a:srgbClr val="FFFFFF"/>
                 </a:solidFill>
                 <a:latin typeface="Arial"/>
               </a:rPr>
-              <a:t>▸  [ ] 5 offene Fragen schriftlich vorbereitet</a:t>
-            </a:r>
-          </a:p>
-          <a:p>
-            <a:pPr marL="190500" indent="-190500">
-              <a:spcBef>
-                <a:spcPts val="400"/>
-              </a:spcBef>
-              <a:spcAft>
-                <a:spcPts val="200"/>
-              </a:spcAft>
-            </a:pPr>
-            <a:r>
-              <a:rPr sz="1300">
-                <a:solidFill>
-                  <a:srgbClr val="3D5466"/>
-                </a:solidFill>
-                <a:latin typeface="Arial"/>
-              </a:rPr>
-              <a:t>▸  [ ] Gesprächsziel definiert</a:t>
-            </a:r>
-          </a:p>
-          <a:p>
-            <a:pPr marL="190500" indent="-190500">
-              <a:spcBef>
-                <a:spcPts val="400"/>
-              </a:spcBef>
-              <a:spcAft>
-                <a:spcPts val="200"/>
-              </a:spcAft>
-            </a:pPr>
-            <a:r>
-              <a:rPr sz="1300">
-                <a:solidFill>
-                  <a:srgbClr val="3D5466"/>
-                </a:solidFill>
-                <a:latin typeface="Arial"/>
-              </a:rPr>
-              <a:t>▸  [ ] Kreditlinie / § 18 KWG-Unterlagen geprüft</a:t>
-            </a:r>
-          </a:p>
-          <a:p>
-            <a:pPr marL="190500" indent="-190500">
-              <a:spcBef>
-                <a:spcPts val="400"/>
-              </a:spcBef>
-              <a:spcAft>
-                <a:spcPts val="200"/>
-              </a:spcAft>
-            </a:pPr>
-            <a:r>
-              <a:rPr sz="1300">
-                <a:solidFill>
-                  <a:srgbClr val="3D5466"/>
-                </a:solidFill>
-                <a:latin typeface="Arial"/>
-              </a:rPr>
-              <a:t>▸  [ ] Verbundpartner-Bedarf gesichtet (R+V, Union Investment, DZ BANK)</a:t>
-            </a:r>
-          </a:p>
-          <a:p>
-            <a:pPr marL="190500" indent="-190500">
-              <a:spcBef>
-                <a:spcPts val="400"/>
-              </a:spcBef>
-              <a:spcAft>
-                <a:spcPts val="200"/>
-              </a:spcAft>
-            </a:pPr>
-            <a:r>
-              <a:rPr sz="1300">
-                <a:solidFill>
-                  <a:srgbClr val="3D5466"/>
-                </a:solidFill>
-                <a:latin typeface="Arial"/>
-              </a:rPr>
-              <a:t>▸  Im Gespräch:</a:t>
-            </a:r>
-          </a:p>
-          <a:p>
-            <a:pPr marL="190500" indent="-190500">
-              <a:spcBef>
-                <a:spcPts val="400"/>
-              </a:spcBef>
-              <a:spcAft>
-                <a:spcPts val="200"/>
-              </a:spcAft>
-            </a:pPr>
-            <a:r>
-              <a:rPr sz="1300">
-                <a:solidFill>
-                  <a:srgbClr val="3D5466"/>
-                </a:solidFill>
-                <a:latin typeface="Arial"/>
-              </a:rPr>
-              <a:t>▸  [ ] Positiver Einstieg, Agenda gesetzt</a:t>
-            </a:r>
-          </a:p>
-          <a:p>
-            <a:pPr marL="190500" indent="-190500">
-              <a:spcBef>
-                <a:spcPts val="400"/>
-              </a:spcBef>
-              <a:spcAft>
-                <a:spcPts val="200"/>
-              </a:spcAft>
-            </a:pPr>
-            <a:r>
-              <a:rPr sz="1300">
-                <a:solidFill>
-                  <a:srgbClr val="3D5466"/>
-                </a:solidFill>
-                <a:latin typeface="Arial"/>
-              </a:rPr>
-              <a:t>▸  [ ] Mindestens 40 % Redezeit für den Kunden</a:t>
-            </a:r>
-          </a:p>
-          <a:p>
-            <a:pPr marL="190500" indent="-190500">
-              <a:spcBef>
-                <a:spcPts val="400"/>
-              </a:spcBef>
-              <a:spcAft>
-                <a:spcPts val="200"/>
-              </a:spcAft>
-            </a:pPr>
-            <a:r>
-              <a:rPr sz="1300">
-                <a:solidFill>
-                  <a:srgbClr val="3D5466"/>
-                </a:solidFill>
-                <a:latin typeface="Arial"/>
-              </a:rPr>
-              <a:t>▸  [ ] Kritische Punkte mit offener Frage angesprochen</a:t>
-            </a:r>
-          </a:p>
-          <a:p>
-            <a:pPr marL="190500" indent="-190500">
-              <a:spcBef>
-                <a:spcPts val="400"/>
-              </a:spcBef>
-              <a:spcAft>
-                <a:spcPts val="200"/>
-              </a:spcAft>
-            </a:pPr>
-            <a:r>
-              <a:rPr sz="1300">
-                <a:solidFill>
-                  <a:srgbClr val="3D5466"/>
-                </a:solidFill>
-                <a:latin typeface="Arial"/>
-              </a:rPr>
-              <a:t>▸  [ ] Handlungsoptionen gemeinsam entwickelt</a:t>
-            </a:r>
-          </a:p>
-        </p:txBody>
-      </p:sp>
-      <p:sp>
-        <p:nvSpPr>
-          <p:cNvPr id="9" name="Rectangle 8"/>
+              <a:t>→  Bearbeitung im Teilnehmer-Workbook (Arbeitsblatt mit Ausfüllfeldern)</a:t>
+            </a:r>
+          </a:p>
+        </p:txBody>
+      </p:sp>
+      <p:sp>
+        <p:nvSpPr>
+          <p:cNvPr id="11" name="Rectangle 10"/>
           <p:cNvSpPr/>
           <p:nvPr/>
         </p:nvSpPr>
@@ -5553,7 +5209,7 @@
       </p:sp>
       <p:sp>
         <p:nvSpPr>
-          <p:cNvPr id="10" name="TextBox 9"/>
+          <p:cNvPr id="12" name="TextBox 11"/>
           <p:cNvSpPr txBox="1"/>
           <p:nvPr/>
         </p:nvSpPr>
@@ -5841,7 +5497,7 @@
                 </a:solidFill>
                 <a:latin typeface="Arial"/>
               </a:rPr>
-              <a:t>Reflexionsfragen</a:t>
+              <a:t>Prinzip dieses Moduls</a:t>
             </a:r>
           </a:p>
         </p:txBody>
@@ -5867,6 +5523,25 @@
             <a:spAutoFit/>
           </a:bodyPr>
           <a:lstStyle/>
+          <a:p>
+            <a:pPr marL="177800" indent="-177800">
+              <a:spcBef>
+                <a:spcPts val="600"/>
+              </a:spcBef>
+              <a:spcAft>
+                <a:spcPts val="200"/>
+              </a:spcAft>
+            </a:pPr>
+            <a:r>
+              <a:rPr sz="1200" i="1">
+                <a:solidFill>
+                  <a:srgbClr val="3D5466"/>
+                </a:solidFill>
+                <a:latin typeface="Arial"/>
+              </a:rPr>
+              <a:t>→  Bring kritische Zahlen ins Gespräch, ohne Abwehr auszulösen.</a:t>
+            </a:r>
+          </a:p>
           <a:p>
             <a:pPr marL="190500" indent="-190500">
               <a:spcBef>
@@ -5883,9 +5558,370 @@
                 </a:solidFill>
                 <a:latin typeface="Arial"/>
               </a:rPr>
-              <a:t>▸  An welcher Stelle im Rollenspiel haben Sie sich am wohlsten gefühlt? Warum?</a:t>
-            </a:r>
-          </a:p>
+              <a:t>▸  Wer im offenen Dialog fragt statt anklagt, erhält die Erklärung – und den nächsten Beratungsansatz.</a:t>
+            </a:r>
+          </a:p>
+        </p:txBody>
+      </p:sp>
+      <p:sp>
+        <p:nvSpPr>
+          <p:cNvPr id="9" name="Rectangle 8"/>
+          <p:cNvSpPr/>
+          <p:nvPr/>
+        </p:nvSpPr>
+        <p:spPr>
+          <a:xfrm>
+            <a:off x="0" y="6510528"/>
+            <a:ext cx="12188952" cy="347472"/>
+          </a:xfrm>
+          <a:prstGeom prst="rect">
+            <a:avLst/>
+          </a:prstGeom>
+          <a:solidFill>
+            <a:srgbClr val="0A1937"/>
+          </a:solidFill>
+          <a:ln>
+            <a:noFill/>
+          </a:ln>
+        </p:spPr>
+        <p:style>
+          <a:lnRef idx="1">
+            <a:schemeClr val="accent1"/>
+          </a:lnRef>
+          <a:fillRef idx="3">
+            <a:schemeClr val="accent1"/>
+          </a:fillRef>
+          <a:effectRef idx="2">
+            <a:schemeClr val="accent1"/>
+          </a:effectRef>
+          <a:fontRef idx="minor">
+            <a:schemeClr val="lt1"/>
+          </a:fontRef>
+        </p:style>
+        <p:txBody>
+          <a:bodyPr rtlCol="0" anchor="ctr"/>
+          <a:lstStyle/>
+          <a:p>
+            <a:pPr algn="ctr"/>
+          </a:p>
+        </p:txBody>
+      </p:sp>
+      <p:sp>
+        <p:nvSpPr>
+          <p:cNvPr id="10" name="TextBox 9"/>
+          <p:cNvSpPr txBox="1"/>
+          <p:nvPr/>
+        </p:nvSpPr>
+        <p:spPr>
+          <a:xfrm>
+            <a:off x="685800" y="6583680"/>
+            <a:ext cx="6490411" cy="256032"/>
+          </a:xfrm>
+          <a:prstGeom prst="rect">
+            <a:avLst/>
+          </a:prstGeom>
+          <a:noFill/>
+        </p:spPr>
+        <p:txBody>
+          <a:bodyPr wrap="none">
+            <a:spAutoFit/>
+          </a:bodyPr>
+          <a:lstStyle/>
+          <a:p>
+            <a:pPr algn="l"/>
+            <a:r>
+              <a:rPr sz="700">
+                <a:solidFill>
+                  <a:srgbClr val="A0B4D2"/>
+                </a:solidFill>
+                <a:latin typeface="Consolas"/>
+              </a:rPr>
+              <a:t>FKB Campus  ·  M02</a:t>
+            </a:r>
+          </a:p>
+        </p:txBody>
+      </p:sp>
+    </p:spTree>
+  </p:cSld>
+  <p:clrMapOvr>
+    <a:masterClrMapping/>
+  </p:clrMapOvr>
+</p:sld>
+</file>
+
+<file path=ppt/slides/slide13.xml><?xml version="1.0" encoding="utf-8"?>
+<p:sld xmlns:a="http://schemas.openxmlformats.org/drawingml/2006/main" xmlns:p="http://schemas.openxmlformats.org/presentationml/2006/main" xmlns:r="http://schemas.openxmlformats.org/officeDocument/2006/relationships">
+  <p:cSld>
+    <p:spTree>
+      <p:nvGrpSpPr>
+        <p:cNvPr id="1" name=""/>
+        <p:cNvGrpSpPr/>
+        <p:nvPr/>
+      </p:nvGrpSpPr>
+      <p:grpSpPr/>
+      <p:sp>
+        <p:nvSpPr>
+          <p:cNvPr id="2" name="Rectangle 1"/>
+          <p:cNvSpPr/>
+          <p:nvPr/>
+        </p:nvSpPr>
+        <p:spPr>
+          <a:xfrm>
+            <a:off x="0" y="0"/>
+            <a:ext cx="12188952" cy="6858000"/>
+          </a:xfrm>
+          <a:prstGeom prst="rect">
+            <a:avLst/>
+          </a:prstGeom>
+          <a:solidFill>
+            <a:srgbClr val="EDEDF3"/>
+          </a:solidFill>
+          <a:ln>
+            <a:noFill/>
+          </a:ln>
+        </p:spPr>
+        <p:style>
+          <a:lnRef idx="1">
+            <a:schemeClr val="accent1"/>
+          </a:lnRef>
+          <a:fillRef idx="3">
+            <a:schemeClr val="accent1"/>
+          </a:fillRef>
+          <a:effectRef idx="2">
+            <a:schemeClr val="accent1"/>
+          </a:effectRef>
+          <a:fontRef idx="minor">
+            <a:schemeClr val="lt1"/>
+          </a:fontRef>
+        </p:style>
+        <p:txBody>
+          <a:bodyPr rtlCol="0" anchor="ctr"/>
+          <a:lstStyle/>
+          <a:p>
+            <a:pPr algn="ctr"/>
+          </a:p>
+        </p:txBody>
+      </p:sp>
+      <p:sp>
+        <p:nvSpPr>
+          <p:cNvPr id="3" name="Rectangle 2"/>
+          <p:cNvSpPr/>
+          <p:nvPr/>
+        </p:nvSpPr>
+        <p:spPr>
+          <a:xfrm>
+            <a:off x="0" y="0"/>
+            <a:ext cx="12188952" cy="50292"/>
+          </a:xfrm>
+          <a:prstGeom prst="rect">
+            <a:avLst/>
+          </a:prstGeom>
+          <a:solidFill>
+            <a:srgbClr val="1F2C56"/>
+          </a:solidFill>
+          <a:ln>
+            <a:noFill/>
+          </a:ln>
+        </p:spPr>
+        <p:style>
+          <a:lnRef idx="1">
+            <a:schemeClr val="accent1"/>
+          </a:lnRef>
+          <a:fillRef idx="3">
+            <a:schemeClr val="accent1"/>
+          </a:fillRef>
+          <a:effectRef idx="2">
+            <a:schemeClr val="accent1"/>
+          </a:effectRef>
+          <a:fontRef idx="minor">
+            <a:schemeClr val="lt1"/>
+          </a:fontRef>
+        </p:style>
+        <p:txBody>
+          <a:bodyPr rtlCol="0" anchor="ctr"/>
+          <a:lstStyle/>
+          <a:p>
+            <a:pPr algn="ctr"/>
+          </a:p>
+        </p:txBody>
+      </p:sp>
+      <p:sp>
+        <p:nvSpPr>
+          <p:cNvPr id="4" name="TextBox 3"/>
+          <p:cNvSpPr txBox="1"/>
+          <p:nvPr/>
+        </p:nvSpPr>
+        <p:spPr>
+          <a:xfrm>
+            <a:off x="685800" y="109728"/>
+            <a:ext cx="10817352" cy="228600"/>
+          </a:xfrm>
+          <a:prstGeom prst="rect">
+            <a:avLst/>
+          </a:prstGeom>
+          <a:noFill/>
+        </p:spPr>
+        <p:txBody>
+          <a:bodyPr wrap="none">
+            <a:spAutoFit/>
+          </a:bodyPr>
+          <a:lstStyle/>
+          <a:p>
+            <a:pPr algn="l"/>
+            <a:r>
+              <a:rPr sz="750">
+                <a:solidFill>
+                  <a:srgbClr val="78808C"/>
+                </a:solidFill>
+                <a:latin typeface="Consolas"/>
+              </a:rPr>
+              <a:t>M02  ·  INHALT</a:t>
+            </a:r>
+          </a:p>
+        </p:txBody>
+      </p:sp>
+      <p:sp>
+        <p:nvSpPr>
+          <p:cNvPr id="5" name="Rectangle 4"/>
+          <p:cNvSpPr/>
+          <p:nvPr/>
+        </p:nvSpPr>
+        <p:spPr>
+          <a:xfrm>
+            <a:off x="0" y="1234440"/>
+            <a:ext cx="12188952" cy="12700"/>
+          </a:xfrm>
+          <a:prstGeom prst="rect">
+            <a:avLst/>
+          </a:prstGeom>
+          <a:solidFill>
+            <a:srgbClr val="D8DFE4"/>
+          </a:solidFill>
+          <a:ln>
+            <a:noFill/>
+          </a:ln>
+        </p:spPr>
+        <p:style>
+          <a:lnRef idx="1">
+            <a:schemeClr val="accent1"/>
+          </a:lnRef>
+          <a:fillRef idx="3">
+            <a:schemeClr val="accent1"/>
+          </a:fillRef>
+          <a:effectRef idx="2">
+            <a:schemeClr val="accent1"/>
+          </a:effectRef>
+          <a:fontRef idx="minor">
+            <a:schemeClr val="lt1"/>
+          </a:fontRef>
+        </p:style>
+        <p:txBody>
+          <a:bodyPr rtlCol="0" anchor="ctr"/>
+          <a:lstStyle/>
+          <a:p>
+            <a:pPr algn="ctr"/>
+          </a:p>
+        </p:txBody>
+      </p:sp>
+      <p:sp>
+        <p:nvSpPr>
+          <p:cNvPr id="6" name="Rectangle 5"/>
+          <p:cNvSpPr/>
+          <p:nvPr/>
+        </p:nvSpPr>
+        <p:spPr>
+          <a:xfrm>
+            <a:off x="685800" y="502920"/>
+            <a:ext cx="36576" cy="658368"/>
+          </a:xfrm>
+          <a:prstGeom prst="rect">
+            <a:avLst/>
+          </a:prstGeom>
+          <a:solidFill>
+            <a:srgbClr val="D9C089"/>
+          </a:solidFill>
+          <a:ln>
+            <a:noFill/>
+          </a:ln>
+        </p:spPr>
+        <p:style>
+          <a:lnRef idx="1">
+            <a:schemeClr val="accent1"/>
+          </a:lnRef>
+          <a:fillRef idx="3">
+            <a:schemeClr val="accent1"/>
+          </a:fillRef>
+          <a:effectRef idx="2">
+            <a:schemeClr val="accent1"/>
+          </a:effectRef>
+          <a:fontRef idx="minor">
+            <a:schemeClr val="lt1"/>
+          </a:fontRef>
+        </p:style>
+        <p:txBody>
+          <a:bodyPr rtlCol="0" anchor="ctr"/>
+          <a:lstStyle/>
+          <a:p>
+            <a:pPr algn="ctr"/>
+          </a:p>
+        </p:txBody>
+      </p:sp>
+      <p:sp>
+        <p:nvSpPr>
+          <p:cNvPr id="7" name="TextBox 6"/>
+          <p:cNvSpPr txBox="1"/>
+          <p:nvPr/>
+        </p:nvSpPr>
+        <p:spPr>
+          <a:xfrm>
+            <a:off x="813816" y="502920"/>
+            <a:ext cx="10634472" cy="685800"/>
+          </a:xfrm>
+          <a:prstGeom prst="rect">
+            <a:avLst/>
+          </a:prstGeom>
+          <a:noFill/>
+        </p:spPr>
+        <p:txBody>
+          <a:bodyPr wrap="square">
+            <a:spAutoFit/>
+          </a:bodyPr>
+          <a:lstStyle/>
+          <a:p>
+            <a:pPr algn="l"/>
+            <a:r>
+              <a:rPr sz="2400" b="1" i="0">
+                <a:solidFill>
+                  <a:srgbClr val="1F2C56"/>
+                </a:solidFill>
+                <a:latin typeface="Arial"/>
+              </a:rPr>
+              <a:t>Reflexion und Selbstcheck</a:t>
+            </a:r>
+          </a:p>
+        </p:txBody>
+      </p:sp>
+      <p:sp>
+        <p:nvSpPr>
+          <p:cNvPr id="8" name="TextBox 7"/>
+          <p:cNvSpPr txBox="1"/>
+          <p:nvPr/>
+        </p:nvSpPr>
+        <p:spPr>
+          <a:xfrm>
+            <a:off x="685800" y="1417320"/>
+            <a:ext cx="10817352" cy="4892040"/>
+          </a:xfrm>
+          <a:prstGeom prst="rect">
+            <a:avLst/>
+          </a:prstGeom>
+          <a:noFill/>
+        </p:spPr>
+        <p:txBody>
+          <a:bodyPr wrap="square" anchor="ctr">
+            <a:spAutoFit/>
+          </a:bodyPr>
+          <a:lstStyle/>
           <a:p>
             <a:pPr marL="190500" indent="-190500">
               <a:spcBef>
@@ -5902,7 +5938,7 @@
                 </a:solidFill>
                 <a:latin typeface="Arial"/>
               </a:rPr>
-              <a:t>▸  Wo haben Sie gemerkt, dass Ihnen eine Technik noch nicht in Fleisch und Blut übergegangen ist?</a:t>
+              <a:t>▸  Bei welcher kritischen Kennzahl löst Ihre Formulierung bisher am ehesten Abwehr aus?</a:t>
             </a:r>
           </a:p>
           <a:p>
@@ -5921,7 +5957,7 @@
                 </a:solidFill>
                 <a:latin typeface="Arial"/>
               </a:rPr>
-              <a:t>▸  Welchen konkreten Kunden würden Sie gerne beim nächsten Gespräch mit den neuen Techniken ansprechen?</a:t>
+              <a:t>▸  Welche der fünf Phasen überspringen Sie im Alltag am häufigsten?</a:t>
             </a:r>
           </a:p>
           <a:p>
@@ -5940,7 +5976,7 @@
                 </a:solidFill>
                 <a:latin typeface="Arial"/>
               </a:rPr>
-              <a:t>▸  Was nehmen Sie sich vor, beim nächsten echten Bilanzgespräch anders zu machen?</a:t>
+              <a:t>▸  Wie formulieren Sie eine schlechte Kennzahl als Frage statt als Vorwurf?</a:t>
             </a:r>
           </a:p>
         </p:txBody>
@@ -7782,7 +7818,7 @@
                 </a:solidFill>
                 <a:latin typeface="Arial"/>
               </a:rPr>
-              <a:t>Theorie-Input: Vom Zahlenleser zum Gesprächsführer</a:t>
+              <a:t>Kritische Zahlen ins Gespräch bringen – ohne Abwehr</a:t>
             </a:r>
           </a:p>
         </p:txBody>
@@ -7804,27 +7840,27 @@
           <a:noFill/>
         </p:spPr>
         <p:txBody>
-          <a:bodyPr wrap="square">
+          <a:bodyPr wrap="square" anchor="ctr">
             <a:spAutoFit/>
           </a:bodyPr>
           <a:lstStyle/>
           <a:p>
-            <a:pPr>
+            <a:pPr marL="177800" indent="-177800">
               <a:spcBef>
-                <a:spcPts val="1000"/>
+                <a:spcPts val="600"/>
               </a:spcBef>
               <a:spcAft>
                 <a:spcPts val="200"/>
               </a:spcAft>
             </a:pPr>
             <a:r>
-              <a:rPr sz="800" b="1">
-                <a:solidFill>
-                  <a:srgbClr val="78808C"/>
-                </a:solidFill>
-                <a:latin typeface="Consolas"/>
-              </a:rPr>
-              <a:t>DIE GRENZEN DER REINEN KENNZAHLENANALYSE</a:t>
+              <a:rPr sz="1200" i="1">
+                <a:solidFill>
+                  <a:srgbClr val="3D5466"/>
+                </a:solidFill>
+                <a:latin typeface="Arial"/>
+              </a:rPr>
+              <a:t>→  Bring kritische Zahlen ins Gespräch, ohne Abwehr auszulösen.</a:t>
             </a:r>
           </a:p>
           <a:p>
@@ -7843,26 +7879,7 @@
                 </a:solidFill>
                 <a:latin typeface="Arial"/>
               </a:rPr>
-              <a:t>▸  Der Jahresabschluss beantwortet die Frage: „Wie ist die finanzielle Situation?" . Diese Analyse ist die Grundlage des Kreditgeschäfts – und gleichzeitig nur die Hälfte der Geschichte.</a:t>
-            </a:r>
-          </a:p>
-          <a:p>
-            <a:pPr>
-              <a:spcBef>
-                <a:spcPts val="1000"/>
-              </a:spcBef>
-              <a:spcAft>
-                <a:spcPts val="200"/>
-              </a:spcAft>
-            </a:pPr>
-            <a:r>
-              <a:rPr sz="800" b="1">
-                <a:solidFill>
-                  <a:srgbClr val="78808C"/>
-                </a:solidFill>
-                <a:latin typeface="Consolas"/>
-              </a:rPr>
-              <a:t>KOMMUNIKATION AUF AUGENHÖHE: INHALTS- VS. BEZIEHUNGSEBENE</a:t>
+              <a:t>▸  Wer im offenen Dialog fragt statt anklagt, erhält die Erklärung – und den nächsten Beratungsansatz.</a:t>
             </a:r>
           </a:p>
           <a:p>
@@ -7881,159 +7898,7 @@
                 </a:solidFill>
                 <a:latin typeface="Arial"/>
               </a:rPr>
-              <a:t>▸  Das Muster: Beobachtung + offene Frage statt Beobachtung + Bewertung.</a:t>
-            </a:r>
-          </a:p>
-          <a:p>
-            <a:pPr>
-              <a:spcBef>
-                <a:spcPts val="1000"/>
-              </a:spcBef>
-              <a:spcAft>
-                <a:spcPts val="200"/>
-              </a:spcAft>
-            </a:pPr>
-            <a:r>
-              <a:rPr sz="800" b="1">
-                <a:solidFill>
-                  <a:srgbClr val="78808C"/>
-                </a:solidFill>
-                <a:latin typeface="Consolas"/>
-              </a:rPr>
-              <a:t>DER 5-PHASEN-RAHMEN FÜR DAS BILANZGESPRÄCH</a:t>
-            </a:r>
-          </a:p>
-          <a:p>
-            <a:pPr marL="190500" indent="-190500">
-              <a:spcBef>
-                <a:spcPts val="400"/>
-              </a:spcBef>
-              <a:spcAft>
-                <a:spcPts val="200"/>
-              </a:spcAft>
-            </a:pPr>
-            <a:r>
-              <a:rPr sz="1300">
-                <a:solidFill>
-                  <a:srgbClr val="3D5466"/>
-                </a:solidFill>
-                <a:latin typeface="Arial"/>
-              </a:rPr>
-              <a:t>▸  Phase 1 – Vorbereitung (30–45 Min. vor dem Termin)</a:t>
-            </a:r>
-          </a:p>
-          <a:p>
-            <a:pPr marL="190500" indent="-190500">
-              <a:spcBef>
-                <a:spcPts val="400"/>
-              </a:spcBef>
-              <a:spcAft>
-                <a:spcPts val="200"/>
-              </a:spcAft>
-            </a:pPr>
-            <a:r>
-              <a:rPr sz="1300">
-                <a:solidFill>
-                  <a:srgbClr val="3D5466"/>
-                </a:solidFill>
-                <a:latin typeface="Arial"/>
-              </a:rPr>
-              <a:t>▸  Mindestens 4 Kennzahlen berechnen (EK-Quote, Liquidität, Verschuldungsgrad, EBIT-Marge)</a:t>
-            </a:r>
-          </a:p>
-          <a:p>
-            <a:pPr marL="190500" indent="-190500">
-              <a:spcBef>
-                <a:spcPts val="400"/>
-              </a:spcBef>
-              <a:spcAft>
-                <a:spcPts val="200"/>
-              </a:spcAft>
-            </a:pPr>
-            <a:r>
-              <a:rPr sz="1300">
-                <a:solidFill>
-                  <a:srgbClr val="3D5466"/>
-                </a:solidFill>
-                <a:latin typeface="Arial"/>
-              </a:rPr>
-              <a:t>▸  Zeitreihe: Vergleich zu mindestens 2 Vorjahren</a:t>
-            </a:r>
-          </a:p>
-          <a:p>
-            <a:pPr marL="190500" indent="-190500">
-              <a:spcBef>
-                <a:spcPts val="400"/>
-              </a:spcBef>
-              <a:spcAft>
-                <a:spcPts val="200"/>
-              </a:spcAft>
-            </a:pPr>
-            <a:r>
-              <a:rPr sz="1300">
-                <a:solidFill>
-                  <a:srgbClr val="3D5466"/>
-                </a:solidFill>
-                <a:latin typeface="Arial"/>
-              </a:rPr>
-              <a:t>▸  Branchenwert recherchieren: In agree (Firmenkundenanalyse) stehen aktuelle Branchenbenchmarks aus der Creditreform/Bisnode-Lizenz direkt im Analysebogen – diese Werte für das Gespräch bevorzugen. Alternativ: Bundesbank Unternehmensabschlussstatistik (kostenfrei, aber teils 2 Jahre zeitverzögert)</a:t>
-            </a:r>
-          </a:p>
-          <a:p>
-            <a:pPr marL="190500" indent="-190500">
-              <a:spcBef>
-                <a:spcPts val="400"/>
-              </a:spcBef>
-              <a:spcAft>
-                <a:spcPts val="200"/>
-              </a:spcAft>
-            </a:pPr>
-            <a:r>
-              <a:rPr sz="1300">
-                <a:solidFill>
-                  <a:srgbClr val="3D5466"/>
-                </a:solidFill>
-                <a:latin typeface="Arial"/>
-              </a:rPr>
-              <a:t>▸  3 Schlüsselbotschaften + 5 offene Fragen schriftlich vorbereiten</a:t>
-            </a:r>
-          </a:p>
-          <a:p>
-            <a:pPr marL="190500" indent="-190500">
-              <a:spcBef>
-                <a:spcPts val="400"/>
-              </a:spcBef>
-              <a:spcAft>
-                <a:spcPts val="200"/>
-              </a:spcAft>
-            </a:pPr>
-            <a:r>
-              <a:rPr sz="1300">
-                <a:solidFill>
-                  <a:srgbClr val="3D5466"/>
-                </a:solidFill>
-                <a:latin typeface="Arial"/>
-              </a:rPr>
-              <a:t>▸  Phase 2 – Eröffnung (ca. 10 Min.)</a:t>
-            </a:r>
-          </a:p>
-          <a:p>
-            <a:pPr marL="190500" indent="-190500">
-              <a:spcBef>
-                <a:spcPts val="400"/>
-              </a:spcBef>
-              <a:spcAft>
-                <a:spcPts val="200"/>
-              </a:spcAft>
-            </a:pPr>
-            <a:r>
-              <a:rPr sz="1300">
-                <a:solidFill>
-                  <a:srgbClr val="3D5466"/>
-                </a:solidFill>
-                <a:latin typeface="Arial"/>
-              </a:rPr>
-              <a:t>▸  Kontext und Ziel setzen: „Heute möchte ich mit Ihnen Ihren Jahresabschluss durchgehen und verstehen, wie sich Ihre Lage entwickelt hat."</a:t>
+              <a:t>▸  Vom Zahlenleser zum Gesprächsführer: die Analyse ist die halbe Miete, das Gespräch die andere.</a:t>
             </a:r>
           </a:p>
         </p:txBody>
@@ -8149,7 +8014,7 @@
             <a:avLst/>
           </a:prstGeom>
           <a:solidFill>
-            <a:srgbClr val="FFFFFF"/>
+            <a:srgbClr val="EDEDF3"/>
           </a:solidFill>
           <a:ln>
             <a:noFill/>
@@ -8250,43 +8115,51 @@
                 </a:solidFill>
                 <a:latin typeface="Consolas"/>
               </a:rPr>
-              <a:t>M02  ·  SCHAUBILD</a:t>
-            </a:r>
-          </a:p>
-        </p:txBody>
-      </p:sp>
-      <p:sp>
-        <p:nvSpPr>
-          <p:cNvPr id="5" name="TextBox 4"/>
-          <p:cNvSpPr txBox="1"/>
-          <p:nvPr/>
-        </p:nvSpPr>
-        <p:spPr>
-          <a:xfrm>
-            <a:off x="685800" y="502920"/>
-            <a:ext cx="10817352" cy="594360"/>
-          </a:xfrm>
-          <a:prstGeom prst="rect">
-            <a:avLst/>
-          </a:prstGeom>
-          <a:noFill/>
-        </p:spPr>
-        <p:txBody>
-          <a:bodyPr wrap="square">
-            <a:spAutoFit/>
-          </a:bodyPr>
-          <a:lstStyle/>
-          <a:p>
-            <a:pPr algn="l"/>
-            <a:r>
-              <a:rPr sz="2000" b="1" i="0">
-                <a:solidFill>
-                  <a:srgbClr val="1F2C56"/>
-                </a:solidFill>
-                <a:latin typeface="Arial"/>
-              </a:rPr>
-              <a:t>Vier-Ohren-Modell nach Schulz von Thun</a:t>
-            </a:r>
+              <a:t>M02  ·  INHALT</a:t>
+            </a:r>
+          </a:p>
+        </p:txBody>
+      </p:sp>
+      <p:sp>
+        <p:nvSpPr>
+          <p:cNvPr id="5" name="Rectangle 4"/>
+          <p:cNvSpPr/>
+          <p:nvPr/>
+        </p:nvSpPr>
+        <p:spPr>
+          <a:xfrm>
+            <a:off x="0" y="1234440"/>
+            <a:ext cx="12188952" cy="12700"/>
+          </a:xfrm>
+          <a:prstGeom prst="rect">
+            <a:avLst/>
+          </a:prstGeom>
+          <a:solidFill>
+            <a:srgbClr val="D8DFE4"/>
+          </a:solidFill>
+          <a:ln>
+            <a:noFill/>
+          </a:ln>
+        </p:spPr>
+        <p:style>
+          <a:lnRef idx="1">
+            <a:schemeClr val="accent1"/>
+          </a:lnRef>
+          <a:fillRef idx="3">
+            <a:schemeClr val="accent1"/>
+          </a:fillRef>
+          <a:effectRef idx="2">
+            <a:schemeClr val="accent1"/>
+          </a:effectRef>
+          <a:fontRef idx="minor">
+            <a:schemeClr val="lt1"/>
+          </a:fontRef>
+        </p:style>
+        <p:txBody>
+          <a:bodyPr rtlCol="0" anchor="ctr"/>
+          <a:lstStyle/>
+          <a:p>
+            <a:pPr algn="ctr"/>
           </a:p>
         </p:txBody>
       </p:sp>
@@ -8298,8 +8171,8 @@
         </p:nvSpPr>
         <p:spPr>
           <a:xfrm>
-            <a:off x="685800" y="1143000"/>
-            <a:ext cx="10817352" cy="25400"/>
+            <a:off x="685800" y="502920"/>
+            <a:ext cx="36576" cy="658368"/>
           </a:xfrm>
           <a:prstGeom prst="rect">
             <a:avLst/>
@@ -8333,33 +8206,124 @@
           </a:p>
         </p:txBody>
       </p:sp>
-      <p:pic>
-        <p:nvPicPr>
-          <p:cNvPr id="7" name="Picture 6" descr="image.png"/>
-          <p:cNvPicPr>
-            <a:picLocks noChangeAspect="1"/>
-          </p:cNvPicPr>
-          <p:nvPr/>
-        </p:nvPicPr>
-        <p:blipFill>
-          <a:blip r:embed="rId2"/>
-          <a:stretch>
-            <a:fillRect/>
-          </a:stretch>
-        </p:blipFill>
-        <p:spPr>
-          <a:xfrm>
-            <a:off x="2554863" y="1325880"/>
-            <a:ext cx="7079225" cy="4937760"/>
-          </a:xfrm>
-          <a:prstGeom prst="rect">
-            <a:avLst/>
-          </a:prstGeom>
-        </p:spPr>
-      </p:pic>
-      <p:sp>
-        <p:nvSpPr>
-          <p:cNvPr id="8" name="Rectangle 7"/>
+      <p:sp>
+        <p:nvSpPr>
+          <p:cNvPr id="7" name="TextBox 6"/>
+          <p:cNvSpPr txBox="1"/>
+          <p:nvPr/>
+        </p:nvSpPr>
+        <p:spPr>
+          <a:xfrm>
+            <a:off x="813816" y="502920"/>
+            <a:ext cx="10634472" cy="685800"/>
+          </a:xfrm>
+          <a:prstGeom prst="rect">
+            <a:avLst/>
+          </a:prstGeom>
+          <a:noFill/>
+        </p:spPr>
+        <p:txBody>
+          <a:bodyPr wrap="square">
+            <a:spAutoFit/>
+          </a:bodyPr>
+          <a:lstStyle/>
+          <a:p>
+            <a:pPr algn="l"/>
+            <a:r>
+              <a:rPr sz="2400" b="1" i="0">
+                <a:solidFill>
+                  <a:srgbClr val="1F2C56"/>
+                </a:solidFill>
+                <a:latin typeface="Arial"/>
+              </a:rPr>
+              <a:t>Reine Kennzahlenanalyse stößt an ihre Grenzen</a:t>
+            </a:r>
+          </a:p>
+        </p:txBody>
+      </p:sp>
+      <p:sp>
+        <p:nvSpPr>
+          <p:cNvPr id="8" name="TextBox 7"/>
+          <p:cNvSpPr txBox="1"/>
+          <p:nvPr/>
+        </p:nvSpPr>
+        <p:spPr>
+          <a:xfrm>
+            <a:off x="685800" y="1417320"/>
+            <a:ext cx="10817352" cy="4892040"/>
+          </a:xfrm>
+          <a:prstGeom prst="rect">
+            <a:avLst/>
+          </a:prstGeom>
+          <a:noFill/>
+        </p:spPr>
+        <p:txBody>
+          <a:bodyPr wrap="square" anchor="ctr">
+            <a:spAutoFit/>
+          </a:bodyPr>
+          <a:lstStyle/>
+          <a:p>
+            <a:pPr marL="177800" indent="-177800">
+              <a:spcBef>
+                <a:spcPts val="600"/>
+              </a:spcBef>
+              <a:spcAft>
+                <a:spcPts val="200"/>
+              </a:spcAft>
+            </a:pPr>
+            <a:r>
+              <a:rPr sz="1200" i="1">
+                <a:solidFill>
+                  <a:srgbClr val="3D5466"/>
+                </a:solidFill>
+                <a:latin typeface="Arial"/>
+              </a:rPr>
+              <a:t>→  Eine Kennzahl erklärt sich nicht selbst – erst das Gespräch macht aus der Zahl eine Geschichte.</a:t>
+            </a:r>
+          </a:p>
+          <a:p>
+            <a:pPr marL="190500" indent="-190500">
+              <a:spcBef>
+                <a:spcPts val="400"/>
+              </a:spcBef>
+              <a:spcAft>
+                <a:spcPts val="200"/>
+              </a:spcAft>
+            </a:pPr>
+            <a:r>
+              <a:rPr sz="1300">
+                <a:solidFill>
+                  <a:srgbClr val="3D5466"/>
+                </a:solidFill>
+                <a:latin typeface="Arial"/>
+              </a:rPr>
+              <a:t>▸  Kommunikation auf Augenhöhe: die Beziehungsebene trägt die Sachebene.</a:t>
+            </a:r>
+          </a:p>
+          <a:p>
+            <a:pPr marL="190500" indent="-190500">
+              <a:spcBef>
+                <a:spcPts val="400"/>
+              </a:spcBef>
+              <a:spcAft>
+                <a:spcPts val="200"/>
+              </a:spcAft>
+            </a:pPr>
+            <a:r>
+              <a:rPr sz="1300">
+                <a:solidFill>
+                  <a:srgbClr val="3D5466"/>
+                </a:solidFill>
+                <a:latin typeface="Arial"/>
+              </a:rPr>
+              <a:t>▸  Das Vier-Ohren-Modell hilft, Einwände als Beziehungs- oder Appellbotschaft zu verstehen.</a:t>
+            </a:r>
+          </a:p>
+        </p:txBody>
+      </p:sp>
+      <p:sp>
+        <p:nvSpPr>
+          <p:cNvPr id="9" name="Rectangle 8"/>
           <p:cNvSpPr/>
           <p:nvPr/>
         </p:nvSpPr>
@@ -8402,7 +8366,7 @@
       </p:sp>
       <p:sp>
         <p:nvSpPr>
-          <p:cNvPr id="9" name="TextBox 8"/>
+          <p:cNvPr id="10" name="TextBox 9"/>
           <p:cNvSpPr txBox="1"/>
           <p:nvPr/>
         </p:nvSpPr>
@@ -8431,41 +8395,6 @@
                 <a:latin typeface="Consolas"/>
               </a:rPr>
               <a:t>FKB Campus  ·  M02</a:t>
-            </a:r>
-          </a:p>
-        </p:txBody>
-      </p:sp>
-      <p:sp>
-        <p:nvSpPr>
-          <p:cNvPr id="10" name="TextBox 9"/>
-          <p:cNvSpPr txBox="1"/>
-          <p:nvPr/>
-        </p:nvSpPr>
-        <p:spPr>
-          <a:xfrm>
-            <a:off x="7176211" y="6583680"/>
-            <a:ext cx="4326940" cy="256032"/>
-          </a:xfrm>
-          <a:prstGeom prst="rect">
-            <a:avLst/>
-          </a:prstGeom>
-          <a:noFill/>
-        </p:spPr>
-        <p:txBody>
-          <a:bodyPr wrap="none">
-            <a:spAutoFit/>
-          </a:bodyPr>
-          <a:lstStyle/>
-          <a:p>
-            <a:pPr algn="r"/>
-            <a:r>
-              <a:rPr sz="700">
-                <a:solidFill>
-                  <a:srgbClr val="A0B4D2"/>
-                </a:solidFill>
-                <a:latin typeface="Consolas"/>
-              </a:rPr>
-              <a:t>Schaubild</a:t>
             </a:r>
           </a:p>
         </p:txBody>
@@ -8639,7 +8568,7 @@
                 </a:solidFill>
                 <a:latin typeface="Arial"/>
               </a:rPr>
-              <a:t>5-Phasen-Rahmen für das strukturierte Bilanzgespräch</a:t>
+              <a:t>Das Vier-Ohren-Modell nach Schulz von Thun</a:t>
             </a:r>
           </a:p>
         </p:txBody>
@@ -8703,8 +8632,8 @@
         </p:blipFill>
         <p:spPr>
           <a:xfrm>
-            <a:off x="1670951" y="1325880"/>
-            <a:ext cx="8847050" cy="4937760"/>
+            <a:off x="2554863" y="1325880"/>
+            <a:ext cx="7079225" cy="4937760"/>
           </a:xfrm>
           <a:prstGeom prst="rect">
             <a:avLst/>
@@ -9079,7 +9008,7 @@
                 </a:solidFill>
                 <a:latin typeface="Arial"/>
               </a:rPr>
-              <a:t>Praxiscase: Schwäbische Metallbau GmbH</a:t>
+              <a:t>Der 5-Phasen-Rahmen für das Bilanzgespräch</a:t>
             </a:r>
           </a:p>
         </p:txBody>
@@ -9101,10 +9030,29 @@
           <a:noFill/>
         </p:spPr>
         <p:txBody>
-          <a:bodyPr wrap="square">
+          <a:bodyPr wrap="square" anchor="ctr">
             <a:spAutoFit/>
           </a:bodyPr>
           <a:lstStyle/>
+          <a:p>
+            <a:pPr marL="177800" indent="-177800">
+              <a:spcBef>
+                <a:spcPts val="600"/>
+              </a:spcBef>
+              <a:spcAft>
+                <a:spcPts val="200"/>
+              </a:spcAft>
+            </a:pPr>
+            <a:r>
+              <a:rPr sz="1200" i="1">
+                <a:solidFill>
+                  <a:srgbClr val="3D5466"/>
+                </a:solidFill>
+                <a:latin typeface="Arial"/>
+              </a:rPr>
+              <a:t>→  Ein strukturiertes Bilanzgespräch folgt fünf Phasen – vom Rahmen über die Analyse bis zum vereinbarten nächsten Schritt.</a:t>
+            </a:r>
+          </a:p>
           <a:p>
             <a:pPr marL="190500" indent="-190500">
               <a:spcBef>
@@ -9121,7 +9069,7 @@
                 </a:solidFill>
                 <a:latin typeface="Arial"/>
               </a:rPr>
-              <a:t>▸  Finanzdaten (fiktiv):</a:t>
+              <a:t>▸  Eröffnung, gemeinsame Standortbestimmung, kritische Punkte, Lösungsraum, Abschluss.</a:t>
             </a:r>
           </a:p>
           <a:p>
@@ -9140,121 +9088,7 @@
                 </a:solidFill>
                 <a:latin typeface="Arial"/>
               </a:rPr>
-              <a:t>▸  Quelle: Deutsche Bundesbank, Unternehmensabschlussstatistik (laufend)</a:t>
-            </a:r>
-          </a:p>
-          <a:p>
-            <a:pPr marL="190500" indent="-190500">
-              <a:spcBef>
-                <a:spcPts val="400"/>
-              </a:spcBef>
-              <a:spcAft>
-                <a:spcPts val="200"/>
-              </a:spcAft>
-            </a:pPr>
-            <a:r>
-              <a:rPr sz="1300">
-                <a:solidFill>
-                  <a:srgbClr val="3D5466"/>
-                </a:solidFill>
-                <a:latin typeface="Arial"/>
-              </a:rPr>
-              <a:t>▸  Rollenbeschreibungen:</a:t>
-            </a:r>
-          </a:p>
-          <a:p>
-            <a:pPr marL="190500" indent="-190500">
-              <a:spcBef>
-                <a:spcPts val="400"/>
-              </a:spcBef>
-              <a:spcAft>
-                <a:spcPts val="200"/>
-              </a:spcAft>
-            </a:pPr>
-            <a:r>
-              <a:rPr sz="1300">
-                <a:solidFill>
-                  <a:srgbClr val="3D5466"/>
-                </a:solidFill>
-                <a:latin typeface="Arial"/>
-              </a:rPr>
-              <a:t>▸  Rolle A – Berater (erhält nur diese Informationen — keine Hintergrundinfos)</a:t>
-            </a:r>
-          </a:p>
-          <a:p>
-            <a:pPr marL="190500" indent="-190500">
-              <a:spcBef>
-                <a:spcPts val="400"/>
-              </a:spcBef>
-              <a:spcAft>
-                <a:spcPts val="200"/>
-              </a:spcAft>
-            </a:pPr>
-            <a:r>
-              <a:rPr sz="1300">
-                <a:solidFill>
-                  <a:srgbClr val="3D5466"/>
-                </a:solidFill>
-                <a:latin typeface="Arial"/>
-              </a:rPr>
-              <a:t>▸  Rolle B – GF Martin Klemm (+ Trainer-Karte mit Hintergrundinfos)</a:t>
-            </a:r>
-          </a:p>
-          <a:p>
-            <a:pPr marL="190500" indent="-190500">
-              <a:spcBef>
-                <a:spcPts val="400"/>
-              </a:spcBef>
-              <a:spcAft>
-                <a:spcPts val="200"/>
-              </a:spcAft>
-            </a:pPr>
-            <a:r>
-              <a:rPr sz="1300">
-                <a:solidFill>
-                  <a:srgbClr val="3D5466"/>
-                </a:solidFill>
-                <a:latin typeface="Arial"/>
-              </a:rPr>
-              <a:t>▸  Rolle C – Beobachter: Beobachtungsbogen nutzen (s. u.), konkrete Gesprächssequenzen festhalten, nicht nur Urteile.</a:t>
-            </a:r>
-          </a:p>
-          <a:p>
-            <a:pPr>
-              <a:spcBef>
-                <a:spcPts val="1000"/>
-              </a:spcBef>
-              <a:spcAft>
-                <a:spcPts val="200"/>
-              </a:spcAft>
-            </a:pPr>
-            <a:r>
-              <a:rPr sz="800" b="1">
-                <a:solidFill>
-                  <a:srgbClr val="78808C"/>
-                </a:solidFill>
-                <a:latin typeface="Consolas"/>
-              </a:rPr>
-              <a:t>BEOBACHTUNGSBOGEN ROLLENSPIEL</a:t>
-            </a:r>
-          </a:p>
-          <a:p>
-            <a:pPr marL="190500" indent="-190500">
-              <a:spcBef>
-                <a:spcPts val="400"/>
-              </a:spcBef>
-              <a:spcAft>
-                <a:spcPts val="200"/>
-              </a:spcAft>
-            </a:pPr>
-            <a:r>
-              <a:rPr sz="1300">
-                <a:solidFill>
-                  <a:srgbClr val="3D5466"/>
-                </a:solidFill>
-                <a:latin typeface="Arial"/>
-              </a:rPr>
-              <a:t>▸  Skala: 1 = gar nicht sichtbar · 3 = ansatzweise · 5 = sehr gut</a:t>
+              <a:t>▸  Kritische Zahlen kommen in Phase 3 – eingebettet in Verständnis, nicht am Anfang.</a:t>
             </a:r>
           </a:p>
         </p:txBody>
@@ -9471,7 +9305,7 @@
                 </a:solidFill>
                 <a:latin typeface="Consolas"/>
               </a:rPr>
-              <a:t>M02  ·  ÜBERSICHT</a:t>
+              <a:t>M02  ·  SCHAUBILD</a:t>
             </a:r>
           </a:p>
         </p:txBody>
@@ -9506,7 +9340,7 @@
                 </a:solidFill>
                 <a:latin typeface="Arial"/>
               </a:rPr>
-              <a:t>Praxiscase: Schwäbische Metallbau GmbH</a:t>
+              <a:t>Der 5-Phasen-Rahmen für das strukturierte Bilanzgespräch</a:t>
             </a:r>
           </a:p>
         </p:txBody>
@@ -9554,494 +9388,30 @@
           </a:p>
         </p:txBody>
       </p:sp>
-      <p:graphicFrame>
-        <p:nvGraphicFramePr>
-          <p:cNvPr id="7" name="Table 6"/>
-          <p:cNvGraphicFramePr>
-            <a:graphicFrameLocks noGrp="1"/>
-          </p:cNvGraphicFramePr>
-          <p:nvPr/>
-        </p:nvGraphicFramePr>
-        <p:xfrm>
-          <a:off x="685800" y="1417320"/>
-          <a:ext cx="10817352" cy="2304288"/>
-        </p:xfrm>
-        <a:graphic>
-          <a:graphicData uri="http://schemas.openxmlformats.org/drawingml/2006/table">
-            <a:tbl>
-              <a:tblPr firstRow="1" bandRow="1">
-                <a:tableStyleId>{5C22544A-7EE6-4342-B048-85BDC9FD1C3A}</a:tableStyleId>
-              </a:tblPr>
-              <a:tblGrid>
-                <a:gridCol w="2704338"/>
-                <a:gridCol w="2704338"/>
-                <a:gridCol w="2704338"/>
-                <a:gridCol w="2704338"/>
-              </a:tblGrid>
-              <a:tr h="384048">
-                <a:tc>
-                  <a:txBody>
-                    <a:bodyPr/>
-                    <a:lstStyle/>
-                    <a:p>
-                      <a:r>
-                        <a:rPr sz="1100" b="1">
-                          <a:solidFill>
-                            <a:srgbClr val="FFFFFF"/>
-                          </a:solidFill>
-                          <a:latin typeface="Arial"/>
-                        </a:rPr>
-                        <a:t>Kennzahl</a:t>
-                      </a:r>
-                    </a:p>
-                  </a:txBody>
-                  <a:tcPr>
-                    <a:solidFill>
-                      <a:srgbClr val="1F2C56"/>
-                    </a:solidFill>
-                  </a:tcPr>
-                </a:tc>
-                <a:tc>
-                  <a:txBody>
-                    <a:bodyPr/>
-                    <a:lstStyle/>
-                    <a:p>
-                      <a:r>
-                        <a:rPr sz="1100" b="1">
-                          <a:solidFill>
-                            <a:srgbClr val="FFFFFF"/>
-                          </a:solidFill>
-                          <a:latin typeface="Arial"/>
-                        </a:rPr>
-                        <a:t>2024</a:t>
-                      </a:r>
-                    </a:p>
-                  </a:txBody>
-                  <a:tcPr>
-                    <a:solidFill>
-                      <a:srgbClr val="1F2C56"/>
-                    </a:solidFill>
-                  </a:tcPr>
-                </a:tc>
-                <a:tc>
-                  <a:txBody>
-                    <a:bodyPr/>
-                    <a:lstStyle/>
-                    <a:p>
-                      <a:r>
-                        <a:rPr sz="1100" b="1">
-                          <a:solidFill>
-                            <a:srgbClr val="FFFFFF"/>
-                          </a:solidFill>
-                          <a:latin typeface="Arial"/>
-                        </a:rPr>
-                        <a:t>2025</a:t>
-                      </a:r>
-                    </a:p>
-                  </a:txBody>
-                  <a:tcPr>
-                    <a:solidFill>
-                      <a:srgbClr val="1F2C56"/>
-                    </a:solidFill>
-                  </a:tcPr>
-                </a:tc>
-                <a:tc>
-                  <a:txBody>
-                    <a:bodyPr/>
-                    <a:lstStyle/>
-                    <a:p>
-                      <a:r>
-                        <a:rPr sz="1100" b="1">
-                          <a:solidFill>
-                            <a:srgbClr val="FFFFFF"/>
-                          </a:solidFill>
-                          <a:latin typeface="Arial"/>
-                        </a:rPr>
-                        <a:t>Branche (Ø)</a:t>
-                      </a:r>
-                    </a:p>
-                  </a:txBody>
-                  <a:tcPr>
-                    <a:solidFill>
-                      <a:srgbClr val="1F2C56"/>
-                    </a:solidFill>
-                  </a:tcPr>
-                </a:tc>
-              </a:tr>
-              <a:tr h="384048">
-                <a:tc>
-                  <a:txBody>
-                    <a:bodyPr/>
-                    <a:lstStyle/>
-                    <a:p>
-                      <a:r>
-                        <a:rPr sz="1050">
-                          <a:solidFill>
-                            <a:srgbClr val="3D5466"/>
-                          </a:solidFill>
-                          <a:latin typeface="Arial"/>
-                        </a:rPr>
-                        <a:t>Eigenkapitalquote</a:t>
-                      </a:r>
-                    </a:p>
-                  </a:txBody>
-                  <a:tcPr/>
-                </a:tc>
-                <a:tc>
-                  <a:txBody>
-                    <a:bodyPr/>
-                    <a:lstStyle/>
-                    <a:p>
-                      <a:r>
-                        <a:rPr sz="1050">
-                          <a:solidFill>
-                            <a:srgbClr val="3D5466"/>
-                          </a:solidFill>
-                          <a:latin typeface="Arial"/>
-                        </a:rPr>
-                        <a:t>22,4 %</a:t>
-                      </a:r>
-                    </a:p>
-                  </a:txBody>
-                  <a:tcPr/>
-                </a:tc>
-                <a:tc>
-                  <a:txBody>
-                    <a:bodyPr/>
-                    <a:lstStyle/>
-                    <a:p>
-                      <a:r>
-                        <a:rPr sz="1050">
-                          <a:solidFill>
-                            <a:srgbClr val="3D5466"/>
-                          </a:solidFill>
-                          <a:latin typeface="Arial"/>
-                        </a:rPr>
-                        <a:t>15,1 %</a:t>
-                      </a:r>
-                    </a:p>
-                  </a:txBody>
-                  <a:tcPr/>
-                </a:tc>
-                <a:tc>
-                  <a:txBody>
-                    <a:bodyPr/>
-                    <a:lstStyle/>
-                    <a:p>
-                      <a:r>
-                        <a:rPr sz="1050">
-                          <a:solidFill>
-                            <a:srgbClr val="3D5466"/>
-                          </a:solidFill>
-                          <a:latin typeface="Arial"/>
-                        </a:rPr>
-                        <a:t>28–32 %</a:t>
-                      </a:r>
-                    </a:p>
-                  </a:txBody>
-                  <a:tcPr/>
-                </a:tc>
-              </a:tr>
-              <a:tr h="384048">
-                <a:tc>
-                  <a:txBody>
-                    <a:bodyPr/>
-                    <a:lstStyle/>
-                    <a:p>
-                      <a:r>
-                        <a:rPr sz="1050">
-                          <a:solidFill>
-                            <a:srgbClr val="3D5466"/>
-                          </a:solidFill>
-                          <a:latin typeface="Arial"/>
-                        </a:rPr>
-                        <a:t>Liquidität 2. Grades</a:t>
-                      </a:r>
-                    </a:p>
-                  </a:txBody>
-                  <a:tcPr/>
-                </a:tc>
-                <a:tc>
-                  <a:txBody>
-                    <a:bodyPr/>
-                    <a:lstStyle/>
-                    <a:p>
-                      <a:r>
-                        <a:rPr sz="1050">
-                          <a:solidFill>
-                            <a:srgbClr val="3D5466"/>
-                          </a:solidFill>
-                          <a:latin typeface="Arial"/>
-                        </a:rPr>
-                        <a:t>1,18</a:t>
-                      </a:r>
-                    </a:p>
-                  </a:txBody>
-                  <a:tcPr/>
-                </a:tc>
-                <a:tc>
-                  <a:txBody>
-                    <a:bodyPr/>
-                    <a:lstStyle/>
-                    <a:p>
-                      <a:r>
-                        <a:rPr sz="1050">
-                          <a:solidFill>
-                            <a:srgbClr val="3D5466"/>
-                          </a:solidFill>
-                          <a:latin typeface="Arial"/>
-                        </a:rPr>
-                        <a:t>0,94</a:t>
-                      </a:r>
-                    </a:p>
-                  </a:txBody>
-                  <a:tcPr/>
-                </a:tc>
-                <a:tc>
-                  <a:txBody>
-                    <a:bodyPr/>
-                    <a:lstStyle/>
-                    <a:p>
-                      <a:r>
-                        <a:rPr sz="1050">
-                          <a:solidFill>
-                            <a:srgbClr val="3D5466"/>
-                          </a:solidFill>
-                          <a:latin typeface="Arial"/>
-                        </a:rPr>
-                        <a:t>&gt; 1,0</a:t>
-                      </a:r>
-                    </a:p>
-                  </a:txBody>
-                  <a:tcPr/>
-                </a:tc>
-              </a:tr>
-              <a:tr h="384048">
-                <a:tc>
-                  <a:txBody>
-                    <a:bodyPr/>
-                    <a:lstStyle/>
-                    <a:p>
-                      <a:r>
-                        <a:rPr sz="1050">
-                          <a:solidFill>
-                            <a:srgbClr val="3D5466"/>
-                          </a:solidFill>
-                          <a:latin typeface="Arial"/>
-                        </a:rPr>
-                        <a:t>Verschuldungsgrad (FK/EK)</a:t>
-                      </a:r>
-                    </a:p>
-                  </a:txBody>
-                  <a:tcPr/>
-                </a:tc>
-                <a:tc>
-                  <a:txBody>
-                    <a:bodyPr/>
-                    <a:lstStyle/>
-                    <a:p>
-                      <a:r>
-                        <a:rPr sz="1050">
-                          <a:solidFill>
-                            <a:srgbClr val="3D5466"/>
-                          </a:solidFill>
-                          <a:latin typeface="Arial"/>
-                        </a:rPr>
-                        <a:t>3,5x</a:t>
-                      </a:r>
-                    </a:p>
-                  </a:txBody>
-                  <a:tcPr/>
-                </a:tc>
-                <a:tc>
-                  <a:txBody>
-                    <a:bodyPr/>
-                    <a:lstStyle/>
-                    <a:p>
-                      <a:r>
-                        <a:rPr sz="1050">
-                          <a:solidFill>
-                            <a:srgbClr val="3D5466"/>
-                          </a:solidFill>
-                          <a:latin typeface="Arial"/>
-                        </a:rPr>
-                        <a:t>5,6x</a:t>
-                      </a:r>
-                    </a:p>
-                  </a:txBody>
-                  <a:tcPr/>
-                </a:tc>
-                <a:tc>
-                  <a:txBody>
-                    <a:bodyPr/>
-                    <a:lstStyle/>
-                    <a:p>
-                      <a:r>
-                        <a:rPr sz="1050">
-                          <a:solidFill>
-                            <a:srgbClr val="3D5466"/>
-                          </a:solidFill>
-                          <a:latin typeface="Arial"/>
-                        </a:rPr>
-                        <a:t>2,5–3,5x</a:t>
-                      </a:r>
-                    </a:p>
-                  </a:txBody>
-                  <a:tcPr/>
-                </a:tc>
-              </a:tr>
-              <a:tr h="384048">
-                <a:tc>
-                  <a:txBody>
-                    <a:bodyPr/>
-                    <a:lstStyle/>
-                    <a:p>
-                      <a:r>
-                        <a:rPr sz="1050">
-                          <a:solidFill>
-                            <a:srgbClr val="3D5466"/>
-                          </a:solidFill>
-                          <a:latin typeface="Arial"/>
-                        </a:rPr>
-                        <a:t>EBIT-Marge</a:t>
-                      </a:r>
-                    </a:p>
-                  </a:txBody>
-                  <a:tcPr/>
-                </a:tc>
-                <a:tc>
-                  <a:txBody>
-                    <a:bodyPr/>
-                    <a:lstStyle/>
-                    <a:p>
-                      <a:r>
-                        <a:rPr sz="1050">
-                          <a:solidFill>
-                            <a:srgbClr val="3D5466"/>
-                          </a:solidFill>
-                          <a:latin typeface="Arial"/>
-                        </a:rPr>
-                        <a:t>4,1 %</a:t>
-                      </a:r>
-                    </a:p>
-                  </a:txBody>
-                  <a:tcPr/>
-                </a:tc>
-                <a:tc>
-                  <a:txBody>
-                    <a:bodyPr/>
-                    <a:lstStyle/>
-                    <a:p>
-                      <a:r>
-                        <a:rPr sz="1050">
-                          <a:solidFill>
-                            <a:srgbClr val="3D5466"/>
-                          </a:solidFill>
-                          <a:latin typeface="Arial"/>
-                        </a:rPr>
-                        <a:t>2,8 %</a:t>
-                      </a:r>
-                    </a:p>
-                  </a:txBody>
-                  <a:tcPr/>
-                </a:tc>
-                <a:tc>
-                  <a:txBody>
-                    <a:bodyPr/>
-                    <a:lstStyle/>
-                    <a:p>
-                      <a:r>
-                        <a:rPr sz="1050">
-                          <a:solidFill>
-                            <a:srgbClr val="3D5466"/>
-                          </a:solidFill>
-                          <a:latin typeface="Arial"/>
-                        </a:rPr>
-                        <a:t>4–6 %</a:t>
-                      </a:r>
-                    </a:p>
-                  </a:txBody>
-                  <a:tcPr/>
-                </a:tc>
-              </a:tr>
-              <a:tr h="384048">
-                <a:tc>
-                  <a:txBody>
-                    <a:bodyPr/>
-                    <a:lstStyle/>
-                    <a:p>
-                      <a:r>
-                        <a:rPr sz="1050">
-                          <a:solidFill>
-                            <a:srgbClr val="3D5466"/>
-                          </a:solidFill>
-                          <a:latin typeface="Arial"/>
-                        </a:rPr>
-                        <a:t>Personalaufwandsquote</a:t>
-                      </a:r>
-                    </a:p>
-                  </a:txBody>
-                  <a:tcPr/>
-                </a:tc>
-                <a:tc>
-                  <a:txBody>
-                    <a:bodyPr/>
-                    <a:lstStyle/>
-                    <a:p>
-                      <a:r>
-                        <a:rPr sz="1050">
-                          <a:solidFill>
-                            <a:srgbClr val="3D5466"/>
-                          </a:solidFill>
-                          <a:latin typeface="Arial"/>
-                        </a:rPr>
-                        <a:t>38 %</a:t>
-                      </a:r>
-                    </a:p>
-                  </a:txBody>
-                  <a:tcPr/>
-                </a:tc>
-                <a:tc>
-                  <a:txBody>
-                    <a:bodyPr/>
-                    <a:lstStyle/>
-                    <a:p>
-                      <a:r>
-                        <a:rPr sz="1050">
-                          <a:solidFill>
-                            <a:srgbClr val="3D5466"/>
-                          </a:solidFill>
-                          <a:latin typeface="Arial"/>
-                        </a:rPr>
-                        <a:t>44 %</a:t>
-                      </a:r>
-                    </a:p>
-                  </a:txBody>
-                  <a:tcPr/>
-                </a:tc>
-                <a:tc>
-                  <a:txBody>
-                    <a:bodyPr/>
-                    <a:lstStyle/>
-                    <a:p>
-                      <a:r>
-                        <a:rPr sz="1050">
-                          <a:solidFill>
-                            <a:srgbClr val="3D5466"/>
-                          </a:solidFill>
-                          <a:latin typeface="Arial"/>
-                        </a:rPr>
-                        <a:t>38–42 %</a:t>
-                      </a:r>
-                    </a:p>
-                  </a:txBody>
-                  <a:tcPr/>
-                </a:tc>
-              </a:tr>
-            </a:tbl>
-          </a:graphicData>
-        </a:graphic>
-      </p:graphicFrame>
+      <p:pic>
+        <p:nvPicPr>
+          <p:cNvPr id="7" name="Picture 6" descr="image.png"/>
+          <p:cNvPicPr>
+            <a:picLocks noChangeAspect="1"/>
+          </p:cNvPicPr>
+          <p:nvPr/>
+        </p:nvPicPr>
+        <p:blipFill>
+          <a:blip r:embed="rId2"/>
+          <a:stretch>
+            <a:fillRect/>
+          </a:stretch>
+        </p:blipFill>
+        <p:spPr>
+          <a:xfrm>
+            <a:off x="1670951" y="1325880"/>
+            <a:ext cx="8847050" cy="4937760"/>
+          </a:xfrm>
+          <a:prstGeom prst="rect">
+            <a:avLst/>
+          </a:prstGeom>
+        </p:spPr>
+      </p:pic>
       <p:sp>
         <p:nvSpPr>
           <p:cNvPr id="8" name="Rectangle 7"/>
@@ -10150,7 +9520,7 @@
                 </a:solidFill>
                 <a:latin typeface="Consolas"/>
               </a:rPr>
-              <a:t>Übersicht</a:t>
+              <a:t>Schaubild</a:t>
             </a:r>
           </a:p>
         </p:txBody>
